--- a/output/wordlabs-power-3day.pptx
+++ b/output/wordlabs-power-3day.pptx
@@ -6040,7 +6040,7 @@
                 <a:ea typeface="Calibri" pitchFamily="34" charset="-122"/>
                 <a:cs typeface="Calibri" pitchFamily="34" charset="-120"/>
               </a:rPr>
-              <a:t>The </a:t>
+              <a:t>The coach felt </a:t>
             </a:r>
             <a:pPr algn="l" indent="0" marL="0">
               <a:buNone/>
@@ -6071,7 +6071,7 @@
                 <a:ea typeface="Calibri" pitchFamily="34" charset="-122"/>
                 <a:cs typeface="Calibri" pitchFamily="34" charset="-120"/>
               </a:rPr>
-              <a:t> speech made everyone feel </a:t>
+              <a:t> when she helped the </a:t>
             </a:r>
             <a:pPr algn="l" indent="0" marL="0">
               <a:buNone/>
@@ -6088,7 +6088,7 @@
                 <a:ea typeface="Calibri" pitchFamily="34" charset="-122"/>
                 <a:cs typeface="Calibri" pitchFamily="34" charset="-120"/>
               </a:rPr>
-              <a:t>powerful</a:t>
+              <a:t>powerless</a:t>
             </a:r>
             <a:pPr algn="l" indent="0" marL="0">
               <a:buNone/>
@@ -6102,7 +6102,7 @@
                 <a:ea typeface="Calibri" pitchFamily="34" charset="-122"/>
                 <a:cs typeface="Calibri" pitchFamily="34" charset="-120"/>
               </a:rPr>
-              <a:t> and ready to help their community.</a:t>
+              <a:t> team believe in themselves again.</a:t>
             </a:r>
             <a:endParaRPr lang="en-US" sz="1800" dirty="0"/>
           </a:p>
@@ -6385,7 +6385,7 @@
                 <a:ea typeface="Trebuchet MS" pitchFamily="34" charset="-122"/>
                 <a:cs typeface="Trebuchet MS" pitchFamily="34" charset="-120"/>
               </a:rPr>
-              <a:t>powerful</a:t>
+              <a:t>powerless</a:t>
             </a:r>
             <a:endParaRPr lang="en-US" sz="1400" dirty="0"/>
           </a:p>
@@ -7860,7 +7860,7 @@
                 <a:ea typeface="Calibri" pitchFamily="34" charset="-122"/>
                 <a:cs typeface="Calibri" pitchFamily="34" charset="-120"/>
               </a:rPr>
-              <a:t>to put into or cause</a:t>
+              <a:t>to make, to put into</a:t>
             </a:r>
             <a:endParaRPr lang="en-US" sz="850" dirty="0"/>
           </a:p>
@@ -8084,7 +8084,7 @@
                 <a:ea typeface="Calibri" pitchFamily="34" charset="-122"/>
                 <a:cs typeface="Calibri" pitchFamily="34" charset="-120"/>
               </a:rPr>
-              <a:t>ongoing action</a:t>
+              <a:t>action happening now</a:t>
             </a:r>
             <a:endParaRPr lang="en-US" sz="850" dirty="0"/>
           </a:p>
@@ -8957,7 +8957,7 @@
                 <a:ea typeface="Calibri" pitchFamily="34" charset="-122"/>
                 <a:cs typeface="Calibri" pitchFamily="34" charset="-120"/>
               </a:rPr>
-              <a:t>to put into or cause</a:t>
+              <a:t>to make, to put into</a:t>
             </a:r>
             <a:endParaRPr lang="en-US" sz="850" dirty="0"/>
           </a:p>
@@ -9181,7 +9181,7 @@
                 <a:ea typeface="Calibri" pitchFamily="34" charset="-122"/>
                 <a:cs typeface="Calibri" pitchFamily="34" charset="-120"/>
               </a:rPr>
-              <a:t>ongoing action</a:t>
+              <a:t>action happening now</a:t>
             </a:r>
             <a:endParaRPr lang="en-US" sz="850" dirty="0"/>
           </a:p>
@@ -10396,7 +10396,7 @@
                 <a:ea typeface="Calibri" pitchFamily="34" charset="-122"/>
                 <a:cs typeface="Calibri" pitchFamily="34" charset="-120"/>
               </a:rPr>
-              <a:t>to put into or cause</a:t>
+              <a:t>to make, to put into</a:t>
             </a:r>
             <a:endParaRPr lang="en-US" sz="850" dirty="0"/>
           </a:p>
@@ -10620,7 +10620,7 @@
                 <a:ea typeface="Calibri" pitchFamily="34" charset="-122"/>
                 <a:cs typeface="Calibri" pitchFamily="34" charset="-120"/>
               </a:rPr>
-              <a:t>ongoing action</a:t>
+              <a:t>action happening now</a:t>
             </a:r>
             <a:endParaRPr lang="en-US" sz="850" dirty="0"/>
           </a:p>
@@ -12080,7 +12080,7 @@
                 <a:ea typeface="Trebuchet MS" pitchFamily="34" charset="-122"/>
                 <a:cs typeface="Trebuchet MS" pitchFamily="34" charset="-120"/>
               </a:rPr>
-              <a:t>powerful</a:t>
+              <a:t>powerless</a:t>
             </a:r>
             <a:endParaRPr lang="en-US" sz="2800" dirty="0"/>
           </a:p>
@@ -12907,7 +12907,7 @@
                 <a:ea typeface="Trebuchet MS" pitchFamily="34" charset="-122"/>
                 <a:cs typeface="Trebuchet MS" pitchFamily="34" charset="-120"/>
               </a:rPr>
-              <a:t>powerful</a:t>
+              <a:t>powerless</a:t>
             </a:r>
             <a:endParaRPr lang="en-US" sz="2800" dirty="0"/>
           </a:p>
@@ -13108,11 +13108,11 @@
             </a:avLst>
           </a:prstGeom>
           <a:solidFill>
-            <a:srgbClr val="FCE7F3"/>
+            <a:srgbClr val="DDD6FE"/>
           </a:solidFill>
           <a:ln w="19050">
             <a:solidFill>
-              <a:srgbClr val="DB2777"/>
+              <a:srgbClr val="7C3AED"/>
             </a:solidFill>
             <a:prstDash val="solid"/>
           </a:ln>
@@ -13152,13 +13152,13 @@
             <a:r>
               <a:rPr lang="en-US" sz="1300" b="1" dirty="0">
                 <a:solidFill>
-                  <a:srgbClr val="9D174D"/>
+                  <a:srgbClr val="4C1D95"/>
                 </a:solidFill>
                 <a:latin typeface="Trebuchet MS" pitchFamily="34" charset="0"/>
                 <a:ea typeface="Trebuchet MS" pitchFamily="34" charset="-122"/>
                 <a:cs typeface="Trebuchet MS" pitchFamily="34" charset="-120"/>
               </a:rPr>
-              <a:t>ful</a:t>
+              <a:t>less</a:t>
             </a:r>
             <a:endParaRPr lang="en-US" sz="1300" dirty="0"/>
           </a:p>
@@ -13197,7 +13197,7 @@
                 <a:ea typeface="Calibri" pitchFamily="34" charset="-122"/>
                 <a:cs typeface="Calibri" pitchFamily="34" charset="-120"/>
               </a:rPr>
-              <a:t>full of</a:t>
+              <a:t>without</a:t>
             </a:r>
             <a:endParaRPr lang="en-US" sz="850" dirty="0"/>
           </a:p>
@@ -13892,7 +13892,7 @@
                 <a:ea typeface="Trebuchet MS" pitchFamily="34" charset="-122"/>
                 <a:cs typeface="Trebuchet MS" pitchFamily="34" charset="-120"/>
               </a:rPr>
-              <a:t>powerful</a:t>
+              <a:t>powerless</a:t>
             </a:r>
             <a:endParaRPr lang="en-US" sz="2800" dirty="0"/>
           </a:p>
@@ -14093,11 +14093,11 @@
             </a:avLst>
           </a:prstGeom>
           <a:solidFill>
-            <a:srgbClr val="FCE7F3"/>
+            <a:srgbClr val="DDD6FE"/>
           </a:solidFill>
           <a:ln w="19050">
             <a:solidFill>
-              <a:srgbClr val="DB2777"/>
+              <a:srgbClr val="7C3AED"/>
             </a:solidFill>
             <a:prstDash val="solid"/>
           </a:ln>
@@ -14137,13 +14137,13 @@
             <a:r>
               <a:rPr lang="en-US" sz="1300" b="1" dirty="0">
                 <a:solidFill>
-                  <a:srgbClr val="9D174D"/>
+                  <a:srgbClr val="4C1D95"/>
                 </a:solidFill>
                 <a:latin typeface="Trebuchet MS" pitchFamily="34" charset="0"/>
                 <a:ea typeface="Trebuchet MS" pitchFamily="34" charset="-122"/>
                 <a:cs typeface="Trebuchet MS" pitchFamily="34" charset="-120"/>
               </a:rPr>
-              <a:t>ful</a:t>
+              <a:t>less</a:t>
             </a:r>
             <a:endParaRPr lang="en-US" sz="1300" dirty="0"/>
           </a:p>
@@ -14182,7 +14182,7 @@
                 <a:ea typeface="Calibri" pitchFamily="34" charset="-122"/>
                 <a:cs typeface="Calibri" pitchFamily="34" charset="-120"/>
               </a:rPr>
-              <a:t>full of</a:t>
+              <a:t>without</a:t>
             </a:r>
             <a:endParaRPr lang="en-US" sz="850" dirty="0"/>
           </a:p>
@@ -14551,7 +14551,7 @@
                 <a:ea typeface="Trebuchet MS" pitchFamily="34" charset="-122"/>
                 <a:cs typeface="Trebuchet MS" pitchFamily="34" charset="-120"/>
               </a:rPr>
-              <a:t>ful</a:t>
+              <a:t>less</a:t>
             </a:r>
             <a:endParaRPr lang="en-US" sz="1400" dirty="0"/>
           </a:p>
@@ -15379,7 +15379,7 @@
                 <a:ea typeface="Trebuchet MS" pitchFamily="34" charset="-122"/>
                 <a:cs typeface="Trebuchet MS" pitchFamily="34" charset="-120"/>
               </a:rPr>
-              <a:t>powerful</a:t>
+              <a:t>powerless</a:t>
             </a:r>
             <a:endParaRPr lang="en-US" sz="2800" dirty="0"/>
           </a:p>
@@ -15580,11 +15580,11 @@
             </a:avLst>
           </a:prstGeom>
           <a:solidFill>
-            <a:srgbClr val="FCE7F3"/>
+            <a:srgbClr val="DDD6FE"/>
           </a:solidFill>
           <a:ln w="19050">
             <a:solidFill>
-              <a:srgbClr val="DB2777"/>
+              <a:srgbClr val="7C3AED"/>
             </a:solidFill>
             <a:prstDash val="solid"/>
           </a:ln>
@@ -15624,13 +15624,13 @@
             <a:r>
               <a:rPr lang="en-US" sz="1300" b="1" dirty="0">
                 <a:solidFill>
-                  <a:srgbClr val="9D174D"/>
+                  <a:srgbClr val="4C1D95"/>
                 </a:solidFill>
                 <a:latin typeface="Trebuchet MS" pitchFamily="34" charset="0"/>
                 <a:ea typeface="Trebuchet MS" pitchFamily="34" charset="-122"/>
                 <a:cs typeface="Trebuchet MS" pitchFamily="34" charset="-120"/>
               </a:rPr>
-              <a:t>ful</a:t>
+              <a:t>less</a:t>
             </a:r>
             <a:endParaRPr lang="en-US" sz="1300" dirty="0"/>
           </a:p>
@@ -15669,7 +15669,7 @@
                 <a:ea typeface="Calibri" pitchFamily="34" charset="-122"/>
                 <a:cs typeface="Calibri" pitchFamily="34" charset="-120"/>
               </a:rPr>
-              <a:t>full of</a:t>
+              <a:t>without</a:t>
             </a:r>
             <a:endParaRPr lang="en-US" sz="850" dirty="0"/>
           </a:p>
@@ -16038,7 +16038,7 @@
                 <a:ea typeface="Trebuchet MS" pitchFamily="34" charset="-122"/>
                 <a:cs typeface="Trebuchet MS" pitchFamily="34" charset="-120"/>
               </a:rPr>
-              <a:t>ful</a:t>
+              <a:t>less</a:t>
             </a:r>
             <a:endParaRPr lang="en-US" sz="1400" dirty="0"/>
           </a:p>
@@ -16395,7 +16395,7 @@
                 <a:ea typeface="Trebuchet MS" pitchFamily="34" charset="-122"/>
                 <a:cs typeface="Trebuchet MS" pitchFamily="34" charset="-120"/>
               </a:rPr>
-              <a:t>f</a:t>
+              <a:t>l</a:t>
             </a:r>
             <a:endParaRPr lang="en-US" sz="900" dirty="0"/>
           </a:p>
@@ -16461,7 +16461,7 @@
                 <a:ea typeface="Trebuchet MS" pitchFamily="34" charset="-122"/>
                 <a:cs typeface="Trebuchet MS" pitchFamily="34" charset="-120"/>
               </a:rPr>
-              <a:t>u</a:t>
+              <a:t>e</a:t>
             </a:r>
             <a:endParaRPr lang="en-US" sz="900" dirty="0"/>
           </a:p>
@@ -16527,7 +16527,7 @@
                 <a:ea typeface="Trebuchet MS" pitchFamily="34" charset="-122"/>
                 <a:cs typeface="Trebuchet MS" pitchFamily="34" charset="-120"/>
               </a:rPr>
-              <a:t>l</a:t>
+              <a:t>ss</a:t>
             </a:r>
             <a:endParaRPr lang="en-US" sz="900" dirty="0"/>
           </a:p>
@@ -17435,7 +17435,7 @@
                 <a:ea typeface="Trebuchet MS" pitchFamily="34" charset="-122"/>
                 <a:cs typeface="Trebuchet MS" pitchFamily="34" charset="-120"/>
               </a:rPr>
-              <a:t>2</a:t>
+              <a:t>1</a:t>
             </a:r>
             <a:pPr algn="ctr" indent="0" marL="0">
               <a:buNone/>
@@ -17449,7 +17449,7 @@
                 <a:ea typeface="Trebuchet MS" pitchFamily="34" charset="-122"/>
                 <a:cs typeface="Trebuchet MS" pitchFamily="34" charset="-120"/>
               </a:rPr>
-              <a:t>  punctuation marks</a:t>
+              <a:t>  punctuation mark</a:t>
             </a:r>
             <a:endParaRPr lang="en-US" sz="2800" dirty="0"/>
           </a:p>
@@ -17870,7 +17870,7 @@
                 <a:ea typeface="Calibri" pitchFamily="34" charset="-122"/>
                 <a:cs typeface="Calibri" pitchFamily="34" charset="-120"/>
               </a:rPr>
-              <a:t>superpower</a:t>
+              <a:t>powerful</a:t>
             </a:r>
             <a:pPr algn="l" indent="0" marL="0">
               <a:buNone/>
@@ -17884,7 +17884,7 @@
                 <a:ea typeface="Calibri" pitchFamily="34" charset="-122"/>
                 <a:cs typeface="Calibri" pitchFamily="34" charset="-120"/>
               </a:rPr>
-              <a:t> of the </a:t>
+              <a:t> </a:t>
             </a:r>
             <a:pPr algn="l" indent="0" marL="0">
               <a:buNone/>
@@ -17901,7 +17901,7 @@
                 <a:ea typeface="Calibri" pitchFamily="34" charset="-122"/>
                 <a:cs typeface="Calibri" pitchFamily="34" charset="-120"/>
               </a:rPr>
-              <a:t>powerhouse</a:t>
+              <a:t>superpower</a:t>
             </a:r>
             <a:pPr algn="l" indent="0" marL="0">
               <a:buNone/>
@@ -17915,7 +17915,7 @@
                 <a:ea typeface="Calibri" pitchFamily="34" charset="-122"/>
                 <a:cs typeface="Calibri" pitchFamily="34" charset="-120"/>
               </a:rPr>
-              <a:t> athlete was </a:t>
+              <a:t> of the </a:t>
             </a:r>
             <a:pPr algn="l" indent="0" marL="0">
               <a:buNone/>
@@ -17932,7 +17932,7 @@
                 <a:ea typeface="Calibri" pitchFamily="34" charset="-122"/>
                 <a:cs typeface="Calibri" pitchFamily="34" charset="-120"/>
               </a:rPr>
-              <a:t>overpowering</a:t>
+              <a:t>overpowered</a:t>
             </a:r>
             <a:pPr algn="l" indent="0" marL="0">
               <a:buNone/>
@@ -17946,7 +17946,7 @@
                 <a:ea typeface="Calibri" pitchFamily="34" charset="-122"/>
                 <a:cs typeface="Calibri" pitchFamily="34" charset="-120"/>
               </a:rPr>
-              <a:t>, leaving the crowd amazed!</a:t>
+              <a:t> hero amazed everyone in the crowd!</a:t>
             </a:r>
             <a:endParaRPr lang="en-US" sz="1800" dirty="0"/>
           </a:p>
@@ -18101,7 +18101,7 @@
                 <a:ea typeface="Trebuchet MS" pitchFamily="34" charset="-122"/>
                 <a:cs typeface="Trebuchet MS" pitchFamily="34" charset="-120"/>
               </a:rPr>
-              <a:t>superpower</a:t>
+              <a:t>powerful</a:t>
             </a:r>
             <a:endParaRPr lang="en-US" sz="1400" dirty="0"/>
           </a:p>
@@ -18229,7 +18229,7 @@
                 <a:ea typeface="Trebuchet MS" pitchFamily="34" charset="-122"/>
                 <a:cs typeface="Trebuchet MS" pitchFamily="34" charset="-120"/>
               </a:rPr>
-              <a:t>powerhouse</a:t>
+              <a:t>superpower</a:t>
             </a:r>
             <a:endParaRPr lang="en-US" sz="1400" dirty="0"/>
           </a:p>
@@ -18357,7 +18357,7 @@
                 <a:ea typeface="Trebuchet MS" pitchFamily="34" charset="-122"/>
                 <a:cs typeface="Trebuchet MS" pitchFamily="34" charset="-120"/>
               </a:rPr>
-              <a:t>overpowering</a:t>
+              <a:t>overpowered</a:t>
             </a:r>
             <a:endParaRPr lang="en-US" sz="1400" dirty="0"/>
           </a:p>
@@ -18827,7 +18827,7 @@
                 <a:ea typeface="Trebuchet MS" pitchFamily="34" charset="-122"/>
                 <a:cs typeface="Trebuchet MS" pitchFamily="34" charset="-120"/>
               </a:rPr>
-              <a:t>superpower</a:t>
+              <a:t>powerful</a:t>
             </a:r>
             <a:endParaRPr lang="en-US" sz="2800" dirty="0"/>
           </a:p>
@@ -19654,7 +19654,7 @@
                 <a:ea typeface="Trebuchet MS" pitchFamily="34" charset="-122"/>
                 <a:cs typeface="Trebuchet MS" pitchFamily="34" charset="-120"/>
               </a:rPr>
-              <a:t>superpower</a:t>
+              <a:t>powerful</a:t>
             </a:r>
             <a:endParaRPr lang="en-US" sz="2800" dirty="0"/>
           </a:p>
@@ -19743,11 +19743,11 @@
             </a:avLst>
           </a:prstGeom>
           <a:solidFill>
-            <a:srgbClr val="DDD6FE"/>
+            <a:srgbClr val="CCFBF1"/>
           </a:solidFill>
           <a:ln w="19050">
             <a:solidFill>
-              <a:srgbClr val="7C3AED"/>
+              <a:srgbClr val="0D9488"/>
             </a:solidFill>
             <a:prstDash val="solid"/>
           </a:ln>
@@ -19787,13 +19787,13 @@
             <a:r>
               <a:rPr lang="en-US" sz="1300" b="1" dirty="0">
                 <a:solidFill>
-                  <a:srgbClr val="4C1D95"/>
+                  <a:srgbClr val="0F766E"/>
                 </a:solidFill>
                 <a:latin typeface="Trebuchet MS" pitchFamily="34" charset="0"/>
                 <a:ea typeface="Trebuchet MS" pitchFamily="34" charset="-122"/>
                 <a:cs typeface="Trebuchet MS" pitchFamily="34" charset="-120"/>
               </a:rPr>
-              <a:t>super</a:t>
+              <a:t>power</a:t>
             </a:r>
             <a:endParaRPr lang="en-US" sz="1300" dirty="0"/>
           </a:p>
@@ -19832,7 +19832,7 @@
                 <a:ea typeface="Calibri" pitchFamily="34" charset="-122"/>
                 <a:cs typeface="Calibri" pitchFamily="34" charset="-120"/>
               </a:rPr>
-              <a:t>above, beyond</a:t>
+              <a:t>strength, force</a:t>
             </a:r>
             <a:endParaRPr lang="en-US" sz="850" dirty="0"/>
           </a:p>
@@ -19855,11 +19855,11 @@
             </a:avLst>
           </a:prstGeom>
           <a:solidFill>
-            <a:srgbClr val="CCFBF1"/>
+            <a:srgbClr val="FCE7F3"/>
           </a:solidFill>
           <a:ln w="19050">
             <a:solidFill>
-              <a:srgbClr val="0D9488"/>
+              <a:srgbClr val="DB2777"/>
             </a:solidFill>
             <a:prstDash val="solid"/>
           </a:ln>
@@ -19899,13 +19899,13 @@
             <a:r>
               <a:rPr lang="en-US" sz="1300" b="1" dirty="0">
                 <a:solidFill>
-                  <a:srgbClr val="0F766E"/>
+                  <a:srgbClr val="9D174D"/>
                 </a:solidFill>
                 <a:latin typeface="Trebuchet MS" pitchFamily="34" charset="0"/>
                 <a:ea typeface="Trebuchet MS" pitchFamily="34" charset="-122"/>
                 <a:cs typeface="Trebuchet MS" pitchFamily="34" charset="-120"/>
               </a:rPr>
-              <a:t>power</a:t>
+              <a:t>ful</a:t>
             </a:r>
             <a:endParaRPr lang="en-US" sz="1300" dirty="0"/>
           </a:p>
@@ -19944,7 +19944,7 @@
                 <a:ea typeface="Calibri" pitchFamily="34" charset="-122"/>
                 <a:cs typeface="Calibri" pitchFamily="34" charset="-120"/>
               </a:rPr>
-              <a:t>strength, force</a:t>
+              <a:t>full of</a:t>
             </a:r>
             <a:endParaRPr lang="en-US" sz="850" dirty="0"/>
           </a:p>
@@ -20639,7 +20639,7 @@
                 <a:ea typeface="Trebuchet MS" pitchFamily="34" charset="-122"/>
                 <a:cs typeface="Trebuchet MS" pitchFamily="34" charset="-120"/>
               </a:rPr>
-              <a:t>superpower</a:t>
+              <a:t>powerful</a:t>
             </a:r>
             <a:endParaRPr lang="en-US" sz="2800" dirty="0"/>
           </a:p>
@@ -20728,11 +20728,11 @@
             </a:avLst>
           </a:prstGeom>
           <a:solidFill>
-            <a:srgbClr val="DDD6FE"/>
+            <a:srgbClr val="CCFBF1"/>
           </a:solidFill>
           <a:ln w="19050">
             <a:solidFill>
-              <a:srgbClr val="7C3AED"/>
+              <a:srgbClr val="0D9488"/>
             </a:solidFill>
             <a:prstDash val="solid"/>
           </a:ln>
@@ -20772,13 +20772,13 @@
             <a:r>
               <a:rPr lang="en-US" sz="1300" b="1" dirty="0">
                 <a:solidFill>
-                  <a:srgbClr val="4C1D95"/>
+                  <a:srgbClr val="0F766E"/>
                 </a:solidFill>
                 <a:latin typeface="Trebuchet MS" pitchFamily="34" charset="0"/>
                 <a:ea typeface="Trebuchet MS" pitchFamily="34" charset="-122"/>
                 <a:cs typeface="Trebuchet MS" pitchFamily="34" charset="-120"/>
               </a:rPr>
-              <a:t>super</a:t>
+              <a:t>power</a:t>
             </a:r>
             <a:endParaRPr lang="en-US" sz="1300" dirty="0"/>
           </a:p>
@@ -20817,7 +20817,7 @@
                 <a:ea typeface="Calibri" pitchFamily="34" charset="-122"/>
                 <a:cs typeface="Calibri" pitchFamily="34" charset="-120"/>
               </a:rPr>
-              <a:t>above, beyond</a:t>
+              <a:t>strength, force</a:t>
             </a:r>
             <a:endParaRPr lang="en-US" sz="850" dirty="0"/>
           </a:p>
@@ -20840,11 +20840,11 @@
             </a:avLst>
           </a:prstGeom>
           <a:solidFill>
-            <a:srgbClr val="CCFBF1"/>
+            <a:srgbClr val="FCE7F3"/>
           </a:solidFill>
           <a:ln w="19050">
             <a:solidFill>
-              <a:srgbClr val="0D9488"/>
+              <a:srgbClr val="DB2777"/>
             </a:solidFill>
             <a:prstDash val="solid"/>
           </a:ln>
@@ -20884,13 +20884,13 @@
             <a:r>
               <a:rPr lang="en-US" sz="1300" b="1" dirty="0">
                 <a:solidFill>
-                  <a:srgbClr val="0F766E"/>
+                  <a:srgbClr val="9D174D"/>
                 </a:solidFill>
                 <a:latin typeface="Trebuchet MS" pitchFamily="34" charset="0"/>
                 <a:ea typeface="Trebuchet MS" pitchFamily="34" charset="-122"/>
                 <a:cs typeface="Trebuchet MS" pitchFamily="34" charset="-120"/>
               </a:rPr>
-              <a:t>power</a:t>
+              <a:t>ful</a:t>
             </a:r>
             <a:endParaRPr lang="en-US" sz="1300" dirty="0"/>
           </a:p>
@@ -20929,7 +20929,7 @@
                 <a:ea typeface="Calibri" pitchFamily="34" charset="-122"/>
                 <a:cs typeface="Calibri" pitchFamily="34" charset="-120"/>
               </a:rPr>
-              <a:t>strength, force</a:t>
+              <a:t>full of</a:t>
             </a:r>
             <a:endParaRPr lang="en-US" sz="850" dirty="0"/>
           </a:p>
@@ -21036,8 +21036,8 @@
         </p:nvSpPr>
         <p:spPr>
           <a:xfrm>
-            <a:off x="1975104" y="3364992"/>
-            <a:ext cx="1554480" cy="475488"/>
+            <a:off x="2313432" y="3364992"/>
+            <a:ext cx="1645920" cy="475488"/>
           </a:xfrm>
           <a:prstGeom prst="rect">
             <a:avLst>
@@ -21063,8 +21063,8 @@
         </p:nvSpPr>
         <p:spPr>
           <a:xfrm>
-            <a:off x="1975104" y="3364992"/>
-            <a:ext cx="1554480" cy="475488"/>
+            <a:off x="2313432" y="3364992"/>
+            <a:ext cx="1645920" cy="475488"/>
           </a:xfrm>
           <a:prstGeom prst="rect">
             <a:avLst/>
@@ -21088,7 +21088,7 @@
                 <a:ea typeface="Trebuchet MS" pitchFamily="34" charset="-122"/>
                 <a:cs typeface="Trebuchet MS" pitchFamily="34" charset="-120"/>
               </a:rPr>
-              <a:t>su</a:t>
+              <a:t>pow</a:t>
             </a:r>
             <a:endParaRPr lang="en-US" sz="1400" dirty="0"/>
           </a:p>
@@ -21102,8 +21102,8 @@
         </p:nvSpPr>
         <p:spPr>
           <a:xfrm>
-            <a:off x="3529584" y="3364992"/>
-            <a:ext cx="73152" cy="475488"/>
+            <a:off x="3959352" y="3364992"/>
+            <a:ext cx="411480" cy="475488"/>
           </a:xfrm>
           <a:prstGeom prst="rect">
             <a:avLst/>
@@ -21141,8 +21141,8 @@
         </p:nvSpPr>
         <p:spPr>
           <a:xfrm>
-            <a:off x="3602736" y="3364992"/>
-            <a:ext cx="1554480" cy="475488"/>
+            <a:off x="4370832" y="3364992"/>
+            <a:ext cx="1645920" cy="475488"/>
           </a:xfrm>
           <a:prstGeom prst="rect">
             <a:avLst>
@@ -21168,8 +21168,8 @@
         </p:nvSpPr>
         <p:spPr>
           <a:xfrm>
-            <a:off x="3602736" y="3364992"/>
-            <a:ext cx="1554480" cy="475488"/>
+            <a:off x="4370832" y="3364992"/>
+            <a:ext cx="1645920" cy="475488"/>
           </a:xfrm>
           <a:prstGeom prst="rect">
             <a:avLst/>
@@ -21193,7 +21193,7 @@
                 <a:ea typeface="Trebuchet MS" pitchFamily="34" charset="-122"/>
                 <a:cs typeface="Trebuchet MS" pitchFamily="34" charset="-120"/>
               </a:rPr>
-              <a:t>per</a:t>
+              <a:t>er</a:t>
             </a:r>
             <a:endParaRPr lang="en-US" sz="1400" dirty="0"/>
           </a:p>
@@ -21207,8 +21207,8 @@
         </p:nvSpPr>
         <p:spPr>
           <a:xfrm>
-            <a:off x="5157216" y="3364992"/>
-            <a:ext cx="73152" cy="475488"/>
+            <a:off x="6016752" y="3364992"/>
+            <a:ext cx="411480" cy="475488"/>
           </a:xfrm>
           <a:prstGeom prst="rect">
             <a:avLst/>
@@ -21246,8 +21246,8 @@
         </p:nvSpPr>
         <p:spPr>
           <a:xfrm>
-            <a:off x="5230368" y="3364992"/>
-            <a:ext cx="1554480" cy="475488"/>
+            <a:off x="6428232" y="3364992"/>
+            <a:ext cx="1645920" cy="475488"/>
           </a:xfrm>
           <a:prstGeom prst="rect">
             <a:avLst>
@@ -21273,8 +21273,8 @@
         </p:nvSpPr>
         <p:spPr>
           <a:xfrm>
-            <a:off x="5230368" y="3364992"/>
-            <a:ext cx="1554480" cy="475488"/>
+            <a:off x="6428232" y="3364992"/>
+            <a:ext cx="1645920" cy="475488"/>
           </a:xfrm>
           <a:prstGeom prst="rect">
             <a:avLst/>
@@ -21298,7 +21298,7 @@
                 <a:ea typeface="Trebuchet MS" pitchFamily="34" charset="-122"/>
                 <a:cs typeface="Trebuchet MS" pitchFamily="34" charset="-120"/>
               </a:rPr>
-              <a:t>pow</a:t>
+              <a:t>ful</a:t>
             </a:r>
             <a:endParaRPr lang="en-US" sz="1400" dirty="0"/>
           </a:p>
@@ -21306,119 +21306,80 @@
       </p:sp>
       <p:sp>
         <p:nvSpPr>
-          <p:cNvPr id="33" name="Text 31"/>
-          <p:cNvSpPr/>
-          <p:nvPr/>
-        </p:nvSpPr>
-        <p:spPr>
-          <a:xfrm>
-            <a:off x="6784848" y="3364992"/>
-            <a:ext cx="73152" cy="475488"/>
-          </a:xfrm>
-          <a:prstGeom prst="rect">
-            <a:avLst/>
-          </a:prstGeom>
-          <a:noFill/>
-          <a:ln/>
-        </p:spPr>
-        <p:txBody>
-          <a:bodyPr wrap="square" lIns="0" tIns="0" rIns="0" bIns="0" rtlCol="0" anchor="ctr"/>
-          <a:lstStyle/>
-          <a:p>
-            <a:pPr algn="ctr" indent="0" marL="0">
-              <a:buNone/>
-            </a:pPr>
-            <a:r>
-              <a:rPr lang="en-US" sz="1600" b="1" dirty="0">
-                <a:solidFill>
-                  <a:srgbClr val="0D9488"/>
+          <p:cNvPr id="33" name="Shape 31"/>
+          <p:cNvSpPr/>
+          <p:nvPr/>
+        </p:nvSpPr>
+        <p:spPr>
+          <a:xfrm>
+            <a:off x="365760" y="4096512"/>
+            <a:ext cx="1371600" cy="804672"/>
+          </a:xfrm>
+          <a:prstGeom prst="rect">
+            <a:avLst>
+              <a:gd name="adj" fmla="val 6818"/>
+            </a:avLst>
+          </a:prstGeom>
+          <a:solidFill>
+            <a:srgbClr val="E2E8F0"/>
+          </a:solidFill>
+          <a:ln w="12700">
+            <a:solidFill>
+              <a:srgbClr val="E2E8F0"/>
+            </a:solidFill>
+            <a:prstDash val="solid"/>
+          </a:ln>
+        </p:spPr>
+      </p:sp>
+      <p:sp>
+        <p:nvSpPr>
+          <p:cNvPr id="34" name="Text 32"/>
+          <p:cNvSpPr/>
+          <p:nvPr/>
+        </p:nvSpPr>
+        <p:spPr>
+          <a:xfrm>
+            <a:off x="365760" y="4096512"/>
+            <a:ext cx="1371600" cy="804672"/>
+          </a:xfrm>
+          <a:prstGeom prst="rect">
+            <a:avLst/>
+          </a:prstGeom>
+          <a:noFill/>
+          <a:ln/>
+        </p:spPr>
+        <p:txBody>
+          <a:bodyPr wrap="square" lIns="0" tIns="0" rIns="0" bIns="0" rtlCol="0" anchor="ctr"/>
+          <a:lstStyle/>
+          <a:p>
+            <a:pPr algn="ctr" indent="0" marL="0">
+              <a:buNone/>
+            </a:pPr>
+            <a:r>
+              <a:rPr lang="en-US" sz="1100" b="1" dirty="0">
+                <a:solidFill>
+                  <a:srgbClr val="475569"/>
                 </a:solidFill>
                 <a:latin typeface="Trebuchet MS" pitchFamily="34" charset="0"/>
                 <a:ea typeface="Trebuchet MS" pitchFamily="34" charset="-122"/>
                 <a:cs typeface="Trebuchet MS" pitchFamily="34" charset="-120"/>
               </a:rPr>
-              <a:t>·</a:t>
-            </a:r>
-            <a:endParaRPr lang="en-US" sz="1600" dirty="0"/>
-          </a:p>
-        </p:txBody>
-      </p:sp>
-      <p:sp>
-        <p:nvSpPr>
-          <p:cNvPr id="34" name="Shape 32"/>
-          <p:cNvSpPr/>
-          <p:nvPr/>
-        </p:nvSpPr>
-        <p:spPr>
-          <a:xfrm>
-            <a:off x="6858000" y="3364992"/>
-            <a:ext cx="1554480" cy="475488"/>
-          </a:xfrm>
-          <a:prstGeom prst="rect">
-            <a:avLst>
-              <a:gd name="adj" fmla="val 9615"/>
-            </a:avLst>
-          </a:prstGeom>
-          <a:solidFill>
-            <a:srgbClr val="FFFFFF"/>
-          </a:solidFill>
-          <a:ln w="12700">
-            <a:solidFill>
-              <a:srgbClr val="0D9488"/>
-            </a:solidFill>
-            <a:prstDash val="solid"/>
-          </a:ln>
-        </p:spPr>
-      </p:sp>
-      <p:sp>
-        <p:nvSpPr>
-          <p:cNvPr id="35" name="Text 33"/>
-          <p:cNvSpPr/>
-          <p:nvPr/>
-        </p:nvSpPr>
-        <p:spPr>
-          <a:xfrm>
-            <a:off x="6858000" y="3364992"/>
-            <a:ext cx="1554480" cy="475488"/>
-          </a:xfrm>
-          <a:prstGeom prst="rect">
-            <a:avLst/>
-          </a:prstGeom>
-          <a:noFill/>
-          <a:ln/>
-        </p:spPr>
-        <p:txBody>
-          <a:bodyPr wrap="square" lIns="0" tIns="0" rIns="0" bIns="0" rtlCol="0" anchor="ctr"/>
-          <a:lstStyle/>
-          <a:p>
-            <a:pPr algn="ctr" indent="0" marL="0">
-              <a:buNone/>
-            </a:pPr>
-            <a:r>
-              <a:rPr lang="en-US" sz="1400" b="1" dirty="0">
-                <a:solidFill>
-                  <a:srgbClr val="0D9488"/>
-                </a:solidFill>
-                <a:latin typeface="Trebuchet MS" pitchFamily="34" charset="0"/>
-                <a:ea typeface="Trebuchet MS" pitchFamily="34" charset="-122"/>
-                <a:cs typeface="Trebuchet MS" pitchFamily="34" charset="-120"/>
-              </a:rPr>
-              <a:t>er</a:t>
-            </a:r>
-            <a:endParaRPr lang="en-US" sz="1400" dirty="0"/>
-          </a:p>
-        </p:txBody>
-      </p:sp>
-      <p:sp>
-        <p:nvSpPr>
-          <p:cNvPr id="36" name="Shape 34"/>
-          <p:cNvSpPr/>
-          <p:nvPr/>
-        </p:nvSpPr>
-        <p:spPr>
-          <a:xfrm>
-            <a:off x="365760" y="4096512"/>
-            <a:ext cx="1371600" cy="804672"/>
+              <a:t>Phonemes</a:t>
+            </a:r>
+            <a:endParaRPr lang="en-US" sz="1100" dirty="0"/>
+          </a:p>
+        </p:txBody>
+      </p:sp>
+      <p:sp>
+        <p:nvSpPr>
+          <p:cNvPr id="35" name="Shape 33"/>
+          <p:cNvSpPr/>
+          <p:nvPr/>
+        </p:nvSpPr>
+        <p:spPr>
+          <a:xfrm>
+            <a:off x="1874520" y="4096512"/>
+            <a:ext cx="6903720" cy="804672"/>
           </a:xfrm>
           <a:prstGeom prst="rect">
             <a:avLst>
@@ -21426,85 +21387,19 @@
             </a:avLst>
           </a:prstGeom>
           <a:solidFill>
-            <a:srgbClr val="E2E8F0"/>
+            <a:srgbClr val="F8FAFC"/>
           </a:solidFill>
           <a:ln w="12700">
             <a:solidFill>
               <a:srgbClr val="E2E8F0"/>
             </a:solidFill>
-            <a:prstDash val="solid"/>
-          </a:ln>
-        </p:spPr>
-      </p:sp>
-      <p:sp>
-        <p:nvSpPr>
-          <p:cNvPr id="37" name="Text 35"/>
-          <p:cNvSpPr/>
-          <p:nvPr/>
-        </p:nvSpPr>
-        <p:spPr>
-          <a:xfrm>
-            <a:off x="365760" y="4096512"/>
-            <a:ext cx="1371600" cy="804672"/>
-          </a:xfrm>
-          <a:prstGeom prst="rect">
-            <a:avLst/>
-          </a:prstGeom>
-          <a:noFill/>
-          <a:ln/>
-        </p:spPr>
-        <p:txBody>
-          <a:bodyPr wrap="square" lIns="0" tIns="0" rIns="0" bIns="0" rtlCol="0" anchor="ctr"/>
-          <a:lstStyle/>
-          <a:p>
-            <a:pPr algn="ctr" indent="0" marL="0">
-              <a:buNone/>
-            </a:pPr>
-            <a:r>
-              <a:rPr lang="en-US" sz="1100" b="1" dirty="0">
-                <a:solidFill>
-                  <a:srgbClr val="475569"/>
-                </a:solidFill>
-                <a:latin typeface="Trebuchet MS" pitchFamily="34" charset="0"/>
-                <a:ea typeface="Trebuchet MS" pitchFamily="34" charset="-122"/>
-                <a:cs typeface="Trebuchet MS" pitchFamily="34" charset="-120"/>
-              </a:rPr>
-              <a:t>Phonemes</a:t>
-            </a:r>
-            <a:endParaRPr lang="en-US" sz="1100" dirty="0"/>
-          </a:p>
-        </p:txBody>
-      </p:sp>
-      <p:sp>
-        <p:nvSpPr>
-          <p:cNvPr id="38" name="Shape 36"/>
-          <p:cNvSpPr/>
-          <p:nvPr/>
-        </p:nvSpPr>
-        <p:spPr>
-          <a:xfrm>
-            <a:off x="1874520" y="4096512"/>
-            <a:ext cx="6903720" cy="804672"/>
-          </a:xfrm>
-          <a:prstGeom prst="rect">
-            <a:avLst>
-              <a:gd name="adj" fmla="val 6818"/>
-            </a:avLst>
-          </a:prstGeom>
-          <a:solidFill>
-            <a:srgbClr val="F8FAFC"/>
-          </a:solidFill>
-          <a:ln w="12700">
-            <a:solidFill>
-              <a:srgbClr val="E2E8F0"/>
-            </a:solidFill>
             <a:prstDash val="dash"/>
           </a:ln>
         </p:spPr>
       </p:sp>
       <p:sp>
         <p:nvSpPr>
-          <p:cNvPr id="39" name="Text 37"/>
+          <p:cNvPr id="36" name="Text 34"/>
           <p:cNvSpPr/>
           <p:nvPr/>
         </p:nvSpPr>
@@ -21966,7 +21861,7 @@
                 <a:ea typeface="Trebuchet MS" pitchFamily="34" charset="-122"/>
                 <a:cs typeface="Trebuchet MS" pitchFamily="34" charset="-120"/>
               </a:rPr>
-              <a:t>superpower</a:t>
+              <a:t>powerful</a:t>
             </a:r>
             <a:endParaRPr lang="en-US" sz="2800" dirty="0"/>
           </a:p>
@@ -22055,11 +21950,11 @@
             </a:avLst>
           </a:prstGeom>
           <a:solidFill>
-            <a:srgbClr val="DDD6FE"/>
+            <a:srgbClr val="CCFBF1"/>
           </a:solidFill>
           <a:ln w="19050">
             <a:solidFill>
-              <a:srgbClr val="7C3AED"/>
+              <a:srgbClr val="0D9488"/>
             </a:solidFill>
             <a:prstDash val="solid"/>
           </a:ln>
@@ -22099,13 +21994,13 @@
             <a:r>
               <a:rPr lang="en-US" sz="1300" b="1" dirty="0">
                 <a:solidFill>
-                  <a:srgbClr val="4C1D95"/>
+                  <a:srgbClr val="0F766E"/>
                 </a:solidFill>
                 <a:latin typeface="Trebuchet MS" pitchFamily="34" charset="0"/>
                 <a:ea typeface="Trebuchet MS" pitchFamily="34" charset="-122"/>
                 <a:cs typeface="Trebuchet MS" pitchFamily="34" charset="-120"/>
               </a:rPr>
-              <a:t>super</a:t>
+              <a:t>power</a:t>
             </a:r>
             <a:endParaRPr lang="en-US" sz="1300" dirty="0"/>
           </a:p>
@@ -22144,7 +22039,7 @@
                 <a:ea typeface="Calibri" pitchFamily="34" charset="-122"/>
                 <a:cs typeface="Calibri" pitchFamily="34" charset="-120"/>
               </a:rPr>
-              <a:t>above, beyond</a:t>
+              <a:t>strength, force</a:t>
             </a:r>
             <a:endParaRPr lang="en-US" sz="850" dirty="0"/>
           </a:p>
@@ -22167,11 +22062,11 @@
             </a:avLst>
           </a:prstGeom>
           <a:solidFill>
-            <a:srgbClr val="CCFBF1"/>
+            <a:srgbClr val="FCE7F3"/>
           </a:solidFill>
           <a:ln w="19050">
             <a:solidFill>
-              <a:srgbClr val="0D9488"/>
+              <a:srgbClr val="DB2777"/>
             </a:solidFill>
             <a:prstDash val="solid"/>
           </a:ln>
@@ -22211,13 +22106,13 @@
             <a:r>
               <a:rPr lang="en-US" sz="1300" b="1" dirty="0">
                 <a:solidFill>
-                  <a:srgbClr val="0F766E"/>
+                  <a:srgbClr val="9D174D"/>
                 </a:solidFill>
                 <a:latin typeface="Trebuchet MS" pitchFamily="34" charset="0"/>
                 <a:ea typeface="Trebuchet MS" pitchFamily="34" charset="-122"/>
                 <a:cs typeface="Trebuchet MS" pitchFamily="34" charset="-120"/>
               </a:rPr>
-              <a:t>power</a:t>
+              <a:t>ful</a:t>
             </a:r>
             <a:endParaRPr lang="en-US" sz="1300" dirty="0"/>
           </a:p>
@@ -22256,7 +22151,7 @@
                 <a:ea typeface="Calibri" pitchFamily="34" charset="-122"/>
                 <a:cs typeface="Calibri" pitchFamily="34" charset="-120"/>
               </a:rPr>
-              <a:t>strength, force</a:t>
+              <a:t>full of</a:t>
             </a:r>
             <a:endParaRPr lang="en-US" sz="850" dirty="0"/>
           </a:p>
@@ -22363,8 +22258,8 @@
         </p:nvSpPr>
         <p:spPr>
           <a:xfrm>
-            <a:off x="1975104" y="3364992"/>
-            <a:ext cx="1554480" cy="475488"/>
+            <a:off x="2313432" y="3364992"/>
+            <a:ext cx="1645920" cy="475488"/>
           </a:xfrm>
           <a:prstGeom prst="rect">
             <a:avLst>
@@ -22390,8 +22285,8 @@
         </p:nvSpPr>
         <p:spPr>
           <a:xfrm>
-            <a:off x="1975104" y="3364992"/>
-            <a:ext cx="1554480" cy="475488"/>
+            <a:off x="2313432" y="3364992"/>
+            <a:ext cx="1645920" cy="475488"/>
           </a:xfrm>
           <a:prstGeom prst="rect">
             <a:avLst/>
@@ -22415,7 +22310,7 @@
                 <a:ea typeface="Trebuchet MS" pitchFamily="34" charset="-122"/>
                 <a:cs typeface="Trebuchet MS" pitchFamily="34" charset="-120"/>
               </a:rPr>
-              <a:t>su</a:t>
+              <a:t>pow</a:t>
             </a:r>
             <a:endParaRPr lang="en-US" sz="1400" dirty="0"/>
           </a:p>
@@ -22429,8 +22324,8 @@
         </p:nvSpPr>
         <p:spPr>
           <a:xfrm>
-            <a:off x="3529584" y="3364992"/>
-            <a:ext cx="73152" cy="475488"/>
+            <a:off x="3959352" y="3364992"/>
+            <a:ext cx="411480" cy="475488"/>
           </a:xfrm>
           <a:prstGeom prst="rect">
             <a:avLst/>
@@ -22468,8 +22363,8 @@
         </p:nvSpPr>
         <p:spPr>
           <a:xfrm>
-            <a:off x="3602736" y="3364992"/>
-            <a:ext cx="1554480" cy="475488"/>
+            <a:off x="4370832" y="3364992"/>
+            <a:ext cx="1645920" cy="475488"/>
           </a:xfrm>
           <a:prstGeom prst="rect">
             <a:avLst>
@@ -22495,8 +22390,8 @@
         </p:nvSpPr>
         <p:spPr>
           <a:xfrm>
-            <a:off x="3602736" y="3364992"/>
-            <a:ext cx="1554480" cy="475488"/>
+            <a:off x="4370832" y="3364992"/>
+            <a:ext cx="1645920" cy="475488"/>
           </a:xfrm>
           <a:prstGeom prst="rect">
             <a:avLst/>
@@ -22520,7 +22415,7 @@
                 <a:ea typeface="Trebuchet MS" pitchFamily="34" charset="-122"/>
                 <a:cs typeface="Trebuchet MS" pitchFamily="34" charset="-120"/>
               </a:rPr>
-              <a:t>per</a:t>
+              <a:t>er</a:t>
             </a:r>
             <a:endParaRPr lang="en-US" sz="1400" dirty="0"/>
           </a:p>
@@ -22534,8 +22429,8 @@
         </p:nvSpPr>
         <p:spPr>
           <a:xfrm>
-            <a:off x="5157216" y="3364992"/>
-            <a:ext cx="73152" cy="475488"/>
+            <a:off x="6016752" y="3364992"/>
+            <a:ext cx="411480" cy="475488"/>
           </a:xfrm>
           <a:prstGeom prst="rect">
             <a:avLst/>
@@ -22573,8 +22468,8 @@
         </p:nvSpPr>
         <p:spPr>
           <a:xfrm>
-            <a:off x="5230368" y="3364992"/>
-            <a:ext cx="1554480" cy="475488"/>
+            <a:off x="6428232" y="3364992"/>
+            <a:ext cx="1645920" cy="475488"/>
           </a:xfrm>
           <a:prstGeom prst="rect">
             <a:avLst>
@@ -22600,8 +22495,8 @@
         </p:nvSpPr>
         <p:spPr>
           <a:xfrm>
-            <a:off x="5230368" y="3364992"/>
-            <a:ext cx="1554480" cy="475488"/>
+            <a:off x="6428232" y="3364992"/>
+            <a:ext cx="1645920" cy="475488"/>
           </a:xfrm>
           <a:prstGeom prst="rect">
             <a:avLst/>
@@ -22625,7 +22520,7 @@
                 <a:ea typeface="Trebuchet MS" pitchFamily="34" charset="-122"/>
                 <a:cs typeface="Trebuchet MS" pitchFamily="34" charset="-120"/>
               </a:rPr>
-              <a:t>pow</a:t>
+              <a:t>ful</a:t>
             </a:r>
             <a:endParaRPr lang="en-US" sz="1400" dirty="0"/>
           </a:p>
@@ -22633,211 +22528,238 @@
       </p:sp>
       <p:sp>
         <p:nvSpPr>
-          <p:cNvPr id="33" name="Text 31"/>
-          <p:cNvSpPr/>
-          <p:nvPr/>
-        </p:nvSpPr>
-        <p:spPr>
-          <a:xfrm>
-            <a:off x="6784848" y="3364992"/>
-            <a:ext cx="73152" cy="475488"/>
-          </a:xfrm>
-          <a:prstGeom prst="rect">
-            <a:avLst/>
-          </a:prstGeom>
-          <a:noFill/>
-          <a:ln/>
-        </p:spPr>
-        <p:txBody>
-          <a:bodyPr wrap="square" lIns="0" tIns="0" rIns="0" bIns="0" rtlCol="0" anchor="ctr"/>
-          <a:lstStyle/>
-          <a:p>
-            <a:pPr algn="ctr" indent="0" marL="0">
-              <a:buNone/>
-            </a:pPr>
-            <a:r>
-              <a:rPr lang="en-US" sz="1600" b="1" dirty="0">
-                <a:solidFill>
-                  <a:srgbClr val="0D9488"/>
+          <p:cNvPr id="33" name="Shape 31"/>
+          <p:cNvSpPr/>
+          <p:nvPr/>
+        </p:nvSpPr>
+        <p:spPr>
+          <a:xfrm>
+            <a:off x="365760" y="4096512"/>
+            <a:ext cx="1371600" cy="804672"/>
+          </a:xfrm>
+          <a:prstGeom prst="rect">
+            <a:avLst>
+              <a:gd name="adj" fmla="val 6818"/>
+            </a:avLst>
+          </a:prstGeom>
+          <a:solidFill>
+            <a:srgbClr val="E2E8F0"/>
+          </a:solidFill>
+          <a:ln w="12700">
+            <a:solidFill>
+              <a:srgbClr val="E2E8F0"/>
+            </a:solidFill>
+            <a:prstDash val="solid"/>
+          </a:ln>
+        </p:spPr>
+      </p:sp>
+      <p:sp>
+        <p:nvSpPr>
+          <p:cNvPr id="34" name="Text 32"/>
+          <p:cNvSpPr/>
+          <p:nvPr/>
+        </p:nvSpPr>
+        <p:spPr>
+          <a:xfrm>
+            <a:off x="365760" y="4096512"/>
+            <a:ext cx="1371600" cy="804672"/>
+          </a:xfrm>
+          <a:prstGeom prst="rect">
+            <a:avLst/>
+          </a:prstGeom>
+          <a:noFill/>
+          <a:ln/>
+        </p:spPr>
+        <p:txBody>
+          <a:bodyPr wrap="square" lIns="0" tIns="0" rIns="0" bIns="0" rtlCol="0" anchor="ctr"/>
+          <a:lstStyle/>
+          <a:p>
+            <a:pPr algn="ctr" indent="0" marL="0">
+              <a:buNone/>
+            </a:pPr>
+            <a:r>
+              <a:rPr lang="en-US" sz="1100" b="1" dirty="0">
+                <a:solidFill>
+                  <a:srgbClr val="475569"/>
                 </a:solidFill>
                 <a:latin typeface="Trebuchet MS" pitchFamily="34" charset="0"/>
                 <a:ea typeface="Trebuchet MS" pitchFamily="34" charset="-122"/>
                 <a:cs typeface="Trebuchet MS" pitchFamily="34" charset="-120"/>
               </a:rPr>
-              <a:t>·</a:t>
-            </a:r>
-            <a:endParaRPr lang="en-US" sz="1600" dirty="0"/>
-          </a:p>
-        </p:txBody>
-      </p:sp>
-      <p:sp>
-        <p:nvSpPr>
-          <p:cNvPr id="34" name="Shape 32"/>
-          <p:cNvSpPr/>
-          <p:nvPr/>
-        </p:nvSpPr>
-        <p:spPr>
-          <a:xfrm>
-            <a:off x="6858000" y="3364992"/>
-            <a:ext cx="1554480" cy="475488"/>
+              <a:t>Phonemes</a:t>
+            </a:r>
+            <a:endParaRPr lang="en-US" sz="1100" dirty="0"/>
+          </a:p>
+        </p:txBody>
+      </p:sp>
+      <p:sp>
+        <p:nvSpPr>
+          <p:cNvPr id="35" name="Shape 33"/>
+          <p:cNvSpPr/>
+          <p:nvPr/>
+        </p:nvSpPr>
+        <p:spPr>
+          <a:xfrm>
+            <a:off x="1874520" y="4096512"/>
+            <a:ext cx="6903720" cy="658368"/>
           </a:xfrm>
           <a:prstGeom prst="rect">
             <a:avLst>
-              <a:gd name="adj" fmla="val 9615"/>
+              <a:gd name="adj" fmla="val 8333"/>
             </a:avLst>
           </a:prstGeom>
           <a:solidFill>
+            <a:srgbClr val="FCE7F3"/>
+          </a:solidFill>
+          <a:ln w="12700">
+            <a:solidFill>
+              <a:srgbClr val="DB2777"/>
+            </a:solidFill>
+            <a:prstDash val="solid"/>
+          </a:ln>
+        </p:spPr>
+      </p:sp>
+      <p:sp>
+        <p:nvSpPr>
+          <p:cNvPr id="36" name="Shape 34"/>
+          <p:cNvSpPr/>
+          <p:nvPr/>
+        </p:nvSpPr>
+        <p:spPr>
+          <a:xfrm>
+            <a:off x="2254649" y="4169664"/>
+            <a:ext cx="685800" cy="475488"/>
+          </a:xfrm>
+          <a:prstGeom prst="rect">
+            <a:avLst>
+              <a:gd name="adj" fmla="val 7692"/>
+            </a:avLst>
+          </a:prstGeom>
+          <a:solidFill>
             <a:srgbClr val="FFFFFF"/>
           </a:solidFill>
           <a:ln w="12700">
             <a:solidFill>
-              <a:srgbClr val="0D9488"/>
-            </a:solidFill>
-            <a:prstDash val="solid"/>
-          </a:ln>
-        </p:spPr>
-      </p:sp>
-      <p:sp>
-        <p:nvSpPr>
-          <p:cNvPr id="35" name="Text 33"/>
-          <p:cNvSpPr/>
-          <p:nvPr/>
-        </p:nvSpPr>
-        <p:spPr>
-          <a:xfrm>
-            <a:off x="6858000" y="3364992"/>
-            <a:ext cx="1554480" cy="475488"/>
-          </a:xfrm>
-          <a:prstGeom prst="rect">
-            <a:avLst/>
-          </a:prstGeom>
-          <a:noFill/>
-          <a:ln/>
-        </p:spPr>
-        <p:txBody>
-          <a:bodyPr wrap="square" lIns="0" tIns="0" rIns="0" bIns="0" rtlCol="0" anchor="ctr"/>
-          <a:lstStyle/>
-          <a:p>
-            <a:pPr algn="ctr" indent="0" marL="0">
-              <a:buNone/>
-            </a:pPr>
-            <a:r>
-              <a:rPr lang="en-US" sz="1400" b="1" dirty="0">
-                <a:solidFill>
-                  <a:srgbClr val="0D9488"/>
+              <a:srgbClr val="DB2777"/>
+            </a:solidFill>
+            <a:prstDash val="solid"/>
+          </a:ln>
+        </p:spPr>
+      </p:sp>
+      <p:sp>
+        <p:nvSpPr>
+          <p:cNvPr id="37" name="Text 35"/>
+          <p:cNvSpPr/>
+          <p:nvPr/>
+        </p:nvSpPr>
+        <p:spPr>
+          <a:xfrm>
+            <a:off x="2254649" y="4169664"/>
+            <a:ext cx="685800" cy="475488"/>
+          </a:xfrm>
+          <a:prstGeom prst="rect">
+            <a:avLst/>
+          </a:prstGeom>
+          <a:noFill/>
+          <a:ln/>
+        </p:spPr>
+        <p:txBody>
+          <a:bodyPr wrap="square" lIns="0" tIns="0" rIns="0" bIns="0" rtlCol="0" anchor="ctr"/>
+          <a:lstStyle/>
+          <a:p>
+            <a:pPr algn="ctr" indent="0" marL="0">
+              <a:buNone/>
+            </a:pPr>
+            <a:r>
+              <a:rPr lang="en-US" sz="900" b="1" dirty="0">
+                <a:solidFill>
+                  <a:srgbClr val="9D174D"/>
                 </a:solidFill>
                 <a:latin typeface="Trebuchet MS" pitchFamily="34" charset="0"/>
                 <a:ea typeface="Trebuchet MS" pitchFamily="34" charset="-122"/>
                 <a:cs typeface="Trebuchet MS" pitchFamily="34" charset="-120"/>
               </a:rPr>
-              <a:t>er</a:t>
-            </a:r>
-            <a:endParaRPr lang="en-US" sz="1400" dirty="0"/>
-          </a:p>
-        </p:txBody>
-      </p:sp>
-      <p:sp>
-        <p:nvSpPr>
-          <p:cNvPr id="36" name="Shape 34"/>
-          <p:cNvSpPr/>
-          <p:nvPr/>
-        </p:nvSpPr>
-        <p:spPr>
-          <a:xfrm>
-            <a:off x="365760" y="4096512"/>
-            <a:ext cx="1371600" cy="804672"/>
+              <a:t>p</a:t>
+            </a:r>
+            <a:endParaRPr lang="en-US" sz="900" dirty="0"/>
+          </a:p>
+        </p:txBody>
+      </p:sp>
+      <p:sp>
+        <p:nvSpPr>
+          <p:cNvPr id="38" name="Shape 36"/>
+          <p:cNvSpPr/>
+          <p:nvPr/>
+        </p:nvSpPr>
+        <p:spPr>
+          <a:xfrm>
+            <a:off x="3293146" y="4169664"/>
+            <a:ext cx="685800" cy="475488"/>
           </a:xfrm>
           <a:prstGeom prst="rect">
             <a:avLst>
-              <a:gd name="adj" fmla="val 6818"/>
+              <a:gd name="adj" fmla="val 7692"/>
             </a:avLst>
           </a:prstGeom>
           <a:solidFill>
-            <a:srgbClr val="E2E8F0"/>
-          </a:solidFill>
-          <a:ln w="12700">
-            <a:solidFill>
-              <a:srgbClr val="E2E8F0"/>
-            </a:solidFill>
-            <a:prstDash val="solid"/>
-          </a:ln>
-        </p:spPr>
-      </p:sp>
-      <p:sp>
-        <p:nvSpPr>
-          <p:cNvPr id="37" name="Text 35"/>
-          <p:cNvSpPr/>
-          <p:nvPr/>
-        </p:nvSpPr>
-        <p:spPr>
-          <a:xfrm>
-            <a:off x="365760" y="4096512"/>
-            <a:ext cx="1371600" cy="804672"/>
-          </a:xfrm>
-          <a:prstGeom prst="rect">
-            <a:avLst/>
-          </a:prstGeom>
-          <a:noFill/>
-          <a:ln/>
-        </p:spPr>
-        <p:txBody>
-          <a:bodyPr wrap="square" lIns="0" tIns="0" rIns="0" bIns="0" rtlCol="0" anchor="ctr"/>
-          <a:lstStyle/>
-          <a:p>
-            <a:pPr algn="ctr" indent="0" marL="0">
-              <a:buNone/>
-            </a:pPr>
-            <a:r>
-              <a:rPr lang="en-US" sz="1100" b="1" dirty="0">
-                <a:solidFill>
-                  <a:srgbClr val="475569"/>
+            <a:srgbClr val="FFFFFF"/>
+          </a:solidFill>
+          <a:ln w="12700">
+            <a:solidFill>
+              <a:srgbClr val="DB2777"/>
+            </a:solidFill>
+            <a:prstDash val="solid"/>
+          </a:ln>
+        </p:spPr>
+      </p:sp>
+      <p:sp>
+        <p:nvSpPr>
+          <p:cNvPr id="39" name="Text 37"/>
+          <p:cNvSpPr/>
+          <p:nvPr/>
+        </p:nvSpPr>
+        <p:spPr>
+          <a:xfrm>
+            <a:off x="3293146" y="4169664"/>
+            <a:ext cx="685800" cy="475488"/>
+          </a:xfrm>
+          <a:prstGeom prst="rect">
+            <a:avLst/>
+          </a:prstGeom>
+          <a:noFill/>
+          <a:ln/>
+        </p:spPr>
+        <p:txBody>
+          <a:bodyPr wrap="square" lIns="0" tIns="0" rIns="0" bIns="0" rtlCol="0" anchor="ctr"/>
+          <a:lstStyle/>
+          <a:p>
+            <a:pPr algn="ctr" indent="0" marL="0">
+              <a:buNone/>
+            </a:pPr>
+            <a:r>
+              <a:rPr lang="en-US" sz="900" b="1" dirty="0">
+                <a:solidFill>
+                  <a:srgbClr val="9D174D"/>
                 </a:solidFill>
                 <a:latin typeface="Trebuchet MS" pitchFamily="34" charset="0"/>
                 <a:ea typeface="Trebuchet MS" pitchFamily="34" charset="-122"/>
                 <a:cs typeface="Trebuchet MS" pitchFamily="34" charset="-120"/>
               </a:rPr>
-              <a:t>Phonemes</a:t>
-            </a:r>
-            <a:endParaRPr lang="en-US" sz="1100" dirty="0"/>
-          </a:p>
-        </p:txBody>
-      </p:sp>
-      <p:sp>
-        <p:nvSpPr>
-          <p:cNvPr id="38" name="Shape 36"/>
-          <p:cNvSpPr/>
-          <p:nvPr/>
-        </p:nvSpPr>
-        <p:spPr>
-          <a:xfrm>
-            <a:off x="1874520" y="4096512"/>
-            <a:ext cx="6903720" cy="658368"/>
-          </a:xfrm>
-          <a:prstGeom prst="rect">
-            <a:avLst>
-              <a:gd name="adj" fmla="val 8333"/>
-            </a:avLst>
-          </a:prstGeom>
-          <a:solidFill>
-            <a:srgbClr val="FCE7F3"/>
-          </a:solidFill>
-          <a:ln w="12700">
-            <a:solidFill>
-              <a:srgbClr val="DB2777"/>
-            </a:solidFill>
-            <a:prstDash val="solid"/>
-          </a:ln>
-        </p:spPr>
-      </p:sp>
-      <p:sp>
-        <p:nvSpPr>
-          <p:cNvPr id="39" name="Shape 37"/>
-          <p:cNvSpPr/>
-          <p:nvPr/>
-        </p:nvSpPr>
-        <p:spPr>
-          <a:xfrm>
-            <a:off x="2124837" y="4169664"/>
+              <a:t>ow</a:t>
+            </a:r>
+            <a:endParaRPr lang="en-US" sz="900" dirty="0"/>
+          </a:p>
+        </p:txBody>
+      </p:sp>
+      <p:sp>
+        <p:nvSpPr>
+          <p:cNvPr id="40" name="Shape 38"/>
+          <p:cNvSpPr/>
+          <p:nvPr/>
+        </p:nvSpPr>
+        <p:spPr>
+          <a:xfrm>
+            <a:off x="4331643" y="4169664"/>
             <a:ext cx="685800" cy="475488"/>
           </a:xfrm>
           <a:prstGeom prst="rect">
@@ -22858,13 +22780,13 @@
       </p:sp>
       <p:sp>
         <p:nvSpPr>
-          <p:cNvPr id="40" name="Text 38"/>
-          <p:cNvSpPr/>
-          <p:nvPr/>
-        </p:nvSpPr>
-        <p:spPr>
-          <a:xfrm>
-            <a:off x="2124837" y="4169664"/>
+          <p:cNvPr id="41" name="Text 39"/>
+          <p:cNvSpPr/>
+          <p:nvPr/>
+        </p:nvSpPr>
+        <p:spPr>
+          <a:xfrm>
+            <a:off x="4331643" y="4169664"/>
             <a:ext cx="685800" cy="475488"/>
           </a:xfrm>
           <a:prstGeom prst="rect">
@@ -22889,7 +22811,7 @@
                 <a:ea typeface="Trebuchet MS" pitchFamily="34" charset="-122"/>
                 <a:cs typeface="Trebuchet MS" pitchFamily="34" charset="-120"/>
               </a:rPr>
-              <a:t>s</a:t>
+              <a:t>er</a:t>
             </a:r>
             <a:endParaRPr lang="en-US" sz="900" dirty="0"/>
           </a:p>
@@ -22897,13 +22819,13 @@
       </p:sp>
       <p:sp>
         <p:nvSpPr>
-          <p:cNvPr id="41" name="Shape 39"/>
-          <p:cNvSpPr/>
-          <p:nvPr/>
-        </p:nvSpPr>
-        <p:spPr>
-          <a:xfrm>
-            <a:off x="3033522" y="4169664"/>
+          <p:cNvPr id="42" name="Shape 40"/>
+          <p:cNvSpPr/>
+          <p:nvPr/>
+        </p:nvSpPr>
+        <p:spPr>
+          <a:xfrm>
+            <a:off x="5370141" y="4169664"/>
             <a:ext cx="685800" cy="475488"/>
           </a:xfrm>
           <a:prstGeom prst="rect">
@@ -22924,13 +22846,13 @@
       </p:sp>
       <p:sp>
         <p:nvSpPr>
-          <p:cNvPr id="42" name="Text 40"/>
-          <p:cNvSpPr/>
-          <p:nvPr/>
-        </p:nvSpPr>
-        <p:spPr>
-          <a:xfrm>
-            <a:off x="3033522" y="4169664"/>
+          <p:cNvPr id="43" name="Text 41"/>
+          <p:cNvSpPr/>
+          <p:nvPr/>
+        </p:nvSpPr>
+        <p:spPr>
+          <a:xfrm>
+            <a:off x="5370141" y="4169664"/>
             <a:ext cx="685800" cy="475488"/>
           </a:xfrm>
           <a:prstGeom prst="rect">
@@ -22955,7 +22877,7 @@
                 <a:ea typeface="Trebuchet MS" pitchFamily="34" charset="-122"/>
                 <a:cs typeface="Trebuchet MS" pitchFamily="34" charset="-120"/>
               </a:rPr>
-              <a:t>u</a:t>
+              <a:t>f</a:t>
             </a:r>
             <a:endParaRPr lang="en-US" sz="900" dirty="0"/>
           </a:p>
@@ -22963,13 +22885,13 @@
       </p:sp>
       <p:sp>
         <p:nvSpPr>
-          <p:cNvPr id="43" name="Shape 41"/>
-          <p:cNvSpPr/>
-          <p:nvPr/>
-        </p:nvSpPr>
-        <p:spPr>
-          <a:xfrm>
-            <a:off x="3942207" y="4169664"/>
+          <p:cNvPr id="44" name="Shape 42"/>
+          <p:cNvSpPr/>
+          <p:nvPr/>
+        </p:nvSpPr>
+        <p:spPr>
+          <a:xfrm>
+            <a:off x="6408638" y="4169664"/>
             <a:ext cx="685800" cy="475488"/>
           </a:xfrm>
           <a:prstGeom prst="rect">
@@ -22990,13 +22912,13 @@
       </p:sp>
       <p:sp>
         <p:nvSpPr>
-          <p:cNvPr id="44" name="Text 42"/>
-          <p:cNvSpPr/>
-          <p:nvPr/>
-        </p:nvSpPr>
-        <p:spPr>
-          <a:xfrm>
-            <a:off x="3942207" y="4169664"/>
+          <p:cNvPr id="45" name="Text 43"/>
+          <p:cNvSpPr/>
+          <p:nvPr/>
+        </p:nvSpPr>
+        <p:spPr>
+          <a:xfrm>
+            <a:off x="6408638" y="4169664"/>
             <a:ext cx="685800" cy="475488"/>
           </a:xfrm>
           <a:prstGeom prst="rect">
@@ -23021,7 +22943,7 @@
                 <a:ea typeface="Trebuchet MS" pitchFamily="34" charset="-122"/>
                 <a:cs typeface="Trebuchet MS" pitchFamily="34" charset="-120"/>
               </a:rPr>
-              <a:t>p</a:t>
+              <a:t>u</a:t>
             </a:r>
             <a:endParaRPr lang="en-US" sz="900" dirty="0"/>
           </a:p>
@@ -23029,13 +22951,13 @@
       </p:sp>
       <p:sp>
         <p:nvSpPr>
-          <p:cNvPr id="45" name="Shape 43"/>
-          <p:cNvSpPr/>
-          <p:nvPr/>
-        </p:nvSpPr>
-        <p:spPr>
-          <a:xfrm>
-            <a:off x="4850892" y="4169664"/>
+          <p:cNvPr id="46" name="Shape 44"/>
+          <p:cNvSpPr/>
+          <p:nvPr/>
+        </p:nvSpPr>
+        <p:spPr>
+          <a:xfrm>
+            <a:off x="7447135" y="4169664"/>
             <a:ext cx="685800" cy="475488"/>
           </a:xfrm>
           <a:prstGeom prst="rect">
@@ -23056,13 +22978,13 @@
       </p:sp>
       <p:sp>
         <p:nvSpPr>
-          <p:cNvPr id="46" name="Text 44"/>
-          <p:cNvSpPr/>
-          <p:nvPr/>
-        </p:nvSpPr>
-        <p:spPr>
-          <a:xfrm>
-            <a:off x="4850892" y="4169664"/>
+          <p:cNvPr id="47" name="Text 45"/>
+          <p:cNvSpPr/>
+          <p:nvPr/>
+        </p:nvSpPr>
+        <p:spPr>
+          <a:xfrm>
+            <a:off x="7447135" y="4169664"/>
             <a:ext cx="685800" cy="475488"/>
           </a:xfrm>
           <a:prstGeom prst="rect">
@@ -23087,205 +23009,7 @@
                 <a:ea typeface="Trebuchet MS" pitchFamily="34" charset="-122"/>
                 <a:cs typeface="Trebuchet MS" pitchFamily="34" charset="-120"/>
               </a:rPr>
-              <a:t>er</a:t>
-            </a:r>
-            <a:endParaRPr lang="en-US" sz="900" dirty="0"/>
-          </a:p>
-        </p:txBody>
-      </p:sp>
-      <p:sp>
-        <p:nvSpPr>
-          <p:cNvPr id="47" name="Shape 45"/>
-          <p:cNvSpPr/>
-          <p:nvPr/>
-        </p:nvSpPr>
-        <p:spPr>
-          <a:xfrm>
-            <a:off x="5759577" y="4169664"/>
-            <a:ext cx="685800" cy="475488"/>
-          </a:xfrm>
-          <a:prstGeom prst="rect">
-            <a:avLst>
-              <a:gd name="adj" fmla="val 7692"/>
-            </a:avLst>
-          </a:prstGeom>
-          <a:solidFill>
-            <a:srgbClr val="FFFFFF"/>
-          </a:solidFill>
-          <a:ln w="12700">
-            <a:solidFill>
-              <a:srgbClr val="DB2777"/>
-            </a:solidFill>
-            <a:prstDash val="solid"/>
-          </a:ln>
-        </p:spPr>
-      </p:sp>
-      <p:sp>
-        <p:nvSpPr>
-          <p:cNvPr id="48" name="Text 46"/>
-          <p:cNvSpPr/>
-          <p:nvPr/>
-        </p:nvSpPr>
-        <p:spPr>
-          <a:xfrm>
-            <a:off x="5759577" y="4169664"/>
-            <a:ext cx="685800" cy="475488"/>
-          </a:xfrm>
-          <a:prstGeom prst="rect">
-            <a:avLst/>
-          </a:prstGeom>
-          <a:noFill/>
-          <a:ln/>
-        </p:spPr>
-        <p:txBody>
-          <a:bodyPr wrap="square" lIns="0" tIns="0" rIns="0" bIns="0" rtlCol="0" anchor="ctr"/>
-          <a:lstStyle/>
-          <a:p>
-            <a:pPr algn="ctr" indent="0" marL="0">
-              <a:buNone/>
-            </a:pPr>
-            <a:r>
-              <a:rPr lang="en-US" sz="900" b="1" dirty="0">
-                <a:solidFill>
-                  <a:srgbClr val="9D174D"/>
-                </a:solidFill>
-                <a:latin typeface="Trebuchet MS" pitchFamily="34" charset="0"/>
-                <a:ea typeface="Trebuchet MS" pitchFamily="34" charset="-122"/>
-                <a:cs typeface="Trebuchet MS" pitchFamily="34" charset="-120"/>
-              </a:rPr>
-              <a:t>p</a:t>
-            </a:r>
-            <a:endParaRPr lang="en-US" sz="900" dirty="0"/>
-          </a:p>
-        </p:txBody>
-      </p:sp>
-      <p:sp>
-        <p:nvSpPr>
-          <p:cNvPr id="49" name="Shape 47"/>
-          <p:cNvSpPr/>
-          <p:nvPr/>
-        </p:nvSpPr>
-        <p:spPr>
-          <a:xfrm>
-            <a:off x="6668262" y="4169664"/>
-            <a:ext cx="685800" cy="475488"/>
-          </a:xfrm>
-          <a:prstGeom prst="rect">
-            <a:avLst>
-              <a:gd name="adj" fmla="val 7692"/>
-            </a:avLst>
-          </a:prstGeom>
-          <a:solidFill>
-            <a:srgbClr val="FFFFFF"/>
-          </a:solidFill>
-          <a:ln w="12700">
-            <a:solidFill>
-              <a:srgbClr val="DB2777"/>
-            </a:solidFill>
-            <a:prstDash val="solid"/>
-          </a:ln>
-        </p:spPr>
-      </p:sp>
-      <p:sp>
-        <p:nvSpPr>
-          <p:cNvPr id="50" name="Text 48"/>
-          <p:cNvSpPr/>
-          <p:nvPr/>
-        </p:nvSpPr>
-        <p:spPr>
-          <a:xfrm>
-            <a:off x="6668262" y="4169664"/>
-            <a:ext cx="685800" cy="475488"/>
-          </a:xfrm>
-          <a:prstGeom prst="rect">
-            <a:avLst/>
-          </a:prstGeom>
-          <a:noFill/>
-          <a:ln/>
-        </p:spPr>
-        <p:txBody>
-          <a:bodyPr wrap="square" lIns="0" tIns="0" rIns="0" bIns="0" rtlCol="0" anchor="ctr"/>
-          <a:lstStyle/>
-          <a:p>
-            <a:pPr algn="ctr" indent="0" marL="0">
-              <a:buNone/>
-            </a:pPr>
-            <a:r>
-              <a:rPr lang="en-US" sz="900" b="1" dirty="0">
-                <a:solidFill>
-                  <a:srgbClr val="9D174D"/>
-                </a:solidFill>
-                <a:latin typeface="Trebuchet MS" pitchFamily="34" charset="0"/>
-                <a:ea typeface="Trebuchet MS" pitchFamily="34" charset="-122"/>
-                <a:cs typeface="Trebuchet MS" pitchFamily="34" charset="-120"/>
-              </a:rPr>
-              <a:t>ow</a:t>
-            </a:r>
-            <a:endParaRPr lang="en-US" sz="900" dirty="0"/>
-          </a:p>
-        </p:txBody>
-      </p:sp>
-      <p:sp>
-        <p:nvSpPr>
-          <p:cNvPr id="51" name="Shape 49"/>
-          <p:cNvSpPr/>
-          <p:nvPr/>
-        </p:nvSpPr>
-        <p:spPr>
-          <a:xfrm>
-            <a:off x="7576947" y="4169664"/>
-            <a:ext cx="685800" cy="475488"/>
-          </a:xfrm>
-          <a:prstGeom prst="rect">
-            <a:avLst>
-              <a:gd name="adj" fmla="val 7692"/>
-            </a:avLst>
-          </a:prstGeom>
-          <a:solidFill>
-            <a:srgbClr val="FFFFFF"/>
-          </a:solidFill>
-          <a:ln w="12700">
-            <a:solidFill>
-              <a:srgbClr val="DB2777"/>
-            </a:solidFill>
-            <a:prstDash val="solid"/>
-          </a:ln>
-        </p:spPr>
-      </p:sp>
-      <p:sp>
-        <p:nvSpPr>
-          <p:cNvPr id="52" name="Text 50"/>
-          <p:cNvSpPr/>
-          <p:nvPr/>
-        </p:nvSpPr>
-        <p:spPr>
-          <a:xfrm>
-            <a:off x="7576947" y="4169664"/>
-            <a:ext cx="685800" cy="475488"/>
-          </a:xfrm>
-          <a:prstGeom prst="rect">
-            <a:avLst/>
-          </a:prstGeom>
-          <a:noFill/>
-          <a:ln/>
-        </p:spPr>
-        <p:txBody>
-          <a:bodyPr wrap="square" lIns="0" tIns="0" rIns="0" bIns="0" rtlCol="0" anchor="ctr"/>
-          <a:lstStyle/>
-          <a:p>
-            <a:pPr algn="ctr" indent="0" marL="0">
-              <a:buNone/>
-            </a:pPr>
-            <a:r>
-              <a:rPr lang="en-US" sz="900" b="1" dirty="0">
-                <a:solidFill>
-                  <a:srgbClr val="9D174D"/>
-                </a:solidFill>
-                <a:latin typeface="Trebuchet MS" pitchFamily="34" charset="0"/>
-                <a:ea typeface="Trebuchet MS" pitchFamily="34" charset="-122"/>
-                <a:cs typeface="Trebuchet MS" pitchFamily="34" charset="-120"/>
-              </a:rPr>
-              <a:t>er</a:t>
+              <a:t>l</a:t>
             </a:r>
             <a:endParaRPr lang="en-US" sz="900" dirty="0"/>
           </a:p>
@@ -23716,7 +23440,7 @@
                 <a:ea typeface="Trebuchet MS" pitchFamily="34" charset="-122"/>
                 <a:cs typeface="Trebuchet MS" pitchFamily="34" charset="-120"/>
               </a:rPr>
-              <a:t>powerhouse</a:t>
+              <a:t>superpower</a:t>
             </a:r>
             <a:endParaRPr lang="en-US" sz="2800" dirty="0"/>
           </a:p>
@@ -24543,7 +24267,7 @@
                 <a:ea typeface="Trebuchet MS" pitchFamily="34" charset="-122"/>
                 <a:cs typeface="Trebuchet MS" pitchFamily="34" charset="-120"/>
               </a:rPr>
-              <a:t>powerhouse</a:t>
+              <a:t>superpower</a:t>
             </a:r>
             <a:endParaRPr lang="en-US" sz="2800" dirty="0"/>
           </a:p>
@@ -24632,11 +24356,11 @@
             </a:avLst>
           </a:prstGeom>
           <a:solidFill>
-            <a:srgbClr val="CCFBF1"/>
+            <a:srgbClr val="DDD6FE"/>
           </a:solidFill>
           <a:ln w="19050">
             <a:solidFill>
-              <a:srgbClr val="0D9488"/>
+              <a:srgbClr val="7C3AED"/>
             </a:solidFill>
             <a:prstDash val="solid"/>
           </a:ln>
@@ -24676,13 +24400,13 @@
             <a:r>
               <a:rPr lang="en-US" sz="1300" b="1" dirty="0">
                 <a:solidFill>
-                  <a:srgbClr val="0F766E"/>
+                  <a:srgbClr val="4C1D95"/>
                 </a:solidFill>
                 <a:latin typeface="Trebuchet MS" pitchFamily="34" charset="0"/>
                 <a:ea typeface="Trebuchet MS" pitchFamily="34" charset="-122"/>
                 <a:cs typeface="Trebuchet MS" pitchFamily="34" charset="-120"/>
               </a:rPr>
-              <a:t>power</a:t>
+              <a:t>super</a:t>
             </a:r>
             <a:endParaRPr lang="en-US" sz="1300" dirty="0"/>
           </a:p>
@@ -24721,7 +24445,7 @@
                 <a:ea typeface="Calibri" pitchFamily="34" charset="-122"/>
                 <a:cs typeface="Calibri" pitchFamily="34" charset="-120"/>
               </a:rPr>
-              <a:t>strength, force</a:t>
+              <a:t>above, beyond</a:t>
             </a:r>
             <a:endParaRPr lang="en-US" sz="850" dirty="0"/>
           </a:p>
@@ -24744,11 +24468,11 @@
             </a:avLst>
           </a:prstGeom>
           <a:solidFill>
-            <a:srgbClr val="FCE7F3"/>
+            <a:srgbClr val="CCFBF1"/>
           </a:solidFill>
           <a:ln w="19050">
             <a:solidFill>
-              <a:srgbClr val="DB2777"/>
+              <a:srgbClr val="0D9488"/>
             </a:solidFill>
             <a:prstDash val="solid"/>
           </a:ln>
@@ -24788,13 +24512,13 @@
             <a:r>
               <a:rPr lang="en-US" sz="1300" b="1" dirty="0">
                 <a:solidFill>
-                  <a:srgbClr val="9D174D"/>
+                  <a:srgbClr val="0F766E"/>
                 </a:solidFill>
                 <a:latin typeface="Trebuchet MS" pitchFamily="34" charset="0"/>
                 <a:ea typeface="Trebuchet MS" pitchFamily="34" charset="-122"/>
                 <a:cs typeface="Trebuchet MS" pitchFamily="34" charset="-120"/>
               </a:rPr>
-              <a:t>house</a:t>
+              <a:t>power</a:t>
             </a:r>
             <a:endParaRPr lang="en-US" sz="1300" dirty="0"/>
           </a:p>
@@ -24833,7 +24557,7 @@
                 <a:ea typeface="Calibri" pitchFamily="34" charset="-122"/>
                 <a:cs typeface="Calibri" pitchFamily="34" charset="-120"/>
               </a:rPr>
-              <a:t>place or container</a:t>
+              <a:t>strength, force</a:t>
             </a:r>
             <a:endParaRPr lang="en-US" sz="850" dirty="0"/>
           </a:p>
@@ -26247,7 +25971,7 @@
                 <a:ea typeface="Trebuchet MS" pitchFamily="34" charset="-122"/>
                 <a:cs typeface="Trebuchet MS" pitchFamily="34" charset="-120"/>
               </a:rPr>
-              <a:t>powerhouse</a:t>
+              <a:t>superpower</a:t>
             </a:r>
             <a:endParaRPr lang="en-US" sz="2800" dirty="0"/>
           </a:p>
@@ -26336,11 +26060,11 @@
             </a:avLst>
           </a:prstGeom>
           <a:solidFill>
-            <a:srgbClr val="CCFBF1"/>
+            <a:srgbClr val="DDD6FE"/>
           </a:solidFill>
           <a:ln w="19050">
             <a:solidFill>
-              <a:srgbClr val="0D9488"/>
+              <a:srgbClr val="7C3AED"/>
             </a:solidFill>
             <a:prstDash val="solid"/>
           </a:ln>
@@ -26380,13 +26104,13 @@
             <a:r>
               <a:rPr lang="en-US" sz="1300" b="1" dirty="0">
                 <a:solidFill>
-                  <a:srgbClr val="0F766E"/>
+                  <a:srgbClr val="4C1D95"/>
                 </a:solidFill>
                 <a:latin typeface="Trebuchet MS" pitchFamily="34" charset="0"/>
                 <a:ea typeface="Trebuchet MS" pitchFamily="34" charset="-122"/>
                 <a:cs typeface="Trebuchet MS" pitchFamily="34" charset="-120"/>
               </a:rPr>
-              <a:t>power</a:t>
+              <a:t>super</a:t>
             </a:r>
             <a:endParaRPr lang="en-US" sz="1300" dirty="0"/>
           </a:p>
@@ -26425,7 +26149,7 @@
                 <a:ea typeface="Calibri" pitchFamily="34" charset="-122"/>
                 <a:cs typeface="Calibri" pitchFamily="34" charset="-120"/>
               </a:rPr>
-              <a:t>strength, force</a:t>
+              <a:t>above, beyond</a:t>
             </a:r>
             <a:endParaRPr lang="en-US" sz="850" dirty="0"/>
           </a:p>
@@ -26448,11 +26172,11 @@
             </a:avLst>
           </a:prstGeom>
           <a:solidFill>
-            <a:srgbClr val="FCE7F3"/>
+            <a:srgbClr val="CCFBF1"/>
           </a:solidFill>
           <a:ln w="19050">
             <a:solidFill>
-              <a:srgbClr val="DB2777"/>
+              <a:srgbClr val="0D9488"/>
             </a:solidFill>
             <a:prstDash val="solid"/>
           </a:ln>
@@ -26492,13 +26216,13 @@
             <a:r>
               <a:rPr lang="en-US" sz="1300" b="1" dirty="0">
                 <a:solidFill>
-                  <a:srgbClr val="9D174D"/>
+                  <a:srgbClr val="0F766E"/>
                 </a:solidFill>
                 <a:latin typeface="Trebuchet MS" pitchFamily="34" charset="0"/>
                 <a:ea typeface="Trebuchet MS" pitchFamily="34" charset="-122"/>
                 <a:cs typeface="Trebuchet MS" pitchFamily="34" charset="-120"/>
               </a:rPr>
-              <a:t>house</a:t>
+              <a:t>power</a:t>
             </a:r>
             <a:endParaRPr lang="en-US" sz="1300" dirty="0"/>
           </a:p>
@@ -26537,7 +26261,7 @@
                 <a:ea typeface="Calibri" pitchFamily="34" charset="-122"/>
                 <a:cs typeface="Calibri" pitchFamily="34" charset="-120"/>
               </a:rPr>
-              <a:t>place or container</a:t>
+              <a:t>strength, force</a:t>
             </a:r>
             <a:endParaRPr lang="en-US" sz="850" dirty="0"/>
           </a:p>
@@ -26644,8 +26368,8 @@
         </p:nvSpPr>
         <p:spPr>
           <a:xfrm>
-            <a:off x="2313432" y="3364992"/>
-            <a:ext cx="1645920" cy="475488"/>
+            <a:off x="1975104" y="3364992"/>
+            <a:ext cx="1554480" cy="475488"/>
           </a:xfrm>
           <a:prstGeom prst="rect">
             <a:avLst>
@@ -26671,8 +26395,8 @@
         </p:nvSpPr>
         <p:spPr>
           <a:xfrm>
-            <a:off x="2313432" y="3364992"/>
-            <a:ext cx="1645920" cy="475488"/>
+            <a:off x="1975104" y="3364992"/>
+            <a:ext cx="1554480" cy="475488"/>
           </a:xfrm>
           <a:prstGeom prst="rect">
             <a:avLst/>
@@ -26696,7 +26420,7 @@
                 <a:ea typeface="Trebuchet MS" pitchFamily="34" charset="-122"/>
                 <a:cs typeface="Trebuchet MS" pitchFamily="34" charset="-120"/>
               </a:rPr>
-              <a:t>pow</a:t>
+              <a:t>su</a:t>
             </a:r>
             <a:endParaRPr lang="en-US" sz="1400" dirty="0"/>
           </a:p>
@@ -26710,8 +26434,8 @@
         </p:nvSpPr>
         <p:spPr>
           <a:xfrm>
-            <a:off x="3959352" y="3364992"/>
-            <a:ext cx="411480" cy="475488"/>
+            <a:off x="3529584" y="3364992"/>
+            <a:ext cx="73152" cy="475488"/>
           </a:xfrm>
           <a:prstGeom prst="rect">
             <a:avLst/>
@@ -26749,8 +26473,8 @@
         </p:nvSpPr>
         <p:spPr>
           <a:xfrm>
-            <a:off x="4370832" y="3364992"/>
-            <a:ext cx="1645920" cy="475488"/>
+            <a:off x="3602736" y="3364992"/>
+            <a:ext cx="1554480" cy="475488"/>
           </a:xfrm>
           <a:prstGeom prst="rect">
             <a:avLst>
@@ -26776,8 +26500,8 @@
         </p:nvSpPr>
         <p:spPr>
           <a:xfrm>
-            <a:off x="4370832" y="3364992"/>
-            <a:ext cx="1645920" cy="475488"/>
+            <a:off x="3602736" y="3364992"/>
+            <a:ext cx="1554480" cy="475488"/>
           </a:xfrm>
           <a:prstGeom prst="rect">
             <a:avLst/>
@@ -26801,7 +26525,7 @@
                 <a:ea typeface="Trebuchet MS" pitchFamily="34" charset="-122"/>
                 <a:cs typeface="Trebuchet MS" pitchFamily="34" charset="-120"/>
               </a:rPr>
-              <a:t>er</a:t>
+              <a:t>per</a:t>
             </a:r>
             <a:endParaRPr lang="en-US" sz="1400" dirty="0"/>
           </a:p>
@@ -26815,8 +26539,8 @@
         </p:nvSpPr>
         <p:spPr>
           <a:xfrm>
-            <a:off x="6016752" y="3364992"/>
-            <a:ext cx="411480" cy="475488"/>
+            <a:off x="5157216" y="3364992"/>
+            <a:ext cx="73152" cy="475488"/>
           </a:xfrm>
           <a:prstGeom prst="rect">
             <a:avLst/>
@@ -26854,8 +26578,8 @@
         </p:nvSpPr>
         <p:spPr>
           <a:xfrm>
-            <a:off x="6428232" y="3364992"/>
-            <a:ext cx="1645920" cy="475488"/>
+            <a:off x="5230368" y="3364992"/>
+            <a:ext cx="1554480" cy="475488"/>
           </a:xfrm>
           <a:prstGeom prst="rect">
             <a:avLst>
@@ -26881,8 +26605,8 @@
         </p:nvSpPr>
         <p:spPr>
           <a:xfrm>
-            <a:off x="6428232" y="3364992"/>
-            <a:ext cx="1645920" cy="475488"/>
+            <a:off x="5230368" y="3364992"/>
+            <a:ext cx="1554480" cy="475488"/>
           </a:xfrm>
           <a:prstGeom prst="rect">
             <a:avLst/>
@@ -26906,7 +26630,7 @@
                 <a:ea typeface="Trebuchet MS" pitchFamily="34" charset="-122"/>
                 <a:cs typeface="Trebuchet MS" pitchFamily="34" charset="-120"/>
               </a:rPr>
-              <a:t>house</a:t>
+              <a:t>pow</a:t>
             </a:r>
             <a:endParaRPr lang="en-US" sz="1400" dirty="0"/>
           </a:p>
@@ -26914,7 +26638,112 @@
       </p:sp>
       <p:sp>
         <p:nvSpPr>
-          <p:cNvPr id="33" name="Shape 31"/>
+          <p:cNvPr id="33" name="Text 31"/>
+          <p:cNvSpPr/>
+          <p:nvPr/>
+        </p:nvSpPr>
+        <p:spPr>
+          <a:xfrm>
+            <a:off x="6784848" y="3364992"/>
+            <a:ext cx="73152" cy="475488"/>
+          </a:xfrm>
+          <a:prstGeom prst="rect">
+            <a:avLst/>
+          </a:prstGeom>
+          <a:noFill/>
+          <a:ln/>
+        </p:spPr>
+        <p:txBody>
+          <a:bodyPr wrap="square" lIns="0" tIns="0" rIns="0" bIns="0" rtlCol="0" anchor="ctr"/>
+          <a:lstStyle/>
+          <a:p>
+            <a:pPr algn="ctr" indent="0" marL="0">
+              <a:buNone/>
+            </a:pPr>
+            <a:r>
+              <a:rPr lang="en-US" sz="1600" b="1" dirty="0">
+                <a:solidFill>
+                  <a:srgbClr val="0D9488"/>
+                </a:solidFill>
+                <a:latin typeface="Trebuchet MS" pitchFamily="34" charset="0"/>
+                <a:ea typeface="Trebuchet MS" pitchFamily="34" charset="-122"/>
+                <a:cs typeface="Trebuchet MS" pitchFamily="34" charset="-120"/>
+              </a:rPr>
+              <a:t>·</a:t>
+            </a:r>
+            <a:endParaRPr lang="en-US" sz="1600" dirty="0"/>
+          </a:p>
+        </p:txBody>
+      </p:sp>
+      <p:sp>
+        <p:nvSpPr>
+          <p:cNvPr id="34" name="Shape 32"/>
+          <p:cNvSpPr/>
+          <p:nvPr/>
+        </p:nvSpPr>
+        <p:spPr>
+          <a:xfrm>
+            <a:off x="6858000" y="3364992"/>
+            <a:ext cx="1554480" cy="475488"/>
+          </a:xfrm>
+          <a:prstGeom prst="rect">
+            <a:avLst>
+              <a:gd name="adj" fmla="val 9615"/>
+            </a:avLst>
+          </a:prstGeom>
+          <a:solidFill>
+            <a:srgbClr val="FFFFFF"/>
+          </a:solidFill>
+          <a:ln w="12700">
+            <a:solidFill>
+              <a:srgbClr val="0D9488"/>
+            </a:solidFill>
+            <a:prstDash val="solid"/>
+          </a:ln>
+        </p:spPr>
+      </p:sp>
+      <p:sp>
+        <p:nvSpPr>
+          <p:cNvPr id="35" name="Text 33"/>
+          <p:cNvSpPr/>
+          <p:nvPr/>
+        </p:nvSpPr>
+        <p:spPr>
+          <a:xfrm>
+            <a:off x="6858000" y="3364992"/>
+            <a:ext cx="1554480" cy="475488"/>
+          </a:xfrm>
+          <a:prstGeom prst="rect">
+            <a:avLst/>
+          </a:prstGeom>
+          <a:noFill/>
+          <a:ln/>
+        </p:spPr>
+        <p:txBody>
+          <a:bodyPr wrap="square" lIns="0" tIns="0" rIns="0" bIns="0" rtlCol="0" anchor="ctr"/>
+          <a:lstStyle/>
+          <a:p>
+            <a:pPr algn="ctr" indent="0" marL="0">
+              <a:buNone/>
+            </a:pPr>
+            <a:r>
+              <a:rPr lang="en-US" sz="1400" b="1" dirty="0">
+                <a:solidFill>
+                  <a:srgbClr val="0D9488"/>
+                </a:solidFill>
+                <a:latin typeface="Trebuchet MS" pitchFamily="34" charset="0"/>
+                <a:ea typeface="Trebuchet MS" pitchFamily="34" charset="-122"/>
+                <a:cs typeface="Trebuchet MS" pitchFamily="34" charset="-120"/>
+              </a:rPr>
+              <a:t>er</a:t>
+            </a:r>
+            <a:endParaRPr lang="en-US" sz="1400" dirty="0"/>
+          </a:p>
+        </p:txBody>
+      </p:sp>
+      <p:sp>
+        <p:nvSpPr>
+          <p:cNvPr id="36" name="Shape 34"/>
           <p:cNvSpPr/>
           <p:nvPr/>
         </p:nvSpPr>
@@ -26941,7 +26770,7 @@
       </p:sp>
       <p:sp>
         <p:nvSpPr>
-          <p:cNvPr id="34" name="Text 32"/>
+          <p:cNvPr id="37" name="Text 35"/>
           <p:cNvSpPr/>
           <p:nvPr/>
         </p:nvSpPr>
@@ -26980,7 +26809,7 @@
       </p:sp>
       <p:sp>
         <p:nvSpPr>
-          <p:cNvPr id="35" name="Shape 33"/>
+          <p:cNvPr id="38" name="Shape 36"/>
           <p:cNvSpPr/>
           <p:nvPr/>
         </p:nvSpPr>
@@ -27007,7 +26836,7 @@
       </p:sp>
       <p:sp>
         <p:nvSpPr>
-          <p:cNvPr id="36" name="Text 34"/>
+          <p:cNvPr id="39" name="Text 37"/>
           <p:cNvSpPr/>
           <p:nvPr/>
         </p:nvSpPr>
@@ -27469,7 +27298,7 @@
                 <a:ea typeface="Trebuchet MS" pitchFamily="34" charset="-122"/>
                 <a:cs typeface="Trebuchet MS" pitchFamily="34" charset="-120"/>
               </a:rPr>
-              <a:t>powerhouse</a:t>
+              <a:t>superpower</a:t>
             </a:r>
             <a:endParaRPr lang="en-US" sz="2800" dirty="0"/>
           </a:p>
@@ -27558,11 +27387,11 @@
             </a:avLst>
           </a:prstGeom>
           <a:solidFill>
-            <a:srgbClr val="CCFBF1"/>
+            <a:srgbClr val="DDD6FE"/>
           </a:solidFill>
           <a:ln w="19050">
             <a:solidFill>
-              <a:srgbClr val="0D9488"/>
+              <a:srgbClr val="7C3AED"/>
             </a:solidFill>
             <a:prstDash val="solid"/>
           </a:ln>
@@ -27602,13 +27431,13 @@
             <a:r>
               <a:rPr lang="en-US" sz="1300" b="1" dirty="0">
                 <a:solidFill>
-                  <a:srgbClr val="0F766E"/>
+                  <a:srgbClr val="4C1D95"/>
                 </a:solidFill>
                 <a:latin typeface="Trebuchet MS" pitchFamily="34" charset="0"/>
                 <a:ea typeface="Trebuchet MS" pitchFamily="34" charset="-122"/>
                 <a:cs typeface="Trebuchet MS" pitchFamily="34" charset="-120"/>
               </a:rPr>
-              <a:t>power</a:t>
+              <a:t>super</a:t>
             </a:r>
             <a:endParaRPr lang="en-US" sz="1300" dirty="0"/>
           </a:p>
@@ -27647,7 +27476,7 @@
                 <a:ea typeface="Calibri" pitchFamily="34" charset="-122"/>
                 <a:cs typeface="Calibri" pitchFamily="34" charset="-120"/>
               </a:rPr>
-              <a:t>strength, force</a:t>
+              <a:t>above, beyond</a:t>
             </a:r>
             <a:endParaRPr lang="en-US" sz="850" dirty="0"/>
           </a:p>
@@ -27670,11 +27499,11 @@
             </a:avLst>
           </a:prstGeom>
           <a:solidFill>
-            <a:srgbClr val="FCE7F3"/>
+            <a:srgbClr val="CCFBF1"/>
           </a:solidFill>
           <a:ln w="19050">
             <a:solidFill>
-              <a:srgbClr val="DB2777"/>
+              <a:srgbClr val="0D9488"/>
             </a:solidFill>
             <a:prstDash val="solid"/>
           </a:ln>
@@ -27714,13 +27543,13 @@
             <a:r>
               <a:rPr lang="en-US" sz="1300" b="1" dirty="0">
                 <a:solidFill>
-                  <a:srgbClr val="9D174D"/>
+                  <a:srgbClr val="0F766E"/>
                 </a:solidFill>
                 <a:latin typeface="Trebuchet MS" pitchFamily="34" charset="0"/>
                 <a:ea typeface="Trebuchet MS" pitchFamily="34" charset="-122"/>
                 <a:cs typeface="Trebuchet MS" pitchFamily="34" charset="-120"/>
               </a:rPr>
-              <a:t>house</a:t>
+              <a:t>power</a:t>
             </a:r>
             <a:endParaRPr lang="en-US" sz="1300" dirty="0"/>
           </a:p>
@@ -27759,7 +27588,7 @@
                 <a:ea typeface="Calibri" pitchFamily="34" charset="-122"/>
                 <a:cs typeface="Calibri" pitchFamily="34" charset="-120"/>
               </a:rPr>
-              <a:t>place or container</a:t>
+              <a:t>strength, force</a:t>
             </a:r>
             <a:endParaRPr lang="en-US" sz="850" dirty="0"/>
           </a:p>
@@ -27866,8 +27695,8 @@
         </p:nvSpPr>
         <p:spPr>
           <a:xfrm>
-            <a:off x="2313432" y="3364992"/>
-            <a:ext cx="1645920" cy="475488"/>
+            <a:off x="1975104" y="3364992"/>
+            <a:ext cx="1554480" cy="475488"/>
           </a:xfrm>
           <a:prstGeom prst="rect">
             <a:avLst>
@@ -27893,8 +27722,8 @@
         </p:nvSpPr>
         <p:spPr>
           <a:xfrm>
-            <a:off x="2313432" y="3364992"/>
-            <a:ext cx="1645920" cy="475488"/>
+            <a:off x="1975104" y="3364992"/>
+            <a:ext cx="1554480" cy="475488"/>
           </a:xfrm>
           <a:prstGeom prst="rect">
             <a:avLst/>
@@ -27918,7 +27747,7 @@
                 <a:ea typeface="Trebuchet MS" pitchFamily="34" charset="-122"/>
                 <a:cs typeface="Trebuchet MS" pitchFamily="34" charset="-120"/>
               </a:rPr>
-              <a:t>pow</a:t>
+              <a:t>su</a:t>
             </a:r>
             <a:endParaRPr lang="en-US" sz="1400" dirty="0"/>
           </a:p>
@@ -27932,8 +27761,8 @@
         </p:nvSpPr>
         <p:spPr>
           <a:xfrm>
-            <a:off x="3959352" y="3364992"/>
-            <a:ext cx="411480" cy="475488"/>
+            <a:off x="3529584" y="3364992"/>
+            <a:ext cx="73152" cy="475488"/>
           </a:xfrm>
           <a:prstGeom prst="rect">
             <a:avLst/>
@@ -27971,8 +27800,8 @@
         </p:nvSpPr>
         <p:spPr>
           <a:xfrm>
-            <a:off x="4370832" y="3364992"/>
-            <a:ext cx="1645920" cy="475488"/>
+            <a:off x="3602736" y="3364992"/>
+            <a:ext cx="1554480" cy="475488"/>
           </a:xfrm>
           <a:prstGeom prst="rect">
             <a:avLst>
@@ -27998,8 +27827,8 @@
         </p:nvSpPr>
         <p:spPr>
           <a:xfrm>
-            <a:off x="4370832" y="3364992"/>
-            <a:ext cx="1645920" cy="475488"/>
+            <a:off x="3602736" y="3364992"/>
+            <a:ext cx="1554480" cy="475488"/>
           </a:xfrm>
           <a:prstGeom prst="rect">
             <a:avLst/>
@@ -28023,7 +27852,7 @@
                 <a:ea typeface="Trebuchet MS" pitchFamily="34" charset="-122"/>
                 <a:cs typeface="Trebuchet MS" pitchFamily="34" charset="-120"/>
               </a:rPr>
-              <a:t>er</a:t>
+              <a:t>per</a:t>
             </a:r>
             <a:endParaRPr lang="en-US" sz="1400" dirty="0"/>
           </a:p>
@@ -28037,8 +27866,8 @@
         </p:nvSpPr>
         <p:spPr>
           <a:xfrm>
-            <a:off x="6016752" y="3364992"/>
-            <a:ext cx="411480" cy="475488"/>
+            <a:off x="5157216" y="3364992"/>
+            <a:ext cx="73152" cy="475488"/>
           </a:xfrm>
           <a:prstGeom prst="rect">
             <a:avLst/>
@@ -28076,8 +27905,8 @@
         </p:nvSpPr>
         <p:spPr>
           <a:xfrm>
-            <a:off x="6428232" y="3364992"/>
-            <a:ext cx="1645920" cy="475488"/>
+            <a:off x="5230368" y="3364992"/>
+            <a:ext cx="1554480" cy="475488"/>
           </a:xfrm>
           <a:prstGeom prst="rect">
             <a:avLst>
@@ -28103,8 +27932,8 @@
         </p:nvSpPr>
         <p:spPr>
           <a:xfrm>
-            <a:off x="6428232" y="3364992"/>
-            <a:ext cx="1645920" cy="475488"/>
+            <a:off x="5230368" y="3364992"/>
+            <a:ext cx="1554480" cy="475488"/>
           </a:xfrm>
           <a:prstGeom prst="rect">
             <a:avLst/>
@@ -28128,7 +27957,7 @@
                 <a:ea typeface="Trebuchet MS" pitchFamily="34" charset="-122"/>
                 <a:cs typeface="Trebuchet MS" pitchFamily="34" charset="-120"/>
               </a:rPr>
-              <a:t>house</a:t>
+              <a:t>pow</a:t>
             </a:r>
             <a:endParaRPr lang="en-US" sz="1400" dirty="0"/>
           </a:p>
@@ -28136,7 +27965,112 @@
       </p:sp>
       <p:sp>
         <p:nvSpPr>
-          <p:cNvPr id="33" name="Shape 31"/>
+          <p:cNvPr id="33" name="Text 31"/>
+          <p:cNvSpPr/>
+          <p:nvPr/>
+        </p:nvSpPr>
+        <p:spPr>
+          <a:xfrm>
+            <a:off x="6784848" y="3364992"/>
+            <a:ext cx="73152" cy="475488"/>
+          </a:xfrm>
+          <a:prstGeom prst="rect">
+            <a:avLst/>
+          </a:prstGeom>
+          <a:noFill/>
+          <a:ln/>
+        </p:spPr>
+        <p:txBody>
+          <a:bodyPr wrap="square" lIns="0" tIns="0" rIns="0" bIns="0" rtlCol="0" anchor="ctr"/>
+          <a:lstStyle/>
+          <a:p>
+            <a:pPr algn="ctr" indent="0" marL="0">
+              <a:buNone/>
+            </a:pPr>
+            <a:r>
+              <a:rPr lang="en-US" sz="1600" b="1" dirty="0">
+                <a:solidFill>
+                  <a:srgbClr val="0D9488"/>
+                </a:solidFill>
+                <a:latin typeface="Trebuchet MS" pitchFamily="34" charset="0"/>
+                <a:ea typeface="Trebuchet MS" pitchFamily="34" charset="-122"/>
+                <a:cs typeface="Trebuchet MS" pitchFamily="34" charset="-120"/>
+              </a:rPr>
+              <a:t>·</a:t>
+            </a:r>
+            <a:endParaRPr lang="en-US" sz="1600" dirty="0"/>
+          </a:p>
+        </p:txBody>
+      </p:sp>
+      <p:sp>
+        <p:nvSpPr>
+          <p:cNvPr id="34" name="Shape 32"/>
+          <p:cNvSpPr/>
+          <p:nvPr/>
+        </p:nvSpPr>
+        <p:spPr>
+          <a:xfrm>
+            <a:off x="6858000" y="3364992"/>
+            <a:ext cx="1554480" cy="475488"/>
+          </a:xfrm>
+          <a:prstGeom prst="rect">
+            <a:avLst>
+              <a:gd name="adj" fmla="val 9615"/>
+            </a:avLst>
+          </a:prstGeom>
+          <a:solidFill>
+            <a:srgbClr val="FFFFFF"/>
+          </a:solidFill>
+          <a:ln w="12700">
+            <a:solidFill>
+              <a:srgbClr val="0D9488"/>
+            </a:solidFill>
+            <a:prstDash val="solid"/>
+          </a:ln>
+        </p:spPr>
+      </p:sp>
+      <p:sp>
+        <p:nvSpPr>
+          <p:cNvPr id="35" name="Text 33"/>
+          <p:cNvSpPr/>
+          <p:nvPr/>
+        </p:nvSpPr>
+        <p:spPr>
+          <a:xfrm>
+            <a:off x="6858000" y="3364992"/>
+            <a:ext cx="1554480" cy="475488"/>
+          </a:xfrm>
+          <a:prstGeom prst="rect">
+            <a:avLst/>
+          </a:prstGeom>
+          <a:noFill/>
+          <a:ln/>
+        </p:spPr>
+        <p:txBody>
+          <a:bodyPr wrap="square" lIns="0" tIns="0" rIns="0" bIns="0" rtlCol="0" anchor="ctr"/>
+          <a:lstStyle/>
+          <a:p>
+            <a:pPr algn="ctr" indent="0" marL="0">
+              <a:buNone/>
+            </a:pPr>
+            <a:r>
+              <a:rPr lang="en-US" sz="1400" b="1" dirty="0">
+                <a:solidFill>
+                  <a:srgbClr val="0D9488"/>
+                </a:solidFill>
+                <a:latin typeface="Trebuchet MS" pitchFamily="34" charset="0"/>
+                <a:ea typeface="Trebuchet MS" pitchFamily="34" charset="-122"/>
+                <a:cs typeface="Trebuchet MS" pitchFamily="34" charset="-120"/>
+              </a:rPr>
+              <a:t>er</a:t>
+            </a:r>
+            <a:endParaRPr lang="en-US" sz="1400" dirty="0"/>
+          </a:p>
+        </p:txBody>
+      </p:sp>
+      <p:sp>
+        <p:nvSpPr>
+          <p:cNvPr id="36" name="Shape 34"/>
           <p:cNvSpPr/>
           <p:nvPr/>
         </p:nvSpPr>
@@ -28163,7 +28097,7 @@
       </p:sp>
       <p:sp>
         <p:nvSpPr>
-          <p:cNvPr id="34" name="Text 32"/>
+          <p:cNvPr id="37" name="Text 35"/>
           <p:cNvSpPr/>
           <p:nvPr/>
         </p:nvSpPr>
@@ -28202,18 +28136,18 @@
       </p:sp>
       <p:sp>
         <p:nvSpPr>
-          <p:cNvPr id="35" name="Shape 33"/>
+          <p:cNvPr id="38" name="Shape 36"/>
           <p:cNvSpPr/>
           <p:nvPr/>
         </p:nvSpPr>
         <p:spPr>
           <a:xfrm>
             <a:off x="1874520" y="4096512"/>
-            <a:ext cx="6903720" cy="804672"/>
+            <a:ext cx="6903720" cy="658368"/>
           </a:xfrm>
           <a:prstGeom prst="rect">
             <a:avLst>
-              <a:gd name="adj" fmla="val 6818"/>
+              <a:gd name="adj" fmla="val 8333"/>
             </a:avLst>
           </a:prstGeom>
           <a:solidFill>
@@ -28229,18 +28163,18 @@
       </p:sp>
       <p:sp>
         <p:nvSpPr>
-          <p:cNvPr id="36" name="Shape 34"/>
-          <p:cNvSpPr/>
-          <p:nvPr/>
-        </p:nvSpPr>
-        <p:spPr>
-          <a:xfrm>
-            <a:off x="2254649" y="4169664"/>
-            <a:ext cx="685800" cy="384048"/>
+          <p:cNvPr id="39" name="Shape 37"/>
+          <p:cNvSpPr/>
+          <p:nvPr/>
+        </p:nvSpPr>
+        <p:spPr>
+          <a:xfrm>
+            <a:off x="2124837" y="4169664"/>
+            <a:ext cx="685800" cy="475488"/>
           </a:xfrm>
           <a:prstGeom prst="rect">
             <a:avLst>
-              <a:gd name="adj" fmla="val 9524"/>
+              <a:gd name="adj" fmla="val 7692"/>
             </a:avLst>
           </a:prstGeom>
           <a:solidFill>
@@ -28256,14 +28190,14 @@
       </p:sp>
       <p:sp>
         <p:nvSpPr>
-          <p:cNvPr id="37" name="Text 35"/>
-          <p:cNvSpPr/>
-          <p:nvPr/>
-        </p:nvSpPr>
-        <p:spPr>
-          <a:xfrm>
-            <a:off x="2254649" y="4169664"/>
-            <a:ext cx="685800" cy="384048"/>
+          <p:cNvPr id="40" name="Text 38"/>
+          <p:cNvSpPr/>
+          <p:nvPr/>
+        </p:nvSpPr>
+        <p:spPr>
+          <a:xfrm>
+            <a:off x="2124837" y="4169664"/>
+            <a:ext cx="685800" cy="475488"/>
           </a:xfrm>
           <a:prstGeom prst="rect">
             <a:avLst/>
@@ -28287,7 +28221,7 @@
                 <a:ea typeface="Trebuchet MS" pitchFamily="34" charset="-122"/>
                 <a:cs typeface="Trebuchet MS" pitchFamily="34" charset="-120"/>
               </a:rPr>
-              <a:t>p</a:t>
+              <a:t>s</a:t>
             </a:r>
             <a:endParaRPr lang="en-US" sz="900" dirty="0"/>
           </a:p>
@@ -28295,18 +28229,18 @@
       </p:sp>
       <p:sp>
         <p:nvSpPr>
-          <p:cNvPr id="38" name="Shape 36"/>
-          <p:cNvSpPr/>
-          <p:nvPr/>
-        </p:nvSpPr>
-        <p:spPr>
-          <a:xfrm>
-            <a:off x="3293146" y="4169664"/>
-            <a:ext cx="685800" cy="384048"/>
+          <p:cNvPr id="41" name="Shape 39"/>
+          <p:cNvSpPr/>
+          <p:nvPr/>
+        </p:nvSpPr>
+        <p:spPr>
+          <a:xfrm>
+            <a:off x="3033522" y="4169664"/>
+            <a:ext cx="685800" cy="475488"/>
           </a:xfrm>
           <a:prstGeom prst="rect">
             <a:avLst>
-              <a:gd name="adj" fmla="val 9524"/>
+              <a:gd name="adj" fmla="val 7692"/>
             </a:avLst>
           </a:prstGeom>
           <a:solidFill>
@@ -28322,14 +28256,14 @@
       </p:sp>
       <p:sp>
         <p:nvSpPr>
-          <p:cNvPr id="39" name="Text 37"/>
-          <p:cNvSpPr/>
-          <p:nvPr/>
-        </p:nvSpPr>
-        <p:spPr>
-          <a:xfrm>
-            <a:off x="3293146" y="4169664"/>
-            <a:ext cx="685800" cy="384048"/>
+          <p:cNvPr id="42" name="Text 40"/>
+          <p:cNvSpPr/>
+          <p:nvPr/>
+        </p:nvSpPr>
+        <p:spPr>
+          <a:xfrm>
+            <a:off x="3033522" y="4169664"/>
+            <a:ext cx="685800" cy="475488"/>
           </a:xfrm>
           <a:prstGeom prst="rect">
             <a:avLst/>
@@ -28353,7 +28287,7 @@
                 <a:ea typeface="Trebuchet MS" pitchFamily="34" charset="-122"/>
                 <a:cs typeface="Trebuchet MS" pitchFamily="34" charset="-120"/>
               </a:rPr>
-              <a:t>ow</a:t>
+              <a:t>u</a:t>
             </a:r>
             <a:endParaRPr lang="en-US" sz="900" dirty="0"/>
           </a:p>
@@ -28361,18 +28295,18 @@
       </p:sp>
       <p:sp>
         <p:nvSpPr>
-          <p:cNvPr id="40" name="Shape 38"/>
-          <p:cNvSpPr/>
-          <p:nvPr/>
-        </p:nvSpPr>
-        <p:spPr>
-          <a:xfrm>
-            <a:off x="4331643" y="4169664"/>
-            <a:ext cx="685800" cy="384048"/>
+          <p:cNvPr id="43" name="Shape 41"/>
+          <p:cNvSpPr/>
+          <p:nvPr/>
+        </p:nvSpPr>
+        <p:spPr>
+          <a:xfrm>
+            <a:off x="3942207" y="4169664"/>
+            <a:ext cx="685800" cy="475488"/>
           </a:xfrm>
           <a:prstGeom prst="rect">
             <a:avLst>
-              <a:gd name="adj" fmla="val 9524"/>
+              <a:gd name="adj" fmla="val 7692"/>
             </a:avLst>
           </a:prstGeom>
           <a:solidFill>
@@ -28388,14 +28322,14 @@
       </p:sp>
       <p:sp>
         <p:nvSpPr>
-          <p:cNvPr id="41" name="Text 39"/>
-          <p:cNvSpPr/>
-          <p:nvPr/>
-        </p:nvSpPr>
-        <p:spPr>
-          <a:xfrm>
-            <a:off x="4331643" y="4169664"/>
-            <a:ext cx="685800" cy="384048"/>
+          <p:cNvPr id="44" name="Text 42"/>
+          <p:cNvSpPr/>
+          <p:nvPr/>
+        </p:nvSpPr>
+        <p:spPr>
+          <a:xfrm>
+            <a:off x="3942207" y="4169664"/>
+            <a:ext cx="685800" cy="475488"/>
           </a:xfrm>
           <a:prstGeom prst="rect">
             <a:avLst/>
@@ -28419,7 +28353,7 @@
                 <a:ea typeface="Trebuchet MS" pitchFamily="34" charset="-122"/>
                 <a:cs typeface="Trebuchet MS" pitchFamily="34" charset="-120"/>
               </a:rPr>
-              <a:t>er</a:t>
+              <a:t>p</a:t>
             </a:r>
             <a:endParaRPr lang="en-US" sz="900" dirty="0"/>
           </a:p>
@@ -28427,18 +28361,18 @@
       </p:sp>
       <p:sp>
         <p:nvSpPr>
-          <p:cNvPr id="42" name="Shape 40"/>
-          <p:cNvSpPr/>
-          <p:nvPr/>
-        </p:nvSpPr>
-        <p:spPr>
-          <a:xfrm>
-            <a:off x="5370141" y="4169664"/>
-            <a:ext cx="685800" cy="384048"/>
+          <p:cNvPr id="45" name="Shape 43"/>
+          <p:cNvSpPr/>
+          <p:nvPr/>
+        </p:nvSpPr>
+        <p:spPr>
+          <a:xfrm>
+            <a:off x="4850892" y="4169664"/>
+            <a:ext cx="685800" cy="475488"/>
           </a:xfrm>
           <a:prstGeom prst="rect">
             <a:avLst>
-              <a:gd name="adj" fmla="val 9524"/>
+              <a:gd name="adj" fmla="val 7692"/>
             </a:avLst>
           </a:prstGeom>
           <a:solidFill>
@@ -28454,14 +28388,14 @@
       </p:sp>
       <p:sp>
         <p:nvSpPr>
-          <p:cNvPr id="43" name="Text 41"/>
-          <p:cNvSpPr/>
-          <p:nvPr/>
-        </p:nvSpPr>
-        <p:spPr>
-          <a:xfrm>
-            <a:off x="5370141" y="4169664"/>
-            <a:ext cx="685800" cy="384048"/>
+          <p:cNvPr id="46" name="Text 44"/>
+          <p:cNvSpPr/>
+          <p:nvPr/>
+        </p:nvSpPr>
+        <p:spPr>
+          <a:xfrm>
+            <a:off x="4850892" y="4169664"/>
+            <a:ext cx="685800" cy="475488"/>
           </a:xfrm>
           <a:prstGeom prst="rect">
             <a:avLst/>
@@ -28485,7 +28419,7 @@
                 <a:ea typeface="Trebuchet MS" pitchFamily="34" charset="-122"/>
                 <a:cs typeface="Trebuchet MS" pitchFamily="34" charset="-120"/>
               </a:rPr>
-              <a:t>h</a:t>
+              <a:t>er</a:t>
             </a:r>
             <a:endParaRPr lang="en-US" sz="900" dirty="0"/>
           </a:p>
@@ -28493,18 +28427,18 @@
       </p:sp>
       <p:sp>
         <p:nvSpPr>
-          <p:cNvPr id="44" name="Shape 42"/>
-          <p:cNvSpPr/>
-          <p:nvPr/>
-        </p:nvSpPr>
-        <p:spPr>
-          <a:xfrm>
-            <a:off x="6408638" y="4169664"/>
-            <a:ext cx="685800" cy="384048"/>
+          <p:cNvPr id="47" name="Shape 45"/>
+          <p:cNvSpPr/>
+          <p:nvPr/>
+        </p:nvSpPr>
+        <p:spPr>
+          <a:xfrm>
+            <a:off x="5759577" y="4169664"/>
+            <a:ext cx="685800" cy="475488"/>
           </a:xfrm>
           <a:prstGeom prst="rect">
             <a:avLst>
-              <a:gd name="adj" fmla="val 9524"/>
+              <a:gd name="adj" fmla="val 7692"/>
             </a:avLst>
           </a:prstGeom>
           <a:solidFill>
@@ -28520,14 +28454,14 @@
       </p:sp>
       <p:sp>
         <p:nvSpPr>
-          <p:cNvPr id="45" name="Text 43"/>
-          <p:cNvSpPr/>
-          <p:nvPr/>
-        </p:nvSpPr>
-        <p:spPr>
-          <a:xfrm>
-            <a:off x="6408638" y="4169664"/>
-            <a:ext cx="685800" cy="384048"/>
+          <p:cNvPr id="48" name="Text 46"/>
+          <p:cNvSpPr/>
+          <p:nvPr/>
+        </p:nvSpPr>
+        <p:spPr>
+          <a:xfrm>
+            <a:off x="5759577" y="4169664"/>
+            <a:ext cx="685800" cy="475488"/>
           </a:xfrm>
           <a:prstGeom prst="rect">
             <a:avLst/>
@@ -28551,7 +28485,7 @@
                 <a:ea typeface="Trebuchet MS" pitchFamily="34" charset="-122"/>
                 <a:cs typeface="Trebuchet MS" pitchFamily="34" charset="-120"/>
               </a:rPr>
-              <a:t>ou</a:t>
+              <a:t>p</a:t>
             </a:r>
             <a:endParaRPr lang="en-US" sz="900" dirty="0"/>
           </a:p>
@@ -28559,18 +28493,18 @@
       </p:sp>
       <p:sp>
         <p:nvSpPr>
-          <p:cNvPr id="46" name="Shape 44"/>
-          <p:cNvSpPr/>
-          <p:nvPr/>
-        </p:nvSpPr>
-        <p:spPr>
-          <a:xfrm>
-            <a:off x="7447135" y="4169664"/>
-            <a:ext cx="685800" cy="384048"/>
+          <p:cNvPr id="49" name="Shape 47"/>
+          <p:cNvSpPr/>
+          <p:nvPr/>
+        </p:nvSpPr>
+        <p:spPr>
+          <a:xfrm>
+            <a:off x="6668262" y="4169664"/>
+            <a:ext cx="685800" cy="475488"/>
           </a:xfrm>
           <a:prstGeom prst="rect">
             <a:avLst>
-              <a:gd name="adj" fmla="val 9524"/>
+              <a:gd name="adj" fmla="val 7692"/>
             </a:avLst>
           </a:prstGeom>
           <a:solidFill>
@@ -28586,14 +28520,14 @@
       </p:sp>
       <p:sp>
         <p:nvSpPr>
-          <p:cNvPr id="47" name="Text 45"/>
-          <p:cNvSpPr/>
-          <p:nvPr/>
-        </p:nvSpPr>
-        <p:spPr>
-          <a:xfrm>
-            <a:off x="7447135" y="4169664"/>
-            <a:ext cx="685800" cy="384048"/>
+          <p:cNvPr id="50" name="Text 48"/>
+          <p:cNvSpPr/>
+          <p:nvPr/>
+        </p:nvSpPr>
+        <p:spPr>
+          <a:xfrm>
+            <a:off x="6668262" y="4169664"/>
+            <a:ext cx="685800" cy="475488"/>
           </a:xfrm>
           <a:prstGeom prst="rect">
             <a:avLst/>
@@ -28617,7 +28551,7 @@
                 <a:ea typeface="Trebuchet MS" pitchFamily="34" charset="-122"/>
                 <a:cs typeface="Trebuchet MS" pitchFamily="34" charset="-120"/>
               </a:rPr>
-              <a:t>se</a:t>
+              <a:t>ow</a:t>
             </a:r>
             <a:endParaRPr lang="en-US" sz="900" dirty="0"/>
           </a:p>
@@ -28625,40 +28559,67 @@
       </p:sp>
       <p:sp>
         <p:nvSpPr>
-          <p:cNvPr id="48" name="Text 46"/>
-          <p:cNvSpPr/>
-          <p:nvPr/>
-        </p:nvSpPr>
-        <p:spPr>
-          <a:xfrm>
-            <a:off x="7447135" y="4572000"/>
-            <a:ext cx="685800" cy="219456"/>
-          </a:xfrm>
-          <a:prstGeom prst="rect">
-            <a:avLst/>
-          </a:prstGeom>
-          <a:noFill/>
-          <a:ln/>
-        </p:spPr>
-        <p:txBody>
-          <a:bodyPr wrap="square" lIns="0" tIns="0" rIns="0" bIns="0" rtlCol="0" anchor="t"/>
-          <a:lstStyle/>
-          <a:p>
-            <a:pPr algn="ctr" indent="0" marL="0">
-              <a:buNone/>
-            </a:pPr>
-            <a:r>
-              <a:rPr lang="en-US" sz="750" i="1" dirty="0">
-                <a:solidFill>
-                  <a:srgbClr val="94A3B8"/>
-                </a:solidFill>
-                <a:latin typeface="Calibri" pitchFamily="34" charset="0"/>
-                <a:ea typeface="Calibri" pitchFamily="34" charset="-122"/>
-                <a:cs typeface="Calibri" pitchFamily="34" charset="-120"/>
-              </a:rPr>
-              <a:t>/z/</a:t>
-            </a:r>
-            <a:endParaRPr lang="en-US" sz="750" dirty="0"/>
+          <p:cNvPr id="51" name="Shape 49"/>
+          <p:cNvSpPr/>
+          <p:nvPr/>
+        </p:nvSpPr>
+        <p:spPr>
+          <a:xfrm>
+            <a:off x="7576947" y="4169664"/>
+            <a:ext cx="685800" cy="475488"/>
+          </a:xfrm>
+          <a:prstGeom prst="rect">
+            <a:avLst>
+              <a:gd name="adj" fmla="val 7692"/>
+            </a:avLst>
+          </a:prstGeom>
+          <a:solidFill>
+            <a:srgbClr val="FFFFFF"/>
+          </a:solidFill>
+          <a:ln w="12700">
+            <a:solidFill>
+              <a:srgbClr val="DB2777"/>
+            </a:solidFill>
+            <a:prstDash val="solid"/>
+          </a:ln>
+        </p:spPr>
+      </p:sp>
+      <p:sp>
+        <p:nvSpPr>
+          <p:cNvPr id="52" name="Text 50"/>
+          <p:cNvSpPr/>
+          <p:nvPr/>
+        </p:nvSpPr>
+        <p:spPr>
+          <a:xfrm>
+            <a:off x="7576947" y="4169664"/>
+            <a:ext cx="685800" cy="475488"/>
+          </a:xfrm>
+          <a:prstGeom prst="rect">
+            <a:avLst/>
+          </a:prstGeom>
+          <a:noFill/>
+          <a:ln/>
+        </p:spPr>
+        <p:txBody>
+          <a:bodyPr wrap="square" lIns="0" tIns="0" rIns="0" bIns="0" rtlCol="0" anchor="ctr"/>
+          <a:lstStyle/>
+          <a:p>
+            <a:pPr algn="ctr" indent="0" marL="0">
+              <a:buNone/>
+            </a:pPr>
+            <a:r>
+              <a:rPr lang="en-US" sz="900" b="1" dirty="0">
+                <a:solidFill>
+                  <a:srgbClr val="9D174D"/>
+                </a:solidFill>
+                <a:latin typeface="Trebuchet MS" pitchFamily="34" charset="0"/>
+                <a:ea typeface="Trebuchet MS" pitchFamily="34" charset="-122"/>
+                <a:cs typeface="Trebuchet MS" pitchFamily="34" charset="-120"/>
+              </a:rPr>
+              <a:t>er</a:t>
+            </a:r>
+            <a:endParaRPr lang="en-US" sz="900" dirty="0"/>
           </a:p>
         </p:txBody>
       </p:sp>
@@ -29087,7 +29048,7 @@
                 <a:ea typeface="Trebuchet MS" pitchFamily="34" charset="-122"/>
                 <a:cs typeface="Trebuchet MS" pitchFamily="34" charset="-120"/>
               </a:rPr>
-              <a:t>overpowering</a:t>
+              <a:t>overpowered</a:t>
             </a:r>
             <a:endParaRPr lang="en-US" sz="2800" dirty="0"/>
           </a:p>
@@ -29914,7 +29875,7 @@
                 <a:ea typeface="Trebuchet MS" pitchFamily="34" charset="-122"/>
                 <a:cs typeface="Trebuchet MS" pitchFamily="34" charset="-120"/>
               </a:rPr>
-              <a:t>overpowering</a:t>
+              <a:t>overpowered</a:t>
             </a:r>
             <a:endParaRPr lang="en-US" sz="2800" dirty="0"/>
           </a:p>
@@ -30277,7 +30238,7 @@
                 <a:ea typeface="Trebuchet MS" pitchFamily="34" charset="-122"/>
                 <a:cs typeface="Trebuchet MS" pitchFamily="34" charset="-120"/>
               </a:rPr>
-              <a:t>ing</a:t>
+              <a:t>ed</a:t>
             </a:r>
             <a:endParaRPr lang="en-US" sz="1300" dirty="0"/>
           </a:p>
@@ -30316,7 +30277,7 @@
                 <a:ea typeface="Calibri" pitchFamily="34" charset="-122"/>
                 <a:cs typeface="Calibri" pitchFamily="34" charset="-120"/>
               </a:rPr>
-              <a:t>ongoing action</a:t>
+              <a:t>already happened, past tense</a:t>
             </a:r>
             <a:endParaRPr lang="en-US" sz="850" dirty="0"/>
           </a:p>
@@ -31011,7 +30972,7 @@
                 <a:ea typeface="Trebuchet MS" pitchFamily="34" charset="-122"/>
                 <a:cs typeface="Trebuchet MS" pitchFamily="34" charset="-120"/>
               </a:rPr>
-              <a:t>overpowering</a:t>
+              <a:t>overpowered</a:t>
             </a:r>
             <a:endParaRPr lang="en-US" sz="2800" dirty="0"/>
           </a:p>
@@ -31374,7 +31335,7 @@
                 <a:ea typeface="Trebuchet MS" pitchFamily="34" charset="-122"/>
                 <a:cs typeface="Trebuchet MS" pitchFamily="34" charset="-120"/>
               </a:rPr>
-              <a:t>ing</a:t>
+              <a:t>ed</a:t>
             </a:r>
             <a:endParaRPr lang="en-US" sz="1300" dirty="0"/>
           </a:p>
@@ -31413,7 +31374,7 @@
                 <a:ea typeface="Calibri" pitchFamily="34" charset="-122"/>
                 <a:cs typeface="Calibri" pitchFamily="34" charset="-120"/>
               </a:rPr>
-              <a:t>ongoing action</a:t>
+              <a:t>already happened, past tense</a:t>
             </a:r>
             <a:endParaRPr lang="en-US" sz="850" dirty="0"/>
           </a:p>
@@ -31520,8 +31481,8 @@
         </p:nvSpPr>
         <p:spPr>
           <a:xfrm>
-            <a:off x="1978152" y="3364992"/>
-            <a:ext cx="1225296" cy="475488"/>
+            <a:off x="1975104" y="3364992"/>
+            <a:ext cx="1554480" cy="475488"/>
           </a:xfrm>
           <a:prstGeom prst="rect">
             <a:avLst>
@@ -31547,8 +31508,8 @@
         </p:nvSpPr>
         <p:spPr>
           <a:xfrm>
-            <a:off x="1978152" y="3364992"/>
-            <a:ext cx="1225296" cy="475488"/>
+            <a:off x="1975104" y="3364992"/>
+            <a:ext cx="1554480" cy="475488"/>
           </a:xfrm>
           <a:prstGeom prst="rect">
             <a:avLst/>
@@ -31586,8 +31547,8 @@
         </p:nvSpPr>
         <p:spPr>
           <a:xfrm>
-            <a:off x="3203448" y="3364992"/>
-            <a:ext cx="76200" cy="475488"/>
+            <a:off x="3529584" y="3364992"/>
+            <a:ext cx="73152" cy="475488"/>
           </a:xfrm>
           <a:prstGeom prst="rect">
             <a:avLst/>
@@ -31625,8 +31586,8 @@
         </p:nvSpPr>
         <p:spPr>
           <a:xfrm>
-            <a:off x="3279648" y="3364992"/>
-            <a:ext cx="1225296" cy="475488"/>
+            <a:off x="3602736" y="3364992"/>
+            <a:ext cx="1554480" cy="475488"/>
           </a:xfrm>
           <a:prstGeom prst="rect">
             <a:avLst>
@@ -31652,8 +31613,8 @@
         </p:nvSpPr>
         <p:spPr>
           <a:xfrm>
-            <a:off x="3279648" y="3364992"/>
-            <a:ext cx="1225296" cy="475488"/>
+            <a:off x="3602736" y="3364992"/>
+            <a:ext cx="1554480" cy="475488"/>
           </a:xfrm>
           <a:prstGeom prst="rect">
             <a:avLst/>
@@ -31691,8 +31652,8 @@
         </p:nvSpPr>
         <p:spPr>
           <a:xfrm>
-            <a:off x="4504944" y="3364992"/>
-            <a:ext cx="76200" cy="475488"/>
+            <a:off x="5157216" y="3364992"/>
+            <a:ext cx="73152" cy="475488"/>
           </a:xfrm>
           <a:prstGeom prst="rect">
             <a:avLst/>
@@ -31730,8 +31691,8 @@
         </p:nvSpPr>
         <p:spPr>
           <a:xfrm>
-            <a:off x="4581144" y="3364992"/>
-            <a:ext cx="1225296" cy="475488"/>
+            <a:off x="5230368" y="3364992"/>
+            <a:ext cx="1554480" cy="475488"/>
           </a:xfrm>
           <a:prstGeom prst="rect">
             <a:avLst>
@@ -31757,8 +31718,8 @@
         </p:nvSpPr>
         <p:spPr>
           <a:xfrm>
-            <a:off x="4581144" y="3364992"/>
-            <a:ext cx="1225296" cy="475488"/>
+            <a:off x="5230368" y="3364992"/>
+            <a:ext cx="1554480" cy="475488"/>
           </a:xfrm>
           <a:prstGeom prst="rect">
             <a:avLst/>
@@ -31796,8 +31757,8 @@
         </p:nvSpPr>
         <p:spPr>
           <a:xfrm>
-            <a:off x="5806440" y="3364992"/>
-            <a:ext cx="76200" cy="475488"/>
+            <a:off x="6784848" y="3364992"/>
+            <a:ext cx="73152" cy="475488"/>
           </a:xfrm>
           <a:prstGeom prst="rect">
             <a:avLst/>
@@ -31835,8 +31796,8 @@
         </p:nvSpPr>
         <p:spPr>
           <a:xfrm>
-            <a:off x="5882640" y="3364992"/>
-            <a:ext cx="1225296" cy="475488"/>
+            <a:off x="6858000" y="3364992"/>
+            <a:ext cx="1554480" cy="475488"/>
           </a:xfrm>
           <a:prstGeom prst="rect">
             <a:avLst>
@@ -31862,8 +31823,8 @@
         </p:nvSpPr>
         <p:spPr>
           <a:xfrm>
-            <a:off x="5882640" y="3364992"/>
-            <a:ext cx="1225296" cy="475488"/>
+            <a:off x="6858000" y="3364992"/>
+            <a:ext cx="1554480" cy="475488"/>
           </a:xfrm>
           <a:prstGeom prst="rect">
             <a:avLst/>
@@ -31887,7 +31848,7 @@
                 <a:ea typeface="Trebuchet MS" pitchFamily="34" charset="-122"/>
                 <a:cs typeface="Trebuchet MS" pitchFamily="34" charset="-120"/>
               </a:rPr>
-              <a:t>er</a:t>
+              <a:t>ered</a:t>
             </a:r>
             <a:endParaRPr lang="en-US" sz="1400" dirty="0"/>
           </a:p>
@@ -31895,119 +31856,80 @@
       </p:sp>
       <p:sp>
         <p:nvSpPr>
-          <p:cNvPr id="39" name="Text 37"/>
-          <p:cNvSpPr/>
-          <p:nvPr/>
-        </p:nvSpPr>
-        <p:spPr>
-          <a:xfrm>
-            <a:off x="7107936" y="3364992"/>
-            <a:ext cx="76200" cy="475488"/>
-          </a:xfrm>
-          <a:prstGeom prst="rect">
-            <a:avLst/>
-          </a:prstGeom>
-          <a:noFill/>
-          <a:ln/>
-        </p:spPr>
-        <p:txBody>
-          <a:bodyPr wrap="square" lIns="0" tIns="0" rIns="0" bIns="0" rtlCol="0" anchor="ctr"/>
-          <a:lstStyle/>
-          <a:p>
-            <a:pPr algn="ctr" indent="0" marL="0">
-              <a:buNone/>
-            </a:pPr>
-            <a:r>
-              <a:rPr lang="en-US" sz="1600" b="1" dirty="0">
-                <a:solidFill>
-                  <a:srgbClr val="0D9488"/>
+          <p:cNvPr id="39" name="Shape 37"/>
+          <p:cNvSpPr/>
+          <p:nvPr/>
+        </p:nvSpPr>
+        <p:spPr>
+          <a:xfrm>
+            <a:off x="365760" y="4096512"/>
+            <a:ext cx="1371600" cy="804672"/>
+          </a:xfrm>
+          <a:prstGeom prst="rect">
+            <a:avLst>
+              <a:gd name="adj" fmla="val 6818"/>
+            </a:avLst>
+          </a:prstGeom>
+          <a:solidFill>
+            <a:srgbClr val="E2E8F0"/>
+          </a:solidFill>
+          <a:ln w="12700">
+            <a:solidFill>
+              <a:srgbClr val="E2E8F0"/>
+            </a:solidFill>
+            <a:prstDash val="solid"/>
+          </a:ln>
+        </p:spPr>
+      </p:sp>
+      <p:sp>
+        <p:nvSpPr>
+          <p:cNvPr id="40" name="Text 38"/>
+          <p:cNvSpPr/>
+          <p:nvPr/>
+        </p:nvSpPr>
+        <p:spPr>
+          <a:xfrm>
+            <a:off x="365760" y="4096512"/>
+            <a:ext cx="1371600" cy="804672"/>
+          </a:xfrm>
+          <a:prstGeom prst="rect">
+            <a:avLst/>
+          </a:prstGeom>
+          <a:noFill/>
+          <a:ln/>
+        </p:spPr>
+        <p:txBody>
+          <a:bodyPr wrap="square" lIns="0" tIns="0" rIns="0" bIns="0" rtlCol="0" anchor="ctr"/>
+          <a:lstStyle/>
+          <a:p>
+            <a:pPr algn="ctr" indent="0" marL="0">
+              <a:buNone/>
+            </a:pPr>
+            <a:r>
+              <a:rPr lang="en-US" sz="1100" b="1" dirty="0">
+                <a:solidFill>
+                  <a:srgbClr val="475569"/>
                 </a:solidFill>
                 <a:latin typeface="Trebuchet MS" pitchFamily="34" charset="0"/>
                 <a:ea typeface="Trebuchet MS" pitchFamily="34" charset="-122"/>
                 <a:cs typeface="Trebuchet MS" pitchFamily="34" charset="-120"/>
               </a:rPr>
-              <a:t>·</a:t>
-            </a:r>
-            <a:endParaRPr lang="en-US" sz="1600" dirty="0"/>
-          </a:p>
-        </p:txBody>
-      </p:sp>
-      <p:sp>
-        <p:nvSpPr>
-          <p:cNvPr id="40" name="Shape 38"/>
-          <p:cNvSpPr/>
-          <p:nvPr/>
-        </p:nvSpPr>
-        <p:spPr>
-          <a:xfrm>
-            <a:off x="7184136" y="3364992"/>
-            <a:ext cx="1225296" cy="475488"/>
-          </a:xfrm>
-          <a:prstGeom prst="rect">
-            <a:avLst>
-              <a:gd name="adj" fmla="val 9615"/>
-            </a:avLst>
-          </a:prstGeom>
-          <a:solidFill>
-            <a:srgbClr val="FFFFFF"/>
-          </a:solidFill>
-          <a:ln w="12700">
-            <a:solidFill>
-              <a:srgbClr val="0D9488"/>
-            </a:solidFill>
-            <a:prstDash val="solid"/>
-          </a:ln>
-        </p:spPr>
-      </p:sp>
-      <p:sp>
-        <p:nvSpPr>
-          <p:cNvPr id="41" name="Text 39"/>
-          <p:cNvSpPr/>
-          <p:nvPr/>
-        </p:nvSpPr>
-        <p:spPr>
-          <a:xfrm>
-            <a:off x="7184136" y="3364992"/>
-            <a:ext cx="1225296" cy="475488"/>
-          </a:xfrm>
-          <a:prstGeom prst="rect">
-            <a:avLst/>
-          </a:prstGeom>
-          <a:noFill/>
-          <a:ln/>
-        </p:spPr>
-        <p:txBody>
-          <a:bodyPr wrap="square" lIns="0" tIns="0" rIns="0" bIns="0" rtlCol="0" anchor="ctr"/>
-          <a:lstStyle/>
-          <a:p>
-            <a:pPr algn="ctr" indent="0" marL="0">
-              <a:buNone/>
-            </a:pPr>
-            <a:r>
-              <a:rPr lang="en-US" sz="1400" b="1" dirty="0">
-                <a:solidFill>
-                  <a:srgbClr val="0D9488"/>
-                </a:solidFill>
-                <a:latin typeface="Trebuchet MS" pitchFamily="34" charset="0"/>
-                <a:ea typeface="Trebuchet MS" pitchFamily="34" charset="-122"/>
-                <a:cs typeface="Trebuchet MS" pitchFamily="34" charset="-120"/>
-              </a:rPr>
-              <a:t>ing</a:t>
-            </a:r>
-            <a:endParaRPr lang="en-US" sz="1400" dirty="0"/>
-          </a:p>
-        </p:txBody>
-      </p:sp>
-      <p:sp>
-        <p:nvSpPr>
-          <p:cNvPr id="42" name="Shape 40"/>
-          <p:cNvSpPr/>
-          <p:nvPr/>
-        </p:nvSpPr>
-        <p:spPr>
-          <a:xfrm>
-            <a:off x="365760" y="4096512"/>
-            <a:ext cx="1371600" cy="804672"/>
+              <a:t>Phonemes</a:t>
+            </a:r>
+            <a:endParaRPr lang="en-US" sz="1100" dirty="0"/>
+          </a:p>
+        </p:txBody>
+      </p:sp>
+      <p:sp>
+        <p:nvSpPr>
+          <p:cNvPr id="41" name="Shape 39"/>
+          <p:cNvSpPr/>
+          <p:nvPr/>
+        </p:nvSpPr>
+        <p:spPr>
+          <a:xfrm>
+            <a:off x="1874520" y="4096512"/>
+            <a:ext cx="6903720" cy="804672"/>
           </a:xfrm>
           <a:prstGeom prst="rect">
             <a:avLst>
@@ -32015,85 +31937,19 @@
             </a:avLst>
           </a:prstGeom>
           <a:solidFill>
-            <a:srgbClr val="E2E8F0"/>
+            <a:srgbClr val="F8FAFC"/>
           </a:solidFill>
           <a:ln w="12700">
             <a:solidFill>
               <a:srgbClr val="E2E8F0"/>
             </a:solidFill>
-            <a:prstDash val="solid"/>
-          </a:ln>
-        </p:spPr>
-      </p:sp>
-      <p:sp>
-        <p:nvSpPr>
-          <p:cNvPr id="43" name="Text 41"/>
-          <p:cNvSpPr/>
-          <p:nvPr/>
-        </p:nvSpPr>
-        <p:spPr>
-          <a:xfrm>
-            <a:off x="365760" y="4096512"/>
-            <a:ext cx="1371600" cy="804672"/>
-          </a:xfrm>
-          <a:prstGeom prst="rect">
-            <a:avLst/>
-          </a:prstGeom>
-          <a:noFill/>
-          <a:ln/>
-        </p:spPr>
-        <p:txBody>
-          <a:bodyPr wrap="square" lIns="0" tIns="0" rIns="0" bIns="0" rtlCol="0" anchor="ctr"/>
-          <a:lstStyle/>
-          <a:p>
-            <a:pPr algn="ctr" indent="0" marL="0">
-              <a:buNone/>
-            </a:pPr>
-            <a:r>
-              <a:rPr lang="en-US" sz="1100" b="1" dirty="0">
-                <a:solidFill>
-                  <a:srgbClr val="475569"/>
-                </a:solidFill>
-                <a:latin typeface="Trebuchet MS" pitchFamily="34" charset="0"/>
-                <a:ea typeface="Trebuchet MS" pitchFamily="34" charset="-122"/>
-                <a:cs typeface="Trebuchet MS" pitchFamily="34" charset="-120"/>
-              </a:rPr>
-              <a:t>Phonemes</a:t>
-            </a:r>
-            <a:endParaRPr lang="en-US" sz="1100" dirty="0"/>
-          </a:p>
-        </p:txBody>
-      </p:sp>
-      <p:sp>
-        <p:nvSpPr>
-          <p:cNvPr id="44" name="Shape 42"/>
-          <p:cNvSpPr/>
-          <p:nvPr/>
-        </p:nvSpPr>
-        <p:spPr>
-          <a:xfrm>
-            <a:off x="1874520" y="4096512"/>
-            <a:ext cx="6903720" cy="804672"/>
-          </a:xfrm>
-          <a:prstGeom prst="rect">
-            <a:avLst>
-              <a:gd name="adj" fmla="val 6818"/>
-            </a:avLst>
-          </a:prstGeom>
-          <a:solidFill>
-            <a:srgbClr val="F8FAFC"/>
-          </a:solidFill>
-          <a:ln w="12700">
-            <a:solidFill>
-              <a:srgbClr val="E2E8F0"/>
-            </a:solidFill>
             <a:prstDash val="dash"/>
           </a:ln>
         </p:spPr>
       </p:sp>
       <p:sp>
         <p:nvSpPr>
-          <p:cNvPr id="45" name="Text 43"/>
+          <p:cNvPr id="42" name="Text 40"/>
           <p:cNvSpPr/>
           <p:nvPr/>
         </p:nvSpPr>
@@ -32555,7 +32411,7 @@
                 <a:ea typeface="Trebuchet MS" pitchFamily="34" charset="-122"/>
                 <a:cs typeface="Trebuchet MS" pitchFamily="34" charset="-120"/>
               </a:rPr>
-              <a:t>overpowering</a:t>
+              <a:t>overpowered</a:t>
             </a:r>
             <a:endParaRPr lang="en-US" sz="2800" dirty="0"/>
           </a:p>
@@ -32918,7 +32774,7 @@
                 <a:ea typeface="Trebuchet MS" pitchFamily="34" charset="-122"/>
                 <a:cs typeface="Trebuchet MS" pitchFamily="34" charset="-120"/>
               </a:rPr>
-              <a:t>ing</a:t>
+              <a:t>ed</a:t>
             </a:r>
             <a:endParaRPr lang="en-US" sz="1300" dirty="0"/>
           </a:p>
@@ -32957,7 +32813,7 @@
                 <a:ea typeface="Calibri" pitchFamily="34" charset="-122"/>
                 <a:cs typeface="Calibri" pitchFamily="34" charset="-120"/>
               </a:rPr>
-              <a:t>ongoing action</a:t>
+              <a:t>already happened, past tense</a:t>
             </a:r>
             <a:endParaRPr lang="en-US" sz="850" dirty="0"/>
           </a:p>
@@ -33064,8 +32920,8 @@
         </p:nvSpPr>
         <p:spPr>
           <a:xfrm>
-            <a:off x="1978152" y="3364992"/>
-            <a:ext cx="1225296" cy="475488"/>
+            <a:off x="1975104" y="3364992"/>
+            <a:ext cx="1554480" cy="475488"/>
           </a:xfrm>
           <a:prstGeom prst="rect">
             <a:avLst>
@@ -33091,8 +32947,8 @@
         </p:nvSpPr>
         <p:spPr>
           <a:xfrm>
-            <a:off x="1978152" y="3364992"/>
-            <a:ext cx="1225296" cy="475488"/>
+            <a:off x="1975104" y="3364992"/>
+            <a:ext cx="1554480" cy="475488"/>
           </a:xfrm>
           <a:prstGeom prst="rect">
             <a:avLst/>
@@ -33130,8 +32986,8 @@
         </p:nvSpPr>
         <p:spPr>
           <a:xfrm>
-            <a:off x="3203448" y="3364992"/>
-            <a:ext cx="76200" cy="475488"/>
+            <a:off x="3529584" y="3364992"/>
+            <a:ext cx="73152" cy="475488"/>
           </a:xfrm>
           <a:prstGeom prst="rect">
             <a:avLst/>
@@ -33169,8 +33025,8 @@
         </p:nvSpPr>
         <p:spPr>
           <a:xfrm>
-            <a:off x="3279648" y="3364992"/>
-            <a:ext cx="1225296" cy="475488"/>
+            <a:off x="3602736" y="3364992"/>
+            <a:ext cx="1554480" cy="475488"/>
           </a:xfrm>
           <a:prstGeom prst="rect">
             <a:avLst>
@@ -33196,8 +33052,8 @@
         </p:nvSpPr>
         <p:spPr>
           <a:xfrm>
-            <a:off x="3279648" y="3364992"/>
-            <a:ext cx="1225296" cy="475488"/>
+            <a:off x="3602736" y="3364992"/>
+            <a:ext cx="1554480" cy="475488"/>
           </a:xfrm>
           <a:prstGeom prst="rect">
             <a:avLst/>
@@ -33235,8 +33091,8 @@
         </p:nvSpPr>
         <p:spPr>
           <a:xfrm>
-            <a:off x="4504944" y="3364992"/>
-            <a:ext cx="76200" cy="475488"/>
+            <a:off x="5157216" y="3364992"/>
+            <a:ext cx="73152" cy="475488"/>
           </a:xfrm>
           <a:prstGeom prst="rect">
             <a:avLst/>
@@ -33274,8 +33130,8 @@
         </p:nvSpPr>
         <p:spPr>
           <a:xfrm>
-            <a:off x="4581144" y="3364992"/>
-            <a:ext cx="1225296" cy="475488"/>
+            <a:off x="5230368" y="3364992"/>
+            <a:ext cx="1554480" cy="475488"/>
           </a:xfrm>
           <a:prstGeom prst="rect">
             <a:avLst>
@@ -33301,8 +33157,8 @@
         </p:nvSpPr>
         <p:spPr>
           <a:xfrm>
-            <a:off x="4581144" y="3364992"/>
-            <a:ext cx="1225296" cy="475488"/>
+            <a:off x="5230368" y="3364992"/>
+            <a:ext cx="1554480" cy="475488"/>
           </a:xfrm>
           <a:prstGeom prst="rect">
             <a:avLst/>
@@ -33340,8 +33196,8 @@
         </p:nvSpPr>
         <p:spPr>
           <a:xfrm>
-            <a:off x="5806440" y="3364992"/>
-            <a:ext cx="76200" cy="475488"/>
+            <a:off x="6784848" y="3364992"/>
+            <a:ext cx="73152" cy="475488"/>
           </a:xfrm>
           <a:prstGeom prst="rect">
             <a:avLst/>
@@ -33379,8 +33235,8 @@
         </p:nvSpPr>
         <p:spPr>
           <a:xfrm>
-            <a:off x="5882640" y="3364992"/>
-            <a:ext cx="1225296" cy="475488"/>
+            <a:off x="6858000" y="3364992"/>
+            <a:ext cx="1554480" cy="475488"/>
           </a:xfrm>
           <a:prstGeom prst="rect">
             <a:avLst>
@@ -33406,8 +33262,8 @@
         </p:nvSpPr>
         <p:spPr>
           <a:xfrm>
-            <a:off x="5882640" y="3364992"/>
-            <a:ext cx="1225296" cy="475488"/>
+            <a:off x="6858000" y="3364992"/>
+            <a:ext cx="1554480" cy="475488"/>
           </a:xfrm>
           <a:prstGeom prst="rect">
             <a:avLst/>
@@ -33431,7 +33287,7 @@
                 <a:ea typeface="Trebuchet MS" pitchFamily="34" charset="-122"/>
                 <a:cs typeface="Trebuchet MS" pitchFamily="34" charset="-120"/>
               </a:rPr>
-              <a:t>er</a:t>
+              <a:t>ered</a:t>
             </a:r>
             <a:endParaRPr lang="en-US" sz="1400" dirty="0"/>
           </a:p>
@@ -33439,211 +33295,238 @@
       </p:sp>
       <p:sp>
         <p:nvSpPr>
-          <p:cNvPr id="39" name="Text 37"/>
-          <p:cNvSpPr/>
-          <p:nvPr/>
-        </p:nvSpPr>
-        <p:spPr>
-          <a:xfrm>
-            <a:off x="7107936" y="3364992"/>
-            <a:ext cx="76200" cy="475488"/>
-          </a:xfrm>
-          <a:prstGeom prst="rect">
-            <a:avLst/>
-          </a:prstGeom>
-          <a:noFill/>
-          <a:ln/>
-        </p:spPr>
-        <p:txBody>
-          <a:bodyPr wrap="square" lIns="0" tIns="0" rIns="0" bIns="0" rtlCol="0" anchor="ctr"/>
-          <a:lstStyle/>
-          <a:p>
-            <a:pPr algn="ctr" indent="0" marL="0">
-              <a:buNone/>
-            </a:pPr>
-            <a:r>
-              <a:rPr lang="en-US" sz="1600" b="1" dirty="0">
-                <a:solidFill>
-                  <a:srgbClr val="0D9488"/>
+          <p:cNvPr id="39" name="Shape 37"/>
+          <p:cNvSpPr/>
+          <p:nvPr/>
+        </p:nvSpPr>
+        <p:spPr>
+          <a:xfrm>
+            <a:off x="365760" y="4096512"/>
+            <a:ext cx="1371600" cy="804672"/>
+          </a:xfrm>
+          <a:prstGeom prst="rect">
+            <a:avLst>
+              <a:gd name="adj" fmla="val 6818"/>
+            </a:avLst>
+          </a:prstGeom>
+          <a:solidFill>
+            <a:srgbClr val="E2E8F0"/>
+          </a:solidFill>
+          <a:ln w="12700">
+            <a:solidFill>
+              <a:srgbClr val="E2E8F0"/>
+            </a:solidFill>
+            <a:prstDash val="solid"/>
+          </a:ln>
+        </p:spPr>
+      </p:sp>
+      <p:sp>
+        <p:nvSpPr>
+          <p:cNvPr id="40" name="Text 38"/>
+          <p:cNvSpPr/>
+          <p:nvPr/>
+        </p:nvSpPr>
+        <p:spPr>
+          <a:xfrm>
+            <a:off x="365760" y="4096512"/>
+            <a:ext cx="1371600" cy="804672"/>
+          </a:xfrm>
+          <a:prstGeom prst="rect">
+            <a:avLst/>
+          </a:prstGeom>
+          <a:noFill/>
+          <a:ln/>
+        </p:spPr>
+        <p:txBody>
+          <a:bodyPr wrap="square" lIns="0" tIns="0" rIns="0" bIns="0" rtlCol="0" anchor="ctr"/>
+          <a:lstStyle/>
+          <a:p>
+            <a:pPr algn="ctr" indent="0" marL="0">
+              <a:buNone/>
+            </a:pPr>
+            <a:r>
+              <a:rPr lang="en-US" sz="1100" b="1" dirty="0">
+                <a:solidFill>
+                  <a:srgbClr val="475569"/>
                 </a:solidFill>
                 <a:latin typeface="Trebuchet MS" pitchFamily="34" charset="0"/>
                 <a:ea typeface="Trebuchet MS" pitchFamily="34" charset="-122"/>
                 <a:cs typeface="Trebuchet MS" pitchFamily="34" charset="-120"/>
               </a:rPr>
-              <a:t>·</a:t>
-            </a:r>
-            <a:endParaRPr lang="en-US" sz="1600" dirty="0"/>
-          </a:p>
-        </p:txBody>
-      </p:sp>
-      <p:sp>
-        <p:nvSpPr>
-          <p:cNvPr id="40" name="Shape 38"/>
-          <p:cNvSpPr/>
-          <p:nvPr/>
-        </p:nvSpPr>
-        <p:spPr>
-          <a:xfrm>
-            <a:off x="7184136" y="3364992"/>
-            <a:ext cx="1225296" cy="475488"/>
+              <a:t>Phonemes</a:t>
+            </a:r>
+            <a:endParaRPr lang="en-US" sz="1100" dirty="0"/>
+          </a:p>
+        </p:txBody>
+      </p:sp>
+      <p:sp>
+        <p:nvSpPr>
+          <p:cNvPr id="41" name="Shape 39"/>
+          <p:cNvSpPr/>
+          <p:nvPr/>
+        </p:nvSpPr>
+        <p:spPr>
+          <a:xfrm>
+            <a:off x="1874520" y="4096512"/>
+            <a:ext cx="6903720" cy="658368"/>
           </a:xfrm>
           <a:prstGeom prst="rect">
             <a:avLst>
-              <a:gd name="adj" fmla="val 9615"/>
+              <a:gd name="adj" fmla="val 8333"/>
             </a:avLst>
           </a:prstGeom>
           <a:solidFill>
+            <a:srgbClr val="FCE7F3"/>
+          </a:solidFill>
+          <a:ln w="12700">
+            <a:solidFill>
+              <a:srgbClr val="DB2777"/>
+            </a:solidFill>
+            <a:prstDash val="solid"/>
+          </a:ln>
+        </p:spPr>
+      </p:sp>
+      <p:sp>
+        <p:nvSpPr>
+          <p:cNvPr id="42" name="Shape 40"/>
+          <p:cNvSpPr/>
+          <p:nvPr/>
+        </p:nvSpPr>
+        <p:spPr>
+          <a:xfrm>
+            <a:off x="2124837" y="4169664"/>
+            <a:ext cx="685800" cy="475488"/>
+          </a:xfrm>
+          <a:prstGeom prst="rect">
+            <a:avLst>
+              <a:gd name="adj" fmla="val 7692"/>
+            </a:avLst>
+          </a:prstGeom>
+          <a:solidFill>
             <a:srgbClr val="FFFFFF"/>
           </a:solidFill>
           <a:ln w="12700">
             <a:solidFill>
-              <a:srgbClr val="0D9488"/>
-            </a:solidFill>
-            <a:prstDash val="solid"/>
-          </a:ln>
-        </p:spPr>
-      </p:sp>
-      <p:sp>
-        <p:nvSpPr>
-          <p:cNvPr id="41" name="Text 39"/>
-          <p:cNvSpPr/>
-          <p:nvPr/>
-        </p:nvSpPr>
-        <p:spPr>
-          <a:xfrm>
-            <a:off x="7184136" y="3364992"/>
-            <a:ext cx="1225296" cy="475488"/>
-          </a:xfrm>
-          <a:prstGeom prst="rect">
-            <a:avLst/>
-          </a:prstGeom>
-          <a:noFill/>
-          <a:ln/>
-        </p:spPr>
-        <p:txBody>
-          <a:bodyPr wrap="square" lIns="0" tIns="0" rIns="0" bIns="0" rtlCol="0" anchor="ctr"/>
-          <a:lstStyle/>
-          <a:p>
-            <a:pPr algn="ctr" indent="0" marL="0">
-              <a:buNone/>
-            </a:pPr>
-            <a:r>
-              <a:rPr lang="en-US" sz="1400" b="1" dirty="0">
-                <a:solidFill>
-                  <a:srgbClr val="0D9488"/>
+              <a:srgbClr val="DB2777"/>
+            </a:solidFill>
+            <a:prstDash val="solid"/>
+          </a:ln>
+        </p:spPr>
+      </p:sp>
+      <p:sp>
+        <p:nvSpPr>
+          <p:cNvPr id="43" name="Text 41"/>
+          <p:cNvSpPr/>
+          <p:nvPr/>
+        </p:nvSpPr>
+        <p:spPr>
+          <a:xfrm>
+            <a:off x="2124837" y="4169664"/>
+            <a:ext cx="685800" cy="475488"/>
+          </a:xfrm>
+          <a:prstGeom prst="rect">
+            <a:avLst/>
+          </a:prstGeom>
+          <a:noFill/>
+          <a:ln/>
+        </p:spPr>
+        <p:txBody>
+          <a:bodyPr wrap="square" lIns="0" tIns="0" rIns="0" bIns="0" rtlCol="0" anchor="ctr"/>
+          <a:lstStyle/>
+          <a:p>
+            <a:pPr algn="ctr" indent="0" marL="0">
+              <a:buNone/>
+            </a:pPr>
+            <a:r>
+              <a:rPr lang="en-US" sz="900" b="1" dirty="0">
+                <a:solidFill>
+                  <a:srgbClr val="9D174D"/>
                 </a:solidFill>
                 <a:latin typeface="Trebuchet MS" pitchFamily="34" charset="0"/>
                 <a:ea typeface="Trebuchet MS" pitchFamily="34" charset="-122"/>
                 <a:cs typeface="Trebuchet MS" pitchFamily="34" charset="-120"/>
               </a:rPr>
-              <a:t>ing</a:t>
-            </a:r>
-            <a:endParaRPr lang="en-US" sz="1400" dirty="0"/>
-          </a:p>
-        </p:txBody>
-      </p:sp>
-      <p:sp>
-        <p:nvSpPr>
-          <p:cNvPr id="42" name="Shape 40"/>
-          <p:cNvSpPr/>
-          <p:nvPr/>
-        </p:nvSpPr>
-        <p:spPr>
-          <a:xfrm>
-            <a:off x="365760" y="4096512"/>
-            <a:ext cx="1371600" cy="804672"/>
+              <a:t>o</a:t>
+            </a:r>
+            <a:endParaRPr lang="en-US" sz="900" dirty="0"/>
+          </a:p>
+        </p:txBody>
+      </p:sp>
+      <p:sp>
+        <p:nvSpPr>
+          <p:cNvPr id="44" name="Shape 42"/>
+          <p:cNvSpPr/>
+          <p:nvPr/>
+        </p:nvSpPr>
+        <p:spPr>
+          <a:xfrm>
+            <a:off x="3033522" y="4169664"/>
+            <a:ext cx="685800" cy="475488"/>
           </a:xfrm>
           <a:prstGeom prst="rect">
             <a:avLst>
-              <a:gd name="adj" fmla="val 6818"/>
+              <a:gd name="adj" fmla="val 7692"/>
             </a:avLst>
           </a:prstGeom>
           <a:solidFill>
-            <a:srgbClr val="E2E8F0"/>
-          </a:solidFill>
-          <a:ln w="12700">
-            <a:solidFill>
-              <a:srgbClr val="E2E8F0"/>
-            </a:solidFill>
-            <a:prstDash val="solid"/>
-          </a:ln>
-        </p:spPr>
-      </p:sp>
-      <p:sp>
-        <p:nvSpPr>
-          <p:cNvPr id="43" name="Text 41"/>
-          <p:cNvSpPr/>
-          <p:nvPr/>
-        </p:nvSpPr>
-        <p:spPr>
-          <a:xfrm>
-            <a:off x="365760" y="4096512"/>
-            <a:ext cx="1371600" cy="804672"/>
-          </a:xfrm>
-          <a:prstGeom prst="rect">
-            <a:avLst/>
-          </a:prstGeom>
-          <a:noFill/>
-          <a:ln/>
-        </p:spPr>
-        <p:txBody>
-          <a:bodyPr wrap="square" lIns="0" tIns="0" rIns="0" bIns="0" rtlCol="0" anchor="ctr"/>
-          <a:lstStyle/>
-          <a:p>
-            <a:pPr algn="ctr" indent="0" marL="0">
-              <a:buNone/>
-            </a:pPr>
-            <a:r>
-              <a:rPr lang="en-US" sz="1100" b="1" dirty="0">
-                <a:solidFill>
-                  <a:srgbClr val="475569"/>
+            <a:srgbClr val="FFFFFF"/>
+          </a:solidFill>
+          <a:ln w="12700">
+            <a:solidFill>
+              <a:srgbClr val="DB2777"/>
+            </a:solidFill>
+            <a:prstDash val="solid"/>
+          </a:ln>
+        </p:spPr>
+      </p:sp>
+      <p:sp>
+        <p:nvSpPr>
+          <p:cNvPr id="45" name="Text 43"/>
+          <p:cNvSpPr/>
+          <p:nvPr/>
+        </p:nvSpPr>
+        <p:spPr>
+          <a:xfrm>
+            <a:off x="3033522" y="4169664"/>
+            <a:ext cx="685800" cy="475488"/>
+          </a:xfrm>
+          <a:prstGeom prst="rect">
+            <a:avLst/>
+          </a:prstGeom>
+          <a:noFill/>
+          <a:ln/>
+        </p:spPr>
+        <p:txBody>
+          <a:bodyPr wrap="square" lIns="0" tIns="0" rIns="0" bIns="0" rtlCol="0" anchor="ctr"/>
+          <a:lstStyle/>
+          <a:p>
+            <a:pPr algn="ctr" indent="0" marL="0">
+              <a:buNone/>
+            </a:pPr>
+            <a:r>
+              <a:rPr lang="en-US" sz="900" b="1" dirty="0">
+                <a:solidFill>
+                  <a:srgbClr val="9D174D"/>
                 </a:solidFill>
                 <a:latin typeface="Trebuchet MS" pitchFamily="34" charset="0"/>
                 <a:ea typeface="Trebuchet MS" pitchFamily="34" charset="-122"/>
                 <a:cs typeface="Trebuchet MS" pitchFamily="34" charset="-120"/>
               </a:rPr>
-              <a:t>Phonemes</a:t>
-            </a:r>
-            <a:endParaRPr lang="en-US" sz="1100" dirty="0"/>
-          </a:p>
-        </p:txBody>
-      </p:sp>
-      <p:sp>
-        <p:nvSpPr>
-          <p:cNvPr id="44" name="Shape 42"/>
-          <p:cNvSpPr/>
-          <p:nvPr/>
-        </p:nvSpPr>
-        <p:spPr>
-          <a:xfrm>
-            <a:off x="1874520" y="4096512"/>
-            <a:ext cx="6903720" cy="658368"/>
-          </a:xfrm>
-          <a:prstGeom prst="rect">
-            <a:avLst>
-              <a:gd name="adj" fmla="val 8333"/>
-            </a:avLst>
-          </a:prstGeom>
-          <a:solidFill>
-            <a:srgbClr val="FCE7F3"/>
-          </a:solidFill>
-          <a:ln w="12700">
-            <a:solidFill>
-              <a:srgbClr val="DB2777"/>
-            </a:solidFill>
-            <a:prstDash val="solid"/>
-          </a:ln>
-        </p:spPr>
-      </p:sp>
-      <p:sp>
-        <p:nvSpPr>
-          <p:cNvPr id="45" name="Shape 43"/>
-          <p:cNvSpPr/>
-          <p:nvPr/>
-        </p:nvSpPr>
-        <p:spPr>
-          <a:xfrm>
-            <a:off x="2023872" y="4169664"/>
+              <a:t>v</a:t>
+            </a:r>
+            <a:endParaRPr lang="en-US" sz="900" dirty="0"/>
+          </a:p>
+        </p:txBody>
+      </p:sp>
+      <p:sp>
+        <p:nvSpPr>
+          <p:cNvPr id="46" name="Shape 44"/>
+          <p:cNvSpPr/>
+          <p:nvPr/>
+        </p:nvSpPr>
+        <p:spPr>
+          <a:xfrm>
+            <a:off x="3942207" y="4169664"/>
             <a:ext cx="685800" cy="475488"/>
           </a:xfrm>
           <a:prstGeom prst="rect">
@@ -33664,13 +33547,13 @@
       </p:sp>
       <p:sp>
         <p:nvSpPr>
-          <p:cNvPr id="46" name="Text 44"/>
-          <p:cNvSpPr/>
-          <p:nvPr/>
-        </p:nvSpPr>
-        <p:spPr>
-          <a:xfrm>
-            <a:off x="2023872" y="4169664"/>
+          <p:cNvPr id="47" name="Text 45"/>
+          <p:cNvSpPr/>
+          <p:nvPr/>
+        </p:nvSpPr>
+        <p:spPr>
+          <a:xfrm>
+            <a:off x="3942207" y="4169664"/>
             <a:ext cx="685800" cy="475488"/>
           </a:xfrm>
           <a:prstGeom prst="rect">
@@ -33695,7 +33578,7 @@
                 <a:ea typeface="Trebuchet MS" pitchFamily="34" charset="-122"/>
                 <a:cs typeface="Trebuchet MS" pitchFamily="34" charset="-120"/>
               </a:rPr>
-              <a:t>o</a:t>
+              <a:t>er</a:t>
             </a:r>
             <a:endParaRPr lang="en-US" sz="900" dirty="0"/>
           </a:p>
@@ -33703,13 +33586,13 @@
       </p:sp>
       <p:sp>
         <p:nvSpPr>
-          <p:cNvPr id="47" name="Shape 45"/>
-          <p:cNvSpPr/>
-          <p:nvPr/>
-        </p:nvSpPr>
-        <p:spPr>
-          <a:xfrm>
-            <a:off x="2831592" y="4169664"/>
+          <p:cNvPr id="48" name="Shape 46"/>
+          <p:cNvSpPr/>
+          <p:nvPr/>
+        </p:nvSpPr>
+        <p:spPr>
+          <a:xfrm>
+            <a:off x="4850892" y="4169664"/>
             <a:ext cx="685800" cy="475488"/>
           </a:xfrm>
           <a:prstGeom prst="rect">
@@ -33730,13 +33613,13 @@
       </p:sp>
       <p:sp>
         <p:nvSpPr>
-          <p:cNvPr id="48" name="Text 46"/>
-          <p:cNvSpPr/>
-          <p:nvPr/>
-        </p:nvSpPr>
-        <p:spPr>
-          <a:xfrm>
-            <a:off x="2831592" y="4169664"/>
+          <p:cNvPr id="49" name="Text 47"/>
+          <p:cNvSpPr/>
+          <p:nvPr/>
+        </p:nvSpPr>
+        <p:spPr>
+          <a:xfrm>
+            <a:off x="4850892" y="4169664"/>
             <a:ext cx="685800" cy="475488"/>
           </a:xfrm>
           <a:prstGeom prst="rect">
@@ -33761,7 +33644,7 @@
                 <a:ea typeface="Trebuchet MS" pitchFamily="34" charset="-122"/>
                 <a:cs typeface="Trebuchet MS" pitchFamily="34" charset="-120"/>
               </a:rPr>
-              <a:t>v</a:t>
+              <a:t>p</a:t>
             </a:r>
             <a:endParaRPr lang="en-US" sz="900" dirty="0"/>
           </a:p>
@@ -33769,13 +33652,13 @@
       </p:sp>
       <p:sp>
         <p:nvSpPr>
-          <p:cNvPr id="49" name="Shape 47"/>
-          <p:cNvSpPr/>
-          <p:nvPr/>
-        </p:nvSpPr>
-        <p:spPr>
-          <a:xfrm>
-            <a:off x="3639312" y="4169664"/>
+          <p:cNvPr id="50" name="Shape 48"/>
+          <p:cNvSpPr/>
+          <p:nvPr/>
+        </p:nvSpPr>
+        <p:spPr>
+          <a:xfrm>
+            <a:off x="5759577" y="4169664"/>
             <a:ext cx="685800" cy="475488"/>
           </a:xfrm>
           <a:prstGeom prst="rect">
@@ -33796,13 +33679,13 @@
       </p:sp>
       <p:sp>
         <p:nvSpPr>
-          <p:cNvPr id="50" name="Text 48"/>
-          <p:cNvSpPr/>
-          <p:nvPr/>
-        </p:nvSpPr>
-        <p:spPr>
-          <a:xfrm>
-            <a:off x="3639312" y="4169664"/>
+          <p:cNvPr id="51" name="Text 49"/>
+          <p:cNvSpPr/>
+          <p:nvPr/>
+        </p:nvSpPr>
+        <p:spPr>
+          <a:xfrm>
+            <a:off x="5759577" y="4169664"/>
             <a:ext cx="685800" cy="475488"/>
           </a:xfrm>
           <a:prstGeom prst="rect">
@@ -33827,7 +33710,7 @@
                 <a:ea typeface="Trebuchet MS" pitchFamily="34" charset="-122"/>
                 <a:cs typeface="Trebuchet MS" pitchFamily="34" charset="-120"/>
               </a:rPr>
-              <a:t>er</a:t>
+              <a:t>ow</a:t>
             </a:r>
             <a:endParaRPr lang="en-US" sz="900" dirty="0"/>
           </a:p>
@@ -33835,13 +33718,13 @@
       </p:sp>
       <p:sp>
         <p:nvSpPr>
-          <p:cNvPr id="51" name="Shape 49"/>
-          <p:cNvSpPr/>
-          <p:nvPr/>
-        </p:nvSpPr>
-        <p:spPr>
-          <a:xfrm>
-            <a:off x="4447032" y="4169664"/>
+          <p:cNvPr id="52" name="Shape 50"/>
+          <p:cNvSpPr/>
+          <p:nvPr/>
+        </p:nvSpPr>
+        <p:spPr>
+          <a:xfrm>
+            <a:off x="6668262" y="4169664"/>
             <a:ext cx="685800" cy="475488"/>
           </a:xfrm>
           <a:prstGeom prst="rect">
@@ -33862,13 +33745,13 @@
       </p:sp>
       <p:sp>
         <p:nvSpPr>
-          <p:cNvPr id="52" name="Text 50"/>
-          <p:cNvSpPr/>
-          <p:nvPr/>
-        </p:nvSpPr>
-        <p:spPr>
-          <a:xfrm>
-            <a:off x="4447032" y="4169664"/>
+          <p:cNvPr id="53" name="Text 51"/>
+          <p:cNvSpPr/>
+          <p:nvPr/>
+        </p:nvSpPr>
+        <p:spPr>
+          <a:xfrm>
+            <a:off x="6668262" y="4169664"/>
             <a:ext cx="685800" cy="475488"/>
           </a:xfrm>
           <a:prstGeom prst="rect">
@@ -33893,7 +33776,7 @@
                 <a:ea typeface="Trebuchet MS" pitchFamily="34" charset="-122"/>
                 <a:cs typeface="Trebuchet MS" pitchFamily="34" charset="-120"/>
               </a:rPr>
-              <a:t>p</a:t>
+              <a:t>er</a:t>
             </a:r>
             <a:endParaRPr lang="en-US" sz="900" dirty="0"/>
           </a:p>
@@ -33901,13 +33784,13 @@
       </p:sp>
       <p:sp>
         <p:nvSpPr>
-          <p:cNvPr id="53" name="Shape 51"/>
-          <p:cNvSpPr/>
-          <p:nvPr/>
-        </p:nvSpPr>
-        <p:spPr>
-          <a:xfrm>
-            <a:off x="5254752" y="4169664"/>
+          <p:cNvPr id="54" name="Shape 52"/>
+          <p:cNvSpPr/>
+          <p:nvPr/>
+        </p:nvSpPr>
+        <p:spPr>
+          <a:xfrm>
+            <a:off x="7576947" y="4169664"/>
             <a:ext cx="685800" cy="475488"/>
           </a:xfrm>
           <a:prstGeom prst="rect">
@@ -33928,13 +33811,13 @@
       </p:sp>
       <p:sp>
         <p:nvSpPr>
-          <p:cNvPr id="54" name="Text 52"/>
-          <p:cNvSpPr/>
-          <p:nvPr/>
-        </p:nvSpPr>
-        <p:spPr>
-          <a:xfrm>
-            <a:off x="5254752" y="4169664"/>
+          <p:cNvPr id="55" name="Text 53"/>
+          <p:cNvSpPr/>
+          <p:nvPr/>
+        </p:nvSpPr>
+        <p:spPr>
+          <a:xfrm>
+            <a:off x="7576947" y="4169664"/>
             <a:ext cx="685800" cy="475488"/>
           </a:xfrm>
           <a:prstGeom prst="rect">
@@ -33959,205 +33842,7 @@
                 <a:ea typeface="Trebuchet MS" pitchFamily="34" charset="-122"/>
                 <a:cs typeface="Trebuchet MS" pitchFamily="34" charset="-120"/>
               </a:rPr>
-              <a:t>ow</a:t>
-            </a:r>
-            <a:endParaRPr lang="en-US" sz="900" dirty="0"/>
-          </a:p>
-        </p:txBody>
-      </p:sp>
-      <p:sp>
-        <p:nvSpPr>
-          <p:cNvPr id="55" name="Shape 53"/>
-          <p:cNvSpPr/>
-          <p:nvPr/>
-        </p:nvSpPr>
-        <p:spPr>
-          <a:xfrm>
-            <a:off x="6062472" y="4169664"/>
-            <a:ext cx="685800" cy="475488"/>
-          </a:xfrm>
-          <a:prstGeom prst="rect">
-            <a:avLst>
-              <a:gd name="adj" fmla="val 7692"/>
-            </a:avLst>
-          </a:prstGeom>
-          <a:solidFill>
-            <a:srgbClr val="FFFFFF"/>
-          </a:solidFill>
-          <a:ln w="12700">
-            <a:solidFill>
-              <a:srgbClr val="DB2777"/>
-            </a:solidFill>
-            <a:prstDash val="solid"/>
-          </a:ln>
-        </p:spPr>
-      </p:sp>
-      <p:sp>
-        <p:nvSpPr>
-          <p:cNvPr id="56" name="Text 54"/>
-          <p:cNvSpPr/>
-          <p:nvPr/>
-        </p:nvSpPr>
-        <p:spPr>
-          <a:xfrm>
-            <a:off x="6062472" y="4169664"/>
-            <a:ext cx="685800" cy="475488"/>
-          </a:xfrm>
-          <a:prstGeom prst="rect">
-            <a:avLst/>
-          </a:prstGeom>
-          <a:noFill/>
-          <a:ln/>
-        </p:spPr>
-        <p:txBody>
-          <a:bodyPr wrap="square" lIns="0" tIns="0" rIns="0" bIns="0" rtlCol="0" anchor="ctr"/>
-          <a:lstStyle/>
-          <a:p>
-            <a:pPr algn="ctr" indent="0" marL="0">
-              <a:buNone/>
-            </a:pPr>
-            <a:r>
-              <a:rPr lang="en-US" sz="900" b="1" dirty="0">
-                <a:solidFill>
-                  <a:srgbClr val="9D174D"/>
-                </a:solidFill>
-                <a:latin typeface="Trebuchet MS" pitchFamily="34" charset="0"/>
-                <a:ea typeface="Trebuchet MS" pitchFamily="34" charset="-122"/>
-                <a:cs typeface="Trebuchet MS" pitchFamily="34" charset="-120"/>
-              </a:rPr>
-              <a:t>er</a:t>
-            </a:r>
-            <a:endParaRPr lang="en-US" sz="900" dirty="0"/>
-          </a:p>
-        </p:txBody>
-      </p:sp>
-      <p:sp>
-        <p:nvSpPr>
-          <p:cNvPr id="57" name="Shape 55"/>
-          <p:cNvSpPr/>
-          <p:nvPr/>
-        </p:nvSpPr>
-        <p:spPr>
-          <a:xfrm>
-            <a:off x="6870192" y="4169664"/>
-            <a:ext cx="685800" cy="475488"/>
-          </a:xfrm>
-          <a:prstGeom prst="rect">
-            <a:avLst>
-              <a:gd name="adj" fmla="val 7692"/>
-            </a:avLst>
-          </a:prstGeom>
-          <a:solidFill>
-            <a:srgbClr val="FFFFFF"/>
-          </a:solidFill>
-          <a:ln w="12700">
-            <a:solidFill>
-              <a:srgbClr val="DB2777"/>
-            </a:solidFill>
-            <a:prstDash val="solid"/>
-          </a:ln>
-        </p:spPr>
-      </p:sp>
-      <p:sp>
-        <p:nvSpPr>
-          <p:cNvPr id="58" name="Text 56"/>
-          <p:cNvSpPr/>
-          <p:nvPr/>
-        </p:nvSpPr>
-        <p:spPr>
-          <a:xfrm>
-            <a:off x="6870192" y="4169664"/>
-            <a:ext cx="685800" cy="475488"/>
-          </a:xfrm>
-          <a:prstGeom prst="rect">
-            <a:avLst/>
-          </a:prstGeom>
-          <a:noFill/>
-          <a:ln/>
-        </p:spPr>
-        <p:txBody>
-          <a:bodyPr wrap="square" lIns="0" tIns="0" rIns="0" bIns="0" rtlCol="0" anchor="ctr"/>
-          <a:lstStyle/>
-          <a:p>
-            <a:pPr algn="ctr" indent="0" marL="0">
-              <a:buNone/>
-            </a:pPr>
-            <a:r>
-              <a:rPr lang="en-US" sz="900" b="1" dirty="0">
-                <a:solidFill>
-                  <a:srgbClr val="9D174D"/>
-                </a:solidFill>
-                <a:latin typeface="Trebuchet MS" pitchFamily="34" charset="0"/>
-                <a:ea typeface="Trebuchet MS" pitchFamily="34" charset="-122"/>
-                <a:cs typeface="Trebuchet MS" pitchFamily="34" charset="-120"/>
-              </a:rPr>
-              <a:t>i</a:t>
-            </a:r>
-            <a:endParaRPr lang="en-US" sz="900" dirty="0"/>
-          </a:p>
-        </p:txBody>
-      </p:sp>
-      <p:sp>
-        <p:nvSpPr>
-          <p:cNvPr id="59" name="Shape 57"/>
-          <p:cNvSpPr/>
-          <p:nvPr/>
-        </p:nvSpPr>
-        <p:spPr>
-          <a:xfrm>
-            <a:off x="7677912" y="4169664"/>
-            <a:ext cx="685800" cy="475488"/>
-          </a:xfrm>
-          <a:prstGeom prst="rect">
-            <a:avLst>
-              <a:gd name="adj" fmla="val 7692"/>
-            </a:avLst>
-          </a:prstGeom>
-          <a:solidFill>
-            <a:srgbClr val="FFFFFF"/>
-          </a:solidFill>
-          <a:ln w="12700">
-            <a:solidFill>
-              <a:srgbClr val="DB2777"/>
-            </a:solidFill>
-            <a:prstDash val="solid"/>
-          </a:ln>
-        </p:spPr>
-      </p:sp>
-      <p:sp>
-        <p:nvSpPr>
-          <p:cNvPr id="60" name="Text 58"/>
-          <p:cNvSpPr/>
-          <p:nvPr/>
-        </p:nvSpPr>
-        <p:spPr>
-          <a:xfrm>
-            <a:off x="7677912" y="4169664"/>
-            <a:ext cx="685800" cy="475488"/>
-          </a:xfrm>
-          <a:prstGeom prst="rect">
-            <a:avLst/>
-          </a:prstGeom>
-          <a:noFill/>
-          <a:ln/>
-        </p:spPr>
-        <p:txBody>
-          <a:bodyPr wrap="square" lIns="0" tIns="0" rIns="0" bIns="0" rtlCol="0" anchor="ctr"/>
-          <a:lstStyle/>
-          <a:p>
-            <a:pPr algn="ctr" indent="0" marL="0">
-              <a:buNone/>
-            </a:pPr>
-            <a:r>
-              <a:rPr lang="en-US" sz="900" b="1" dirty="0">
-                <a:solidFill>
-                  <a:srgbClr val="9D174D"/>
-                </a:solidFill>
-                <a:latin typeface="Trebuchet MS" pitchFamily="34" charset="0"/>
-                <a:ea typeface="Trebuchet MS" pitchFamily="34" charset="-122"/>
-                <a:cs typeface="Trebuchet MS" pitchFamily="34" charset="-120"/>
-              </a:rPr>
-              <a:t>ng</a:t>
+              <a:t>d</a:t>
             </a:r>
             <a:endParaRPr lang="en-US" sz="900" dirty="0"/>
           </a:p>
@@ -36047,7 +35732,7 @@
                 <a:ea typeface="Trebuchet MS" pitchFamily="34" charset="-122"/>
                 <a:cs typeface="Trebuchet MS" pitchFamily="34" charset="-120"/>
               </a:rPr>
-              <a:t>-ful</a:t>
+              <a:t>-ed</a:t>
             </a:r>
             <a:endParaRPr lang="en-US" sz="1300" dirty="0"/>
           </a:p>
@@ -36200,7 +35885,7 @@
                 <a:ea typeface="Trebuchet MS" pitchFamily="34" charset="-122"/>
                 <a:cs typeface="Trebuchet MS" pitchFamily="34" charset="-120"/>
               </a:rPr>
-              <a:t>-less</a:t>
+              <a:t>-ful</a:t>
             </a:r>
             <a:endParaRPr lang="en-US" sz="1300" dirty="0"/>
           </a:p>
@@ -36264,7 +35949,7 @@
                 <a:ea typeface="Trebuchet MS" pitchFamily="34" charset="-122"/>
                 <a:cs typeface="Trebuchet MS" pitchFamily="34" charset="-120"/>
               </a:rPr>
-              <a:t>un-</a:t>
+              <a:t>super-</a:t>
             </a:r>
             <a:endParaRPr lang="en-US" sz="1300" dirty="0"/>
           </a:p>
@@ -36353,7 +36038,7 @@
                 <a:ea typeface="Trebuchet MS" pitchFamily="34" charset="-122"/>
                 <a:cs typeface="Trebuchet MS" pitchFamily="34" charset="-120"/>
               </a:rPr>
-              <a:t>-ed</a:t>
+              <a:t>-house</a:t>
             </a:r>
             <a:endParaRPr lang="en-US" sz="1300" dirty="0"/>
           </a:p>
@@ -36417,7 +36102,7 @@
                 <a:ea typeface="Trebuchet MS" pitchFamily="34" charset="-122"/>
                 <a:cs typeface="Trebuchet MS" pitchFamily="34" charset="-120"/>
               </a:rPr>
-              <a:t>super-</a:t>
+              <a:t>un-</a:t>
             </a:r>
             <a:endParaRPr lang="en-US" sz="1300" dirty="0"/>
           </a:p>
@@ -36570,7 +36255,7 @@
                 <a:ea typeface="Trebuchet MS" pitchFamily="34" charset="-122"/>
                 <a:cs typeface="Trebuchet MS" pitchFamily="34" charset="-120"/>
               </a:rPr>
-              <a:t>re-</a:t>
+              <a:t>water-</a:t>
             </a:r>
             <a:endParaRPr lang="en-US" sz="1300" dirty="0"/>
           </a:p>
@@ -36659,7 +36344,7 @@
                 <a:ea typeface="Trebuchet MS" pitchFamily="34" charset="-122"/>
                 <a:cs typeface="Trebuchet MS" pitchFamily="34" charset="-120"/>
               </a:rPr>
-              <a:t>-house</a:t>
+              <a:t>-less</a:t>
             </a:r>
             <a:endParaRPr lang="en-US" sz="1300" dirty="0"/>
           </a:p>
@@ -37160,7 +36845,7 @@
                 <a:ea typeface="Trebuchet MS" pitchFamily="34" charset="-122"/>
                 <a:cs typeface="Trebuchet MS" pitchFamily="34" charset="-120"/>
               </a:rPr>
-              <a:t>empowering</a:t>
+              <a:t>unpowered</a:t>
             </a:r>
             <a:endParaRPr lang="en-US" sz="1200" dirty="0"/>
           </a:p>
@@ -37226,7 +36911,7 @@
                 <a:ea typeface="Trebuchet MS" pitchFamily="34" charset="-122"/>
                 <a:cs typeface="Trebuchet MS" pitchFamily="34" charset="-120"/>
               </a:rPr>
-              <a:t>overpowering</a:t>
+              <a:t>empowering</a:t>
             </a:r>
             <a:endParaRPr lang="en-US" sz="1200" dirty="0"/>
           </a:p>
@@ -38414,7 +38099,7 @@
                 <a:ea typeface="Calibri" pitchFamily="34" charset="-122"/>
                 <a:cs typeface="Calibri" pitchFamily="34" charset="-120"/>
               </a:rPr>
-              <a:t>1.  The word 'powerless' means having no strength or ability.</a:t>
+              <a:t>1.  The word 'powerless' contains the root 'power' and means having no strength or force.</a:t>
             </a:r>
             <a:endParaRPr lang="en-US" sz="1300" dirty="0"/>
           </a:p>
@@ -38553,7 +38238,7 @@
                 <a:ea typeface="Calibri" pitchFamily="34" charset="-122"/>
                 <a:cs typeface="Calibri" pitchFamily="34" charset="-120"/>
               </a:rPr>
-              <a:t>2.  The prefix 'em' in 'empower' means against or opposite.</a:t>
+              <a:t>2.  Adding the suffix '-ful' to 'power' makes the word 'powerful', which means full of strength.</a:t>
             </a:r>
             <a:endParaRPr lang="en-US" sz="1300" dirty="0"/>
           </a:p>
@@ -38576,11 +38261,11 @@
             </a:avLst>
           </a:prstGeom>
           <a:solidFill>
-            <a:srgbClr val="FEE2E2"/>
-          </a:solidFill>
-          <a:ln w="12700">
-            <a:solidFill>
-              <a:srgbClr val="DC2626"/>
+            <a:srgbClr val="DCFCE7"/>
+          </a:solidFill>
+          <a:ln w="12700">
+            <a:solidFill>
+              <a:srgbClr val="16A34A"/>
             </a:solidFill>
             <a:prstDash val="solid"/>
           </a:ln>
@@ -38613,13 +38298,13 @@
             <a:r>
               <a:rPr lang="en-US" sz="1100" b="1" dirty="0">
                 <a:solidFill>
-                  <a:srgbClr val="DC2626"/>
+                  <a:srgbClr val="16A34A"/>
                 </a:solidFill>
                 <a:latin typeface="Trebuchet MS" pitchFamily="34" charset="0"/>
                 <a:ea typeface="Trebuchet MS" pitchFamily="34" charset="-122"/>
                 <a:cs typeface="Trebuchet MS" pitchFamily="34" charset="-120"/>
               </a:rPr>
-              <a:t>FALSE</a:t>
+              <a:t>TRUE</a:t>
             </a:r>
             <a:endParaRPr lang="en-US" sz="1100" dirty="0"/>
           </a:p>
@@ -38692,7 +38377,7 @@
                 <a:ea typeface="Calibri" pitchFamily="34" charset="-122"/>
                 <a:cs typeface="Calibri" pitchFamily="34" charset="-120"/>
               </a:rPr>
-              <a:t>3.  The word 'powerful' contains the suffix '-ful', meaning full of.</a:t>
+              <a:t>3.  The root 'power' comes from the Greek word for light.</a:t>
             </a:r>
             <a:endParaRPr lang="en-US" sz="1300" dirty="0"/>
           </a:p>
@@ -38715,11 +38400,11 @@
             </a:avLst>
           </a:prstGeom>
           <a:solidFill>
-            <a:srgbClr val="DCFCE7"/>
-          </a:solidFill>
-          <a:ln w="12700">
-            <a:solidFill>
-              <a:srgbClr val="16A34A"/>
+            <a:srgbClr val="FEE2E2"/>
+          </a:solidFill>
+          <a:ln w="12700">
+            <a:solidFill>
+              <a:srgbClr val="DC2626"/>
             </a:solidFill>
             <a:prstDash val="solid"/>
           </a:ln>
@@ -38752,13 +38437,13 @@
             <a:r>
               <a:rPr lang="en-US" sz="1100" b="1" dirty="0">
                 <a:solidFill>
-                  <a:srgbClr val="16A34A"/>
+                  <a:srgbClr val="DC2626"/>
                 </a:solidFill>
                 <a:latin typeface="Trebuchet MS" pitchFamily="34" charset="0"/>
                 <a:ea typeface="Trebuchet MS" pitchFamily="34" charset="-122"/>
                 <a:cs typeface="Trebuchet MS" pitchFamily="34" charset="-120"/>
               </a:rPr>
-              <a:t>TRUE</a:t>
+              <a:t>FALSE</a:t>
             </a:r>
             <a:endParaRPr lang="en-US" sz="1100" dirty="0"/>
           </a:p>
@@ -38831,7 +38516,7 @@
                 <a:ea typeface="Calibri" pitchFamily="34" charset="-122"/>
                 <a:cs typeface="Calibri" pitchFamily="34" charset="-120"/>
               </a:rPr>
-              <a:t>4.  A 'powerhouse' can describe a person who is extremely energetic and productive.</a:t>
+              <a:t>4.  The prefix 'em-' in 'empower' means to give someone power or make them feel capable.</a:t>
             </a:r>
             <a:endParaRPr lang="en-US" sz="1300" dirty="0"/>
           </a:p>
@@ -38970,7 +38655,7 @@
                 <a:ea typeface="Calibri" pitchFamily="34" charset="-122"/>
                 <a:cs typeface="Calibri" pitchFamily="34" charset="-120"/>
               </a:rPr>
-              <a:t>5.  The word 'superpower' means a power that is smaller than normal.</a:t>
+              <a:t>5.  A 'powerhouse' is always a building that stores electricity and nothing else.</a:t>
             </a:r>
             <a:endParaRPr lang="en-US" sz="1300" dirty="0"/>
           </a:p>
@@ -40005,7 +39690,7 @@
                 <a:ea typeface="Trebuchet MS" pitchFamily="34" charset="-122"/>
                 <a:cs typeface="Trebuchet MS" pitchFamily="34" charset="-120"/>
               </a:rPr>
-              <a:t>empowering</a:t>
+              <a:t>unpowered</a:t>
             </a:r>
             <a:endParaRPr lang="en-US" sz="1300" dirty="0"/>
           </a:p>
@@ -40726,7 +40411,7 @@
                 <a:ea typeface="Trebuchet MS" pitchFamily="34" charset="-122"/>
                 <a:cs typeface="Trebuchet MS" pitchFamily="34" charset="-120"/>
               </a:rPr>
-              <a:t>-ful</a:t>
+              <a:t>-ed</a:t>
             </a:r>
             <a:endParaRPr lang="en-US" sz="1300" dirty="0"/>
           </a:p>
@@ -40879,7 +40564,7 @@
                 <a:ea typeface="Trebuchet MS" pitchFamily="34" charset="-122"/>
                 <a:cs typeface="Trebuchet MS" pitchFamily="34" charset="-120"/>
               </a:rPr>
-              <a:t>-less</a:t>
+              <a:t>-ful</a:t>
             </a:r>
             <a:endParaRPr lang="en-US" sz="1300" dirty="0"/>
           </a:p>
@@ -40943,7 +40628,7 @@
                 <a:ea typeface="Trebuchet MS" pitchFamily="34" charset="-122"/>
                 <a:cs typeface="Trebuchet MS" pitchFamily="34" charset="-120"/>
               </a:rPr>
-              <a:t>un-</a:t>
+              <a:t>super-</a:t>
             </a:r>
             <a:endParaRPr lang="en-US" sz="1300" dirty="0"/>
           </a:p>
@@ -41032,7 +40717,7 @@
                 <a:ea typeface="Trebuchet MS" pitchFamily="34" charset="-122"/>
                 <a:cs typeface="Trebuchet MS" pitchFamily="34" charset="-120"/>
               </a:rPr>
-              <a:t>-ed</a:t>
+              <a:t>-house</a:t>
             </a:r>
             <a:endParaRPr lang="en-US" sz="1300" dirty="0"/>
           </a:p>
@@ -41096,7 +40781,7 @@
                 <a:ea typeface="Trebuchet MS" pitchFamily="34" charset="-122"/>
                 <a:cs typeface="Trebuchet MS" pitchFamily="34" charset="-120"/>
               </a:rPr>
-              <a:t>super-</a:t>
+              <a:t>un-</a:t>
             </a:r>
             <a:endParaRPr lang="en-US" sz="1300" dirty="0"/>
           </a:p>
@@ -41249,7 +40934,7 @@
                 <a:ea typeface="Trebuchet MS" pitchFamily="34" charset="-122"/>
                 <a:cs typeface="Trebuchet MS" pitchFamily="34" charset="-120"/>
               </a:rPr>
-              <a:t>re-</a:t>
+              <a:t>water-</a:t>
             </a:r>
             <a:endParaRPr lang="en-US" sz="1300" dirty="0"/>
           </a:p>
@@ -41338,7 +41023,7 @@
                 <a:ea typeface="Trebuchet MS" pitchFamily="34" charset="-122"/>
                 <a:cs typeface="Trebuchet MS" pitchFamily="34" charset="-120"/>
               </a:rPr>
-              <a:t>-house</a:t>
+              <a:t>-less</a:t>
             </a:r>
             <a:endParaRPr lang="en-US" sz="1300" dirty="0"/>
           </a:p>
@@ -41616,7 +41301,7 @@
         <p:spPr>
           <a:xfrm>
             <a:off x="4471416" y="4178808"/>
-            <a:ext cx="950976" cy="420624"/>
+            <a:ext cx="822960" cy="420624"/>
           </a:xfrm>
           <a:prstGeom prst="rect">
             <a:avLst>
@@ -41650,7 +41335,7 @@
         <p:spPr>
           <a:xfrm>
             <a:off x="4471416" y="4178808"/>
-            <a:ext cx="950976" cy="420624"/>
+            <a:ext cx="822960" cy="420624"/>
           </a:xfrm>
           <a:prstGeom prst="rect">
             <a:avLst/>
@@ -41674,7 +41359,7 @@
                 <a:ea typeface="Trebuchet MS" pitchFamily="34" charset="-122"/>
                 <a:cs typeface="Trebuchet MS" pitchFamily="34" charset="-120"/>
               </a:rPr>
-              <a:t>-ful</a:t>
+              <a:t>-ed</a:t>
             </a:r>
             <a:endParaRPr lang="en-US" sz="1300" dirty="0"/>
           </a:p>
@@ -41688,7 +41373,7 @@
         </p:nvSpPr>
         <p:spPr>
           <a:xfrm>
-            <a:off x="5495544" y="4178808"/>
+            <a:off x="5367528" y="4178808"/>
             <a:ext cx="365760" cy="420624"/>
           </a:xfrm>
           <a:prstGeom prst="rect">
@@ -41727,7 +41412,7 @@
         </p:nvSpPr>
         <p:spPr>
           <a:xfrm>
-            <a:off x="5907024" y="4178808"/>
+            <a:off x="5779008" y="4178808"/>
             <a:ext cx="2194560" cy="420624"/>
           </a:xfrm>
           <a:prstGeom prst="rect">
@@ -41754,7 +41439,7 @@
         </p:nvSpPr>
         <p:spPr>
           <a:xfrm>
-            <a:off x="5907024" y="4178808"/>
+            <a:off x="5779008" y="4178808"/>
             <a:ext cx="2194560" cy="420624"/>
           </a:xfrm>
           <a:prstGeom prst="rect">
@@ -42249,7 +41934,7 @@
                 <a:ea typeface="Calibri" pitchFamily="34" charset="-122"/>
                 <a:cs typeface="Calibri" pitchFamily="34" charset="-120"/>
               </a:rPr>
-              <a:t>Feeling confident and strong enough to do something, like being empowered to speak up in class.</a:t>
+              <a:t>Feeling confident and strong enough to do something yourself.</a:t>
             </a:r>
             <a:endParaRPr lang="en-US" sz="1200" dirty="0"/>
           </a:p>
@@ -42388,7 +42073,7 @@
                 <a:ea typeface="Calibri" pitchFamily="34" charset="-122"/>
                 <a:cs typeface="Calibri" pitchFamily="34" charset="-120"/>
               </a:rPr>
-              <a:t>An amazing ability that goes beyond normal, like a superhero's superpower to fly.</a:t>
+              <a:t>An amazing ability, like flying or invisibility, that a superhero might have.</a:t>
             </a:r>
             <a:endParaRPr lang="en-US" sz="1200" dirty="0"/>
           </a:p>
@@ -42527,7 +42212,7 @@
                 <a:ea typeface="Calibri" pitchFamily="34" charset="-122"/>
                 <a:cs typeface="Calibri" pitchFamily="34" charset="-120"/>
               </a:rPr>
-              <a:t>Having a lot of strength or force, like a powerful storm that knocks down trees.</a:t>
+              <a:t>Having a lot of strength or force, like a powerful storm.</a:t>
             </a:r>
             <a:endParaRPr lang="en-US" sz="1200" dirty="0"/>
           </a:p>
@@ -42666,7 +42351,7 @@
                 <a:ea typeface="Calibri" pitchFamily="34" charset="-122"/>
                 <a:cs typeface="Calibri" pitchFamily="34" charset="-120"/>
               </a:rPr>
-              <a:t>A person, team, or thing that is extremely strong or produces a lot of energy.</a:t>
+              <a:t>A person, team, or place that produces a lot of energy or achieves a great deal.</a:t>
             </a:r>
             <a:endParaRPr lang="en-US" sz="1200" dirty="0"/>
           </a:p>
@@ -42805,7 +42490,7 @@
                 <a:ea typeface="Calibri" pitchFamily="34" charset="-122"/>
                 <a:cs typeface="Calibri" pitchFamily="34" charset="-120"/>
               </a:rPr>
-              <a:t>Something that gives you confidence and makes you feel capable of doing great things.</a:t>
+              <a:t>Something that has no engine or power source to make it move.</a:t>
             </a:r>
             <a:endParaRPr lang="en-US" sz="1200" dirty="0"/>
           </a:p>
@@ -42944,7 +42629,7 @@
                 <a:ea typeface="Calibri" pitchFamily="34" charset="-122"/>
                 <a:cs typeface="Calibri" pitchFamily="34" charset="-120"/>
               </a:rPr>
-              <a:t>When something is too strong and takes control, like being overpowered by a stronger opponent in a game.</a:t>
+              <a:t>When someone or something is too strong to be beaten or controlled.</a:t>
             </a:r>
             <a:endParaRPr lang="en-US" sz="1200" dirty="0"/>
           </a:p>
@@ -43017,7 +42702,7 @@
                 <a:ea typeface="Trebuchet MS" pitchFamily="34" charset="-122"/>
                 <a:cs typeface="Trebuchet MS" pitchFamily="34" charset="-120"/>
               </a:rPr>
-              <a:t>empowering</a:t>
+              <a:t>unpowered</a:t>
             </a:r>
             <a:endParaRPr lang="en-US" sz="1200" dirty="0"/>
           </a:p>
@@ -43083,7 +42768,7 @@
                 <a:ea typeface="Calibri" pitchFamily="34" charset="-122"/>
                 <a:cs typeface="Calibri" pitchFamily="34" charset="-120"/>
               </a:rPr>
-              <a:t>Having no strength or ability to do something, like feeling powerless when you can't help a friend.</a:t>
+              <a:t>Not able to do anything to change a situation; having no power.</a:t>
             </a:r>
             <a:endParaRPr lang="en-US" sz="1200" dirty="0"/>
           </a:p>
@@ -43578,7 +43263,7 @@
                 <a:ea typeface="Calibri" pitchFamily="34" charset="-122"/>
                 <a:cs typeface="Calibri" pitchFamily="34" charset="-120"/>
               </a:rPr>
-              <a:t>The powerful engine roared to life as the racing car sped down the track.</a:t>
+              <a:t>The superhero felt truly empowered after she discovered her incredible superpower.</a:t>
             </a:r>
             <a:endParaRPr lang="en-US" sz="1500" dirty="0"/>
           </a:p>
@@ -43742,7 +43427,7 @@
                 <a:ea typeface="Calibri" pitchFamily="34" charset="-122"/>
                 <a:cs typeface="Calibri" pitchFamily="34" charset="-120"/>
               </a:rPr>
-              <a:t>She felt empowered after her teacher praised her science project in front of the whole class.</a:t>
+              <a:t>The powerful waterfall crashed down the rocks, spraying mist everywhere.</a:t>
             </a:r>
             <a:endParaRPr lang="en-US" sz="1500" dirty="0"/>
           </a:p>
@@ -43906,7 +43591,7 @@
                 <a:ea typeface="Calibri" pitchFamily="34" charset="-122"/>
                 <a:cs typeface="Calibri" pitchFamily="34" charset="-120"/>
               </a:rPr>
-              <a:t>Without electricity, the whole neighbourhood felt powerless during the storm.</a:t>
+              <a:t>Without batteries, the toy was completely powerless and wouldn't move at all.</a:t>
             </a:r>
             <a:endParaRPr lang="en-US" sz="1500" dirty="0"/>
           </a:p>

--- a/output/wordlabs-power-3day.pptx
+++ b/output/wordlabs-power-3day.pptx
@@ -33394,7 +33394,7 @@
         </p:nvSpPr>
         <p:spPr>
           <a:xfrm>
-            <a:off x="2124837" y="4169664"/>
+            <a:off x="2023872" y="4169664"/>
             <a:ext cx="685800" cy="475488"/>
           </a:xfrm>
           <a:prstGeom prst="rect">
@@ -33421,7 +33421,7 @@
         </p:nvSpPr>
         <p:spPr>
           <a:xfrm>
-            <a:off x="2124837" y="4169664"/>
+            <a:off x="2023872" y="4169664"/>
             <a:ext cx="685800" cy="475488"/>
           </a:xfrm>
           <a:prstGeom prst="rect">
@@ -33460,7 +33460,7 @@
         </p:nvSpPr>
         <p:spPr>
           <a:xfrm>
-            <a:off x="3033522" y="4169664"/>
+            <a:off x="2831592" y="4169664"/>
             <a:ext cx="685800" cy="475488"/>
           </a:xfrm>
           <a:prstGeom prst="rect">
@@ -33487,7 +33487,7 @@
         </p:nvSpPr>
         <p:spPr>
           <a:xfrm>
-            <a:off x="3033522" y="4169664"/>
+            <a:off x="2831592" y="4169664"/>
             <a:ext cx="685800" cy="475488"/>
           </a:xfrm>
           <a:prstGeom prst="rect">
@@ -33526,7 +33526,7 @@
         </p:nvSpPr>
         <p:spPr>
           <a:xfrm>
-            <a:off x="3942207" y="4169664"/>
+            <a:off x="3639312" y="4169664"/>
             <a:ext cx="685800" cy="475488"/>
           </a:xfrm>
           <a:prstGeom prst="rect">
@@ -33553,7 +33553,7 @@
         </p:nvSpPr>
         <p:spPr>
           <a:xfrm>
-            <a:off x="3942207" y="4169664"/>
+            <a:off x="3639312" y="4169664"/>
             <a:ext cx="685800" cy="475488"/>
           </a:xfrm>
           <a:prstGeom prst="rect">
@@ -33592,7 +33592,7 @@
         </p:nvSpPr>
         <p:spPr>
           <a:xfrm>
-            <a:off x="4850892" y="4169664"/>
+            <a:off x="4447032" y="4169664"/>
             <a:ext cx="685800" cy="475488"/>
           </a:xfrm>
           <a:prstGeom prst="rect">
@@ -33619,7 +33619,7 @@
         </p:nvSpPr>
         <p:spPr>
           <a:xfrm>
-            <a:off x="4850892" y="4169664"/>
+            <a:off x="4447032" y="4169664"/>
             <a:ext cx="685800" cy="475488"/>
           </a:xfrm>
           <a:prstGeom prst="rect">
@@ -33658,7 +33658,7 @@
         </p:nvSpPr>
         <p:spPr>
           <a:xfrm>
-            <a:off x="5759577" y="4169664"/>
+            <a:off x="5254752" y="4169664"/>
             <a:ext cx="685800" cy="475488"/>
           </a:xfrm>
           <a:prstGeom prst="rect">
@@ -33685,7 +33685,7 @@
         </p:nvSpPr>
         <p:spPr>
           <a:xfrm>
-            <a:off x="5759577" y="4169664"/>
+            <a:off x="5254752" y="4169664"/>
             <a:ext cx="685800" cy="475488"/>
           </a:xfrm>
           <a:prstGeom prst="rect">
@@ -33724,7 +33724,7 @@
         </p:nvSpPr>
         <p:spPr>
           <a:xfrm>
-            <a:off x="6668262" y="4169664"/>
+            <a:off x="6062472" y="4169664"/>
             <a:ext cx="685800" cy="475488"/>
           </a:xfrm>
           <a:prstGeom prst="rect">
@@ -33751,7 +33751,7 @@
         </p:nvSpPr>
         <p:spPr>
           <a:xfrm>
-            <a:off x="6668262" y="4169664"/>
+            <a:off x="6062472" y="4169664"/>
             <a:ext cx="685800" cy="475488"/>
           </a:xfrm>
           <a:prstGeom prst="rect">
@@ -33790,7 +33790,7 @@
         </p:nvSpPr>
         <p:spPr>
           <a:xfrm>
-            <a:off x="7576947" y="4169664"/>
+            <a:off x="6870192" y="4169664"/>
             <a:ext cx="685800" cy="475488"/>
           </a:xfrm>
           <a:prstGeom prst="rect">
@@ -33817,7 +33817,73 @@
         </p:nvSpPr>
         <p:spPr>
           <a:xfrm>
-            <a:off x="7576947" y="4169664"/>
+            <a:off x="6870192" y="4169664"/>
+            <a:ext cx="685800" cy="475488"/>
+          </a:xfrm>
+          <a:prstGeom prst="rect">
+            <a:avLst/>
+          </a:prstGeom>
+          <a:noFill/>
+          <a:ln/>
+        </p:spPr>
+        <p:txBody>
+          <a:bodyPr wrap="square" lIns="0" tIns="0" rIns="0" bIns="0" rtlCol="0" anchor="ctr"/>
+          <a:lstStyle/>
+          <a:p>
+            <a:pPr algn="ctr" indent="0" marL="0">
+              <a:buNone/>
+            </a:pPr>
+            <a:r>
+              <a:rPr lang="en-US" sz="900" b="1" dirty="0">
+                <a:solidFill>
+                  <a:srgbClr val="9D174D"/>
+                </a:solidFill>
+                <a:latin typeface="Trebuchet MS" pitchFamily="34" charset="0"/>
+                <a:ea typeface="Trebuchet MS" pitchFamily="34" charset="-122"/>
+                <a:cs typeface="Trebuchet MS" pitchFamily="34" charset="-120"/>
+              </a:rPr>
+              <a:t>e</a:t>
+            </a:r>
+            <a:endParaRPr lang="en-US" sz="900" dirty="0"/>
+          </a:p>
+        </p:txBody>
+      </p:sp>
+      <p:sp>
+        <p:nvSpPr>
+          <p:cNvPr id="56" name="Shape 54"/>
+          <p:cNvSpPr/>
+          <p:nvPr/>
+        </p:nvSpPr>
+        <p:spPr>
+          <a:xfrm>
+            <a:off x="7677912" y="4169664"/>
+            <a:ext cx="685800" cy="475488"/>
+          </a:xfrm>
+          <a:prstGeom prst="rect">
+            <a:avLst>
+              <a:gd name="adj" fmla="val 7692"/>
+            </a:avLst>
+          </a:prstGeom>
+          <a:solidFill>
+            <a:srgbClr val="FFFFFF"/>
+          </a:solidFill>
+          <a:ln w="12700">
+            <a:solidFill>
+              <a:srgbClr val="DB2777"/>
+            </a:solidFill>
+            <a:prstDash val="solid"/>
+          </a:ln>
+        </p:spPr>
+      </p:sp>
+      <p:sp>
+        <p:nvSpPr>
+          <p:cNvPr id="57" name="Text 55"/>
+          <p:cNvSpPr/>
+          <p:nvPr/>
+        </p:nvSpPr>
+        <p:spPr>
+          <a:xfrm>
+            <a:off x="7677912" y="4169664"/>
             <a:ext cx="685800" cy="475488"/>
           </a:xfrm>
           <a:prstGeom prst="rect">
@@ -38238,7 +38304,7 @@
                 <a:ea typeface="Calibri" pitchFamily="34" charset="-122"/>
                 <a:cs typeface="Calibri" pitchFamily="34" charset="-120"/>
               </a:rPr>
-              <a:t>2.  Adding the suffix '-ful' to 'power' makes the word 'powerful', which means full of strength.</a:t>
+              <a:t>2.  A 'powerhouse' is always a building that stores electricity and nothing else.</a:t>
             </a:r>
             <a:endParaRPr lang="en-US" sz="1300" dirty="0"/>
           </a:p>
@@ -38261,11 +38327,11 @@
             </a:avLst>
           </a:prstGeom>
           <a:solidFill>
-            <a:srgbClr val="DCFCE7"/>
-          </a:solidFill>
-          <a:ln w="12700">
-            <a:solidFill>
-              <a:srgbClr val="16A34A"/>
+            <a:srgbClr val="FEE2E2"/>
+          </a:solidFill>
+          <a:ln w="12700">
+            <a:solidFill>
+              <a:srgbClr val="DC2626"/>
             </a:solidFill>
             <a:prstDash val="solid"/>
           </a:ln>
@@ -38298,13 +38364,13 @@
             <a:r>
               <a:rPr lang="en-US" sz="1100" b="1" dirty="0">
                 <a:solidFill>
-                  <a:srgbClr val="16A34A"/>
+                  <a:srgbClr val="DC2626"/>
                 </a:solidFill>
                 <a:latin typeface="Trebuchet MS" pitchFamily="34" charset="0"/>
                 <a:ea typeface="Trebuchet MS" pitchFamily="34" charset="-122"/>
                 <a:cs typeface="Trebuchet MS" pitchFamily="34" charset="-120"/>
               </a:rPr>
-              <a:t>TRUE</a:t>
+              <a:t>FALSE</a:t>
             </a:r>
             <a:endParaRPr lang="en-US" sz="1100" dirty="0"/>
           </a:p>
@@ -38516,7 +38582,7 @@
                 <a:ea typeface="Calibri" pitchFamily="34" charset="-122"/>
                 <a:cs typeface="Calibri" pitchFamily="34" charset="-120"/>
               </a:rPr>
-              <a:t>4.  The prefix 'em-' in 'empower' means to give someone power or make them feel capable.</a:t>
+              <a:t>4.  Adding the suffix '-ful' to 'power' makes the word 'powerful', which means full of strength.</a:t>
             </a:r>
             <a:endParaRPr lang="en-US" sz="1300" dirty="0"/>
           </a:p>
@@ -38655,7 +38721,7 @@
                 <a:ea typeface="Calibri" pitchFamily="34" charset="-122"/>
                 <a:cs typeface="Calibri" pitchFamily="34" charset="-120"/>
               </a:rPr>
-              <a:t>5.  A 'powerhouse' is always a building that stores electricity and nothing else.</a:t>
+              <a:t>5.  The prefix 'em-' in 'empower' means to give someone power or make them feel capable.</a:t>
             </a:r>
             <a:endParaRPr lang="en-US" sz="1300" dirty="0"/>
           </a:p>
@@ -38678,11 +38744,11 @@
             </a:avLst>
           </a:prstGeom>
           <a:solidFill>
-            <a:srgbClr val="FEE2E2"/>
-          </a:solidFill>
-          <a:ln w="12700">
-            <a:solidFill>
-              <a:srgbClr val="DC2626"/>
+            <a:srgbClr val="DCFCE7"/>
+          </a:solidFill>
+          <a:ln w="12700">
+            <a:solidFill>
+              <a:srgbClr val="16A34A"/>
             </a:solidFill>
             <a:prstDash val="solid"/>
           </a:ln>
@@ -38715,13 +38781,13 @@
             <a:r>
               <a:rPr lang="en-US" sz="1100" b="1" dirty="0">
                 <a:solidFill>
-                  <a:srgbClr val="DC2626"/>
+                  <a:srgbClr val="16A34A"/>
                 </a:solidFill>
                 <a:latin typeface="Trebuchet MS" pitchFamily="34" charset="0"/>
                 <a:ea typeface="Trebuchet MS" pitchFamily="34" charset="-122"/>
                 <a:cs typeface="Trebuchet MS" pitchFamily="34" charset="-120"/>
               </a:rPr>
-              <a:t>FALSE</a:t>
+              <a:t>TRUE</a:t>
             </a:r>
             <a:endParaRPr lang="en-US" sz="1100" dirty="0"/>
           </a:p>

--- a/output/wordlabs-power-3day.pptx
+++ b/output/wordlabs-power-3day.pptx
@@ -4240,7 +4240,7 @@
                 <a:ea typeface="Calibri" pitchFamily="34" charset="-122"/>
                 <a:cs typeface="Calibri" pitchFamily="34" charset="-120"/>
               </a:rPr>
-              <a:t>"strength, force, ability"</a:t>
+              <a:t>"strength; control; energy"</a:t>
             </a:r>
             <a:endParaRPr lang="en-US" sz="2200" dirty="0"/>
           </a:p>
@@ -4279,7 +4279,7 @@
                 <a:ea typeface="Calibri" pitchFamily="34" charset="-122"/>
                 <a:cs typeface="Calibri" pitchFamily="34" charset="-120"/>
               </a:rPr>
-              <a:t>Origin: Latin: potere</a:t>
+              <a:t>Origin: Core English root</a:t>
             </a:r>
             <a:endParaRPr lang="en-US" sz="1300" dirty="0"/>
           </a:p>
@@ -5288,7 +5288,7 @@
                 <a:ea typeface="Calibri" pitchFamily="34" charset="-122"/>
                 <a:cs typeface="Calibri" pitchFamily="34" charset="-120"/>
               </a:rPr>
-              <a:t>Word Labs  •  wordlabs.app  •  Root: 'power' = strength, force, ability</a:t>
+              <a:t>Word Labs  •  wordlabs.app  •  Root: 'power' = strength; control; energy</a:t>
             </a:r>
             <a:endParaRPr lang="en-US" sz="800" dirty="0"/>
           </a:p>
@@ -5928,7 +5928,7 @@
                 <a:ea typeface="Calibri" pitchFamily="34" charset="-122"/>
                 <a:cs typeface="Calibri" pitchFamily="34" charset="-120"/>
               </a:rPr>
-              <a:t>Word Labs  •  wordlabs.app  •  Root: 'power' = strength, force, ability</a:t>
+              <a:t>Word Labs  •  wordlabs.app  •  Root: 'power' = strength; control; energy</a:t>
             </a:r>
             <a:endParaRPr lang="en-US" sz="800" dirty="0"/>
           </a:p>
@@ -6040,7 +6040,7 @@
                 <a:ea typeface="Calibri" pitchFamily="34" charset="-122"/>
                 <a:cs typeface="Calibri" pitchFamily="34" charset="-120"/>
               </a:rPr>
-              <a:t>The coach felt </a:t>
+              <a:t>Learning to swim was an </a:t>
             </a:r>
             <a:pPr algn="l" indent="0" marL="0">
               <a:buNone/>
@@ -6071,7 +6071,7 @@
                 <a:ea typeface="Calibri" pitchFamily="34" charset="-122"/>
                 <a:cs typeface="Calibri" pitchFamily="34" charset="-120"/>
               </a:rPr>
-              <a:t> when she helped the </a:t>
+              <a:t> experience for her. The charity focuses on the </a:t>
             </a:r>
             <a:pPr algn="l" indent="0" marL="0">
               <a:buNone/>
@@ -6088,7 +6088,7 @@
                 <a:ea typeface="Calibri" pitchFamily="34" charset="-122"/>
                 <a:cs typeface="Calibri" pitchFamily="34" charset="-120"/>
               </a:rPr>
-              <a:t>powerless</a:t>
+              <a:t>empowerment</a:t>
             </a:r>
             <a:pPr algn="l" indent="0" marL="0">
               <a:buNone/>
@@ -6102,7 +6102,7 @@
                 <a:ea typeface="Calibri" pitchFamily="34" charset="-122"/>
                 <a:cs typeface="Calibri" pitchFamily="34" charset="-120"/>
               </a:rPr>
-              <a:t> team believe in themselves again.</a:t>
+              <a:t> of women in the community.</a:t>
             </a:r>
             <a:endParaRPr lang="en-US" sz="1800" dirty="0"/>
           </a:p>
@@ -6385,7 +6385,7 @@
                 <a:ea typeface="Trebuchet MS" pitchFamily="34" charset="-122"/>
                 <a:cs typeface="Trebuchet MS" pitchFamily="34" charset="-120"/>
               </a:rPr>
-              <a:t>powerless</a:t>
+              <a:t>empowerment</a:t>
             </a:r>
             <a:endParaRPr lang="en-US" sz="1400" dirty="0"/>
           </a:p>
@@ -6716,7 +6716,7 @@
                 <a:ea typeface="Calibri" pitchFamily="34" charset="-122"/>
                 <a:cs typeface="Calibri" pitchFamily="34" charset="-120"/>
               </a:rPr>
-              <a:t>Word Labs  •  wordlabs.app  •  Root: 'power' = strength, force, ability</a:t>
+              <a:t>Word Labs  •  wordlabs.app  •  Root: 'power' = strength; control; energy</a:t>
             </a:r>
             <a:endParaRPr lang="en-US" sz="800" dirty="0"/>
           </a:p>
@@ -7543,7 +7543,7 @@
                 <a:ea typeface="Calibri" pitchFamily="34" charset="-122"/>
                 <a:cs typeface="Calibri" pitchFamily="34" charset="-120"/>
               </a:rPr>
-              <a:t>Word Labs  •  wordlabs.app  •  Root: 'power' = strength, force, ability</a:t>
+              <a:t>Word Labs  •  wordlabs.app  •  Root: 'power' = strength; control; energy</a:t>
             </a:r>
             <a:endParaRPr lang="en-US" sz="800" dirty="0"/>
           </a:p>
@@ -7821,7 +7821,7 @@
                 <a:ea typeface="Trebuchet MS" pitchFamily="34" charset="-122"/>
                 <a:cs typeface="Trebuchet MS" pitchFamily="34" charset="-120"/>
               </a:rPr>
-              <a:t>em</a:t>
+              <a:t>en</a:t>
             </a:r>
             <a:endParaRPr lang="en-US" sz="1300" dirty="0"/>
           </a:p>
@@ -7860,7 +7860,7 @@
                 <a:ea typeface="Calibri" pitchFamily="34" charset="-122"/>
                 <a:cs typeface="Calibri" pitchFamily="34" charset="-120"/>
               </a:rPr>
-              <a:t>to make, to put into</a:t>
+              <a:t>made of; to make</a:t>
             </a:r>
             <a:endParaRPr lang="en-US" sz="850" dirty="0"/>
           </a:p>
@@ -7972,7 +7972,7 @@
                 <a:ea typeface="Calibri" pitchFamily="34" charset="-122"/>
                 <a:cs typeface="Calibri" pitchFamily="34" charset="-120"/>
               </a:rPr>
-              <a:t>strength, force</a:t>
+              <a:t>strength; control; energy</a:t>
             </a:r>
             <a:endParaRPr lang="en-US" sz="850" dirty="0"/>
           </a:p>
@@ -8084,7 +8084,7 @@
                 <a:ea typeface="Calibri" pitchFamily="34" charset="-122"/>
                 <a:cs typeface="Calibri" pitchFamily="34" charset="-120"/>
               </a:rPr>
-              <a:t>action happening now</a:t>
+              <a:t>happening now</a:t>
             </a:r>
             <a:endParaRPr lang="en-US" sz="850" dirty="0"/>
           </a:p>
@@ -8640,7 +8640,7 @@
                 <a:ea typeface="Calibri" pitchFamily="34" charset="-122"/>
                 <a:cs typeface="Calibri" pitchFamily="34" charset="-120"/>
               </a:rPr>
-              <a:t>Word Labs  •  wordlabs.app  •  Root: 'power' = strength, force, ability</a:t>
+              <a:t>Word Labs  •  wordlabs.app  •  Root: 'power' = strength; control; energy</a:t>
             </a:r>
             <a:endParaRPr lang="en-US" sz="800" dirty="0"/>
           </a:p>
@@ -8918,7 +8918,7 @@
                 <a:ea typeface="Trebuchet MS" pitchFamily="34" charset="-122"/>
                 <a:cs typeface="Trebuchet MS" pitchFamily="34" charset="-120"/>
               </a:rPr>
-              <a:t>em</a:t>
+              <a:t>en</a:t>
             </a:r>
             <a:endParaRPr lang="en-US" sz="1300" dirty="0"/>
           </a:p>
@@ -8957,7 +8957,7 @@
                 <a:ea typeface="Calibri" pitchFamily="34" charset="-122"/>
                 <a:cs typeface="Calibri" pitchFamily="34" charset="-120"/>
               </a:rPr>
-              <a:t>to make, to put into</a:t>
+              <a:t>made of; to make</a:t>
             </a:r>
             <a:endParaRPr lang="en-US" sz="850" dirty="0"/>
           </a:p>
@@ -9069,7 +9069,7 @@
                 <a:ea typeface="Calibri" pitchFamily="34" charset="-122"/>
                 <a:cs typeface="Calibri" pitchFamily="34" charset="-120"/>
               </a:rPr>
-              <a:t>strength, force</a:t>
+              <a:t>strength; control; energy</a:t>
             </a:r>
             <a:endParaRPr lang="en-US" sz="850" dirty="0"/>
           </a:p>
@@ -9181,7 +9181,7 @@
                 <a:ea typeface="Calibri" pitchFamily="34" charset="-122"/>
                 <a:cs typeface="Calibri" pitchFamily="34" charset="-120"/>
               </a:rPr>
-              <a:t>action happening now</a:t>
+              <a:t>happening now</a:t>
             </a:r>
             <a:endParaRPr lang="en-US" sz="850" dirty="0"/>
           </a:p>
@@ -10079,7 +10079,7 @@
                 <a:ea typeface="Calibri" pitchFamily="34" charset="-122"/>
                 <a:cs typeface="Calibri" pitchFamily="34" charset="-120"/>
               </a:rPr>
-              <a:t>Word Labs  •  wordlabs.app  •  Root: 'power' = strength, force, ability</a:t>
+              <a:t>Word Labs  •  wordlabs.app  •  Root: 'power' = strength; control; energy</a:t>
             </a:r>
             <a:endParaRPr lang="en-US" sz="800" dirty="0"/>
           </a:p>
@@ -10357,7 +10357,7 @@
                 <a:ea typeface="Trebuchet MS" pitchFamily="34" charset="-122"/>
                 <a:cs typeface="Trebuchet MS" pitchFamily="34" charset="-120"/>
               </a:rPr>
-              <a:t>em</a:t>
+              <a:t>en</a:t>
             </a:r>
             <a:endParaRPr lang="en-US" sz="1300" dirty="0"/>
           </a:p>
@@ -10396,7 +10396,7 @@
                 <a:ea typeface="Calibri" pitchFamily="34" charset="-122"/>
                 <a:cs typeface="Calibri" pitchFamily="34" charset="-120"/>
               </a:rPr>
-              <a:t>to make, to put into</a:t>
+              <a:t>made of; to make</a:t>
             </a:r>
             <a:endParaRPr lang="en-US" sz="850" dirty="0"/>
           </a:p>
@@ -10508,7 +10508,7 @@
                 <a:ea typeface="Calibri" pitchFamily="34" charset="-122"/>
                 <a:cs typeface="Calibri" pitchFamily="34" charset="-120"/>
               </a:rPr>
-              <a:t>strength, force</a:t>
+              <a:t>strength; control; energy</a:t>
             </a:r>
             <a:endParaRPr lang="en-US" sz="850" dirty="0"/>
           </a:p>
@@ -10620,7 +10620,7 @@
                 <a:ea typeface="Calibri" pitchFamily="34" charset="-122"/>
                 <a:cs typeface="Calibri" pitchFamily="34" charset="-120"/>
               </a:rPr>
-              <a:t>action happening now</a:t>
+              <a:t>happening now</a:t>
             </a:r>
             <a:endParaRPr lang="en-US" sz="850" dirty="0"/>
           </a:p>
@@ -11941,7 +11941,7 @@
                 <a:ea typeface="Calibri" pitchFamily="34" charset="-122"/>
                 <a:cs typeface="Calibri" pitchFamily="34" charset="-120"/>
               </a:rPr>
-              <a:t>Word Labs  •  wordlabs.app  •  Root: 'power' = strength, force, ability</a:t>
+              <a:t>Word Labs  •  wordlabs.app  •  Root: 'power' = strength; control; energy</a:t>
             </a:r>
             <a:endParaRPr lang="en-US" sz="800" dirty="0"/>
           </a:p>
@@ -12080,7 +12080,7 @@
                 <a:ea typeface="Trebuchet MS" pitchFamily="34" charset="-122"/>
                 <a:cs typeface="Trebuchet MS" pitchFamily="34" charset="-120"/>
               </a:rPr>
-              <a:t>powerless</a:t>
+              <a:t>empowerment</a:t>
             </a:r>
             <a:endParaRPr lang="en-US" sz="2800" dirty="0"/>
           </a:p>
@@ -12768,7 +12768,7 @@
                 <a:ea typeface="Calibri" pitchFamily="34" charset="-122"/>
                 <a:cs typeface="Calibri" pitchFamily="34" charset="-120"/>
               </a:rPr>
-              <a:t>Word Labs  •  wordlabs.app  •  Root: 'power' = strength, force, ability</a:t>
+              <a:t>Word Labs  •  wordlabs.app  •  Root: 'power' = strength; control; energy</a:t>
             </a:r>
             <a:endParaRPr lang="en-US" sz="800" dirty="0"/>
           </a:p>
@@ -12907,7 +12907,7 @@
                 <a:ea typeface="Trebuchet MS" pitchFamily="34" charset="-122"/>
                 <a:cs typeface="Trebuchet MS" pitchFamily="34" charset="-120"/>
               </a:rPr>
-              <a:t>powerless</a:t>
+              <a:t>empowerment</a:t>
             </a:r>
             <a:endParaRPr lang="en-US" sz="2800" dirty="0"/>
           </a:p>
@@ -12987,7 +12987,7 @@
         </p:nvSpPr>
         <p:spPr>
           <a:xfrm>
-            <a:off x="2938272" y="2258568"/>
+            <a:off x="2221992" y="2258568"/>
             <a:ext cx="1828800" cy="292608"/>
           </a:xfrm>
           <a:prstGeom prst="rect">
@@ -12996,11 +12996,11 @@
             </a:avLst>
           </a:prstGeom>
           <a:solidFill>
-            <a:srgbClr val="CCFBF1"/>
+            <a:srgbClr val="DDD6FE"/>
           </a:solidFill>
           <a:ln w="19050">
             <a:solidFill>
-              <a:srgbClr val="0D9488"/>
+              <a:srgbClr val="7C3AED"/>
             </a:solidFill>
             <a:prstDash val="solid"/>
           </a:ln>
@@ -13021,7 +13021,7 @@
         </p:nvSpPr>
         <p:spPr>
           <a:xfrm>
-            <a:off x="2938272" y="2258568"/>
+            <a:off x="2221992" y="2258568"/>
             <a:ext cx="1828800" cy="292608"/>
           </a:xfrm>
           <a:prstGeom prst="rect">
@@ -13040,13 +13040,13 @@
             <a:r>
               <a:rPr lang="en-US" sz="1300" b="1" dirty="0">
                 <a:solidFill>
-                  <a:srgbClr val="0F766E"/>
+                  <a:srgbClr val="4C1D95"/>
                 </a:solidFill>
                 <a:latin typeface="Trebuchet MS" pitchFamily="34" charset="0"/>
                 <a:ea typeface="Trebuchet MS" pitchFamily="34" charset="-122"/>
                 <a:cs typeface="Trebuchet MS" pitchFamily="34" charset="-120"/>
               </a:rPr>
-              <a:t>power</a:t>
+              <a:t>en</a:t>
             </a:r>
             <a:endParaRPr lang="en-US" sz="1300" dirty="0"/>
           </a:p>
@@ -13060,7 +13060,7 @@
         </p:nvSpPr>
         <p:spPr>
           <a:xfrm>
-            <a:off x="2938272" y="2569464"/>
+            <a:off x="2221992" y="2569464"/>
             <a:ext cx="1828800" cy="201168"/>
           </a:xfrm>
           <a:prstGeom prst="rect">
@@ -13085,7 +13085,7 @@
                 <a:ea typeface="Calibri" pitchFamily="34" charset="-122"/>
                 <a:cs typeface="Calibri" pitchFamily="34" charset="-120"/>
               </a:rPr>
-              <a:t>strength, force</a:t>
+              <a:t>made of; to make</a:t>
             </a:r>
             <a:endParaRPr lang="en-US" sz="850" dirty="0"/>
           </a:p>
@@ -13099,7 +13099,7 @@
         </p:nvSpPr>
         <p:spPr>
           <a:xfrm>
-            <a:off x="5803392" y="2258568"/>
+            <a:off x="4370832" y="2258568"/>
             <a:ext cx="1828800" cy="292608"/>
           </a:xfrm>
           <a:prstGeom prst="rect">
@@ -13108,11 +13108,11 @@
             </a:avLst>
           </a:prstGeom>
           <a:solidFill>
-            <a:srgbClr val="DDD6FE"/>
+            <a:srgbClr val="CCFBF1"/>
           </a:solidFill>
           <a:ln w="19050">
             <a:solidFill>
-              <a:srgbClr val="7C3AED"/>
+              <a:srgbClr val="0D9488"/>
             </a:solidFill>
             <a:prstDash val="solid"/>
           </a:ln>
@@ -13133,7 +13133,7 @@
         </p:nvSpPr>
         <p:spPr>
           <a:xfrm>
-            <a:off x="5803392" y="2258568"/>
+            <a:off x="4370832" y="2258568"/>
             <a:ext cx="1828800" cy="292608"/>
           </a:xfrm>
           <a:prstGeom prst="rect">
@@ -13152,13 +13152,13 @@
             <a:r>
               <a:rPr lang="en-US" sz="1300" b="1" dirty="0">
                 <a:solidFill>
-                  <a:srgbClr val="4C1D95"/>
+                  <a:srgbClr val="0F766E"/>
                 </a:solidFill>
                 <a:latin typeface="Trebuchet MS" pitchFamily="34" charset="0"/>
                 <a:ea typeface="Trebuchet MS" pitchFamily="34" charset="-122"/>
                 <a:cs typeface="Trebuchet MS" pitchFamily="34" charset="-120"/>
               </a:rPr>
-              <a:t>less</a:t>
+              <a:t>power</a:t>
             </a:r>
             <a:endParaRPr lang="en-US" sz="1300" dirty="0"/>
           </a:p>
@@ -13172,7 +13172,7 @@
         </p:nvSpPr>
         <p:spPr>
           <a:xfrm>
-            <a:off x="5803392" y="2569464"/>
+            <a:off x="4370832" y="2569464"/>
             <a:ext cx="1828800" cy="201168"/>
           </a:xfrm>
           <a:prstGeom prst="rect">
@@ -13197,7 +13197,7 @@
                 <a:ea typeface="Calibri" pitchFamily="34" charset="-122"/>
                 <a:cs typeface="Calibri" pitchFamily="34" charset="-120"/>
               </a:rPr>
-              <a:t>without</a:t>
+              <a:t>strength; control; energy</a:t>
             </a:r>
             <a:endParaRPr lang="en-US" sz="850" dirty="0"/>
           </a:p>
@@ -13206,6 +13206,118 @@
       <p:sp>
         <p:nvSpPr>
           <p:cNvPr id="22" name="Shape 20"/>
+          <p:cNvSpPr/>
+          <p:nvPr/>
+        </p:nvSpPr>
+        <p:spPr>
+          <a:xfrm>
+            <a:off x="6519672" y="2258568"/>
+            <a:ext cx="1828800" cy="292608"/>
+          </a:xfrm>
+          <a:prstGeom prst="rect">
+            <a:avLst>
+              <a:gd name="adj" fmla="val 25000"/>
+            </a:avLst>
+          </a:prstGeom>
+          <a:solidFill>
+            <a:srgbClr val="FCE7F3"/>
+          </a:solidFill>
+          <a:ln w="19050">
+            <a:solidFill>
+              <a:srgbClr val="DB2777"/>
+            </a:solidFill>
+            <a:prstDash val="solid"/>
+          </a:ln>
+          <a:effectLst>
+            <a:outerShdw sx="100000" sy="100000" kx="0" ky="0" algn="bl" rotWithShape="0" blurRad="101600" dist="38100" dir="8100000">
+              <a:srgbClr val="000000">
+                <a:alpha val="12000"/>
+              </a:srgbClr>
+            </a:outerShdw>
+          </a:effectLst>
+        </p:spPr>
+      </p:sp>
+      <p:sp>
+        <p:nvSpPr>
+          <p:cNvPr id="23" name="Text 21"/>
+          <p:cNvSpPr/>
+          <p:nvPr/>
+        </p:nvSpPr>
+        <p:spPr>
+          <a:xfrm>
+            <a:off x="6519672" y="2258568"/>
+            <a:ext cx="1828800" cy="292608"/>
+          </a:xfrm>
+          <a:prstGeom prst="rect">
+            <a:avLst/>
+          </a:prstGeom>
+          <a:noFill/>
+          <a:ln/>
+        </p:spPr>
+        <p:txBody>
+          <a:bodyPr wrap="square" lIns="0" tIns="0" rIns="0" bIns="0" rtlCol="0" anchor="ctr"/>
+          <a:lstStyle/>
+          <a:p>
+            <a:pPr algn="ctr" indent="0" marL="0">
+              <a:buNone/>
+            </a:pPr>
+            <a:r>
+              <a:rPr lang="en-US" sz="1300" b="1" dirty="0">
+                <a:solidFill>
+                  <a:srgbClr val="9D174D"/>
+                </a:solidFill>
+                <a:latin typeface="Trebuchet MS" pitchFamily="34" charset="0"/>
+                <a:ea typeface="Trebuchet MS" pitchFamily="34" charset="-122"/>
+                <a:cs typeface="Trebuchet MS" pitchFamily="34" charset="-120"/>
+              </a:rPr>
+              <a:t>ment</a:t>
+            </a:r>
+            <a:endParaRPr lang="en-US" sz="1300" dirty="0"/>
+          </a:p>
+        </p:txBody>
+      </p:sp>
+      <p:sp>
+        <p:nvSpPr>
+          <p:cNvPr id="24" name="Text 22"/>
+          <p:cNvSpPr/>
+          <p:nvPr/>
+        </p:nvSpPr>
+        <p:spPr>
+          <a:xfrm>
+            <a:off x="6519672" y="2569464"/>
+            <a:ext cx="1828800" cy="201168"/>
+          </a:xfrm>
+          <a:prstGeom prst="rect">
+            <a:avLst/>
+          </a:prstGeom>
+          <a:noFill/>
+          <a:ln/>
+        </p:spPr>
+        <p:txBody>
+          <a:bodyPr wrap="square" lIns="0" tIns="0" rIns="0" bIns="0" rtlCol="0" anchor="t"/>
+          <a:lstStyle/>
+          <a:p>
+            <a:pPr algn="ctr" indent="0" marL="0">
+              <a:buNone/>
+            </a:pPr>
+            <a:r>
+              <a:rPr lang="en-US" sz="850" dirty="0">
+                <a:solidFill>
+                  <a:srgbClr val="475569"/>
+                </a:solidFill>
+                <a:latin typeface="Calibri" pitchFamily="34" charset="0"/>
+                <a:ea typeface="Calibri" pitchFamily="34" charset="-122"/>
+                <a:cs typeface="Calibri" pitchFamily="34" charset="-120"/>
+              </a:rPr>
+              <a:t>result of action</a:t>
+            </a:r>
+            <a:endParaRPr lang="en-US" sz="850" dirty="0"/>
+          </a:p>
+        </p:txBody>
+      </p:sp>
+      <p:sp>
+        <p:nvSpPr>
+          <p:cNvPr id="25" name="Shape 23"/>
           <p:cNvSpPr/>
           <p:nvPr/>
         </p:nvSpPr>
@@ -13232,7 +13344,7 @@
       </p:sp>
       <p:sp>
         <p:nvSpPr>
-          <p:cNvPr id="23" name="Text 21"/>
+          <p:cNvPr id="26" name="Text 24"/>
           <p:cNvSpPr/>
           <p:nvPr/>
         </p:nvSpPr>
@@ -13271,7 +13383,7 @@
       </p:sp>
       <p:sp>
         <p:nvSpPr>
-          <p:cNvPr id="24" name="Shape 22"/>
+          <p:cNvPr id="27" name="Shape 25"/>
           <p:cNvSpPr/>
           <p:nvPr/>
         </p:nvSpPr>
@@ -13298,7 +13410,7 @@
       </p:sp>
       <p:sp>
         <p:nvSpPr>
-          <p:cNvPr id="25" name="Text 23"/>
+          <p:cNvPr id="28" name="Text 26"/>
           <p:cNvSpPr/>
           <p:nvPr/>
         </p:nvSpPr>
@@ -13337,7 +13449,7 @@
       </p:sp>
       <p:sp>
         <p:nvSpPr>
-          <p:cNvPr id="26" name="Shape 24"/>
+          <p:cNvPr id="29" name="Shape 27"/>
           <p:cNvSpPr/>
           <p:nvPr/>
         </p:nvSpPr>
@@ -13364,7 +13476,7 @@
       </p:sp>
       <p:sp>
         <p:nvSpPr>
-          <p:cNvPr id="27" name="Text 25"/>
+          <p:cNvPr id="30" name="Text 28"/>
           <p:cNvSpPr/>
           <p:nvPr/>
         </p:nvSpPr>
@@ -13403,7 +13515,7 @@
       </p:sp>
       <p:sp>
         <p:nvSpPr>
-          <p:cNvPr id="28" name="Shape 26"/>
+          <p:cNvPr id="31" name="Shape 29"/>
           <p:cNvSpPr/>
           <p:nvPr/>
         </p:nvSpPr>
@@ -13430,7 +13542,7 @@
       </p:sp>
       <p:sp>
         <p:nvSpPr>
-          <p:cNvPr id="29" name="Text 27"/>
+          <p:cNvPr id="32" name="Text 30"/>
           <p:cNvSpPr/>
           <p:nvPr/>
         </p:nvSpPr>
@@ -13753,7 +13865,7 @@
                 <a:ea typeface="Calibri" pitchFamily="34" charset="-122"/>
                 <a:cs typeface="Calibri" pitchFamily="34" charset="-120"/>
               </a:rPr>
-              <a:t>Word Labs  •  wordlabs.app  •  Root: 'power' = strength, force, ability</a:t>
+              <a:t>Word Labs  •  wordlabs.app  •  Root: 'power' = strength; control; energy</a:t>
             </a:r>
             <a:endParaRPr lang="en-US" sz="800" dirty="0"/>
           </a:p>
@@ -13892,7 +14004,7 @@
                 <a:ea typeface="Trebuchet MS" pitchFamily="34" charset="-122"/>
                 <a:cs typeface="Trebuchet MS" pitchFamily="34" charset="-120"/>
               </a:rPr>
-              <a:t>powerless</a:t>
+              <a:t>empowerment</a:t>
             </a:r>
             <a:endParaRPr lang="en-US" sz="2800" dirty="0"/>
           </a:p>
@@ -13972,7 +14084,7 @@
         </p:nvSpPr>
         <p:spPr>
           <a:xfrm>
-            <a:off x="2938272" y="2258568"/>
+            <a:off x="2221992" y="2258568"/>
             <a:ext cx="1828800" cy="292608"/>
           </a:xfrm>
           <a:prstGeom prst="rect">
@@ -13981,11 +14093,11 @@
             </a:avLst>
           </a:prstGeom>
           <a:solidFill>
-            <a:srgbClr val="CCFBF1"/>
+            <a:srgbClr val="DDD6FE"/>
           </a:solidFill>
           <a:ln w="19050">
             <a:solidFill>
-              <a:srgbClr val="0D9488"/>
+              <a:srgbClr val="7C3AED"/>
             </a:solidFill>
             <a:prstDash val="solid"/>
           </a:ln>
@@ -14006,7 +14118,7 @@
         </p:nvSpPr>
         <p:spPr>
           <a:xfrm>
-            <a:off x="2938272" y="2258568"/>
+            <a:off x="2221992" y="2258568"/>
             <a:ext cx="1828800" cy="292608"/>
           </a:xfrm>
           <a:prstGeom prst="rect">
@@ -14025,13 +14137,13 @@
             <a:r>
               <a:rPr lang="en-US" sz="1300" b="1" dirty="0">
                 <a:solidFill>
-                  <a:srgbClr val="0F766E"/>
+                  <a:srgbClr val="4C1D95"/>
                 </a:solidFill>
                 <a:latin typeface="Trebuchet MS" pitchFamily="34" charset="0"/>
                 <a:ea typeface="Trebuchet MS" pitchFamily="34" charset="-122"/>
                 <a:cs typeface="Trebuchet MS" pitchFamily="34" charset="-120"/>
               </a:rPr>
-              <a:t>power</a:t>
+              <a:t>en</a:t>
             </a:r>
             <a:endParaRPr lang="en-US" sz="1300" dirty="0"/>
           </a:p>
@@ -14045,7 +14157,7 @@
         </p:nvSpPr>
         <p:spPr>
           <a:xfrm>
-            <a:off x="2938272" y="2569464"/>
+            <a:off x="2221992" y="2569464"/>
             <a:ext cx="1828800" cy="201168"/>
           </a:xfrm>
           <a:prstGeom prst="rect">
@@ -14070,7 +14182,7 @@
                 <a:ea typeface="Calibri" pitchFamily="34" charset="-122"/>
                 <a:cs typeface="Calibri" pitchFamily="34" charset="-120"/>
               </a:rPr>
-              <a:t>strength, force</a:t>
+              <a:t>made of; to make</a:t>
             </a:r>
             <a:endParaRPr lang="en-US" sz="850" dirty="0"/>
           </a:p>
@@ -14084,7 +14196,7 @@
         </p:nvSpPr>
         <p:spPr>
           <a:xfrm>
-            <a:off x="5803392" y="2258568"/>
+            <a:off x="4370832" y="2258568"/>
             <a:ext cx="1828800" cy="292608"/>
           </a:xfrm>
           <a:prstGeom prst="rect">
@@ -14093,11 +14205,11 @@
             </a:avLst>
           </a:prstGeom>
           <a:solidFill>
-            <a:srgbClr val="DDD6FE"/>
+            <a:srgbClr val="CCFBF1"/>
           </a:solidFill>
           <a:ln w="19050">
             <a:solidFill>
-              <a:srgbClr val="7C3AED"/>
+              <a:srgbClr val="0D9488"/>
             </a:solidFill>
             <a:prstDash val="solid"/>
           </a:ln>
@@ -14118,7 +14230,7 @@
         </p:nvSpPr>
         <p:spPr>
           <a:xfrm>
-            <a:off x="5803392" y="2258568"/>
+            <a:off x="4370832" y="2258568"/>
             <a:ext cx="1828800" cy="292608"/>
           </a:xfrm>
           <a:prstGeom prst="rect">
@@ -14137,13 +14249,13 @@
             <a:r>
               <a:rPr lang="en-US" sz="1300" b="1" dirty="0">
                 <a:solidFill>
-                  <a:srgbClr val="4C1D95"/>
+                  <a:srgbClr val="0F766E"/>
                 </a:solidFill>
                 <a:latin typeface="Trebuchet MS" pitchFamily="34" charset="0"/>
                 <a:ea typeface="Trebuchet MS" pitchFamily="34" charset="-122"/>
                 <a:cs typeface="Trebuchet MS" pitchFamily="34" charset="-120"/>
               </a:rPr>
-              <a:t>less</a:t>
+              <a:t>power</a:t>
             </a:r>
             <a:endParaRPr lang="en-US" sz="1300" dirty="0"/>
           </a:p>
@@ -14157,7 +14269,7 @@
         </p:nvSpPr>
         <p:spPr>
           <a:xfrm>
-            <a:off x="5803392" y="2569464"/>
+            <a:off x="4370832" y="2569464"/>
             <a:ext cx="1828800" cy="201168"/>
           </a:xfrm>
           <a:prstGeom prst="rect">
@@ -14182,7 +14294,7 @@
                 <a:ea typeface="Calibri" pitchFamily="34" charset="-122"/>
                 <a:cs typeface="Calibri" pitchFamily="34" charset="-120"/>
               </a:rPr>
-              <a:t>without</a:t>
+              <a:t>strength; control; energy</a:t>
             </a:r>
             <a:endParaRPr lang="en-US" sz="850" dirty="0"/>
           </a:p>
@@ -14191,6 +14303,118 @@
       <p:sp>
         <p:nvSpPr>
           <p:cNvPr id="22" name="Shape 20"/>
+          <p:cNvSpPr/>
+          <p:nvPr/>
+        </p:nvSpPr>
+        <p:spPr>
+          <a:xfrm>
+            <a:off x="6519672" y="2258568"/>
+            <a:ext cx="1828800" cy="292608"/>
+          </a:xfrm>
+          <a:prstGeom prst="rect">
+            <a:avLst>
+              <a:gd name="adj" fmla="val 25000"/>
+            </a:avLst>
+          </a:prstGeom>
+          <a:solidFill>
+            <a:srgbClr val="FCE7F3"/>
+          </a:solidFill>
+          <a:ln w="19050">
+            <a:solidFill>
+              <a:srgbClr val="DB2777"/>
+            </a:solidFill>
+            <a:prstDash val="solid"/>
+          </a:ln>
+          <a:effectLst>
+            <a:outerShdw sx="100000" sy="100000" kx="0" ky="0" algn="bl" rotWithShape="0" blurRad="101600" dist="38100" dir="8100000">
+              <a:srgbClr val="000000">
+                <a:alpha val="12000"/>
+              </a:srgbClr>
+            </a:outerShdw>
+          </a:effectLst>
+        </p:spPr>
+      </p:sp>
+      <p:sp>
+        <p:nvSpPr>
+          <p:cNvPr id="23" name="Text 21"/>
+          <p:cNvSpPr/>
+          <p:nvPr/>
+        </p:nvSpPr>
+        <p:spPr>
+          <a:xfrm>
+            <a:off x="6519672" y="2258568"/>
+            <a:ext cx="1828800" cy="292608"/>
+          </a:xfrm>
+          <a:prstGeom prst="rect">
+            <a:avLst/>
+          </a:prstGeom>
+          <a:noFill/>
+          <a:ln/>
+        </p:spPr>
+        <p:txBody>
+          <a:bodyPr wrap="square" lIns="0" tIns="0" rIns="0" bIns="0" rtlCol="0" anchor="ctr"/>
+          <a:lstStyle/>
+          <a:p>
+            <a:pPr algn="ctr" indent="0" marL="0">
+              <a:buNone/>
+            </a:pPr>
+            <a:r>
+              <a:rPr lang="en-US" sz="1300" b="1" dirty="0">
+                <a:solidFill>
+                  <a:srgbClr val="9D174D"/>
+                </a:solidFill>
+                <a:latin typeface="Trebuchet MS" pitchFamily="34" charset="0"/>
+                <a:ea typeface="Trebuchet MS" pitchFamily="34" charset="-122"/>
+                <a:cs typeface="Trebuchet MS" pitchFamily="34" charset="-120"/>
+              </a:rPr>
+              <a:t>ment</a:t>
+            </a:r>
+            <a:endParaRPr lang="en-US" sz="1300" dirty="0"/>
+          </a:p>
+        </p:txBody>
+      </p:sp>
+      <p:sp>
+        <p:nvSpPr>
+          <p:cNvPr id="24" name="Text 22"/>
+          <p:cNvSpPr/>
+          <p:nvPr/>
+        </p:nvSpPr>
+        <p:spPr>
+          <a:xfrm>
+            <a:off x="6519672" y="2569464"/>
+            <a:ext cx="1828800" cy="201168"/>
+          </a:xfrm>
+          <a:prstGeom prst="rect">
+            <a:avLst/>
+          </a:prstGeom>
+          <a:noFill/>
+          <a:ln/>
+        </p:spPr>
+        <p:txBody>
+          <a:bodyPr wrap="square" lIns="0" tIns="0" rIns="0" bIns="0" rtlCol="0" anchor="t"/>
+          <a:lstStyle/>
+          <a:p>
+            <a:pPr algn="ctr" indent="0" marL="0">
+              <a:buNone/>
+            </a:pPr>
+            <a:r>
+              <a:rPr lang="en-US" sz="850" dirty="0">
+                <a:solidFill>
+                  <a:srgbClr val="475569"/>
+                </a:solidFill>
+                <a:latin typeface="Calibri" pitchFamily="34" charset="0"/>
+                <a:ea typeface="Calibri" pitchFamily="34" charset="-122"/>
+                <a:cs typeface="Calibri" pitchFamily="34" charset="-120"/>
+              </a:rPr>
+              <a:t>result of action</a:t>
+            </a:r>
+            <a:endParaRPr lang="en-US" sz="850" dirty="0"/>
+          </a:p>
+        </p:txBody>
+      </p:sp>
+      <p:sp>
+        <p:nvSpPr>
+          <p:cNvPr id="25" name="Shape 23"/>
           <p:cNvSpPr/>
           <p:nvPr/>
         </p:nvSpPr>
@@ -14217,7 +14441,7 @@
       </p:sp>
       <p:sp>
         <p:nvSpPr>
-          <p:cNvPr id="23" name="Text 21"/>
+          <p:cNvPr id="26" name="Text 24"/>
           <p:cNvSpPr/>
           <p:nvPr/>
         </p:nvSpPr>
@@ -14256,7 +14480,7 @@
       </p:sp>
       <p:sp>
         <p:nvSpPr>
-          <p:cNvPr id="24" name="Shape 22"/>
+          <p:cNvPr id="27" name="Shape 25"/>
           <p:cNvSpPr/>
           <p:nvPr/>
         </p:nvSpPr>
@@ -14283,14 +14507,14 @@
       </p:sp>
       <p:sp>
         <p:nvSpPr>
-          <p:cNvPr id="25" name="Shape 23"/>
-          <p:cNvSpPr/>
-          <p:nvPr/>
-        </p:nvSpPr>
-        <p:spPr>
-          <a:xfrm>
-            <a:off x="2313432" y="3364992"/>
-            <a:ext cx="1645920" cy="475488"/>
+          <p:cNvPr id="28" name="Shape 26"/>
+          <p:cNvSpPr/>
+          <p:nvPr/>
+        </p:nvSpPr>
+        <p:spPr>
+          <a:xfrm>
+            <a:off x="1975104" y="3364992"/>
+            <a:ext cx="1554480" cy="475488"/>
           </a:xfrm>
           <a:prstGeom prst="rect">
             <a:avLst>
@@ -14310,14 +14534,14 @@
       </p:sp>
       <p:sp>
         <p:nvSpPr>
-          <p:cNvPr id="26" name="Text 24"/>
-          <p:cNvSpPr/>
-          <p:nvPr/>
-        </p:nvSpPr>
-        <p:spPr>
-          <a:xfrm>
-            <a:off x="2313432" y="3364992"/>
-            <a:ext cx="1645920" cy="475488"/>
+          <p:cNvPr id="29" name="Text 27"/>
+          <p:cNvSpPr/>
+          <p:nvPr/>
+        </p:nvSpPr>
+        <p:spPr>
+          <a:xfrm>
+            <a:off x="1975104" y="3364992"/>
+            <a:ext cx="1554480" cy="475488"/>
           </a:xfrm>
           <a:prstGeom prst="rect">
             <a:avLst/>
@@ -14341,7 +14565,7 @@
                 <a:ea typeface="Trebuchet MS" pitchFamily="34" charset="-122"/>
                 <a:cs typeface="Trebuchet MS" pitchFamily="34" charset="-120"/>
               </a:rPr>
-              <a:t>pow</a:t>
+              <a:t>em</a:t>
             </a:r>
             <a:endParaRPr lang="en-US" sz="1400" dirty="0"/>
           </a:p>
@@ -14349,14 +14573,14 @@
       </p:sp>
       <p:sp>
         <p:nvSpPr>
-          <p:cNvPr id="27" name="Text 25"/>
-          <p:cNvSpPr/>
-          <p:nvPr/>
-        </p:nvSpPr>
-        <p:spPr>
-          <a:xfrm>
-            <a:off x="3959352" y="3364992"/>
-            <a:ext cx="411480" cy="475488"/>
+          <p:cNvPr id="30" name="Text 28"/>
+          <p:cNvSpPr/>
+          <p:nvPr/>
+        </p:nvSpPr>
+        <p:spPr>
+          <a:xfrm>
+            <a:off x="3529584" y="3364992"/>
+            <a:ext cx="73152" cy="475488"/>
           </a:xfrm>
           <a:prstGeom prst="rect">
             <a:avLst/>
@@ -14388,14 +14612,14 @@
       </p:sp>
       <p:sp>
         <p:nvSpPr>
-          <p:cNvPr id="28" name="Shape 26"/>
-          <p:cNvSpPr/>
-          <p:nvPr/>
-        </p:nvSpPr>
-        <p:spPr>
-          <a:xfrm>
-            <a:off x="4370832" y="3364992"/>
-            <a:ext cx="1645920" cy="475488"/>
+          <p:cNvPr id="31" name="Shape 29"/>
+          <p:cNvSpPr/>
+          <p:nvPr/>
+        </p:nvSpPr>
+        <p:spPr>
+          <a:xfrm>
+            <a:off x="3602736" y="3364992"/>
+            <a:ext cx="1554480" cy="475488"/>
           </a:xfrm>
           <a:prstGeom prst="rect">
             <a:avLst>
@@ -14415,14 +14639,14 @@
       </p:sp>
       <p:sp>
         <p:nvSpPr>
-          <p:cNvPr id="29" name="Text 27"/>
-          <p:cNvSpPr/>
-          <p:nvPr/>
-        </p:nvSpPr>
-        <p:spPr>
-          <a:xfrm>
-            <a:off x="4370832" y="3364992"/>
-            <a:ext cx="1645920" cy="475488"/>
+          <p:cNvPr id="32" name="Text 30"/>
+          <p:cNvSpPr/>
+          <p:nvPr/>
+        </p:nvSpPr>
+        <p:spPr>
+          <a:xfrm>
+            <a:off x="3602736" y="3364992"/>
+            <a:ext cx="1554480" cy="475488"/>
           </a:xfrm>
           <a:prstGeom prst="rect">
             <a:avLst/>
@@ -14446,7 +14670,7 @@
                 <a:ea typeface="Trebuchet MS" pitchFamily="34" charset="-122"/>
                 <a:cs typeface="Trebuchet MS" pitchFamily="34" charset="-120"/>
               </a:rPr>
-              <a:t>er</a:t>
+              <a:t>pow</a:t>
             </a:r>
             <a:endParaRPr lang="en-US" sz="1400" dirty="0"/>
           </a:p>
@@ -14454,14 +14678,14 @@
       </p:sp>
       <p:sp>
         <p:nvSpPr>
-          <p:cNvPr id="30" name="Text 28"/>
-          <p:cNvSpPr/>
-          <p:nvPr/>
-        </p:nvSpPr>
-        <p:spPr>
-          <a:xfrm>
-            <a:off x="6016752" y="3364992"/>
-            <a:ext cx="411480" cy="475488"/>
+          <p:cNvPr id="33" name="Text 31"/>
+          <p:cNvSpPr/>
+          <p:nvPr/>
+        </p:nvSpPr>
+        <p:spPr>
+          <a:xfrm>
+            <a:off x="5157216" y="3364992"/>
+            <a:ext cx="73152" cy="475488"/>
           </a:xfrm>
           <a:prstGeom prst="rect">
             <a:avLst/>
@@ -14493,14 +14717,14 @@
       </p:sp>
       <p:sp>
         <p:nvSpPr>
-          <p:cNvPr id="31" name="Shape 29"/>
-          <p:cNvSpPr/>
-          <p:nvPr/>
-        </p:nvSpPr>
-        <p:spPr>
-          <a:xfrm>
-            <a:off x="6428232" y="3364992"/>
-            <a:ext cx="1645920" cy="475488"/>
+          <p:cNvPr id="34" name="Shape 32"/>
+          <p:cNvSpPr/>
+          <p:nvPr/>
+        </p:nvSpPr>
+        <p:spPr>
+          <a:xfrm>
+            <a:off x="5230368" y="3364992"/>
+            <a:ext cx="1554480" cy="475488"/>
           </a:xfrm>
           <a:prstGeom prst="rect">
             <a:avLst>
@@ -14520,14 +14744,14 @@
       </p:sp>
       <p:sp>
         <p:nvSpPr>
-          <p:cNvPr id="32" name="Text 30"/>
-          <p:cNvSpPr/>
-          <p:nvPr/>
-        </p:nvSpPr>
-        <p:spPr>
-          <a:xfrm>
-            <a:off x="6428232" y="3364992"/>
-            <a:ext cx="1645920" cy="475488"/>
+          <p:cNvPr id="35" name="Text 33"/>
+          <p:cNvSpPr/>
+          <p:nvPr/>
+        </p:nvSpPr>
+        <p:spPr>
+          <a:xfrm>
+            <a:off x="5230368" y="3364992"/>
+            <a:ext cx="1554480" cy="475488"/>
           </a:xfrm>
           <a:prstGeom prst="rect">
             <a:avLst/>
@@ -14551,7 +14775,7 @@
                 <a:ea typeface="Trebuchet MS" pitchFamily="34" charset="-122"/>
                 <a:cs typeface="Trebuchet MS" pitchFamily="34" charset="-120"/>
               </a:rPr>
-              <a:t>less</a:t>
+              <a:t>er</a:t>
             </a:r>
             <a:endParaRPr lang="en-US" sz="1400" dirty="0"/>
           </a:p>
@@ -14559,7 +14783,112 @@
       </p:sp>
       <p:sp>
         <p:nvSpPr>
-          <p:cNvPr id="33" name="Shape 31"/>
+          <p:cNvPr id="36" name="Text 34"/>
+          <p:cNvSpPr/>
+          <p:nvPr/>
+        </p:nvSpPr>
+        <p:spPr>
+          <a:xfrm>
+            <a:off x="6784848" y="3364992"/>
+            <a:ext cx="73152" cy="475488"/>
+          </a:xfrm>
+          <a:prstGeom prst="rect">
+            <a:avLst/>
+          </a:prstGeom>
+          <a:noFill/>
+          <a:ln/>
+        </p:spPr>
+        <p:txBody>
+          <a:bodyPr wrap="square" lIns="0" tIns="0" rIns="0" bIns="0" rtlCol="0" anchor="ctr"/>
+          <a:lstStyle/>
+          <a:p>
+            <a:pPr algn="ctr" indent="0" marL="0">
+              <a:buNone/>
+            </a:pPr>
+            <a:r>
+              <a:rPr lang="en-US" sz="1600" b="1" dirty="0">
+                <a:solidFill>
+                  <a:srgbClr val="0D9488"/>
+                </a:solidFill>
+                <a:latin typeface="Trebuchet MS" pitchFamily="34" charset="0"/>
+                <a:ea typeface="Trebuchet MS" pitchFamily="34" charset="-122"/>
+                <a:cs typeface="Trebuchet MS" pitchFamily="34" charset="-120"/>
+              </a:rPr>
+              <a:t>·</a:t>
+            </a:r>
+            <a:endParaRPr lang="en-US" sz="1600" dirty="0"/>
+          </a:p>
+        </p:txBody>
+      </p:sp>
+      <p:sp>
+        <p:nvSpPr>
+          <p:cNvPr id="37" name="Shape 35"/>
+          <p:cNvSpPr/>
+          <p:nvPr/>
+        </p:nvSpPr>
+        <p:spPr>
+          <a:xfrm>
+            <a:off x="6858000" y="3364992"/>
+            <a:ext cx="1554480" cy="475488"/>
+          </a:xfrm>
+          <a:prstGeom prst="rect">
+            <a:avLst>
+              <a:gd name="adj" fmla="val 9615"/>
+            </a:avLst>
+          </a:prstGeom>
+          <a:solidFill>
+            <a:srgbClr val="FFFFFF"/>
+          </a:solidFill>
+          <a:ln w="12700">
+            <a:solidFill>
+              <a:srgbClr val="0D9488"/>
+            </a:solidFill>
+            <a:prstDash val="solid"/>
+          </a:ln>
+        </p:spPr>
+      </p:sp>
+      <p:sp>
+        <p:nvSpPr>
+          <p:cNvPr id="38" name="Text 36"/>
+          <p:cNvSpPr/>
+          <p:nvPr/>
+        </p:nvSpPr>
+        <p:spPr>
+          <a:xfrm>
+            <a:off x="6858000" y="3364992"/>
+            <a:ext cx="1554480" cy="475488"/>
+          </a:xfrm>
+          <a:prstGeom prst="rect">
+            <a:avLst/>
+          </a:prstGeom>
+          <a:noFill/>
+          <a:ln/>
+        </p:spPr>
+        <p:txBody>
+          <a:bodyPr wrap="square" lIns="0" tIns="0" rIns="0" bIns="0" rtlCol="0" anchor="ctr"/>
+          <a:lstStyle/>
+          <a:p>
+            <a:pPr algn="ctr" indent="0" marL="0">
+              <a:buNone/>
+            </a:pPr>
+            <a:r>
+              <a:rPr lang="en-US" sz="1400" b="1" dirty="0">
+                <a:solidFill>
+                  <a:srgbClr val="0D9488"/>
+                </a:solidFill>
+                <a:latin typeface="Trebuchet MS" pitchFamily="34" charset="0"/>
+                <a:ea typeface="Trebuchet MS" pitchFamily="34" charset="-122"/>
+                <a:cs typeface="Trebuchet MS" pitchFamily="34" charset="-120"/>
+              </a:rPr>
+              <a:t>ment</a:t>
+            </a:r>
+            <a:endParaRPr lang="en-US" sz="1400" dirty="0"/>
+          </a:p>
+        </p:txBody>
+      </p:sp>
+      <p:sp>
+        <p:nvSpPr>
+          <p:cNvPr id="39" name="Shape 37"/>
           <p:cNvSpPr/>
           <p:nvPr/>
         </p:nvSpPr>
@@ -14586,7 +14915,7 @@
       </p:sp>
       <p:sp>
         <p:nvSpPr>
-          <p:cNvPr id="34" name="Text 32"/>
+          <p:cNvPr id="40" name="Text 38"/>
           <p:cNvSpPr/>
           <p:nvPr/>
         </p:nvSpPr>
@@ -14625,7 +14954,7 @@
       </p:sp>
       <p:sp>
         <p:nvSpPr>
-          <p:cNvPr id="35" name="Shape 33"/>
+          <p:cNvPr id="41" name="Shape 39"/>
           <p:cNvSpPr/>
           <p:nvPr/>
         </p:nvSpPr>
@@ -14652,7 +14981,7 @@
       </p:sp>
       <p:sp>
         <p:nvSpPr>
-          <p:cNvPr id="36" name="Text 34"/>
+          <p:cNvPr id="42" name="Text 40"/>
           <p:cNvSpPr/>
           <p:nvPr/>
         </p:nvSpPr>
@@ -14884,7 +15213,7 @@
                 <a:ea typeface="Calibri" pitchFamily="34" charset="-122"/>
                 <a:cs typeface="Calibri" pitchFamily="34" charset="-120"/>
               </a:rPr>
-              <a:t>Root 'power' — strength, force, ability</a:t>
+              <a:t>Root 'power' — strength; control; energy</a:t>
             </a:r>
             <a:endParaRPr lang="en-US" sz="1600" dirty="0"/>
           </a:p>
@@ -15240,7 +15569,7 @@
                 <a:ea typeface="Calibri" pitchFamily="34" charset="-122"/>
                 <a:cs typeface="Calibri" pitchFamily="34" charset="-120"/>
               </a:rPr>
-              <a:t>Word Labs  •  wordlabs.app  •  Root: 'power' = strength, force, ability</a:t>
+              <a:t>Word Labs  •  wordlabs.app  •  Root: 'power' = strength; control; energy</a:t>
             </a:r>
             <a:endParaRPr lang="en-US" sz="800" dirty="0"/>
           </a:p>
@@ -15379,7 +15708,7 @@
                 <a:ea typeface="Trebuchet MS" pitchFamily="34" charset="-122"/>
                 <a:cs typeface="Trebuchet MS" pitchFamily="34" charset="-120"/>
               </a:rPr>
-              <a:t>powerless</a:t>
+              <a:t>empowerment</a:t>
             </a:r>
             <a:endParaRPr lang="en-US" sz="2800" dirty="0"/>
           </a:p>
@@ -15459,7 +15788,7 @@
         </p:nvSpPr>
         <p:spPr>
           <a:xfrm>
-            <a:off x="2938272" y="2258568"/>
+            <a:off x="2221992" y="2258568"/>
             <a:ext cx="1828800" cy="292608"/>
           </a:xfrm>
           <a:prstGeom prst="rect">
@@ -15468,11 +15797,11 @@
             </a:avLst>
           </a:prstGeom>
           <a:solidFill>
-            <a:srgbClr val="CCFBF1"/>
+            <a:srgbClr val="DDD6FE"/>
           </a:solidFill>
           <a:ln w="19050">
             <a:solidFill>
-              <a:srgbClr val="0D9488"/>
+              <a:srgbClr val="7C3AED"/>
             </a:solidFill>
             <a:prstDash val="solid"/>
           </a:ln>
@@ -15493,7 +15822,7 @@
         </p:nvSpPr>
         <p:spPr>
           <a:xfrm>
-            <a:off x="2938272" y="2258568"/>
+            <a:off x="2221992" y="2258568"/>
             <a:ext cx="1828800" cy="292608"/>
           </a:xfrm>
           <a:prstGeom prst="rect">
@@ -15512,13 +15841,13 @@
             <a:r>
               <a:rPr lang="en-US" sz="1300" b="1" dirty="0">
                 <a:solidFill>
-                  <a:srgbClr val="0F766E"/>
+                  <a:srgbClr val="4C1D95"/>
                 </a:solidFill>
                 <a:latin typeface="Trebuchet MS" pitchFamily="34" charset="0"/>
                 <a:ea typeface="Trebuchet MS" pitchFamily="34" charset="-122"/>
                 <a:cs typeface="Trebuchet MS" pitchFamily="34" charset="-120"/>
               </a:rPr>
-              <a:t>power</a:t>
+              <a:t>en</a:t>
             </a:r>
             <a:endParaRPr lang="en-US" sz="1300" dirty="0"/>
           </a:p>
@@ -15532,7 +15861,7 @@
         </p:nvSpPr>
         <p:spPr>
           <a:xfrm>
-            <a:off x="2938272" y="2569464"/>
+            <a:off x="2221992" y="2569464"/>
             <a:ext cx="1828800" cy="201168"/>
           </a:xfrm>
           <a:prstGeom prst="rect">
@@ -15557,7 +15886,7 @@
                 <a:ea typeface="Calibri" pitchFamily="34" charset="-122"/>
                 <a:cs typeface="Calibri" pitchFamily="34" charset="-120"/>
               </a:rPr>
-              <a:t>strength, force</a:t>
+              <a:t>made of; to make</a:t>
             </a:r>
             <a:endParaRPr lang="en-US" sz="850" dirty="0"/>
           </a:p>
@@ -15571,7 +15900,7 @@
         </p:nvSpPr>
         <p:spPr>
           <a:xfrm>
-            <a:off x="5803392" y="2258568"/>
+            <a:off x="4370832" y="2258568"/>
             <a:ext cx="1828800" cy="292608"/>
           </a:xfrm>
           <a:prstGeom prst="rect">
@@ -15580,11 +15909,11 @@
             </a:avLst>
           </a:prstGeom>
           <a:solidFill>
-            <a:srgbClr val="DDD6FE"/>
+            <a:srgbClr val="CCFBF1"/>
           </a:solidFill>
           <a:ln w="19050">
             <a:solidFill>
-              <a:srgbClr val="7C3AED"/>
+              <a:srgbClr val="0D9488"/>
             </a:solidFill>
             <a:prstDash val="solid"/>
           </a:ln>
@@ -15605,7 +15934,7 @@
         </p:nvSpPr>
         <p:spPr>
           <a:xfrm>
-            <a:off x="5803392" y="2258568"/>
+            <a:off x="4370832" y="2258568"/>
             <a:ext cx="1828800" cy="292608"/>
           </a:xfrm>
           <a:prstGeom prst="rect">
@@ -15624,13 +15953,13 @@
             <a:r>
               <a:rPr lang="en-US" sz="1300" b="1" dirty="0">
                 <a:solidFill>
-                  <a:srgbClr val="4C1D95"/>
+                  <a:srgbClr val="0F766E"/>
                 </a:solidFill>
                 <a:latin typeface="Trebuchet MS" pitchFamily="34" charset="0"/>
                 <a:ea typeface="Trebuchet MS" pitchFamily="34" charset="-122"/>
                 <a:cs typeface="Trebuchet MS" pitchFamily="34" charset="-120"/>
               </a:rPr>
-              <a:t>less</a:t>
+              <a:t>power</a:t>
             </a:r>
             <a:endParaRPr lang="en-US" sz="1300" dirty="0"/>
           </a:p>
@@ -15644,7 +15973,7 @@
         </p:nvSpPr>
         <p:spPr>
           <a:xfrm>
-            <a:off x="5803392" y="2569464"/>
+            <a:off x="4370832" y="2569464"/>
             <a:ext cx="1828800" cy="201168"/>
           </a:xfrm>
           <a:prstGeom prst="rect">
@@ -15669,7 +15998,7 @@
                 <a:ea typeface="Calibri" pitchFamily="34" charset="-122"/>
                 <a:cs typeface="Calibri" pitchFamily="34" charset="-120"/>
               </a:rPr>
-              <a:t>without</a:t>
+              <a:t>strength; control; energy</a:t>
             </a:r>
             <a:endParaRPr lang="en-US" sz="850" dirty="0"/>
           </a:p>
@@ -15678,6 +16007,118 @@
       <p:sp>
         <p:nvSpPr>
           <p:cNvPr id="22" name="Shape 20"/>
+          <p:cNvSpPr/>
+          <p:nvPr/>
+        </p:nvSpPr>
+        <p:spPr>
+          <a:xfrm>
+            <a:off x="6519672" y="2258568"/>
+            <a:ext cx="1828800" cy="292608"/>
+          </a:xfrm>
+          <a:prstGeom prst="rect">
+            <a:avLst>
+              <a:gd name="adj" fmla="val 25000"/>
+            </a:avLst>
+          </a:prstGeom>
+          <a:solidFill>
+            <a:srgbClr val="FCE7F3"/>
+          </a:solidFill>
+          <a:ln w="19050">
+            <a:solidFill>
+              <a:srgbClr val="DB2777"/>
+            </a:solidFill>
+            <a:prstDash val="solid"/>
+          </a:ln>
+          <a:effectLst>
+            <a:outerShdw sx="100000" sy="100000" kx="0" ky="0" algn="bl" rotWithShape="0" blurRad="101600" dist="38100" dir="8100000">
+              <a:srgbClr val="000000">
+                <a:alpha val="12000"/>
+              </a:srgbClr>
+            </a:outerShdw>
+          </a:effectLst>
+        </p:spPr>
+      </p:sp>
+      <p:sp>
+        <p:nvSpPr>
+          <p:cNvPr id="23" name="Text 21"/>
+          <p:cNvSpPr/>
+          <p:nvPr/>
+        </p:nvSpPr>
+        <p:spPr>
+          <a:xfrm>
+            <a:off x="6519672" y="2258568"/>
+            <a:ext cx="1828800" cy="292608"/>
+          </a:xfrm>
+          <a:prstGeom prst="rect">
+            <a:avLst/>
+          </a:prstGeom>
+          <a:noFill/>
+          <a:ln/>
+        </p:spPr>
+        <p:txBody>
+          <a:bodyPr wrap="square" lIns="0" tIns="0" rIns="0" bIns="0" rtlCol="0" anchor="ctr"/>
+          <a:lstStyle/>
+          <a:p>
+            <a:pPr algn="ctr" indent="0" marL="0">
+              <a:buNone/>
+            </a:pPr>
+            <a:r>
+              <a:rPr lang="en-US" sz="1300" b="1" dirty="0">
+                <a:solidFill>
+                  <a:srgbClr val="9D174D"/>
+                </a:solidFill>
+                <a:latin typeface="Trebuchet MS" pitchFamily="34" charset="0"/>
+                <a:ea typeface="Trebuchet MS" pitchFamily="34" charset="-122"/>
+                <a:cs typeface="Trebuchet MS" pitchFamily="34" charset="-120"/>
+              </a:rPr>
+              <a:t>ment</a:t>
+            </a:r>
+            <a:endParaRPr lang="en-US" sz="1300" dirty="0"/>
+          </a:p>
+        </p:txBody>
+      </p:sp>
+      <p:sp>
+        <p:nvSpPr>
+          <p:cNvPr id="24" name="Text 22"/>
+          <p:cNvSpPr/>
+          <p:nvPr/>
+        </p:nvSpPr>
+        <p:spPr>
+          <a:xfrm>
+            <a:off x="6519672" y="2569464"/>
+            <a:ext cx="1828800" cy="201168"/>
+          </a:xfrm>
+          <a:prstGeom prst="rect">
+            <a:avLst/>
+          </a:prstGeom>
+          <a:noFill/>
+          <a:ln/>
+        </p:spPr>
+        <p:txBody>
+          <a:bodyPr wrap="square" lIns="0" tIns="0" rIns="0" bIns="0" rtlCol="0" anchor="t"/>
+          <a:lstStyle/>
+          <a:p>
+            <a:pPr algn="ctr" indent="0" marL="0">
+              <a:buNone/>
+            </a:pPr>
+            <a:r>
+              <a:rPr lang="en-US" sz="850" dirty="0">
+                <a:solidFill>
+                  <a:srgbClr val="475569"/>
+                </a:solidFill>
+                <a:latin typeface="Calibri" pitchFamily="34" charset="0"/>
+                <a:ea typeface="Calibri" pitchFamily="34" charset="-122"/>
+                <a:cs typeface="Calibri" pitchFamily="34" charset="-120"/>
+              </a:rPr>
+              <a:t>result of action</a:t>
+            </a:r>
+            <a:endParaRPr lang="en-US" sz="850" dirty="0"/>
+          </a:p>
+        </p:txBody>
+      </p:sp>
+      <p:sp>
+        <p:nvSpPr>
+          <p:cNvPr id="25" name="Shape 23"/>
           <p:cNvSpPr/>
           <p:nvPr/>
         </p:nvSpPr>
@@ -15704,7 +16145,7 @@
       </p:sp>
       <p:sp>
         <p:nvSpPr>
-          <p:cNvPr id="23" name="Text 21"/>
+          <p:cNvPr id="26" name="Text 24"/>
           <p:cNvSpPr/>
           <p:nvPr/>
         </p:nvSpPr>
@@ -15743,7 +16184,7 @@
       </p:sp>
       <p:sp>
         <p:nvSpPr>
-          <p:cNvPr id="24" name="Shape 22"/>
+          <p:cNvPr id="27" name="Shape 25"/>
           <p:cNvSpPr/>
           <p:nvPr/>
         </p:nvSpPr>
@@ -15770,14 +16211,14 @@
       </p:sp>
       <p:sp>
         <p:nvSpPr>
-          <p:cNvPr id="25" name="Shape 23"/>
-          <p:cNvSpPr/>
-          <p:nvPr/>
-        </p:nvSpPr>
-        <p:spPr>
-          <a:xfrm>
-            <a:off x="2313432" y="3364992"/>
-            <a:ext cx="1645920" cy="475488"/>
+          <p:cNvPr id="28" name="Shape 26"/>
+          <p:cNvSpPr/>
+          <p:nvPr/>
+        </p:nvSpPr>
+        <p:spPr>
+          <a:xfrm>
+            <a:off x="1975104" y="3364992"/>
+            <a:ext cx="1554480" cy="475488"/>
           </a:xfrm>
           <a:prstGeom prst="rect">
             <a:avLst>
@@ -15797,14 +16238,14 @@
       </p:sp>
       <p:sp>
         <p:nvSpPr>
-          <p:cNvPr id="26" name="Text 24"/>
-          <p:cNvSpPr/>
-          <p:nvPr/>
-        </p:nvSpPr>
-        <p:spPr>
-          <a:xfrm>
-            <a:off x="2313432" y="3364992"/>
-            <a:ext cx="1645920" cy="475488"/>
+          <p:cNvPr id="29" name="Text 27"/>
+          <p:cNvSpPr/>
+          <p:nvPr/>
+        </p:nvSpPr>
+        <p:spPr>
+          <a:xfrm>
+            <a:off x="1975104" y="3364992"/>
+            <a:ext cx="1554480" cy="475488"/>
           </a:xfrm>
           <a:prstGeom prst="rect">
             <a:avLst/>
@@ -15828,7 +16269,7 @@
                 <a:ea typeface="Trebuchet MS" pitchFamily="34" charset="-122"/>
                 <a:cs typeface="Trebuchet MS" pitchFamily="34" charset="-120"/>
               </a:rPr>
-              <a:t>pow</a:t>
+              <a:t>em</a:t>
             </a:r>
             <a:endParaRPr lang="en-US" sz="1400" dirty="0"/>
           </a:p>
@@ -15836,14 +16277,14 @@
       </p:sp>
       <p:sp>
         <p:nvSpPr>
-          <p:cNvPr id="27" name="Text 25"/>
-          <p:cNvSpPr/>
-          <p:nvPr/>
-        </p:nvSpPr>
-        <p:spPr>
-          <a:xfrm>
-            <a:off x="3959352" y="3364992"/>
-            <a:ext cx="411480" cy="475488"/>
+          <p:cNvPr id="30" name="Text 28"/>
+          <p:cNvSpPr/>
+          <p:nvPr/>
+        </p:nvSpPr>
+        <p:spPr>
+          <a:xfrm>
+            <a:off x="3529584" y="3364992"/>
+            <a:ext cx="73152" cy="475488"/>
           </a:xfrm>
           <a:prstGeom prst="rect">
             <a:avLst/>
@@ -15875,14 +16316,14 @@
       </p:sp>
       <p:sp>
         <p:nvSpPr>
-          <p:cNvPr id="28" name="Shape 26"/>
-          <p:cNvSpPr/>
-          <p:nvPr/>
-        </p:nvSpPr>
-        <p:spPr>
-          <a:xfrm>
-            <a:off x="4370832" y="3364992"/>
-            <a:ext cx="1645920" cy="475488"/>
+          <p:cNvPr id="31" name="Shape 29"/>
+          <p:cNvSpPr/>
+          <p:nvPr/>
+        </p:nvSpPr>
+        <p:spPr>
+          <a:xfrm>
+            <a:off x="3602736" y="3364992"/>
+            <a:ext cx="1554480" cy="475488"/>
           </a:xfrm>
           <a:prstGeom prst="rect">
             <a:avLst>
@@ -15902,14 +16343,14 @@
       </p:sp>
       <p:sp>
         <p:nvSpPr>
-          <p:cNvPr id="29" name="Text 27"/>
-          <p:cNvSpPr/>
-          <p:nvPr/>
-        </p:nvSpPr>
-        <p:spPr>
-          <a:xfrm>
-            <a:off x="4370832" y="3364992"/>
-            <a:ext cx="1645920" cy="475488"/>
+          <p:cNvPr id="32" name="Text 30"/>
+          <p:cNvSpPr/>
+          <p:nvPr/>
+        </p:nvSpPr>
+        <p:spPr>
+          <a:xfrm>
+            <a:off x="3602736" y="3364992"/>
+            <a:ext cx="1554480" cy="475488"/>
           </a:xfrm>
           <a:prstGeom prst="rect">
             <a:avLst/>
@@ -15933,7 +16374,7 @@
                 <a:ea typeface="Trebuchet MS" pitchFamily="34" charset="-122"/>
                 <a:cs typeface="Trebuchet MS" pitchFamily="34" charset="-120"/>
               </a:rPr>
-              <a:t>er</a:t>
+              <a:t>pow</a:t>
             </a:r>
             <a:endParaRPr lang="en-US" sz="1400" dirty="0"/>
           </a:p>
@@ -15941,14 +16382,14 @@
       </p:sp>
       <p:sp>
         <p:nvSpPr>
-          <p:cNvPr id="30" name="Text 28"/>
-          <p:cNvSpPr/>
-          <p:nvPr/>
-        </p:nvSpPr>
-        <p:spPr>
-          <a:xfrm>
-            <a:off x="6016752" y="3364992"/>
-            <a:ext cx="411480" cy="475488"/>
+          <p:cNvPr id="33" name="Text 31"/>
+          <p:cNvSpPr/>
+          <p:nvPr/>
+        </p:nvSpPr>
+        <p:spPr>
+          <a:xfrm>
+            <a:off x="5157216" y="3364992"/>
+            <a:ext cx="73152" cy="475488"/>
           </a:xfrm>
           <a:prstGeom prst="rect">
             <a:avLst/>
@@ -15980,14 +16421,14 @@
       </p:sp>
       <p:sp>
         <p:nvSpPr>
-          <p:cNvPr id="31" name="Shape 29"/>
-          <p:cNvSpPr/>
-          <p:nvPr/>
-        </p:nvSpPr>
-        <p:spPr>
-          <a:xfrm>
-            <a:off x="6428232" y="3364992"/>
-            <a:ext cx="1645920" cy="475488"/>
+          <p:cNvPr id="34" name="Shape 32"/>
+          <p:cNvSpPr/>
+          <p:nvPr/>
+        </p:nvSpPr>
+        <p:spPr>
+          <a:xfrm>
+            <a:off x="5230368" y="3364992"/>
+            <a:ext cx="1554480" cy="475488"/>
           </a:xfrm>
           <a:prstGeom prst="rect">
             <a:avLst>
@@ -16007,14 +16448,14 @@
       </p:sp>
       <p:sp>
         <p:nvSpPr>
-          <p:cNvPr id="32" name="Text 30"/>
-          <p:cNvSpPr/>
-          <p:nvPr/>
-        </p:nvSpPr>
-        <p:spPr>
-          <a:xfrm>
-            <a:off x="6428232" y="3364992"/>
-            <a:ext cx="1645920" cy="475488"/>
+          <p:cNvPr id="35" name="Text 33"/>
+          <p:cNvSpPr/>
+          <p:nvPr/>
+        </p:nvSpPr>
+        <p:spPr>
+          <a:xfrm>
+            <a:off x="5230368" y="3364992"/>
+            <a:ext cx="1554480" cy="475488"/>
           </a:xfrm>
           <a:prstGeom prst="rect">
             <a:avLst/>
@@ -16038,7 +16479,7 @@
                 <a:ea typeface="Trebuchet MS" pitchFamily="34" charset="-122"/>
                 <a:cs typeface="Trebuchet MS" pitchFamily="34" charset="-120"/>
               </a:rPr>
-              <a:t>less</a:t>
+              <a:t>er</a:t>
             </a:r>
             <a:endParaRPr lang="en-US" sz="1400" dirty="0"/>
           </a:p>
@@ -16046,7 +16487,112 @@
       </p:sp>
       <p:sp>
         <p:nvSpPr>
-          <p:cNvPr id="33" name="Shape 31"/>
+          <p:cNvPr id="36" name="Text 34"/>
+          <p:cNvSpPr/>
+          <p:nvPr/>
+        </p:nvSpPr>
+        <p:spPr>
+          <a:xfrm>
+            <a:off x="6784848" y="3364992"/>
+            <a:ext cx="73152" cy="475488"/>
+          </a:xfrm>
+          <a:prstGeom prst="rect">
+            <a:avLst/>
+          </a:prstGeom>
+          <a:noFill/>
+          <a:ln/>
+        </p:spPr>
+        <p:txBody>
+          <a:bodyPr wrap="square" lIns="0" tIns="0" rIns="0" bIns="0" rtlCol="0" anchor="ctr"/>
+          <a:lstStyle/>
+          <a:p>
+            <a:pPr algn="ctr" indent="0" marL="0">
+              <a:buNone/>
+            </a:pPr>
+            <a:r>
+              <a:rPr lang="en-US" sz="1600" b="1" dirty="0">
+                <a:solidFill>
+                  <a:srgbClr val="0D9488"/>
+                </a:solidFill>
+                <a:latin typeface="Trebuchet MS" pitchFamily="34" charset="0"/>
+                <a:ea typeface="Trebuchet MS" pitchFamily="34" charset="-122"/>
+                <a:cs typeface="Trebuchet MS" pitchFamily="34" charset="-120"/>
+              </a:rPr>
+              <a:t>·</a:t>
+            </a:r>
+            <a:endParaRPr lang="en-US" sz="1600" dirty="0"/>
+          </a:p>
+        </p:txBody>
+      </p:sp>
+      <p:sp>
+        <p:nvSpPr>
+          <p:cNvPr id="37" name="Shape 35"/>
+          <p:cNvSpPr/>
+          <p:nvPr/>
+        </p:nvSpPr>
+        <p:spPr>
+          <a:xfrm>
+            <a:off x="6858000" y="3364992"/>
+            <a:ext cx="1554480" cy="475488"/>
+          </a:xfrm>
+          <a:prstGeom prst="rect">
+            <a:avLst>
+              <a:gd name="adj" fmla="val 9615"/>
+            </a:avLst>
+          </a:prstGeom>
+          <a:solidFill>
+            <a:srgbClr val="FFFFFF"/>
+          </a:solidFill>
+          <a:ln w="12700">
+            <a:solidFill>
+              <a:srgbClr val="0D9488"/>
+            </a:solidFill>
+            <a:prstDash val="solid"/>
+          </a:ln>
+        </p:spPr>
+      </p:sp>
+      <p:sp>
+        <p:nvSpPr>
+          <p:cNvPr id="38" name="Text 36"/>
+          <p:cNvSpPr/>
+          <p:nvPr/>
+        </p:nvSpPr>
+        <p:spPr>
+          <a:xfrm>
+            <a:off x="6858000" y="3364992"/>
+            <a:ext cx="1554480" cy="475488"/>
+          </a:xfrm>
+          <a:prstGeom prst="rect">
+            <a:avLst/>
+          </a:prstGeom>
+          <a:noFill/>
+          <a:ln/>
+        </p:spPr>
+        <p:txBody>
+          <a:bodyPr wrap="square" lIns="0" tIns="0" rIns="0" bIns="0" rtlCol="0" anchor="ctr"/>
+          <a:lstStyle/>
+          <a:p>
+            <a:pPr algn="ctr" indent="0" marL="0">
+              <a:buNone/>
+            </a:pPr>
+            <a:r>
+              <a:rPr lang="en-US" sz="1400" b="1" dirty="0">
+                <a:solidFill>
+                  <a:srgbClr val="0D9488"/>
+                </a:solidFill>
+                <a:latin typeface="Trebuchet MS" pitchFamily="34" charset="0"/>
+                <a:ea typeface="Trebuchet MS" pitchFamily="34" charset="-122"/>
+                <a:cs typeface="Trebuchet MS" pitchFamily="34" charset="-120"/>
+              </a:rPr>
+              <a:t>ment</a:t>
+            </a:r>
+            <a:endParaRPr lang="en-US" sz="1400" dirty="0"/>
+          </a:p>
+        </p:txBody>
+      </p:sp>
+      <p:sp>
+        <p:nvSpPr>
+          <p:cNvPr id="39" name="Shape 37"/>
           <p:cNvSpPr/>
           <p:nvPr/>
         </p:nvSpPr>
@@ -16073,7 +16619,7 @@
       </p:sp>
       <p:sp>
         <p:nvSpPr>
-          <p:cNvPr id="34" name="Text 32"/>
+          <p:cNvPr id="40" name="Text 38"/>
           <p:cNvSpPr/>
           <p:nvPr/>
         </p:nvSpPr>
@@ -16112,7 +16658,7 @@
       </p:sp>
       <p:sp>
         <p:nvSpPr>
-          <p:cNvPr id="35" name="Shape 33"/>
+          <p:cNvPr id="41" name="Shape 39"/>
           <p:cNvSpPr/>
           <p:nvPr/>
         </p:nvSpPr>
@@ -16139,14 +16685,14 @@
       </p:sp>
       <p:sp>
         <p:nvSpPr>
-          <p:cNvPr id="36" name="Shape 34"/>
-          <p:cNvSpPr/>
-          <p:nvPr/>
-        </p:nvSpPr>
-        <p:spPr>
-          <a:xfrm>
-            <a:off x="2254649" y="4169664"/>
-            <a:ext cx="685800" cy="475488"/>
+          <p:cNvPr id="42" name="Shape 40"/>
+          <p:cNvSpPr/>
+          <p:nvPr/>
+        </p:nvSpPr>
+        <p:spPr>
+          <a:xfrm>
+            <a:off x="1951330" y="4169664"/>
+            <a:ext cx="676656" cy="475488"/>
           </a:xfrm>
           <a:prstGeom prst="rect">
             <a:avLst>
@@ -16166,14 +16712,14 @@
       </p:sp>
       <p:sp>
         <p:nvSpPr>
-          <p:cNvPr id="37" name="Text 35"/>
-          <p:cNvSpPr/>
-          <p:nvPr/>
-        </p:nvSpPr>
-        <p:spPr>
-          <a:xfrm>
-            <a:off x="2254649" y="4169664"/>
-            <a:ext cx="685800" cy="475488"/>
+          <p:cNvPr id="43" name="Text 41"/>
+          <p:cNvSpPr/>
+          <p:nvPr/>
+        </p:nvSpPr>
+        <p:spPr>
+          <a:xfrm>
+            <a:off x="1951330" y="4169664"/>
+            <a:ext cx="676656" cy="475488"/>
           </a:xfrm>
           <a:prstGeom prst="rect">
             <a:avLst/>
@@ -16197,7 +16743,7 @@
                 <a:ea typeface="Trebuchet MS" pitchFamily="34" charset="-122"/>
                 <a:cs typeface="Trebuchet MS" pitchFamily="34" charset="-120"/>
               </a:rPr>
-              <a:t>p</a:t>
+              <a:t>e</a:t>
             </a:r>
             <a:endParaRPr lang="en-US" sz="900" dirty="0"/>
           </a:p>
@@ -16205,14 +16751,14 @@
       </p:sp>
       <p:sp>
         <p:nvSpPr>
-          <p:cNvPr id="38" name="Shape 36"/>
-          <p:cNvSpPr/>
-          <p:nvPr/>
-        </p:nvSpPr>
-        <p:spPr>
-          <a:xfrm>
-            <a:off x="3293146" y="4169664"/>
-            <a:ext cx="685800" cy="475488"/>
+          <p:cNvPr id="44" name="Shape 42"/>
+          <p:cNvSpPr/>
+          <p:nvPr/>
+        </p:nvSpPr>
+        <p:spPr>
+          <a:xfrm>
+            <a:off x="2677363" y="4169664"/>
+            <a:ext cx="676656" cy="475488"/>
           </a:xfrm>
           <a:prstGeom prst="rect">
             <a:avLst>
@@ -16232,14 +16778,14 @@
       </p:sp>
       <p:sp>
         <p:nvSpPr>
-          <p:cNvPr id="39" name="Text 37"/>
-          <p:cNvSpPr/>
-          <p:nvPr/>
-        </p:nvSpPr>
-        <p:spPr>
-          <a:xfrm>
-            <a:off x="3293146" y="4169664"/>
-            <a:ext cx="685800" cy="475488"/>
+          <p:cNvPr id="45" name="Text 43"/>
+          <p:cNvSpPr/>
+          <p:nvPr/>
+        </p:nvSpPr>
+        <p:spPr>
+          <a:xfrm>
+            <a:off x="2677363" y="4169664"/>
+            <a:ext cx="676656" cy="475488"/>
           </a:xfrm>
           <a:prstGeom prst="rect">
             <a:avLst/>
@@ -16263,7 +16809,7 @@
                 <a:ea typeface="Trebuchet MS" pitchFamily="34" charset="-122"/>
                 <a:cs typeface="Trebuchet MS" pitchFamily="34" charset="-120"/>
               </a:rPr>
-              <a:t>ow</a:t>
+              <a:t>m</a:t>
             </a:r>
             <a:endParaRPr lang="en-US" sz="900" dirty="0"/>
           </a:p>
@@ -16271,14 +16817,14 @@
       </p:sp>
       <p:sp>
         <p:nvSpPr>
-          <p:cNvPr id="40" name="Shape 38"/>
-          <p:cNvSpPr/>
-          <p:nvPr/>
-        </p:nvSpPr>
-        <p:spPr>
-          <a:xfrm>
-            <a:off x="4331643" y="4169664"/>
-            <a:ext cx="685800" cy="475488"/>
+          <p:cNvPr id="46" name="Shape 44"/>
+          <p:cNvSpPr/>
+          <p:nvPr/>
+        </p:nvSpPr>
+        <p:spPr>
+          <a:xfrm>
+            <a:off x="3403397" y="4169664"/>
+            <a:ext cx="676656" cy="475488"/>
           </a:xfrm>
           <a:prstGeom prst="rect">
             <a:avLst>
@@ -16298,14 +16844,14 @@
       </p:sp>
       <p:sp>
         <p:nvSpPr>
-          <p:cNvPr id="41" name="Text 39"/>
-          <p:cNvSpPr/>
-          <p:nvPr/>
-        </p:nvSpPr>
-        <p:spPr>
-          <a:xfrm>
-            <a:off x="4331643" y="4169664"/>
-            <a:ext cx="685800" cy="475488"/>
+          <p:cNvPr id="47" name="Text 45"/>
+          <p:cNvSpPr/>
+          <p:nvPr/>
+        </p:nvSpPr>
+        <p:spPr>
+          <a:xfrm>
+            <a:off x="3403397" y="4169664"/>
+            <a:ext cx="676656" cy="475488"/>
           </a:xfrm>
           <a:prstGeom prst="rect">
             <a:avLst/>
@@ -16329,7 +16875,7 @@
                 <a:ea typeface="Trebuchet MS" pitchFamily="34" charset="-122"/>
                 <a:cs typeface="Trebuchet MS" pitchFamily="34" charset="-120"/>
               </a:rPr>
-              <a:t>er</a:t>
+              <a:t>p</a:t>
             </a:r>
             <a:endParaRPr lang="en-US" sz="900" dirty="0"/>
           </a:p>
@@ -16337,14 +16883,14 @@
       </p:sp>
       <p:sp>
         <p:nvSpPr>
-          <p:cNvPr id="42" name="Shape 40"/>
-          <p:cNvSpPr/>
-          <p:nvPr/>
-        </p:nvSpPr>
-        <p:spPr>
-          <a:xfrm>
-            <a:off x="5370141" y="4169664"/>
-            <a:ext cx="685800" cy="475488"/>
+          <p:cNvPr id="48" name="Shape 46"/>
+          <p:cNvSpPr/>
+          <p:nvPr/>
+        </p:nvSpPr>
+        <p:spPr>
+          <a:xfrm>
+            <a:off x="4129430" y="4169664"/>
+            <a:ext cx="676656" cy="475488"/>
           </a:xfrm>
           <a:prstGeom prst="rect">
             <a:avLst>
@@ -16364,14 +16910,14 @@
       </p:sp>
       <p:sp>
         <p:nvSpPr>
-          <p:cNvPr id="43" name="Text 41"/>
-          <p:cNvSpPr/>
-          <p:nvPr/>
-        </p:nvSpPr>
-        <p:spPr>
-          <a:xfrm>
-            <a:off x="5370141" y="4169664"/>
-            <a:ext cx="685800" cy="475488"/>
+          <p:cNvPr id="49" name="Text 47"/>
+          <p:cNvSpPr/>
+          <p:nvPr/>
+        </p:nvSpPr>
+        <p:spPr>
+          <a:xfrm>
+            <a:off x="4129430" y="4169664"/>
+            <a:ext cx="676656" cy="475488"/>
           </a:xfrm>
           <a:prstGeom prst="rect">
             <a:avLst/>
@@ -16395,7 +16941,7 @@
                 <a:ea typeface="Trebuchet MS" pitchFamily="34" charset="-122"/>
                 <a:cs typeface="Trebuchet MS" pitchFamily="34" charset="-120"/>
               </a:rPr>
-              <a:t>l</a:t>
+              <a:t>ow</a:t>
             </a:r>
             <a:endParaRPr lang="en-US" sz="900" dirty="0"/>
           </a:p>
@@ -16403,14 +16949,14 @@
       </p:sp>
       <p:sp>
         <p:nvSpPr>
-          <p:cNvPr id="44" name="Shape 42"/>
-          <p:cNvSpPr/>
-          <p:nvPr/>
-        </p:nvSpPr>
-        <p:spPr>
-          <a:xfrm>
-            <a:off x="6408638" y="4169664"/>
-            <a:ext cx="685800" cy="475488"/>
+          <p:cNvPr id="50" name="Shape 48"/>
+          <p:cNvSpPr/>
+          <p:nvPr/>
+        </p:nvSpPr>
+        <p:spPr>
+          <a:xfrm>
+            <a:off x="4855464" y="4169664"/>
+            <a:ext cx="676656" cy="475488"/>
           </a:xfrm>
           <a:prstGeom prst="rect">
             <a:avLst>
@@ -16430,14 +16976,14 @@
       </p:sp>
       <p:sp>
         <p:nvSpPr>
-          <p:cNvPr id="45" name="Text 43"/>
-          <p:cNvSpPr/>
-          <p:nvPr/>
-        </p:nvSpPr>
-        <p:spPr>
-          <a:xfrm>
-            <a:off x="6408638" y="4169664"/>
-            <a:ext cx="685800" cy="475488"/>
+          <p:cNvPr id="51" name="Text 49"/>
+          <p:cNvSpPr/>
+          <p:nvPr/>
+        </p:nvSpPr>
+        <p:spPr>
+          <a:xfrm>
+            <a:off x="4855464" y="4169664"/>
+            <a:ext cx="676656" cy="475488"/>
           </a:xfrm>
           <a:prstGeom prst="rect">
             <a:avLst/>
@@ -16461,7 +17007,7 @@
                 <a:ea typeface="Trebuchet MS" pitchFamily="34" charset="-122"/>
                 <a:cs typeface="Trebuchet MS" pitchFamily="34" charset="-120"/>
               </a:rPr>
-              <a:t>e</a:t>
+              <a:t>er</a:t>
             </a:r>
             <a:endParaRPr lang="en-US" sz="900" dirty="0"/>
           </a:p>
@@ -16469,14 +17015,14 @@
       </p:sp>
       <p:sp>
         <p:nvSpPr>
-          <p:cNvPr id="46" name="Shape 44"/>
-          <p:cNvSpPr/>
-          <p:nvPr/>
-        </p:nvSpPr>
-        <p:spPr>
-          <a:xfrm>
-            <a:off x="7447135" y="4169664"/>
-            <a:ext cx="685800" cy="475488"/>
+          <p:cNvPr id="52" name="Shape 50"/>
+          <p:cNvSpPr/>
+          <p:nvPr/>
+        </p:nvSpPr>
+        <p:spPr>
+          <a:xfrm>
+            <a:off x="5581498" y="4169664"/>
+            <a:ext cx="676656" cy="475488"/>
           </a:xfrm>
           <a:prstGeom prst="rect">
             <a:avLst>
@@ -16496,14 +17042,14 @@
       </p:sp>
       <p:sp>
         <p:nvSpPr>
-          <p:cNvPr id="47" name="Text 45"/>
-          <p:cNvSpPr/>
-          <p:nvPr/>
-        </p:nvSpPr>
-        <p:spPr>
-          <a:xfrm>
-            <a:off x="7447135" y="4169664"/>
-            <a:ext cx="685800" cy="475488"/>
+          <p:cNvPr id="53" name="Text 51"/>
+          <p:cNvSpPr/>
+          <p:nvPr/>
+        </p:nvSpPr>
+        <p:spPr>
+          <a:xfrm>
+            <a:off x="5581498" y="4169664"/>
+            <a:ext cx="676656" cy="475488"/>
           </a:xfrm>
           <a:prstGeom prst="rect">
             <a:avLst/>
@@ -16527,7 +17073,205 @@
                 <a:ea typeface="Trebuchet MS" pitchFamily="34" charset="-122"/>
                 <a:cs typeface="Trebuchet MS" pitchFamily="34" charset="-120"/>
               </a:rPr>
-              <a:t>ss</a:t>
+              <a:t>m</a:t>
+            </a:r>
+            <a:endParaRPr lang="en-US" sz="900" dirty="0"/>
+          </a:p>
+        </p:txBody>
+      </p:sp>
+      <p:sp>
+        <p:nvSpPr>
+          <p:cNvPr id="54" name="Shape 52"/>
+          <p:cNvSpPr/>
+          <p:nvPr/>
+        </p:nvSpPr>
+        <p:spPr>
+          <a:xfrm>
+            <a:off x="6307531" y="4169664"/>
+            <a:ext cx="676656" cy="475488"/>
+          </a:xfrm>
+          <a:prstGeom prst="rect">
+            <a:avLst>
+              <a:gd name="adj" fmla="val 7692"/>
+            </a:avLst>
+          </a:prstGeom>
+          <a:solidFill>
+            <a:srgbClr val="FFFFFF"/>
+          </a:solidFill>
+          <a:ln w="12700">
+            <a:solidFill>
+              <a:srgbClr val="DB2777"/>
+            </a:solidFill>
+            <a:prstDash val="solid"/>
+          </a:ln>
+        </p:spPr>
+      </p:sp>
+      <p:sp>
+        <p:nvSpPr>
+          <p:cNvPr id="55" name="Text 53"/>
+          <p:cNvSpPr/>
+          <p:nvPr/>
+        </p:nvSpPr>
+        <p:spPr>
+          <a:xfrm>
+            <a:off x="6307531" y="4169664"/>
+            <a:ext cx="676656" cy="475488"/>
+          </a:xfrm>
+          <a:prstGeom prst="rect">
+            <a:avLst/>
+          </a:prstGeom>
+          <a:noFill/>
+          <a:ln/>
+        </p:spPr>
+        <p:txBody>
+          <a:bodyPr wrap="square" lIns="0" tIns="0" rIns="0" bIns="0" rtlCol="0" anchor="ctr"/>
+          <a:lstStyle/>
+          <a:p>
+            <a:pPr algn="ctr" indent="0" marL="0">
+              <a:buNone/>
+            </a:pPr>
+            <a:r>
+              <a:rPr lang="en-US" sz="900" b="1" dirty="0">
+                <a:solidFill>
+                  <a:srgbClr val="9D174D"/>
+                </a:solidFill>
+                <a:latin typeface="Trebuchet MS" pitchFamily="34" charset="0"/>
+                <a:ea typeface="Trebuchet MS" pitchFamily="34" charset="-122"/>
+                <a:cs typeface="Trebuchet MS" pitchFamily="34" charset="-120"/>
+              </a:rPr>
+              <a:t>e</a:t>
+            </a:r>
+            <a:endParaRPr lang="en-US" sz="900" dirty="0"/>
+          </a:p>
+        </p:txBody>
+      </p:sp>
+      <p:sp>
+        <p:nvSpPr>
+          <p:cNvPr id="56" name="Shape 54"/>
+          <p:cNvSpPr/>
+          <p:nvPr/>
+        </p:nvSpPr>
+        <p:spPr>
+          <a:xfrm>
+            <a:off x="7033565" y="4169664"/>
+            <a:ext cx="676656" cy="475488"/>
+          </a:xfrm>
+          <a:prstGeom prst="rect">
+            <a:avLst>
+              <a:gd name="adj" fmla="val 7692"/>
+            </a:avLst>
+          </a:prstGeom>
+          <a:solidFill>
+            <a:srgbClr val="FFFFFF"/>
+          </a:solidFill>
+          <a:ln w="12700">
+            <a:solidFill>
+              <a:srgbClr val="DB2777"/>
+            </a:solidFill>
+            <a:prstDash val="solid"/>
+          </a:ln>
+        </p:spPr>
+      </p:sp>
+      <p:sp>
+        <p:nvSpPr>
+          <p:cNvPr id="57" name="Text 55"/>
+          <p:cNvSpPr/>
+          <p:nvPr/>
+        </p:nvSpPr>
+        <p:spPr>
+          <a:xfrm>
+            <a:off x="7033565" y="4169664"/>
+            <a:ext cx="676656" cy="475488"/>
+          </a:xfrm>
+          <a:prstGeom prst="rect">
+            <a:avLst/>
+          </a:prstGeom>
+          <a:noFill/>
+          <a:ln/>
+        </p:spPr>
+        <p:txBody>
+          <a:bodyPr wrap="square" lIns="0" tIns="0" rIns="0" bIns="0" rtlCol="0" anchor="ctr"/>
+          <a:lstStyle/>
+          <a:p>
+            <a:pPr algn="ctr" indent="0" marL="0">
+              <a:buNone/>
+            </a:pPr>
+            <a:r>
+              <a:rPr lang="en-US" sz="900" b="1" dirty="0">
+                <a:solidFill>
+                  <a:srgbClr val="9D174D"/>
+                </a:solidFill>
+                <a:latin typeface="Trebuchet MS" pitchFamily="34" charset="0"/>
+                <a:ea typeface="Trebuchet MS" pitchFamily="34" charset="-122"/>
+                <a:cs typeface="Trebuchet MS" pitchFamily="34" charset="-120"/>
+              </a:rPr>
+              <a:t>n</a:t>
+            </a:r>
+            <a:endParaRPr lang="en-US" sz="900" dirty="0"/>
+          </a:p>
+        </p:txBody>
+      </p:sp>
+      <p:sp>
+        <p:nvSpPr>
+          <p:cNvPr id="58" name="Shape 56"/>
+          <p:cNvSpPr/>
+          <p:nvPr/>
+        </p:nvSpPr>
+        <p:spPr>
+          <a:xfrm>
+            <a:off x="7759598" y="4169664"/>
+            <a:ext cx="676656" cy="475488"/>
+          </a:xfrm>
+          <a:prstGeom prst="rect">
+            <a:avLst>
+              <a:gd name="adj" fmla="val 7692"/>
+            </a:avLst>
+          </a:prstGeom>
+          <a:solidFill>
+            <a:srgbClr val="FFFFFF"/>
+          </a:solidFill>
+          <a:ln w="12700">
+            <a:solidFill>
+              <a:srgbClr val="DB2777"/>
+            </a:solidFill>
+            <a:prstDash val="solid"/>
+          </a:ln>
+        </p:spPr>
+      </p:sp>
+      <p:sp>
+        <p:nvSpPr>
+          <p:cNvPr id="59" name="Text 57"/>
+          <p:cNvSpPr/>
+          <p:nvPr/>
+        </p:nvSpPr>
+        <p:spPr>
+          <a:xfrm>
+            <a:off x="7759598" y="4169664"/>
+            <a:ext cx="676656" cy="475488"/>
+          </a:xfrm>
+          <a:prstGeom prst="rect">
+            <a:avLst/>
+          </a:prstGeom>
+          <a:noFill/>
+          <a:ln/>
+        </p:spPr>
+        <p:txBody>
+          <a:bodyPr wrap="square" lIns="0" tIns="0" rIns="0" bIns="0" rtlCol="0" anchor="ctr"/>
+          <a:lstStyle/>
+          <a:p>
+            <a:pPr algn="ctr" indent="0" marL="0">
+              <a:buNone/>
+            </a:pPr>
+            <a:r>
+              <a:rPr lang="en-US" sz="900" b="1" dirty="0">
+                <a:solidFill>
+                  <a:srgbClr val="9D174D"/>
+                </a:solidFill>
+                <a:latin typeface="Trebuchet MS" pitchFamily="34" charset="0"/>
+                <a:ea typeface="Trebuchet MS" pitchFamily="34" charset="-122"/>
+                <a:cs typeface="Trebuchet MS" pitchFamily="34" charset="-120"/>
+              </a:rPr>
+              <a:t>t</a:t>
             </a:r>
             <a:endParaRPr lang="en-US" sz="900" dirty="0"/>
           </a:p>
@@ -17101,7 +17845,7 @@
                 <a:ea typeface="Calibri" pitchFamily="34" charset="-122"/>
                 <a:cs typeface="Calibri" pitchFamily="34" charset="-120"/>
               </a:rPr>
-              <a:t>Word Labs  •  wordlabs.app  •  Root: 'power' = strength, force, ability</a:t>
+              <a:t>Word Labs  •  wordlabs.app  •  Root: 'power' = strength; control; energy</a:t>
             </a:r>
             <a:endParaRPr lang="en-US" sz="800" dirty="0"/>
           </a:p>
@@ -17435,7 +18179,7 @@
                 <a:ea typeface="Trebuchet MS" pitchFamily="34" charset="-122"/>
                 <a:cs typeface="Trebuchet MS" pitchFamily="34" charset="-120"/>
               </a:rPr>
-              <a:t>1</a:t>
+              <a:t>0</a:t>
             </a:r>
             <a:pPr algn="ctr" indent="0" marL="0">
               <a:buNone/>
@@ -17741,7 +18485,7 @@
                 <a:ea typeface="Calibri" pitchFamily="34" charset="-122"/>
                 <a:cs typeface="Calibri" pitchFamily="34" charset="-120"/>
               </a:rPr>
-              <a:t>Word Labs  •  wordlabs.app  •  Root: 'power' = strength, force, ability</a:t>
+              <a:t>Word Labs  •  wordlabs.app  •  Root: 'power' = strength; control; energy</a:t>
             </a:r>
             <a:endParaRPr lang="en-US" sz="800" dirty="0"/>
           </a:p>
@@ -17853,7 +18597,7 @@
                 <a:ea typeface="Calibri" pitchFamily="34" charset="-122"/>
                 <a:cs typeface="Calibri" pitchFamily="34" charset="-120"/>
               </a:rPr>
-              <a:t>The </a:t>
+              <a:t>The champion boxer </a:t>
             </a:r>
             <a:pPr algn="l" indent="0" marL="0">
               <a:buNone/>
@@ -17870,7 +18614,7 @@
                 <a:ea typeface="Calibri" pitchFamily="34" charset="-122"/>
                 <a:cs typeface="Calibri" pitchFamily="34" charset="-120"/>
               </a:rPr>
-              <a:t>powerful</a:t>
+              <a:t>overpowered</a:t>
             </a:r>
             <a:pPr algn="l" indent="0" marL="0">
               <a:buNone/>
@@ -17884,7 +18628,7 @@
                 <a:ea typeface="Calibri" pitchFamily="34" charset="-122"/>
                 <a:cs typeface="Calibri" pitchFamily="34" charset="-120"/>
               </a:rPr>
-              <a:t> </a:t>
+              <a:t> his opponent in the first round. The </a:t>
             </a:r>
             <a:pPr algn="l" indent="0" marL="0">
               <a:buNone/>
@@ -17901,7 +18645,7 @@
                 <a:ea typeface="Calibri" pitchFamily="34" charset="-122"/>
                 <a:cs typeface="Calibri" pitchFamily="34" charset="-120"/>
               </a:rPr>
-              <a:t>superpower</a:t>
+              <a:t>overpowering</a:t>
             </a:r>
             <a:pPr algn="l" indent="0" marL="0">
               <a:buNone/>
@@ -17915,7 +18659,7 @@
                 <a:ea typeface="Calibri" pitchFamily="34" charset="-122"/>
                 <a:cs typeface="Calibri" pitchFamily="34" charset="-120"/>
               </a:rPr>
-              <a:t> of the </a:t>
+              <a:t> smell of paint filled the whole house. The old car felt </a:t>
             </a:r>
             <a:pPr algn="l" indent="0" marL="0">
               <a:buNone/>
@@ -17932,7 +18676,7 @@
                 <a:ea typeface="Calibri" pitchFamily="34" charset="-122"/>
                 <a:cs typeface="Calibri" pitchFamily="34" charset="-120"/>
               </a:rPr>
-              <a:t>overpowered</a:t>
+              <a:t>underpowered</a:t>
             </a:r>
             <a:pPr algn="l" indent="0" marL="0">
               <a:buNone/>
@@ -17946,7 +18690,7 @@
                 <a:ea typeface="Calibri" pitchFamily="34" charset="-122"/>
                 <a:cs typeface="Calibri" pitchFamily="34" charset="-120"/>
               </a:rPr>
-              <a:t> hero amazed everyone in the crowd!</a:t>
+              <a:t> when climbing the steep hill.</a:t>
             </a:r>
             <a:endParaRPr lang="en-US" sz="1800" dirty="0"/>
           </a:p>
@@ -18101,7 +18845,7 @@
                 <a:ea typeface="Trebuchet MS" pitchFamily="34" charset="-122"/>
                 <a:cs typeface="Trebuchet MS" pitchFamily="34" charset="-120"/>
               </a:rPr>
-              <a:t>powerful</a:t>
+              <a:t>overpowered</a:t>
             </a:r>
             <a:endParaRPr lang="en-US" sz="1400" dirty="0"/>
           </a:p>
@@ -18229,7 +18973,7 @@
                 <a:ea typeface="Trebuchet MS" pitchFamily="34" charset="-122"/>
                 <a:cs typeface="Trebuchet MS" pitchFamily="34" charset="-120"/>
               </a:rPr>
-              <a:t>superpower</a:t>
+              <a:t>overpowering</a:t>
             </a:r>
             <a:endParaRPr lang="en-US" sz="1400" dirty="0"/>
           </a:p>
@@ -18357,7 +19101,7 @@
                 <a:ea typeface="Trebuchet MS" pitchFamily="34" charset="-122"/>
                 <a:cs typeface="Trebuchet MS" pitchFamily="34" charset="-120"/>
               </a:rPr>
-              <a:t>overpowered</a:t>
+              <a:t>underpowered</a:t>
             </a:r>
             <a:endParaRPr lang="en-US" sz="1400" dirty="0"/>
           </a:p>
@@ -18688,7 +19432,7 @@
                 <a:ea typeface="Calibri" pitchFamily="34" charset="-122"/>
                 <a:cs typeface="Calibri" pitchFamily="34" charset="-120"/>
               </a:rPr>
-              <a:t>Word Labs  •  wordlabs.app  •  Root: 'power' = strength, force, ability</a:t>
+              <a:t>Word Labs  •  wordlabs.app  •  Root: 'power' = strength; control; energy</a:t>
             </a:r>
             <a:endParaRPr lang="en-US" sz="800" dirty="0"/>
           </a:p>
@@ -18827,7 +19571,7 @@
                 <a:ea typeface="Trebuchet MS" pitchFamily="34" charset="-122"/>
                 <a:cs typeface="Trebuchet MS" pitchFamily="34" charset="-120"/>
               </a:rPr>
-              <a:t>powerful</a:t>
+              <a:t>overpowered</a:t>
             </a:r>
             <a:endParaRPr lang="en-US" sz="2800" dirty="0"/>
           </a:p>
@@ -19515,7 +20259,7 @@
                 <a:ea typeface="Calibri" pitchFamily="34" charset="-122"/>
                 <a:cs typeface="Calibri" pitchFamily="34" charset="-120"/>
               </a:rPr>
-              <a:t>Word Labs  •  wordlabs.app  •  Root: 'power' = strength, force, ability</a:t>
+              <a:t>Word Labs  •  wordlabs.app  •  Root: 'power' = strength; control; energy</a:t>
             </a:r>
             <a:endParaRPr lang="en-US" sz="800" dirty="0"/>
           </a:p>
@@ -19654,7 +20398,7 @@
                 <a:ea typeface="Trebuchet MS" pitchFamily="34" charset="-122"/>
                 <a:cs typeface="Trebuchet MS" pitchFamily="34" charset="-120"/>
               </a:rPr>
-              <a:t>powerful</a:t>
+              <a:t>overpowered</a:t>
             </a:r>
             <a:endParaRPr lang="en-US" sz="2800" dirty="0"/>
           </a:p>
@@ -19734,7 +20478,7 @@
         </p:nvSpPr>
         <p:spPr>
           <a:xfrm>
-            <a:off x="2938272" y="2258568"/>
+            <a:off x="2221992" y="2258568"/>
             <a:ext cx="1828800" cy="292608"/>
           </a:xfrm>
           <a:prstGeom prst="rect">
@@ -19743,11 +20487,11 @@
             </a:avLst>
           </a:prstGeom>
           <a:solidFill>
-            <a:srgbClr val="CCFBF1"/>
+            <a:srgbClr val="DDD6FE"/>
           </a:solidFill>
           <a:ln w="19050">
             <a:solidFill>
-              <a:srgbClr val="0D9488"/>
+              <a:srgbClr val="7C3AED"/>
             </a:solidFill>
             <a:prstDash val="solid"/>
           </a:ln>
@@ -19768,7 +20512,7 @@
         </p:nvSpPr>
         <p:spPr>
           <a:xfrm>
-            <a:off x="2938272" y="2258568"/>
+            <a:off x="2221992" y="2258568"/>
             <a:ext cx="1828800" cy="292608"/>
           </a:xfrm>
           <a:prstGeom prst="rect">
@@ -19787,13 +20531,13 @@
             <a:r>
               <a:rPr lang="en-US" sz="1300" b="1" dirty="0">
                 <a:solidFill>
-                  <a:srgbClr val="0F766E"/>
+                  <a:srgbClr val="4C1D95"/>
                 </a:solidFill>
                 <a:latin typeface="Trebuchet MS" pitchFamily="34" charset="0"/>
                 <a:ea typeface="Trebuchet MS" pitchFamily="34" charset="-122"/>
                 <a:cs typeface="Trebuchet MS" pitchFamily="34" charset="-120"/>
               </a:rPr>
-              <a:t>power</a:t>
+              <a:t>over</a:t>
             </a:r>
             <a:endParaRPr lang="en-US" sz="1300" dirty="0"/>
           </a:p>
@@ -19807,7 +20551,7 @@
         </p:nvSpPr>
         <p:spPr>
           <a:xfrm>
-            <a:off x="2938272" y="2569464"/>
+            <a:off x="2221992" y="2569464"/>
             <a:ext cx="1828800" cy="201168"/>
           </a:xfrm>
           <a:prstGeom prst="rect">
@@ -19832,7 +20576,7 @@
                 <a:ea typeface="Calibri" pitchFamily="34" charset="-122"/>
                 <a:cs typeface="Calibri" pitchFamily="34" charset="-120"/>
               </a:rPr>
-              <a:t>strength, force</a:t>
+              <a:t>too much</a:t>
             </a:r>
             <a:endParaRPr lang="en-US" sz="850" dirty="0"/>
           </a:p>
@@ -19846,7 +20590,7 @@
         </p:nvSpPr>
         <p:spPr>
           <a:xfrm>
-            <a:off x="5803392" y="2258568"/>
+            <a:off x="4370832" y="2258568"/>
             <a:ext cx="1828800" cy="292608"/>
           </a:xfrm>
           <a:prstGeom prst="rect">
@@ -19855,11 +20599,11 @@
             </a:avLst>
           </a:prstGeom>
           <a:solidFill>
-            <a:srgbClr val="FCE7F3"/>
+            <a:srgbClr val="CCFBF1"/>
           </a:solidFill>
           <a:ln w="19050">
             <a:solidFill>
-              <a:srgbClr val="DB2777"/>
+              <a:srgbClr val="0D9488"/>
             </a:solidFill>
             <a:prstDash val="solid"/>
           </a:ln>
@@ -19880,7 +20624,7 @@
         </p:nvSpPr>
         <p:spPr>
           <a:xfrm>
-            <a:off x="5803392" y="2258568"/>
+            <a:off x="4370832" y="2258568"/>
             <a:ext cx="1828800" cy="292608"/>
           </a:xfrm>
           <a:prstGeom prst="rect">
@@ -19899,13 +20643,13 @@
             <a:r>
               <a:rPr lang="en-US" sz="1300" b="1" dirty="0">
                 <a:solidFill>
-                  <a:srgbClr val="9D174D"/>
+                  <a:srgbClr val="0F766E"/>
                 </a:solidFill>
                 <a:latin typeface="Trebuchet MS" pitchFamily="34" charset="0"/>
                 <a:ea typeface="Trebuchet MS" pitchFamily="34" charset="-122"/>
                 <a:cs typeface="Trebuchet MS" pitchFamily="34" charset="-120"/>
               </a:rPr>
-              <a:t>ful</a:t>
+              <a:t>power</a:t>
             </a:r>
             <a:endParaRPr lang="en-US" sz="1300" dirty="0"/>
           </a:p>
@@ -19919,7 +20663,7 @@
         </p:nvSpPr>
         <p:spPr>
           <a:xfrm>
-            <a:off x="5803392" y="2569464"/>
+            <a:off x="4370832" y="2569464"/>
             <a:ext cx="1828800" cy="201168"/>
           </a:xfrm>
           <a:prstGeom prst="rect">
@@ -19944,7 +20688,7 @@
                 <a:ea typeface="Calibri" pitchFamily="34" charset="-122"/>
                 <a:cs typeface="Calibri" pitchFamily="34" charset="-120"/>
               </a:rPr>
-              <a:t>full of</a:t>
+              <a:t>strength; control; energy</a:t>
             </a:r>
             <a:endParaRPr lang="en-US" sz="850" dirty="0"/>
           </a:p>
@@ -19953,6 +20697,118 @@
       <p:sp>
         <p:nvSpPr>
           <p:cNvPr id="22" name="Shape 20"/>
+          <p:cNvSpPr/>
+          <p:nvPr/>
+        </p:nvSpPr>
+        <p:spPr>
+          <a:xfrm>
+            <a:off x="6519672" y="2258568"/>
+            <a:ext cx="1828800" cy="292608"/>
+          </a:xfrm>
+          <a:prstGeom prst="rect">
+            <a:avLst>
+              <a:gd name="adj" fmla="val 25000"/>
+            </a:avLst>
+          </a:prstGeom>
+          <a:solidFill>
+            <a:srgbClr val="FCE7F3"/>
+          </a:solidFill>
+          <a:ln w="19050">
+            <a:solidFill>
+              <a:srgbClr val="DB2777"/>
+            </a:solidFill>
+            <a:prstDash val="solid"/>
+          </a:ln>
+          <a:effectLst>
+            <a:outerShdw sx="100000" sy="100000" kx="0" ky="0" algn="bl" rotWithShape="0" blurRad="101600" dist="38100" dir="8100000">
+              <a:srgbClr val="000000">
+                <a:alpha val="12000"/>
+              </a:srgbClr>
+            </a:outerShdw>
+          </a:effectLst>
+        </p:spPr>
+      </p:sp>
+      <p:sp>
+        <p:nvSpPr>
+          <p:cNvPr id="23" name="Text 21"/>
+          <p:cNvSpPr/>
+          <p:nvPr/>
+        </p:nvSpPr>
+        <p:spPr>
+          <a:xfrm>
+            <a:off x="6519672" y="2258568"/>
+            <a:ext cx="1828800" cy="292608"/>
+          </a:xfrm>
+          <a:prstGeom prst="rect">
+            <a:avLst/>
+          </a:prstGeom>
+          <a:noFill/>
+          <a:ln/>
+        </p:spPr>
+        <p:txBody>
+          <a:bodyPr wrap="square" lIns="0" tIns="0" rIns="0" bIns="0" rtlCol="0" anchor="ctr"/>
+          <a:lstStyle/>
+          <a:p>
+            <a:pPr algn="ctr" indent="0" marL="0">
+              <a:buNone/>
+            </a:pPr>
+            <a:r>
+              <a:rPr lang="en-US" sz="1300" b="1" dirty="0">
+                <a:solidFill>
+                  <a:srgbClr val="9D174D"/>
+                </a:solidFill>
+                <a:latin typeface="Trebuchet MS" pitchFamily="34" charset="0"/>
+                <a:ea typeface="Trebuchet MS" pitchFamily="34" charset="-122"/>
+                <a:cs typeface="Trebuchet MS" pitchFamily="34" charset="-120"/>
+              </a:rPr>
+              <a:t>ed</a:t>
+            </a:r>
+            <a:endParaRPr lang="en-US" sz="1300" dirty="0"/>
+          </a:p>
+        </p:txBody>
+      </p:sp>
+      <p:sp>
+        <p:nvSpPr>
+          <p:cNvPr id="24" name="Text 22"/>
+          <p:cNvSpPr/>
+          <p:nvPr/>
+        </p:nvSpPr>
+        <p:spPr>
+          <a:xfrm>
+            <a:off x="6519672" y="2569464"/>
+            <a:ext cx="1828800" cy="201168"/>
+          </a:xfrm>
+          <a:prstGeom prst="rect">
+            <a:avLst/>
+          </a:prstGeom>
+          <a:noFill/>
+          <a:ln/>
+        </p:spPr>
+        <p:txBody>
+          <a:bodyPr wrap="square" lIns="0" tIns="0" rIns="0" bIns="0" rtlCol="0" anchor="t"/>
+          <a:lstStyle/>
+          <a:p>
+            <a:pPr algn="ctr" indent="0" marL="0">
+              <a:buNone/>
+            </a:pPr>
+            <a:r>
+              <a:rPr lang="en-US" sz="850" dirty="0">
+                <a:solidFill>
+                  <a:srgbClr val="475569"/>
+                </a:solidFill>
+                <a:latin typeface="Calibri" pitchFamily="34" charset="0"/>
+                <a:ea typeface="Calibri" pitchFamily="34" charset="-122"/>
+                <a:cs typeface="Calibri" pitchFamily="34" charset="-120"/>
+              </a:rPr>
+              <a:t>past tense</a:t>
+            </a:r>
+            <a:endParaRPr lang="en-US" sz="850" dirty="0"/>
+          </a:p>
+        </p:txBody>
+      </p:sp>
+      <p:sp>
+        <p:nvSpPr>
+          <p:cNvPr id="25" name="Shape 23"/>
           <p:cNvSpPr/>
           <p:nvPr/>
         </p:nvSpPr>
@@ -19979,7 +20835,7 @@
       </p:sp>
       <p:sp>
         <p:nvSpPr>
-          <p:cNvPr id="23" name="Text 21"/>
+          <p:cNvPr id="26" name="Text 24"/>
           <p:cNvSpPr/>
           <p:nvPr/>
         </p:nvSpPr>
@@ -20018,7 +20874,7 @@
       </p:sp>
       <p:sp>
         <p:nvSpPr>
-          <p:cNvPr id="24" name="Shape 22"/>
+          <p:cNvPr id="27" name="Shape 25"/>
           <p:cNvSpPr/>
           <p:nvPr/>
         </p:nvSpPr>
@@ -20045,7 +20901,7 @@
       </p:sp>
       <p:sp>
         <p:nvSpPr>
-          <p:cNvPr id="25" name="Text 23"/>
+          <p:cNvPr id="28" name="Text 26"/>
           <p:cNvSpPr/>
           <p:nvPr/>
         </p:nvSpPr>
@@ -20084,7 +20940,7 @@
       </p:sp>
       <p:sp>
         <p:nvSpPr>
-          <p:cNvPr id="26" name="Shape 24"/>
+          <p:cNvPr id="29" name="Shape 27"/>
           <p:cNvSpPr/>
           <p:nvPr/>
         </p:nvSpPr>
@@ -20111,7 +20967,7 @@
       </p:sp>
       <p:sp>
         <p:nvSpPr>
-          <p:cNvPr id="27" name="Text 25"/>
+          <p:cNvPr id="30" name="Text 28"/>
           <p:cNvSpPr/>
           <p:nvPr/>
         </p:nvSpPr>
@@ -20150,7 +21006,7 @@
       </p:sp>
       <p:sp>
         <p:nvSpPr>
-          <p:cNvPr id="28" name="Shape 26"/>
+          <p:cNvPr id="31" name="Shape 29"/>
           <p:cNvSpPr/>
           <p:nvPr/>
         </p:nvSpPr>
@@ -20177,7 +21033,7 @@
       </p:sp>
       <p:sp>
         <p:nvSpPr>
-          <p:cNvPr id="29" name="Text 27"/>
+          <p:cNvPr id="32" name="Text 30"/>
           <p:cNvSpPr/>
           <p:nvPr/>
         </p:nvSpPr>
@@ -20500,7 +21356,7 @@
                 <a:ea typeface="Calibri" pitchFamily="34" charset="-122"/>
                 <a:cs typeface="Calibri" pitchFamily="34" charset="-120"/>
               </a:rPr>
-              <a:t>Word Labs  •  wordlabs.app  •  Root: 'power' = strength, force, ability</a:t>
+              <a:t>Word Labs  •  wordlabs.app  •  Root: 'power' = strength; control; energy</a:t>
             </a:r>
             <a:endParaRPr lang="en-US" sz="800" dirty="0"/>
           </a:p>
@@ -20639,7 +21495,7 @@
                 <a:ea typeface="Trebuchet MS" pitchFamily="34" charset="-122"/>
                 <a:cs typeface="Trebuchet MS" pitchFamily="34" charset="-120"/>
               </a:rPr>
-              <a:t>powerful</a:t>
+              <a:t>overpowered</a:t>
             </a:r>
             <a:endParaRPr lang="en-US" sz="2800" dirty="0"/>
           </a:p>
@@ -20719,7 +21575,7 @@
         </p:nvSpPr>
         <p:spPr>
           <a:xfrm>
-            <a:off x="2938272" y="2258568"/>
+            <a:off x="2221992" y="2258568"/>
             <a:ext cx="1828800" cy="292608"/>
           </a:xfrm>
           <a:prstGeom prst="rect">
@@ -20728,11 +21584,11 @@
             </a:avLst>
           </a:prstGeom>
           <a:solidFill>
-            <a:srgbClr val="CCFBF1"/>
+            <a:srgbClr val="DDD6FE"/>
           </a:solidFill>
           <a:ln w="19050">
             <a:solidFill>
-              <a:srgbClr val="0D9488"/>
+              <a:srgbClr val="7C3AED"/>
             </a:solidFill>
             <a:prstDash val="solid"/>
           </a:ln>
@@ -20753,7 +21609,7 @@
         </p:nvSpPr>
         <p:spPr>
           <a:xfrm>
-            <a:off x="2938272" y="2258568"/>
+            <a:off x="2221992" y="2258568"/>
             <a:ext cx="1828800" cy="292608"/>
           </a:xfrm>
           <a:prstGeom prst="rect">
@@ -20772,13 +21628,13 @@
             <a:r>
               <a:rPr lang="en-US" sz="1300" b="1" dirty="0">
                 <a:solidFill>
-                  <a:srgbClr val="0F766E"/>
+                  <a:srgbClr val="4C1D95"/>
                 </a:solidFill>
                 <a:latin typeface="Trebuchet MS" pitchFamily="34" charset="0"/>
                 <a:ea typeface="Trebuchet MS" pitchFamily="34" charset="-122"/>
                 <a:cs typeface="Trebuchet MS" pitchFamily="34" charset="-120"/>
               </a:rPr>
-              <a:t>power</a:t>
+              <a:t>over</a:t>
             </a:r>
             <a:endParaRPr lang="en-US" sz="1300" dirty="0"/>
           </a:p>
@@ -20792,7 +21648,7 @@
         </p:nvSpPr>
         <p:spPr>
           <a:xfrm>
-            <a:off x="2938272" y="2569464"/>
+            <a:off x="2221992" y="2569464"/>
             <a:ext cx="1828800" cy="201168"/>
           </a:xfrm>
           <a:prstGeom prst="rect">
@@ -20817,7 +21673,7 @@
                 <a:ea typeface="Calibri" pitchFamily="34" charset="-122"/>
                 <a:cs typeface="Calibri" pitchFamily="34" charset="-120"/>
               </a:rPr>
-              <a:t>strength, force</a:t>
+              <a:t>too much</a:t>
             </a:r>
             <a:endParaRPr lang="en-US" sz="850" dirty="0"/>
           </a:p>
@@ -20831,7 +21687,7 @@
         </p:nvSpPr>
         <p:spPr>
           <a:xfrm>
-            <a:off x="5803392" y="2258568"/>
+            <a:off x="4370832" y="2258568"/>
             <a:ext cx="1828800" cy="292608"/>
           </a:xfrm>
           <a:prstGeom prst="rect">
@@ -20840,11 +21696,11 @@
             </a:avLst>
           </a:prstGeom>
           <a:solidFill>
-            <a:srgbClr val="FCE7F3"/>
+            <a:srgbClr val="CCFBF1"/>
           </a:solidFill>
           <a:ln w="19050">
             <a:solidFill>
-              <a:srgbClr val="DB2777"/>
+              <a:srgbClr val="0D9488"/>
             </a:solidFill>
             <a:prstDash val="solid"/>
           </a:ln>
@@ -20865,7 +21721,7 @@
         </p:nvSpPr>
         <p:spPr>
           <a:xfrm>
-            <a:off x="5803392" y="2258568"/>
+            <a:off x="4370832" y="2258568"/>
             <a:ext cx="1828800" cy="292608"/>
           </a:xfrm>
           <a:prstGeom prst="rect">
@@ -20884,13 +21740,13 @@
             <a:r>
               <a:rPr lang="en-US" sz="1300" b="1" dirty="0">
                 <a:solidFill>
-                  <a:srgbClr val="9D174D"/>
+                  <a:srgbClr val="0F766E"/>
                 </a:solidFill>
                 <a:latin typeface="Trebuchet MS" pitchFamily="34" charset="0"/>
                 <a:ea typeface="Trebuchet MS" pitchFamily="34" charset="-122"/>
                 <a:cs typeface="Trebuchet MS" pitchFamily="34" charset="-120"/>
               </a:rPr>
-              <a:t>ful</a:t>
+              <a:t>power</a:t>
             </a:r>
             <a:endParaRPr lang="en-US" sz="1300" dirty="0"/>
           </a:p>
@@ -20904,7 +21760,7 @@
         </p:nvSpPr>
         <p:spPr>
           <a:xfrm>
-            <a:off x="5803392" y="2569464"/>
+            <a:off x="4370832" y="2569464"/>
             <a:ext cx="1828800" cy="201168"/>
           </a:xfrm>
           <a:prstGeom prst="rect">
@@ -20929,7 +21785,7 @@
                 <a:ea typeface="Calibri" pitchFamily="34" charset="-122"/>
                 <a:cs typeface="Calibri" pitchFamily="34" charset="-120"/>
               </a:rPr>
-              <a:t>full of</a:t>
+              <a:t>strength; control; energy</a:t>
             </a:r>
             <a:endParaRPr lang="en-US" sz="850" dirty="0"/>
           </a:p>
@@ -20938,6 +21794,118 @@
       <p:sp>
         <p:nvSpPr>
           <p:cNvPr id="22" name="Shape 20"/>
+          <p:cNvSpPr/>
+          <p:nvPr/>
+        </p:nvSpPr>
+        <p:spPr>
+          <a:xfrm>
+            <a:off x="6519672" y="2258568"/>
+            <a:ext cx="1828800" cy="292608"/>
+          </a:xfrm>
+          <a:prstGeom prst="rect">
+            <a:avLst>
+              <a:gd name="adj" fmla="val 25000"/>
+            </a:avLst>
+          </a:prstGeom>
+          <a:solidFill>
+            <a:srgbClr val="FCE7F3"/>
+          </a:solidFill>
+          <a:ln w="19050">
+            <a:solidFill>
+              <a:srgbClr val="DB2777"/>
+            </a:solidFill>
+            <a:prstDash val="solid"/>
+          </a:ln>
+          <a:effectLst>
+            <a:outerShdw sx="100000" sy="100000" kx="0" ky="0" algn="bl" rotWithShape="0" blurRad="101600" dist="38100" dir="8100000">
+              <a:srgbClr val="000000">
+                <a:alpha val="12000"/>
+              </a:srgbClr>
+            </a:outerShdw>
+          </a:effectLst>
+        </p:spPr>
+      </p:sp>
+      <p:sp>
+        <p:nvSpPr>
+          <p:cNvPr id="23" name="Text 21"/>
+          <p:cNvSpPr/>
+          <p:nvPr/>
+        </p:nvSpPr>
+        <p:spPr>
+          <a:xfrm>
+            <a:off x="6519672" y="2258568"/>
+            <a:ext cx="1828800" cy="292608"/>
+          </a:xfrm>
+          <a:prstGeom prst="rect">
+            <a:avLst/>
+          </a:prstGeom>
+          <a:noFill/>
+          <a:ln/>
+        </p:spPr>
+        <p:txBody>
+          <a:bodyPr wrap="square" lIns="0" tIns="0" rIns="0" bIns="0" rtlCol="0" anchor="ctr"/>
+          <a:lstStyle/>
+          <a:p>
+            <a:pPr algn="ctr" indent="0" marL="0">
+              <a:buNone/>
+            </a:pPr>
+            <a:r>
+              <a:rPr lang="en-US" sz="1300" b="1" dirty="0">
+                <a:solidFill>
+                  <a:srgbClr val="9D174D"/>
+                </a:solidFill>
+                <a:latin typeface="Trebuchet MS" pitchFamily="34" charset="0"/>
+                <a:ea typeface="Trebuchet MS" pitchFamily="34" charset="-122"/>
+                <a:cs typeface="Trebuchet MS" pitchFamily="34" charset="-120"/>
+              </a:rPr>
+              <a:t>ed</a:t>
+            </a:r>
+            <a:endParaRPr lang="en-US" sz="1300" dirty="0"/>
+          </a:p>
+        </p:txBody>
+      </p:sp>
+      <p:sp>
+        <p:nvSpPr>
+          <p:cNvPr id="24" name="Text 22"/>
+          <p:cNvSpPr/>
+          <p:nvPr/>
+        </p:nvSpPr>
+        <p:spPr>
+          <a:xfrm>
+            <a:off x="6519672" y="2569464"/>
+            <a:ext cx="1828800" cy="201168"/>
+          </a:xfrm>
+          <a:prstGeom prst="rect">
+            <a:avLst/>
+          </a:prstGeom>
+          <a:noFill/>
+          <a:ln/>
+        </p:spPr>
+        <p:txBody>
+          <a:bodyPr wrap="square" lIns="0" tIns="0" rIns="0" bIns="0" rtlCol="0" anchor="t"/>
+          <a:lstStyle/>
+          <a:p>
+            <a:pPr algn="ctr" indent="0" marL="0">
+              <a:buNone/>
+            </a:pPr>
+            <a:r>
+              <a:rPr lang="en-US" sz="850" dirty="0">
+                <a:solidFill>
+                  <a:srgbClr val="475569"/>
+                </a:solidFill>
+                <a:latin typeface="Calibri" pitchFamily="34" charset="0"/>
+                <a:ea typeface="Calibri" pitchFamily="34" charset="-122"/>
+                <a:cs typeface="Calibri" pitchFamily="34" charset="-120"/>
+              </a:rPr>
+              <a:t>past tense</a:t>
+            </a:r>
+            <a:endParaRPr lang="en-US" sz="850" dirty="0"/>
+          </a:p>
+        </p:txBody>
+      </p:sp>
+      <p:sp>
+        <p:nvSpPr>
+          <p:cNvPr id="25" name="Shape 23"/>
           <p:cNvSpPr/>
           <p:nvPr/>
         </p:nvSpPr>
@@ -20964,7 +21932,7 @@
       </p:sp>
       <p:sp>
         <p:nvSpPr>
-          <p:cNvPr id="23" name="Text 21"/>
+          <p:cNvPr id="26" name="Text 24"/>
           <p:cNvSpPr/>
           <p:nvPr/>
         </p:nvSpPr>
@@ -21003,7 +21971,7 @@
       </p:sp>
       <p:sp>
         <p:nvSpPr>
-          <p:cNvPr id="24" name="Shape 22"/>
+          <p:cNvPr id="27" name="Shape 25"/>
           <p:cNvSpPr/>
           <p:nvPr/>
         </p:nvSpPr>
@@ -21030,14 +21998,14 @@
       </p:sp>
       <p:sp>
         <p:nvSpPr>
-          <p:cNvPr id="25" name="Shape 23"/>
-          <p:cNvSpPr/>
-          <p:nvPr/>
-        </p:nvSpPr>
-        <p:spPr>
-          <a:xfrm>
-            <a:off x="2313432" y="3364992"/>
-            <a:ext cx="1645920" cy="475488"/>
+          <p:cNvPr id="28" name="Shape 26"/>
+          <p:cNvSpPr/>
+          <p:nvPr/>
+        </p:nvSpPr>
+        <p:spPr>
+          <a:xfrm>
+            <a:off x="1975104" y="3364992"/>
+            <a:ext cx="1554480" cy="475488"/>
           </a:xfrm>
           <a:prstGeom prst="rect">
             <a:avLst>
@@ -21057,14 +22025,14 @@
       </p:sp>
       <p:sp>
         <p:nvSpPr>
-          <p:cNvPr id="26" name="Text 24"/>
-          <p:cNvSpPr/>
-          <p:nvPr/>
-        </p:nvSpPr>
-        <p:spPr>
-          <a:xfrm>
-            <a:off x="2313432" y="3364992"/>
-            <a:ext cx="1645920" cy="475488"/>
+          <p:cNvPr id="29" name="Text 27"/>
+          <p:cNvSpPr/>
+          <p:nvPr/>
+        </p:nvSpPr>
+        <p:spPr>
+          <a:xfrm>
+            <a:off x="1975104" y="3364992"/>
+            <a:ext cx="1554480" cy="475488"/>
           </a:xfrm>
           <a:prstGeom prst="rect">
             <a:avLst/>
@@ -21088,7 +22056,7 @@
                 <a:ea typeface="Trebuchet MS" pitchFamily="34" charset="-122"/>
                 <a:cs typeface="Trebuchet MS" pitchFamily="34" charset="-120"/>
               </a:rPr>
-              <a:t>pow</a:t>
+              <a:t>o</a:t>
             </a:r>
             <a:endParaRPr lang="en-US" sz="1400" dirty="0"/>
           </a:p>
@@ -21096,14 +22064,14 @@
       </p:sp>
       <p:sp>
         <p:nvSpPr>
-          <p:cNvPr id="27" name="Text 25"/>
-          <p:cNvSpPr/>
-          <p:nvPr/>
-        </p:nvSpPr>
-        <p:spPr>
-          <a:xfrm>
-            <a:off x="3959352" y="3364992"/>
-            <a:ext cx="411480" cy="475488"/>
+          <p:cNvPr id="30" name="Text 28"/>
+          <p:cNvSpPr/>
+          <p:nvPr/>
+        </p:nvSpPr>
+        <p:spPr>
+          <a:xfrm>
+            <a:off x="3529584" y="3364992"/>
+            <a:ext cx="73152" cy="475488"/>
           </a:xfrm>
           <a:prstGeom prst="rect">
             <a:avLst/>
@@ -21135,14 +22103,14 @@
       </p:sp>
       <p:sp>
         <p:nvSpPr>
-          <p:cNvPr id="28" name="Shape 26"/>
-          <p:cNvSpPr/>
-          <p:nvPr/>
-        </p:nvSpPr>
-        <p:spPr>
-          <a:xfrm>
-            <a:off x="4370832" y="3364992"/>
-            <a:ext cx="1645920" cy="475488"/>
+          <p:cNvPr id="31" name="Shape 29"/>
+          <p:cNvSpPr/>
+          <p:nvPr/>
+        </p:nvSpPr>
+        <p:spPr>
+          <a:xfrm>
+            <a:off x="3602736" y="3364992"/>
+            <a:ext cx="1554480" cy="475488"/>
           </a:xfrm>
           <a:prstGeom prst="rect">
             <a:avLst>
@@ -21162,14 +22130,14 @@
       </p:sp>
       <p:sp>
         <p:nvSpPr>
-          <p:cNvPr id="29" name="Text 27"/>
-          <p:cNvSpPr/>
-          <p:nvPr/>
-        </p:nvSpPr>
-        <p:spPr>
-          <a:xfrm>
-            <a:off x="4370832" y="3364992"/>
-            <a:ext cx="1645920" cy="475488"/>
+          <p:cNvPr id="32" name="Text 30"/>
+          <p:cNvSpPr/>
+          <p:nvPr/>
+        </p:nvSpPr>
+        <p:spPr>
+          <a:xfrm>
+            <a:off x="3602736" y="3364992"/>
+            <a:ext cx="1554480" cy="475488"/>
           </a:xfrm>
           <a:prstGeom prst="rect">
             <a:avLst/>
@@ -21193,7 +22161,7 @@
                 <a:ea typeface="Trebuchet MS" pitchFamily="34" charset="-122"/>
                 <a:cs typeface="Trebuchet MS" pitchFamily="34" charset="-120"/>
               </a:rPr>
-              <a:t>er</a:t>
+              <a:t>ver</a:t>
             </a:r>
             <a:endParaRPr lang="en-US" sz="1400" dirty="0"/>
           </a:p>
@@ -21201,14 +22169,14 @@
       </p:sp>
       <p:sp>
         <p:nvSpPr>
-          <p:cNvPr id="30" name="Text 28"/>
-          <p:cNvSpPr/>
-          <p:nvPr/>
-        </p:nvSpPr>
-        <p:spPr>
-          <a:xfrm>
-            <a:off x="6016752" y="3364992"/>
-            <a:ext cx="411480" cy="475488"/>
+          <p:cNvPr id="33" name="Text 31"/>
+          <p:cNvSpPr/>
+          <p:nvPr/>
+        </p:nvSpPr>
+        <p:spPr>
+          <a:xfrm>
+            <a:off x="5157216" y="3364992"/>
+            <a:ext cx="73152" cy="475488"/>
           </a:xfrm>
           <a:prstGeom prst="rect">
             <a:avLst/>
@@ -21240,14 +22208,14 @@
       </p:sp>
       <p:sp>
         <p:nvSpPr>
-          <p:cNvPr id="31" name="Shape 29"/>
-          <p:cNvSpPr/>
-          <p:nvPr/>
-        </p:nvSpPr>
-        <p:spPr>
-          <a:xfrm>
-            <a:off x="6428232" y="3364992"/>
-            <a:ext cx="1645920" cy="475488"/>
+          <p:cNvPr id="34" name="Shape 32"/>
+          <p:cNvSpPr/>
+          <p:nvPr/>
+        </p:nvSpPr>
+        <p:spPr>
+          <a:xfrm>
+            <a:off x="5230368" y="3364992"/>
+            <a:ext cx="1554480" cy="475488"/>
           </a:xfrm>
           <a:prstGeom prst="rect">
             <a:avLst>
@@ -21267,14 +22235,14 @@
       </p:sp>
       <p:sp>
         <p:nvSpPr>
-          <p:cNvPr id="32" name="Text 30"/>
-          <p:cNvSpPr/>
-          <p:nvPr/>
-        </p:nvSpPr>
-        <p:spPr>
-          <a:xfrm>
-            <a:off x="6428232" y="3364992"/>
-            <a:ext cx="1645920" cy="475488"/>
+          <p:cNvPr id="35" name="Text 33"/>
+          <p:cNvSpPr/>
+          <p:nvPr/>
+        </p:nvSpPr>
+        <p:spPr>
+          <a:xfrm>
+            <a:off x="5230368" y="3364992"/>
+            <a:ext cx="1554480" cy="475488"/>
           </a:xfrm>
           <a:prstGeom prst="rect">
             <a:avLst/>
@@ -21298,7 +22266,7 @@
                 <a:ea typeface="Trebuchet MS" pitchFamily="34" charset="-122"/>
                 <a:cs typeface="Trebuchet MS" pitchFamily="34" charset="-120"/>
               </a:rPr>
-              <a:t>ful</a:t>
+              <a:t>pow</a:t>
             </a:r>
             <a:endParaRPr lang="en-US" sz="1400" dirty="0"/>
           </a:p>
@@ -21306,7 +22274,112 @@
       </p:sp>
       <p:sp>
         <p:nvSpPr>
-          <p:cNvPr id="33" name="Shape 31"/>
+          <p:cNvPr id="36" name="Text 34"/>
+          <p:cNvSpPr/>
+          <p:nvPr/>
+        </p:nvSpPr>
+        <p:spPr>
+          <a:xfrm>
+            <a:off x="6784848" y="3364992"/>
+            <a:ext cx="73152" cy="475488"/>
+          </a:xfrm>
+          <a:prstGeom prst="rect">
+            <a:avLst/>
+          </a:prstGeom>
+          <a:noFill/>
+          <a:ln/>
+        </p:spPr>
+        <p:txBody>
+          <a:bodyPr wrap="square" lIns="0" tIns="0" rIns="0" bIns="0" rtlCol="0" anchor="ctr"/>
+          <a:lstStyle/>
+          <a:p>
+            <a:pPr algn="ctr" indent="0" marL="0">
+              <a:buNone/>
+            </a:pPr>
+            <a:r>
+              <a:rPr lang="en-US" sz="1600" b="1" dirty="0">
+                <a:solidFill>
+                  <a:srgbClr val="0D9488"/>
+                </a:solidFill>
+                <a:latin typeface="Trebuchet MS" pitchFamily="34" charset="0"/>
+                <a:ea typeface="Trebuchet MS" pitchFamily="34" charset="-122"/>
+                <a:cs typeface="Trebuchet MS" pitchFamily="34" charset="-120"/>
+              </a:rPr>
+              <a:t>·</a:t>
+            </a:r>
+            <a:endParaRPr lang="en-US" sz="1600" dirty="0"/>
+          </a:p>
+        </p:txBody>
+      </p:sp>
+      <p:sp>
+        <p:nvSpPr>
+          <p:cNvPr id="37" name="Shape 35"/>
+          <p:cNvSpPr/>
+          <p:nvPr/>
+        </p:nvSpPr>
+        <p:spPr>
+          <a:xfrm>
+            <a:off x="6858000" y="3364992"/>
+            <a:ext cx="1554480" cy="475488"/>
+          </a:xfrm>
+          <a:prstGeom prst="rect">
+            <a:avLst>
+              <a:gd name="adj" fmla="val 9615"/>
+            </a:avLst>
+          </a:prstGeom>
+          <a:solidFill>
+            <a:srgbClr val="FFFFFF"/>
+          </a:solidFill>
+          <a:ln w="12700">
+            <a:solidFill>
+              <a:srgbClr val="0D9488"/>
+            </a:solidFill>
+            <a:prstDash val="solid"/>
+          </a:ln>
+        </p:spPr>
+      </p:sp>
+      <p:sp>
+        <p:nvSpPr>
+          <p:cNvPr id="38" name="Text 36"/>
+          <p:cNvSpPr/>
+          <p:nvPr/>
+        </p:nvSpPr>
+        <p:spPr>
+          <a:xfrm>
+            <a:off x="6858000" y="3364992"/>
+            <a:ext cx="1554480" cy="475488"/>
+          </a:xfrm>
+          <a:prstGeom prst="rect">
+            <a:avLst/>
+          </a:prstGeom>
+          <a:noFill/>
+          <a:ln/>
+        </p:spPr>
+        <p:txBody>
+          <a:bodyPr wrap="square" lIns="0" tIns="0" rIns="0" bIns="0" rtlCol="0" anchor="ctr"/>
+          <a:lstStyle/>
+          <a:p>
+            <a:pPr algn="ctr" indent="0" marL="0">
+              <a:buNone/>
+            </a:pPr>
+            <a:r>
+              <a:rPr lang="en-US" sz="1400" b="1" dirty="0">
+                <a:solidFill>
+                  <a:srgbClr val="0D9488"/>
+                </a:solidFill>
+                <a:latin typeface="Trebuchet MS" pitchFamily="34" charset="0"/>
+                <a:ea typeface="Trebuchet MS" pitchFamily="34" charset="-122"/>
+                <a:cs typeface="Trebuchet MS" pitchFamily="34" charset="-120"/>
+              </a:rPr>
+              <a:t>ered</a:t>
+            </a:r>
+            <a:endParaRPr lang="en-US" sz="1400" dirty="0"/>
+          </a:p>
+        </p:txBody>
+      </p:sp>
+      <p:sp>
+        <p:nvSpPr>
+          <p:cNvPr id="39" name="Shape 37"/>
           <p:cNvSpPr/>
           <p:nvPr/>
         </p:nvSpPr>
@@ -21333,7 +22406,7 @@
       </p:sp>
       <p:sp>
         <p:nvSpPr>
-          <p:cNvPr id="34" name="Text 32"/>
+          <p:cNvPr id="40" name="Text 38"/>
           <p:cNvSpPr/>
           <p:nvPr/>
         </p:nvSpPr>
@@ -21372,7 +22445,7 @@
       </p:sp>
       <p:sp>
         <p:nvSpPr>
-          <p:cNvPr id="35" name="Shape 33"/>
+          <p:cNvPr id="41" name="Shape 39"/>
           <p:cNvSpPr/>
           <p:nvPr/>
         </p:nvSpPr>
@@ -21399,7 +22472,7 @@
       </p:sp>
       <p:sp>
         <p:nvSpPr>
-          <p:cNvPr id="36" name="Text 34"/>
+          <p:cNvPr id="42" name="Text 40"/>
           <p:cNvSpPr/>
           <p:nvPr/>
         </p:nvSpPr>
@@ -21722,7 +22795,7 @@
                 <a:ea typeface="Calibri" pitchFamily="34" charset="-122"/>
                 <a:cs typeface="Calibri" pitchFamily="34" charset="-120"/>
               </a:rPr>
-              <a:t>Word Labs  •  wordlabs.app  •  Root: 'power' = strength, force, ability</a:t>
+              <a:t>Word Labs  •  wordlabs.app  •  Root: 'power' = strength; control; energy</a:t>
             </a:r>
             <a:endParaRPr lang="en-US" sz="800" dirty="0"/>
           </a:p>
@@ -21861,7 +22934,7 @@
                 <a:ea typeface="Trebuchet MS" pitchFamily="34" charset="-122"/>
                 <a:cs typeface="Trebuchet MS" pitchFamily="34" charset="-120"/>
               </a:rPr>
-              <a:t>powerful</a:t>
+              <a:t>overpowered</a:t>
             </a:r>
             <a:endParaRPr lang="en-US" sz="2800" dirty="0"/>
           </a:p>
@@ -21941,7 +23014,7 @@
         </p:nvSpPr>
         <p:spPr>
           <a:xfrm>
-            <a:off x="2938272" y="2258568"/>
+            <a:off x="2221992" y="2258568"/>
             <a:ext cx="1828800" cy="292608"/>
           </a:xfrm>
           <a:prstGeom prst="rect">
@@ -21950,11 +23023,11 @@
             </a:avLst>
           </a:prstGeom>
           <a:solidFill>
-            <a:srgbClr val="CCFBF1"/>
+            <a:srgbClr val="DDD6FE"/>
           </a:solidFill>
           <a:ln w="19050">
             <a:solidFill>
-              <a:srgbClr val="0D9488"/>
+              <a:srgbClr val="7C3AED"/>
             </a:solidFill>
             <a:prstDash val="solid"/>
           </a:ln>
@@ -21975,7 +23048,7 @@
         </p:nvSpPr>
         <p:spPr>
           <a:xfrm>
-            <a:off x="2938272" y="2258568"/>
+            <a:off x="2221992" y="2258568"/>
             <a:ext cx="1828800" cy="292608"/>
           </a:xfrm>
           <a:prstGeom prst="rect">
@@ -21994,13 +23067,13 @@
             <a:r>
               <a:rPr lang="en-US" sz="1300" b="1" dirty="0">
                 <a:solidFill>
-                  <a:srgbClr val="0F766E"/>
+                  <a:srgbClr val="4C1D95"/>
                 </a:solidFill>
                 <a:latin typeface="Trebuchet MS" pitchFamily="34" charset="0"/>
                 <a:ea typeface="Trebuchet MS" pitchFamily="34" charset="-122"/>
                 <a:cs typeface="Trebuchet MS" pitchFamily="34" charset="-120"/>
               </a:rPr>
-              <a:t>power</a:t>
+              <a:t>over</a:t>
             </a:r>
             <a:endParaRPr lang="en-US" sz="1300" dirty="0"/>
           </a:p>
@@ -22014,7 +23087,7 @@
         </p:nvSpPr>
         <p:spPr>
           <a:xfrm>
-            <a:off x="2938272" y="2569464"/>
+            <a:off x="2221992" y="2569464"/>
             <a:ext cx="1828800" cy="201168"/>
           </a:xfrm>
           <a:prstGeom prst="rect">
@@ -22039,7 +23112,7 @@
                 <a:ea typeface="Calibri" pitchFamily="34" charset="-122"/>
                 <a:cs typeface="Calibri" pitchFamily="34" charset="-120"/>
               </a:rPr>
-              <a:t>strength, force</a:t>
+              <a:t>too much</a:t>
             </a:r>
             <a:endParaRPr lang="en-US" sz="850" dirty="0"/>
           </a:p>
@@ -22053,7 +23126,7 @@
         </p:nvSpPr>
         <p:spPr>
           <a:xfrm>
-            <a:off x="5803392" y="2258568"/>
+            <a:off x="4370832" y="2258568"/>
             <a:ext cx="1828800" cy="292608"/>
           </a:xfrm>
           <a:prstGeom prst="rect">
@@ -22062,11 +23135,11 @@
             </a:avLst>
           </a:prstGeom>
           <a:solidFill>
-            <a:srgbClr val="FCE7F3"/>
+            <a:srgbClr val="CCFBF1"/>
           </a:solidFill>
           <a:ln w="19050">
             <a:solidFill>
-              <a:srgbClr val="DB2777"/>
+              <a:srgbClr val="0D9488"/>
             </a:solidFill>
             <a:prstDash val="solid"/>
           </a:ln>
@@ -22087,7 +23160,7 @@
         </p:nvSpPr>
         <p:spPr>
           <a:xfrm>
-            <a:off x="5803392" y="2258568"/>
+            <a:off x="4370832" y="2258568"/>
             <a:ext cx="1828800" cy="292608"/>
           </a:xfrm>
           <a:prstGeom prst="rect">
@@ -22106,13 +23179,13 @@
             <a:r>
               <a:rPr lang="en-US" sz="1300" b="1" dirty="0">
                 <a:solidFill>
-                  <a:srgbClr val="9D174D"/>
+                  <a:srgbClr val="0F766E"/>
                 </a:solidFill>
                 <a:latin typeface="Trebuchet MS" pitchFamily="34" charset="0"/>
                 <a:ea typeface="Trebuchet MS" pitchFamily="34" charset="-122"/>
                 <a:cs typeface="Trebuchet MS" pitchFamily="34" charset="-120"/>
               </a:rPr>
-              <a:t>ful</a:t>
+              <a:t>power</a:t>
             </a:r>
             <a:endParaRPr lang="en-US" sz="1300" dirty="0"/>
           </a:p>
@@ -22126,7 +23199,7 @@
         </p:nvSpPr>
         <p:spPr>
           <a:xfrm>
-            <a:off x="5803392" y="2569464"/>
+            <a:off x="4370832" y="2569464"/>
             <a:ext cx="1828800" cy="201168"/>
           </a:xfrm>
           <a:prstGeom prst="rect">
@@ -22151,7 +23224,7 @@
                 <a:ea typeface="Calibri" pitchFamily="34" charset="-122"/>
                 <a:cs typeface="Calibri" pitchFamily="34" charset="-120"/>
               </a:rPr>
-              <a:t>full of</a:t>
+              <a:t>strength; control; energy</a:t>
             </a:r>
             <a:endParaRPr lang="en-US" sz="850" dirty="0"/>
           </a:p>
@@ -22160,6 +23233,118 @@
       <p:sp>
         <p:nvSpPr>
           <p:cNvPr id="22" name="Shape 20"/>
+          <p:cNvSpPr/>
+          <p:nvPr/>
+        </p:nvSpPr>
+        <p:spPr>
+          <a:xfrm>
+            <a:off x="6519672" y="2258568"/>
+            <a:ext cx="1828800" cy="292608"/>
+          </a:xfrm>
+          <a:prstGeom prst="rect">
+            <a:avLst>
+              <a:gd name="adj" fmla="val 25000"/>
+            </a:avLst>
+          </a:prstGeom>
+          <a:solidFill>
+            <a:srgbClr val="FCE7F3"/>
+          </a:solidFill>
+          <a:ln w="19050">
+            <a:solidFill>
+              <a:srgbClr val="DB2777"/>
+            </a:solidFill>
+            <a:prstDash val="solid"/>
+          </a:ln>
+          <a:effectLst>
+            <a:outerShdw sx="100000" sy="100000" kx="0" ky="0" algn="bl" rotWithShape="0" blurRad="101600" dist="38100" dir="8100000">
+              <a:srgbClr val="000000">
+                <a:alpha val="12000"/>
+              </a:srgbClr>
+            </a:outerShdw>
+          </a:effectLst>
+        </p:spPr>
+      </p:sp>
+      <p:sp>
+        <p:nvSpPr>
+          <p:cNvPr id="23" name="Text 21"/>
+          <p:cNvSpPr/>
+          <p:nvPr/>
+        </p:nvSpPr>
+        <p:spPr>
+          <a:xfrm>
+            <a:off x="6519672" y="2258568"/>
+            <a:ext cx="1828800" cy="292608"/>
+          </a:xfrm>
+          <a:prstGeom prst="rect">
+            <a:avLst/>
+          </a:prstGeom>
+          <a:noFill/>
+          <a:ln/>
+        </p:spPr>
+        <p:txBody>
+          <a:bodyPr wrap="square" lIns="0" tIns="0" rIns="0" bIns="0" rtlCol="0" anchor="ctr"/>
+          <a:lstStyle/>
+          <a:p>
+            <a:pPr algn="ctr" indent="0" marL="0">
+              <a:buNone/>
+            </a:pPr>
+            <a:r>
+              <a:rPr lang="en-US" sz="1300" b="1" dirty="0">
+                <a:solidFill>
+                  <a:srgbClr val="9D174D"/>
+                </a:solidFill>
+                <a:latin typeface="Trebuchet MS" pitchFamily="34" charset="0"/>
+                <a:ea typeface="Trebuchet MS" pitchFamily="34" charset="-122"/>
+                <a:cs typeface="Trebuchet MS" pitchFamily="34" charset="-120"/>
+              </a:rPr>
+              <a:t>ed</a:t>
+            </a:r>
+            <a:endParaRPr lang="en-US" sz="1300" dirty="0"/>
+          </a:p>
+        </p:txBody>
+      </p:sp>
+      <p:sp>
+        <p:nvSpPr>
+          <p:cNvPr id="24" name="Text 22"/>
+          <p:cNvSpPr/>
+          <p:nvPr/>
+        </p:nvSpPr>
+        <p:spPr>
+          <a:xfrm>
+            <a:off x="6519672" y="2569464"/>
+            <a:ext cx="1828800" cy="201168"/>
+          </a:xfrm>
+          <a:prstGeom prst="rect">
+            <a:avLst/>
+          </a:prstGeom>
+          <a:noFill/>
+          <a:ln/>
+        </p:spPr>
+        <p:txBody>
+          <a:bodyPr wrap="square" lIns="0" tIns="0" rIns="0" bIns="0" rtlCol="0" anchor="t"/>
+          <a:lstStyle/>
+          <a:p>
+            <a:pPr algn="ctr" indent="0" marL="0">
+              <a:buNone/>
+            </a:pPr>
+            <a:r>
+              <a:rPr lang="en-US" sz="850" dirty="0">
+                <a:solidFill>
+                  <a:srgbClr val="475569"/>
+                </a:solidFill>
+                <a:latin typeface="Calibri" pitchFamily="34" charset="0"/>
+                <a:ea typeface="Calibri" pitchFamily="34" charset="-122"/>
+                <a:cs typeface="Calibri" pitchFamily="34" charset="-120"/>
+              </a:rPr>
+              <a:t>past tense</a:t>
+            </a:r>
+            <a:endParaRPr lang="en-US" sz="850" dirty="0"/>
+          </a:p>
+        </p:txBody>
+      </p:sp>
+      <p:sp>
+        <p:nvSpPr>
+          <p:cNvPr id="25" name="Shape 23"/>
           <p:cNvSpPr/>
           <p:nvPr/>
         </p:nvSpPr>
@@ -22186,7 +23371,7 @@
       </p:sp>
       <p:sp>
         <p:nvSpPr>
-          <p:cNvPr id="23" name="Text 21"/>
+          <p:cNvPr id="26" name="Text 24"/>
           <p:cNvSpPr/>
           <p:nvPr/>
         </p:nvSpPr>
@@ -22225,7 +23410,7 @@
       </p:sp>
       <p:sp>
         <p:nvSpPr>
-          <p:cNvPr id="24" name="Shape 22"/>
+          <p:cNvPr id="27" name="Shape 25"/>
           <p:cNvSpPr/>
           <p:nvPr/>
         </p:nvSpPr>
@@ -22252,14 +23437,14 @@
       </p:sp>
       <p:sp>
         <p:nvSpPr>
-          <p:cNvPr id="25" name="Shape 23"/>
-          <p:cNvSpPr/>
-          <p:nvPr/>
-        </p:nvSpPr>
-        <p:spPr>
-          <a:xfrm>
-            <a:off x="2313432" y="3364992"/>
-            <a:ext cx="1645920" cy="475488"/>
+          <p:cNvPr id="28" name="Shape 26"/>
+          <p:cNvSpPr/>
+          <p:nvPr/>
+        </p:nvSpPr>
+        <p:spPr>
+          <a:xfrm>
+            <a:off x="1975104" y="3364992"/>
+            <a:ext cx="1554480" cy="475488"/>
           </a:xfrm>
           <a:prstGeom prst="rect">
             <a:avLst>
@@ -22279,14 +23464,14 @@
       </p:sp>
       <p:sp>
         <p:nvSpPr>
-          <p:cNvPr id="26" name="Text 24"/>
-          <p:cNvSpPr/>
-          <p:nvPr/>
-        </p:nvSpPr>
-        <p:spPr>
-          <a:xfrm>
-            <a:off x="2313432" y="3364992"/>
-            <a:ext cx="1645920" cy="475488"/>
+          <p:cNvPr id="29" name="Text 27"/>
+          <p:cNvSpPr/>
+          <p:nvPr/>
+        </p:nvSpPr>
+        <p:spPr>
+          <a:xfrm>
+            <a:off x="1975104" y="3364992"/>
+            <a:ext cx="1554480" cy="475488"/>
           </a:xfrm>
           <a:prstGeom prst="rect">
             <a:avLst/>
@@ -22310,7 +23495,7 @@
                 <a:ea typeface="Trebuchet MS" pitchFamily="34" charset="-122"/>
                 <a:cs typeface="Trebuchet MS" pitchFamily="34" charset="-120"/>
               </a:rPr>
-              <a:t>pow</a:t>
+              <a:t>o</a:t>
             </a:r>
             <a:endParaRPr lang="en-US" sz="1400" dirty="0"/>
           </a:p>
@@ -22318,14 +23503,14 @@
       </p:sp>
       <p:sp>
         <p:nvSpPr>
-          <p:cNvPr id="27" name="Text 25"/>
-          <p:cNvSpPr/>
-          <p:nvPr/>
-        </p:nvSpPr>
-        <p:spPr>
-          <a:xfrm>
-            <a:off x="3959352" y="3364992"/>
-            <a:ext cx="411480" cy="475488"/>
+          <p:cNvPr id="30" name="Text 28"/>
+          <p:cNvSpPr/>
+          <p:nvPr/>
+        </p:nvSpPr>
+        <p:spPr>
+          <a:xfrm>
+            <a:off x="3529584" y="3364992"/>
+            <a:ext cx="73152" cy="475488"/>
           </a:xfrm>
           <a:prstGeom prst="rect">
             <a:avLst/>
@@ -22357,14 +23542,14 @@
       </p:sp>
       <p:sp>
         <p:nvSpPr>
-          <p:cNvPr id="28" name="Shape 26"/>
-          <p:cNvSpPr/>
-          <p:nvPr/>
-        </p:nvSpPr>
-        <p:spPr>
-          <a:xfrm>
-            <a:off x="4370832" y="3364992"/>
-            <a:ext cx="1645920" cy="475488"/>
+          <p:cNvPr id="31" name="Shape 29"/>
+          <p:cNvSpPr/>
+          <p:nvPr/>
+        </p:nvSpPr>
+        <p:spPr>
+          <a:xfrm>
+            <a:off x="3602736" y="3364992"/>
+            <a:ext cx="1554480" cy="475488"/>
           </a:xfrm>
           <a:prstGeom prst="rect">
             <a:avLst>
@@ -22384,14 +23569,14 @@
       </p:sp>
       <p:sp>
         <p:nvSpPr>
-          <p:cNvPr id="29" name="Text 27"/>
-          <p:cNvSpPr/>
-          <p:nvPr/>
-        </p:nvSpPr>
-        <p:spPr>
-          <a:xfrm>
-            <a:off x="4370832" y="3364992"/>
-            <a:ext cx="1645920" cy="475488"/>
+          <p:cNvPr id="32" name="Text 30"/>
+          <p:cNvSpPr/>
+          <p:nvPr/>
+        </p:nvSpPr>
+        <p:spPr>
+          <a:xfrm>
+            <a:off x="3602736" y="3364992"/>
+            <a:ext cx="1554480" cy="475488"/>
           </a:xfrm>
           <a:prstGeom prst="rect">
             <a:avLst/>
@@ -22415,7 +23600,7 @@
                 <a:ea typeface="Trebuchet MS" pitchFamily="34" charset="-122"/>
                 <a:cs typeface="Trebuchet MS" pitchFamily="34" charset="-120"/>
               </a:rPr>
-              <a:t>er</a:t>
+              <a:t>ver</a:t>
             </a:r>
             <a:endParaRPr lang="en-US" sz="1400" dirty="0"/>
           </a:p>
@@ -22423,14 +23608,14 @@
       </p:sp>
       <p:sp>
         <p:nvSpPr>
-          <p:cNvPr id="30" name="Text 28"/>
-          <p:cNvSpPr/>
-          <p:nvPr/>
-        </p:nvSpPr>
-        <p:spPr>
-          <a:xfrm>
-            <a:off x="6016752" y="3364992"/>
-            <a:ext cx="411480" cy="475488"/>
+          <p:cNvPr id="33" name="Text 31"/>
+          <p:cNvSpPr/>
+          <p:nvPr/>
+        </p:nvSpPr>
+        <p:spPr>
+          <a:xfrm>
+            <a:off x="5157216" y="3364992"/>
+            <a:ext cx="73152" cy="475488"/>
           </a:xfrm>
           <a:prstGeom prst="rect">
             <a:avLst/>
@@ -22462,14 +23647,14 @@
       </p:sp>
       <p:sp>
         <p:nvSpPr>
-          <p:cNvPr id="31" name="Shape 29"/>
-          <p:cNvSpPr/>
-          <p:nvPr/>
-        </p:nvSpPr>
-        <p:spPr>
-          <a:xfrm>
-            <a:off x="6428232" y="3364992"/>
-            <a:ext cx="1645920" cy="475488"/>
+          <p:cNvPr id="34" name="Shape 32"/>
+          <p:cNvSpPr/>
+          <p:nvPr/>
+        </p:nvSpPr>
+        <p:spPr>
+          <a:xfrm>
+            <a:off x="5230368" y="3364992"/>
+            <a:ext cx="1554480" cy="475488"/>
           </a:xfrm>
           <a:prstGeom prst="rect">
             <a:avLst>
@@ -22489,14 +23674,14 @@
       </p:sp>
       <p:sp>
         <p:nvSpPr>
-          <p:cNvPr id="32" name="Text 30"/>
-          <p:cNvSpPr/>
-          <p:nvPr/>
-        </p:nvSpPr>
-        <p:spPr>
-          <a:xfrm>
-            <a:off x="6428232" y="3364992"/>
-            <a:ext cx="1645920" cy="475488"/>
+          <p:cNvPr id="35" name="Text 33"/>
+          <p:cNvSpPr/>
+          <p:nvPr/>
+        </p:nvSpPr>
+        <p:spPr>
+          <a:xfrm>
+            <a:off x="5230368" y="3364992"/>
+            <a:ext cx="1554480" cy="475488"/>
           </a:xfrm>
           <a:prstGeom prst="rect">
             <a:avLst/>
@@ -22520,7 +23705,7 @@
                 <a:ea typeface="Trebuchet MS" pitchFamily="34" charset="-122"/>
                 <a:cs typeface="Trebuchet MS" pitchFamily="34" charset="-120"/>
               </a:rPr>
-              <a:t>ful</a:t>
+              <a:t>pow</a:t>
             </a:r>
             <a:endParaRPr lang="en-US" sz="1400" dirty="0"/>
           </a:p>
@@ -22528,7 +23713,112 @@
       </p:sp>
       <p:sp>
         <p:nvSpPr>
-          <p:cNvPr id="33" name="Shape 31"/>
+          <p:cNvPr id="36" name="Text 34"/>
+          <p:cNvSpPr/>
+          <p:nvPr/>
+        </p:nvSpPr>
+        <p:spPr>
+          <a:xfrm>
+            <a:off x="6784848" y="3364992"/>
+            <a:ext cx="73152" cy="475488"/>
+          </a:xfrm>
+          <a:prstGeom prst="rect">
+            <a:avLst/>
+          </a:prstGeom>
+          <a:noFill/>
+          <a:ln/>
+        </p:spPr>
+        <p:txBody>
+          <a:bodyPr wrap="square" lIns="0" tIns="0" rIns="0" bIns="0" rtlCol="0" anchor="ctr"/>
+          <a:lstStyle/>
+          <a:p>
+            <a:pPr algn="ctr" indent="0" marL="0">
+              <a:buNone/>
+            </a:pPr>
+            <a:r>
+              <a:rPr lang="en-US" sz="1600" b="1" dirty="0">
+                <a:solidFill>
+                  <a:srgbClr val="0D9488"/>
+                </a:solidFill>
+                <a:latin typeface="Trebuchet MS" pitchFamily="34" charset="0"/>
+                <a:ea typeface="Trebuchet MS" pitchFamily="34" charset="-122"/>
+                <a:cs typeface="Trebuchet MS" pitchFamily="34" charset="-120"/>
+              </a:rPr>
+              <a:t>·</a:t>
+            </a:r>
+            <a:endParaRPr lang="en-US" sz="1600" dirty="0"/>
+          </a:p>
+        </p:txBody>
+      </p:sp>
+      <p:sp>
+        <p:nvSpPr>
+          <p:cNvPr id="37" name="Shape 35"/>
+          <p:cNvSpPr/>
+          <p:nvPr/>
+        </p:nvSpPr>
+        <p:spPr>
+          <a:xfrm>
+            <a:off x="6858000" y="3364992"/>
+            <a:ext cx="1554480" cy="475488"/>
+          </a:xfrm>
+          <a:prstGeom prst="rect">
+            <a:avLst>
+              <a:gd name="adj" fmla="val 9615"/>
+            </a:avLst>
+          </a:prstGeom>
+          <a:solidFill>
+            <a:srgbClr val="FFFFFF"/>
+          </a:solidFill>
+          <a:ln w="12700">
+            <a:solidFill>
+              <a:srgbClr val="0D9488"/>
+            </a:solidFill>
+            <a:prstDash val="solid"/>
+          </a:ln>
+        </p:spPr>
+      </p:sp>
+      <p:sp>
+        <p:nvSpPr>
+          <p:cNvPr id="38" name="Text 36"/>
+          <p:cNvSpPr/>
+          <p:nvPr/>
+        </p:nvSpPr>
+        <p:spPr>
+          <a:xfrm>
+            <a:off x="6858000" y="3364992"/>
+            <a:ext cx="1554480" cy="475488"/>
+          </a:xfrm>
+          <a:prstGeom prst="rect">
+            <a:avLst/>
+          </a:prstGeom>
+          <a:noFill/>
+          <a:ln/>
+        </p:spPr>
+        <p:txBody>
+          <a:bodyPr wrap="square" lIns="0" tIns="0" rIns="0" bIns="0" rtlCol="0" anchor="ctr"/>
+          <a:lstStyle/>
+          <a:p>
+            <a:pPr algn="ctr" indent="0" marL="0">
+              <a:buNone/>
+            </a:pPr>
+            <a:r>
+              <a:rPr lang="en-US" sz="1400" b="1" dirty="0">
+                <a:solidFill>
+                  <a:srgbClr val="0D9488"/>
+                </a:solidFill>
+                <a:latin typeface="Trebuchet MS" pitchFamily="34" charset="0"/>
+                <a:ea typeface="Trebuchet MS" pitchFamily="34" charset="-122"/>
+                <a:cs typeface="Trebuchet MS" pitchFamily="34" charset="-120"/>
+              </a:rPr>
+              <a:t>ered</a:t>
+            </a:r>
+            <a:endParaRPr lang="en-US" sz="1400" dirty="0"/>
+          </a:p>
+        </p:txBody>
+      </p:sp>
+      <p:sp>
+        <p:nvSpPr>
+          <p:cNvPr id="39" name="Shape 37"/>
           <p:cNvSpPr/>
           <p:nvPr/>
         </p:nvSpPr>
@@ -22555,7 +23845,7 @@
       </p:sp>
       <p:sp>
         <p:nvSpPr>
-          <p:cNvPr id="34" name="Text 32"/>
+          <p:cNvPr id="40" name="Text 38"/>
           <p:cNvSpPr/>
           <p:nvPr/>
         </p:nvSpPr>
@@ -22594,7 +23884,7 @@
       </p:sp>
       <p:sp>
         <p:nvSpPr>
-          <p:cNvPr id="35" name="Shape 33"/>
+          <p:cNvPr id="41" name="Shape 39"/>
           <p:cNvSpPr/>
           <p:nvPr/>
         </p:nvSpPr>
@@ -22621,13 +23911,13 @@
       </p:sp>
       <p:sp>
         <p:nvSpPr>
-          <p:cNvPr id="36" name="Shape 34"/>
-          <p:cNvSpPr/>
-          <p:nvPr/>
-        </p:nvSpPr>
-        <p:spPr>
-          <a:xfrm>
-            <a:off x="2254649" y="4169664"/>
+          <p:cNvPr id="42" name="Shape 40"/>
+          <p:cNvSpPr/>
+          <p:nvPr/>
+        </p:nvSpPr>
+        <p:spPr>
+          <a:xfrm>
+            <a:off x="2023872" y="4169664"/>
             <a:ext cx="685800" cy="475488"/>
           </a:xfrm>
           <a:prstGeom prst="rect">
@@ -22648,13 +23938,13 @@
       </p:sp>
       <p:sp>
         <p:nvSpPr>
-          <p:cNvPr id="37" name="Text 35"/>
-          <p:cNvSpPr/>
-          <p:nvPr/>
-        </p:nvSpPr>
-        <p:spPr>
-          <a:xfrm>
-            <a:off x="2254649" y="4169664"/>
+          <p:cNvPr id="43" name="Text 41"/>
+          <p:cNvSpPr/>
+          <p:nvPr/>
+        </p:nvSpPr>
+        <p:spPr>
+          <a:xfrm>
+            <a:off x="2023872" y="4169664"/>
             <a:ext cx="685800" cy="475488"/>
           </a:xfrm>
           <a:prstGeom prst="rect">
@@ -22679,7 +23969,7 @@
                 <a:ea typeface="Trebuchet MS" pitchFamily="34" charset="-122"/>
                 <a:cs typeface="Trebuchet MS" pitchFamily="34" charset="-120"/>
               </a:rPr>
-              <a:t>p</a:t>
+              <a:t>o</a:t>
             </a:r>
             <a:endParaRPr lang="en-US" sz="900" dirty="0"/>
           </a:p>
@@ -22687,13 +23977,13 @@
       </p:sp>
       <p:sp>
         <p:nvSpPr>
-          <p:cNvPr id="38" name="Shape 36"/>
-          <p:cNvSpPr/>
-          <p:nvPr/>
-        </p:nvSpPr>
-        <p:spPr>
-          <a:xfrm>
-            <a:off x="3293146" y="4169664"/>
+          <p:cNvPr id="44" name="Shape 42"/>
+          <p:cNvSpPr/>
+          <p:nvPr/>
+        </p:nvSpPr>
+        <p:spPr>
+          <a:xfrm>
+            <a:off x="2831592" y="4169664"/>
             <a:ext cx="685800" cy="475488"/>
           </a:xfrm>
           <a:prstGeom prst="rect">
@@ -22714,13 +24004,13 @@
       </p:sp>
       <p:sp>
         <p:nvSpPr>
-          <p:cNvPr id="39" name="Text 37"/>
-          <p:cNvSpPr/>
-          <p:nvPr/>
-        </p:nvSpPr>
-        <p:spPr>
-          <a:xfrm>
-            <a:off x="3293146" y="4169664"/>
+          <p:cNvPr id="45" name="Text 43"/>
+          <p:cNvSpPr/>
+          <p:nvPr/>
+        </p:nvSpPr>
+        <p:spPr>
+          <a:xfrm>
+            <a:off x="2831592" y="4169664"/>
             <a:ext cx="685800" cy="475488"/>
           </a:xfrm>
           <a:prstGeom prst="rect">
@@ -22745,7 +24035,7 @@
                 <a:ea typeface="Trebuchet MS" pitchFamily="34" charset="-122"/>
                 <a:cs typeface="Trebuchet MS" pitchFamily="34" charset="-120"/>
               </a:rPr>
-              <a:t>ow</a:t>
+              <a:t>v</a:t>
             </a:r>
             <a:endParaRPr lang="en-US" sz="900" dirty="0"/>
           </a:p>
@@ -22753,13 +24043,13 @@
       </p:sp>
       <p:sp>
         <p:nvSpPr>
-          <p:cNvPr id="40" name="Shape 38"/>
-          <p:cNvSpPr/>
-          <p:nvPr/>
-        </p:nvSpPr>
-        <p:spPr>
-          <a:xfrm>
-            <a:off x="4331643" y="4169664"/>
+          <p:cNvPr id="46" name="Shape 44"/>
+          <p:cNvSpPr/>
+          <p:nvPr/>
+        </p:nvSpPr>
+        <p:spPr>
+          <a:xfrm>
+            <a:off x="3639312" y="4169664"/>
             <a:ext cx="685800" cy="475488"/>
           </a:xfrm>
           <a:prstGeom prst="rect">
@@ -22780,13 +24070,13 @@
       </p:sp>
       <p:sp>
         <p:nvSpPr>
-          <p:cNvPr id="41" name="Text 39"/>
-          <p:cNvSpPr/>
-          <p:nvPr/>
-        </p:nvSpPr>
-        <p:spPr>
-          <a:xfrm>
-            <a:off x="4331643" y="4169664"/>
+          <p:cNvPr id="47" name="Text 45"/>
+          <p:cNvSpPr/>
+          <p:nvPr/>
+        </p:nvSpPr>
+        <p:spPr>
+          <a:xfrm>
+            <a:off x="3639312" y="4169664"/>
             <a:ext cx="685800" cy="475488"/>
           </a:xfrm>
           <a:prstGeom prst="rect">
@@ -22819,13 +24109,13 @@
       </p:sp>
       <p:sp>
         <p:nvSpPr>
-          <p:cNvPr id="42" name="Shape 40"/>
-          <p:cNvSpPr/>
-          <p:nvPr/>
-        </p:nvSpPr>
-        <p:spPr>
-          <a:xfrm>
-            <a:off x="5370141" y="4169664"/>
+          <p:cNvPr id="48" name="Shape 46"/>
+          <p:cNvSpPr/>
+          <p:nvPr/>
+        </p:nvSpPr>
+        <p:spPr>
+          <a:xfrm>
+            <a:off x="4447032" y="4169664"/>
             <a:ext cx="685800" cy="475488"/>
           </a:xfrm>
           <a:prstGeom prst="rect">
@@ -22846,13 +24136,13 @@
       </p:sp>
       <p:sp>
         <p:nvSpPr>
-          <p:cNvPr id="43" name="Text 41"/>
-          <p:cNvSpPr/>
-          <p:nvPr/>
-        </p:nvSpPr>
-        <p:spPr>
-          <a:xfrm>
-            <a:off x="5370141" y="4169664"/>
+          <p:cNvPr id="49" name="Text 47"/>
+          <p:cNvSpPr/>
+          <p:nvPr/>
+        </p:nvSpPr>
+        <p:spPr>
+          <a:xfrm>
+            <a:off x="4447032" y="4169664"/>
             <a:ext cx="685800" cy="475488"/>
           </a:xfrm>
           <a:prstGeom prst="rect">
@@ -22877,7 +24167,7 @@
                 <a:ea typeface="Trebuchet MS" pitchFamily="34" charset="-122"/>
                 <a:cs typeface="Trebuchet MS" pitchFamily="34" charset="-120"/>
               </a:rPr>
-              <a:t>f</a:t>
+              <a:t>p</a:t>
             </a:r>
             <a:endParaRPr lang="en-US" sz="900" dirty="0"/>
           </a:p>
@@ -22885,13 +24175,13 @@
       </p:sp>
       <p:sp>
         <p:nvSpPr>
-          <p:cNvPr id="44" name="Shape 42"/>
-          <p:cNvSpPr/>
-          <p:nvPr/>
-        </p:nvSpPr>
-        <p:spPr>
-          <a:xfrm>
-            <a:off x="6408638" y="4169664"/>
+          <p:cNvPr id="50" name="Shape 48"/>
+          <p:cNvSpPr/>
+          <p:nvPr/>
+        </p:nvSpPr>
+        <p:spPr>
+          <a:xfrm>
+            <a:off x="5254752" y="4169664"/>
             <a:ext cx="685800" cy="475488"/>
           </a:xfrm>
           <a:prstGeom prst="rect">
@@ -22912,13 +24202,13 @@
       </p:sp>
       <p:sp>
         <p:nvSpPr>
-          <p:cNvPr id="45" name="Text 43"/>
-          <p:cNvSpPr/>
-          <p:nvPr/>
-        </p:nvSpPr>
-        <p:spPr>
-          <a:xfrm>
-            <a:off x="6408638" y="4169664"/>
+          <p:cNvPr id="51" name="Text 49"/>
+          <p:cNvSpPr/>
+          <p:nvPr/>
+        </p:nvSpPr>
+        <p:spPr>
+          <a:xfrm>
+            <a:off x="5254752" y="4169664"/>
             <a:ext cx="685800" cy="475488"/>
           </a:xfrm>
           <a:prstGeom prst="rect">
@@ -22943,7 +24233,7 @@
                 <a:ea typeface="Trebuchet MS" pitchFamily="34" charset="-122"/>
                 <a:cs typeface="Trebuchet MS" pitchFamily="34" charset="-120"/>
               </a:rPr>
-              <a:t>u</a:t>
+              <a:t>ow</a:t>
             </a:r>
             <a:endParaRPr lang="en-US" sz="900" dirty="0"/>
           </a:p>
@@ -22951,13 +24241,13 @@
       </p:sp>
       <p:sp>
         <p:nvSpPr>
-          <p:cNvPr id="46" name="Shape 44"/>
-          <p:cNvSpPr/>
-          <p:nvPr/>
-        </p:nvSpPr>
-        <p:spPr>
-          <a:xfrm>
-            <a:off x="7447135" y="4169664"/>
+          <p:cNvPr id="52" name="Shape 50"/>
+          <p:cNvSpPr/>
+          <p:nvPr/>
+        </p:nvSpPr>
+        <p:spPr>
+          <a:xfrm>
+            <a:off x="6062472" y="4169664"/>
             <a:ext cx="685800" cy="475488"/>
           </a:xfrm>
           <a:prstGeom prst="rect">
@@ -22978,13 +24268,13 @@
       </p:sp>
       <p:sp>
         <p:nvSpPr>
-          <p:cNvPr id="47" name="Text 45"/>
-          <p:cNvSpPr/>
-          <p:nvPr/>
-        </p:nvSpPr>
-        <p:spPr>
-          <a:xfrm>
-            <a:off x="7447135" y="4169664"/>
+          <p:cNvPr id="53" name="Text 51"/>
+          <p:cNvSpPr/>
+          <p:nvPr/>
+        </p:nvSpPr>
+        <p:spPr>
+          <a:xfrm>
+            <a:off x="6062472" y="4169664"/>
             <a:ext cx="685800" cy="475488"/>
           </a:xfrm>
           <a:prstGeom prst="rect">
@@ -23009,7 +24299,139 @@
                 <a:ea typeface="Trebuchet MS" pitchFamily="34" charset="-122"/>
                 <a:cs typeface="Trebuchet MS" pitchFamily="34" charset="-120"/>
               </a:rPr>
-              <a:t>l</a:t>
+              <a:t>er</a:t>
+            </a:r>
+            <a:endParaRPr lang="en-US" sz="900" dirty="0"/>
+          </a:p>
+        </p:txBody>
+      </p:sp>
+      <p:sp>
+        <p:nvSpPr>
+          <p:cNvPr id="54" name="Shape 52"/>
+          <p:cNvSpPr/>
+          <p:nvPr/>
+        </p:nvSpPr>
+        <p:spPr>
+          <a:xfrm>
+            <a:off x="6870192" y="4169664"/>
+            <a:ext cx="685800" cy="475488"/>
+          </a:xfrm>
+          <a:prstGeom prst="rect">
+            <a:avLst>
+              <a:gd name="adj" fmla="val 7692"/>
+            </a:avLst>
+          </a:prstGeom>
+          <a:solidFill>
+            <a:srgbClr val="FFFFFF"/>
+          </a:solidFill>
+          <a:ln w="12700">
+            <a:solidFill>
+              <a:srgbClr val="DB2777"/>
+            </a:solidFill>
+            <a:prstDash val="solid"/>
+          </a:ln>
+        </p:spPr>
+      </p:sp>
+      <p:sp>
+        <p:nvSpPr>
+          <p:cNvPr id="55" name="Text 53"/>
+          <p:cNvSpPr/>
+          <p:nvPr/>
+        </p:nvSpPr>
+        <p:spPr>
+          <a:xfrm>
+            <a:off x="6870192" y="4169664"/>
+            <a:ext cx="685800" cy="475488"/>
+          </a:xfrm>
+          <a:prstGeom prst="rect">
+            <a:avLst/>
+          </a:prstGeom>
+          <a:noFill/>
+          <a:ln/>
+        </p:spPr>
+        <p:txBody>
+          <a:bodyPr wrap="square" lIns="0" tIns="0" rIns="0" bIns="0" rtlCol="0" anchor="ctr"/>
+          <a:lstStyle/>
+          <a:p>
+            <a:pPr algn="ctr" indent="0" marL="0">
+              <a:buNone/>
+            </a:pPr>
+            <a:r>
+              <a:rPr lang="en-US" sz="900" b="1" dirty="0">
+                <a:solidFill>
+                  <a:srgbClr val="9D174D"/>
+                </a:solidFill>
+                <a:latin typeface="Trebuchet MS" pitchFamily="34" charset="0"/>
+                <a:ea typeface="Trebuchet MS" pitchFamily="34" charset="-122"/>
+                <a:cs typeface="Trebuchet MS" pitchFamily="34" charset="-120"/>
+              </a:rPr>
+              <a:t>e</a:t>
+            </a:r>
+            <a:endParaRPr lang="en-US" sz="900" dirty="0"/>
+          </a:p>
+        </p:txBody>
+      </p:sp>
+      <p:sp>
+        <p:nvSpPr>
+          <p:cNvPr id="56" name="Shape 54"/>
+          <p:cNvSpPr/>
+          <p:nvPr/>
+        </p:nvSpPr>
+        <p:spPr>
+          <a:xfrm>
+            <a:off x="7677912" y="4169664"/>
+            <a:ext cx="685800" cy="475488"/>
+          </a:xfrm>
+          <a:prstGeom prst="rect">
+            <a:avLst>
+              <a:gd name="adj" fmla="val 7692"/>
+            </a:avLst>
+          </a:prstGeom>
+          <a:solidFill>
+            <a:srgbClr val="FFFFFF"/>
+          </a:solidFill>
+          <a:ln w="12700">
+            <a:solidFill>
+              <a:srgbClr val="DB2777"/>
+            </a:solidFill>
+            <a:prstDash val="solid"/>
+          </a:ln>
+        </p:spPr>
+      </p:sp>
+      <p:sp>
+        <p:nvSpPr>
+          <p:cNvPr id="57" name="Text 55"/>
+          <p:cNvSpPr/>
+          <p:nvPr/>
+        </p:nvSpPr>
+        <p:spPr>
+          <a:xfrm>
+            <a:off x="7677912" y="4169664"/>
+            <a:ext cx="685800" cy="475488"/>
+          </a:xfrm>
+          <a:prstGeom prst="rect">
+            <a:avLst/>
+          </a:prstGeom>
+          <a:noFill/>
+          <a:ln/>
+        </p:spPr>
+        <p:txBody>
+          <a:bodyPr wrap="square" lIns="0" tIns="0" rIns="0" bIns="0" rtlCol="0" anchor="ctr"/>
+          <a:lstStyle/>
+          <a:p>
+            <a:pPr algn="ctr" indent="0" marL="0">
+              <a:buNone/>
+            </a:pPr>
+            <a:r>
+              <a:rPr lang="en-US" sz="900" b="1" dirty="0">
+                <a:solidFill>
+                  <a:srgbClr val="9D174D"/>
+                </a:solidFill>
+                <a:latin typeface="Trebuchet MS" pitchFamily="34" charset="0"/>
+                <a:ea typeface="Trebuchet MS" pitchFamily="34" charset="-122"/>
+                <a:cs typeface="Trebuchet MS" pitchFamily="34" charset="-120"/>
+              </a:rPr>
+              <a:t>d</a:t>
             </a:r>
             <a:endParaRPr lang="en-US" sz="900" dirty="0"/>
           </a:p>
@@ -23301,7 +24723,7 @@
                 <a:ea typeface="Calibri" pitchFamily="34" charset="-122"/>
                 <a:cs typeface="Calibri" pitchFamily="34" charset="-120"/>
               </a:rPr>
-              <a:t>Word Labs  •  wordlabs.app  •  Root: 'power' = strength, force, ability</a:t>
+              <a:t>Word Labs  •  wordlabs.app  •  Root: 'power' = strength; control; energy</a:t>
             </a:r>
             <a:endParaRPr lang="en-US" sz="800" dirty="0"/>
           </a:p>
@@ -23440,7 +24862,7 @@
                 <a:ea typeface="Trebuchet MS" pitchFamily="34" charset="-122"/>
                 <a:cs typeface="Trebuchet MS" pitchFamily="34" charset="-120"/>
               </a:rPr>
-              <a:t>superpower</a:t>
+              <a:t>overpowering</a:t>
             </a:r>
             <a:endParaRPr lang="en-US" sz="2800" dirty="0"/>
           </a:p>
@@ -24128,7 +25550,7 @@
                 <a:ea typeface="Calibri" pitchFamily="34" charset="-122"/>
                 <a:cs typeface="Calibri" pitchFamily="34" charset="-120"/>
               </a:rPr>
-              <a:t>Word Labs  •  wordlabs.app  •  Root: 'power' = strength, force, ability</a:t>
+              <a:t>Word Labs  •  wordlabs.app  •  Root: 'power' = strength; control; energy</a:t>
             </a:r>
             <a:endParaRPr lang="en-US" sz="800" dirty="0"/>
           </a:p>
@@ -24267,7 +25689,7 @@
                 <a:ea typeface="Trebuchet MS" pitchFamily="34" charset="-122"/>
                 <a:cs typeface="Trebuchet MS" pitchFamily="34" charset="-120"/>
               </a:rPr>
-              <a:t>superpower</a:t>
+              <a:t>overpowering</a:t>
             </a:r>
             <a:endParaRPr lang="en-US" sz="2800" dirty="0"/>
           </a:p>
@@ -24347,7 +25769,7 @@
         </p:nvSpPr>
         <p:spPr>
           <a:xfrm>
-            <a:off x="2938272" y="2258568"/>
+            <a:off x="2221992" y="2258568"/>
             <a:ext cx="1828800" cy="292608"/>
           </a:xfrm>
           <a:prstGeom prst="rect">
@@ -24381,7 +25803,7 @@
         </p:nvSpPr>
         <p:spPr>
           <a:xfrm>
-            <a:off x="2938272" y="2258568"/>
+            <a:off x="2221992" y="2258568"/>
             <a:ext cx="1828800" cy="292608"/>
           </a:xfrm>
           <a:prstGeom prst="rect">
@@ -24406,7 +25828,7 @@
                 <a:ea typeface="Trebuchet MS" pitchFamily="34" charset="-122"/>
                 <a:cs typeface="Trebuchet MS" pitchFamily="34" charset="-120"/>
               </a:rPr>
-              <a:t>super</a:t>
+              <a:t>over</a:t>
             </a:r>
             <a:endParaRPr lang="en-US" sz="1300" dirty="0"/>
           </a:p>
@@ -24420,7 +25842,7 @@
         </p:nvSpPr>
         <p:spPr>
           <a:xfrm>
-            <a:off x="2938272" y="2569464"/>
+            <a:off x="2221992" y="2569464"/>
             <a:ext cx="1828800" cy="201168"/>
           </a:xfrm>
           <a:prstGeom prst="rect">
@@ -24445,7 +25867,7 @@
                 <a:ea typeface="Calibri" pitchFamily="34" charset="-122"/>
                 <a:cs typeface="Calibri" pitchFamily="34" charset="-120"/>
               </a:rPr>
-              <a:t>above, beyond</a:t>
+              <a:t>too much</a:t>
             </a:r>
             <a:endParaRPr lang="en-US" sz="850" dirty="0"/>
           </a:p>
@@ -24459,7 +25881,7 @@
         </p:nvSpPr>
         <p:spPr>
           <a:xfrm>
-            <a:off x="5803392" y="2258568"/>
+            <a:off x="4370832" y="2258568"/>
             <a:ext cx="1828800" cy="292608"/>
           </a:xfrm>
           <a:prstGeom prst="rect">
@@ -24493,7 +25915,7 @@
         </p:nvSpPr>
         <p:spPr>
           <a:xfrm>
-            <a:off x="5803392" y="2258568"/>
+            <a:off x="4370832" y="2258568"/>
             <a:ext cx="1828800" cy="292608"/>
           </a:xfrm>
           <a:prstGeom prst="rect">
@@ -24532,7 +25954,7 @@
         </p:nvSpPr>
         <p:spPr>
           <a:xfrm>
-            <a:off x="5803392" y="2569464"/>
+            <a:off x="4370832" y="2569464"/>
             <a:ext cx="1828800" cy="201168"/>
           </a:xfrm>
           <a:prstGeom prst="rect">
@@ -24557,7 +25979,7 @@
                 <a:ea typeface="Calibri" pitchFamily="34" charset="-122"/>
                 <a:cs typeface="Calibri" pitchFamily="34" charset="-120"/>
               </a:rPr>
-              <a:t>strength, force</a:t>
+              <a:t>strength; control; energy</a:t>
             </a:r>
             <a:endParaRPr lang="en-US" sz="850" dirty="0"/>
           </a:p>
@@ -24566,6 +25988,118 @@
       <p:sp>
         <p:nvSpPr>
           <p:cNvPr id="22" name="Shape 20"/>
+          <p:cNvSpPr/>
+          <p:nvPr/>
+        </p:nvSpPr>
+        <p:spPr>
+          <a:xfrm>
+            <a:off x="6519672" y="2258568"/>
+            <a:ext cx="1828800" cy="292608"/>
+          </a:xfrm>
+          <a:prstGeom prst="rect">
+            <a:avLst>
+              <a:gd name="adj" fmla="val 25000"/>
+            </a:avLst>
+          </a:prstGeom>
+          <a:solidFill>
+            <a:srgbClr val="FCE7F3"/>
+          </a:solidFill>
+          <a:ln w="19050">
+            <a:solidFill>
+              <a:srgbClr val="DB2777"/>
+            </a:solidFill>
+            <a:prstDash val="solid"/>
+          </a:ln>
+          <a:effectLst>
+            <a:outerShdw sx="100000" sy="100000" kx="0" ky="0" algn="bl" rotWithShape="0" blurRad="101600" dist="38100" dir="8100000">
+              <a:srgbClr val="000000">
+                <a:alpha val="12000"/>
+              </a:srgbClr>
+            </a:outerShdw>
+          </a:effectLst>
+        </p:spPr>
+      </p:sp>
+      <p:sp>
+        <p:nvSpPr>
+          <p:cNvPr id="23" name="Text 21"/>
+          <p:cNvSpPr/>
+          <p:nvPr/>
+        </p:nvSpPr>
+        <p:spPr>
+          <a:xfrm>
+            <a:off x="6519672" y="2258568"/>
+            <a:ext cx="1828800" cy="292608"/>
+          </a:xfrm>
+          <a:prstGeom prst="rect">
+            <a:avLst/>
+          </a:prstGeom>
+          <a:noFill/>
+          <a:ln/>
+        </p:spPr>
+        <p:txBody>
+          <a:bodyPr wrap="square" lIns="0" tIns="0" rIns="0" bIns="0" rtlCol="0" anchor="ctr"/>
+          <a:lstStyle/>
+          <a:p>
+            <a:pPr algn="ctr" indent="0" marL="0">
+              <a:buNone/>
+            </a:pPr>
+            <a:r>
+              <a:rPr lang="en-US" sz="1300" b="1" dirty="0">
+                <a:solidFill>
+                  <a:srgbClr val="9D174D"/>
+                </a:solidFill>
+                <a:latin typeface="Trebuchet MS" pitchFamily="34" charset="0"/>
+                <a:ea typeface="Trebuchet MS" pitchFamily="34" charset="-122"/>
+                <a:cs typeface="Trebuchet MS" pitchFamily="34" charset="-120"/>
+              </a:rPr>
+              <a:t>ing</a:t>
+            </a:r>
+            <a:endParaRPr lang="en-US" sz="1300" dirty="0"/>
+          </a:p>
+        </p:txBody>
+      </p:sp>
+      <p:sp>
+        <p:nvSpPr>
+          <p:cNvPr id="24" name="Text 22"/>
+          <p:cNvSpPr/>
+          <p:nvPr/>
+        </p:nvSpPr>
+        <p:spPr>
+          <a:xfrm>
+            <a:off x="6519672" y="2569464"/>
+            <a:ext cx="1828800" cy="201168"/>
+          </a:xfrm>
+          <a:prstGeom prst="rect">
+            <a:avLst/>
+          </a:prstGeom>
+          <a:noFill/>
+          <a:ln/>
+        </p:spPr>
+        <p:txBody>
+          <a:bodyPr wrap="square" lIns="0" tIns="0" rIns="0" bIns="0" rtlCol="0" anchor="t"/>
+          <a:lstStyle/>
+          <a:p>
+            <a:pPr algn="ctr" indent="0" marL="0">
+              <a:buNone/>
+            </a:pPr>
+            <a:r>
+              <a:rPr lang="en-US" sz="850" dirty="0">
+                <a:solidFill>
+                  <a:srgbClr val="475569"/>
+                </a:solidFill>
+                <a:latin typeface="Calibri" pitchFamily="34" charset="0"/>
+                <a:ea typeface="Calibri" pitchFamily="34" charset="-122"/>
+                <a:cs typeface="Calibri" pitchFamily="34" charset="-120"/>
+              </a:rPr>
+              <a:t>happening now</a:t>
+            </a:r>
+            <a:endParaRPr lang="en-US" sz="850" dirty="0"/>
+          </a:p>
+        </p:txBody>
+      </p:sp>
+      <p:sp>
+        <p:nvSpPr>
+          <p:cNvPr id="25" name="Shape 23"/>
           <p:cNvSpPr/>
           <p:nvPr/>
         </p:nvSpPr>
@@ -24592,7 +26126,7 @@
       </p:sp>
       <p:sp>
         <p:nvSpPr>
-          <p:cNvPr id="23" name="Text 21"/>
+          <p:cNvPr id="26" name="Text 24"/>
           <p:cNvSpPr/>
           <p:nvPr/>
         </p:nvSpPr>
@@ -24631,7 +26165,7 @@
       </p:sp>
       <p:sp>
         <p:nvSpPr>
-          <p:cNvPr id="24" name="Shape 22"/>
+          <p:cNvPr id="27" name="Shape 25"/>
           <p:cNvSpPr/>
           <p:nvPr/>
         </p:nvSpPr>
@@ -24658,7 +26192,7 @@
       </p:sp>
       <p:sp>
         <p:nvSpPr>
-          <p:cNvPr id="25" name="Text 23"/>
+          <p:cNvPr id="28" name="Text 26"/>
           <p:cNvSpPr/>
           <p:nvPr/>
         </p:nvSpPr>
@@ -24697,7 +26231,7 @@
       </p:sp>
       <p:sp>
         <p:nvSpPr>
-          <p:cNvPr id="26" name="Shape 24"/>
+          <p:cNvPr id="29" name="Shape 27"/>
           <p:cNvSpPr/>
           <p:nvPr/>
         </p:nvSpPr>
@@ -24724,7 +26258,7 @@
       </p:sp>
       <p:sp>
         <p:nvSpPr>
-          <p:cNvPr id="27" name="Text 25"/>
+          <p:cNvPr id="30" name="Text 28"/>
           <p:cNvSpPr/>
           <p:nvPr/>
         </p:nvSpPr>
@@ -24763,7 +26297,7 @@
       </p:sp>
       <p:sp>
         <p:nvSpPr>
-          <p:cNvPr id="28" name="Shape 26"/>
+          <p:cNvPr id="31" name="Shape 29"/>
           <p:cNvSpPr/>
           <p:nvPr/>
         </p:nvSpPr>
@@ -24790,7 +26324,7 @@
       </p:sp>
       <p:sp>
         <p:nvSpPr>
-          <p:cNvPr id="29" name="Text 27"/>
+          <p:cNvPr id="32" name="Text 30"/>
           <p:cNvSpPr/>
           <p:nvPr/>
         </p:nvSpPr>
@@ -25113,7 +26647,7 @@
                 <a:ea typeface="Calibri" pitchFamily="34" charset="-122"/>
                 <a:cs typeface="Calibri" pitchFamily="34" charset="-120"/>
               </a:rPr>
-              <a:t>Word Labs  •  wordlabs.app  •  Root: 'power' = strength, force, ability</a:t>
+              <a:t>Word Labs  •  wordlabs.app  •  Root: 'power' = strength; control; energy</a:t>
             </a:r>
             <a:endParaRPr lang="en-US" sz="800" dirty="0"/>
           </a:p>
@@ -25186,7 +26720,7 @@
                 <a:ea typeface="Trebuchet MS" pitchFamily="34" charset="-122"/>
                 <a:cs typeface="Trebuchet MS" pitchFamily="34" charset="-120"/>
               </a:rPr>
-              <a:t>We are learning that the root 'power' means 'strength, force, ability'.</a:t>
+              <a:t>We are learning that the root 'power' means 'strength; control; energy'.</a:t>
             </a:r>
             <a:endParaRPr lang="en-US" sz="2000" dirty="0"/>
           </a:p>
@@ -25832,7 +27366,7 @@
                 <a:ea typeface="Calibri" pitchFamily="34" charset="-122"/>
                 <a:cs typeface="Calibri" pitchFamily="34" charset="-120"/>
               </a:rPr>
-              <a:t>Word Labs  •  wordlabs.app  •  Root: 'power' = strength, force, ability</a:t>
+              <a:t>Word Labs  •  wordlabs.app  •  Root: 'power' = strength; control; energy</a:t>
             </a:r>
             <a:endParaRPr lang="en-US" sz="800" dirty="0"/>
           </a:p>
@@ -25971,7 +27505,7 @@
                 <a:ea typeface="Trebuchet MS" pitchFamily="34" charset="-122"/>
                 <a:cs typeface="Trebuchet MS" pitchFamily="34" charset="-120"/>
               </a:rPr>
-              <a:t>superpower</a:t>
+              <a:t>overpowering</a:t>
             </a:r>
             <a:endParaRPr lang="en-US" sz="2800" dirty="0"/>
           </a:p>
@@ -26051,7 +27585,7 @@
         </p:nvSpPr>
         <p:spPr>
           <a:xfrm>
-            <a:off x="2938272" y="2258568"/>
+            <a:off x="2221992" y="2258568"/>
             <a:ext cx="1828800" cy="292608"/>
           </a:xfrm>
           <a:prstGeom prst="rect">
@@ -26085,7 +27619,7 @@
         </p:nvSpPr>
         <p:spPr>
           <a:xfrm>
-            <a:off x="2938272" y="2258568"/>
+            <a:off x="2221992" y="2258568"/>
             <a:ext cx="1828800" cy="292608"/>
           </a:xfrm>
           <a:prstGeom prst="rect">
@@ -26110,7 +27644,7 @@
                 <a:ea typeface="Trebuchet MS" pitchFamily="34" charset="-122"/>
                 <a:cs typeface="Trebuchet MS" pitchFamily="34" charset="-120"/>
               </a:rPr>
-              <a:t>super</a:t>
+              <a:t>over</a:t>
             </a:r>
             <a:endParaRPr lang="en-US" sz="1300" dirty="0"/>
           </a:p>
@@ -26124,7 +27658,7 @@
         </p:nvSpPr>
         <p:spPr>
           <a:xfrm>
-            <a:off x="2938272" y="2569464"/>
+            <a:off x="2221992" y="2569464"/>
             <a:ext cx="1828800" cy="201168"/>
           </a:xfrm>
           <a:prstGeom prst="rect">
@@ -26149,7 +27683,7 @@
                 <a:ea typeface="Calibri" pitchFamily="34" charset="-122"/>
                 <a:cs typeface="Calibri" pitchFamily="34" charset="-120"/>
               </a:rPr>
-              <a:t>above, beyond</a:t>
+              <a:t>too much</a:t>
             </a:r>
             <a:endParaRPr lang="en-US" sz="850" dirty="0"/>
           </a:p>
@@ -26163,7 +27697,7 @@
         </p:nvSpPr>
         <p:spPr>
           <a:xfrm>
-            <a:off x="5803392" y="2258568"/>
+            <a:off x="4370832" y="2258568"/>
             <a:ext cx="1828800" cy="292608"/>
           </a:xfrm>
           <a:prstGeom prst="rect">
@@ -26197,7 +27731,7 @@
         </p:nvSpPr>
         <p:spPr>
           <a:xfrm>
-            <a:off x="5803392" y="2258568"/>
+            <a:off x="4370832" y="2258568"/>
             <a:ext cx="1828800" cy="292608"/>
           </a:xfrm>
           <a:prstGeom prst="rect">
@@ -26236,7 +27770,7 @@
         </p:nvSpPr>
         <p:spPr>
           <a:xfrm>
-            <a:off x="5803392" y="2569464"/>
+            <a:off x="4370832" y="2569464"/>
             <a:ext cx="1828800" cy="201168"/>
           </a:xfrm>
           <a:prstGeom prst="rect">
@@ -26261,7 +27795,7 @@
                 <a:ea typeface="Calibri" pitchFamily="34" charset="-122"/>
                 <a:cs typeface="Calibri" pitchFamily="34" charset="-120"/>
               </a:rPr>
-              <a:t>strength, force</a:t>
+              <a:t>strength; control; energy</a:t>
             </a:r>
             <a:endParaRPr lang="en-US" sz="850" dirty="0"/>
           </a:p>
@@ -26270,6 +27804,118 @@
       <p:sp>
         <p:nvSpPr>
           <p:cNvPr id="22" name="Shape 20"/>
+          <p:cNvSpPr/>
+          <p:nvPr/>
+        </p:nvSpPr>
+        <p:spPr>
+          <a:xfrm>
+            <a:off x="6519672" y="2258568"/>
+            <a:ext cx="1828800" cy="292608"/>
+          </a:xfrm>
+          <a:prstGeom prst="rect">
+            <a:avLst>
+              <a:gd name="adj" fmla="val 25000"/>
+            </a:avLst>
+          </a:prstGeom>
+          <a:solidFill>
+            <a:srgbClr val="FCE7F3"/>
+          </a:solidFill>
+          <a:ln w="19050">
+            <a:solidFill>
+              <a:srgbClr val="DB2777"/>
+            </a:solidFill>
+            <a:prstDash val="solid"/>
+          </a:ln>
+          <a:effectLst>
+            <a:outerShdw sx="100000" sy="100000" kx="0" ky="0" algn="bl" rotWithShape="0" blurRad="101600" dist="38100" dir="8100000">
+              <a:srgbClr val="000000">
+                <a:alpha val="12000"/>
+              </a:srgbClr>
+            </a:outerShdw>
+          </a:effectLst>
+        </p:spPr>
+      </p:sp>
+      <p:sp>
+        <p:nvSpPr>
+          <p:cNvPr id="23" name="Text 21"/>
+          <p:cNvSpPr/>
+          <p:nvPr/>
+        </p:nvSpPr>
+        <p:spPr>
+          <a:xfrm>
+            <a:off x="6519672" y="2258568"/>
+            <a:ext cx="1828800" cy="292608"/>
+          </a:xfrm>
+          <a:prstGeom prst="rect">
+            <a:avLst/>
+          </a:prstGeom>
+          <a:noFill/>
+          <a:ln/>
+        </p:spPr>
+        <p:txBody>
+          <a:bodyPr wrap="square" lIns="0" tIns="0" rIns="0" bIns="0" rtlCol="0" anchor="ctr"/>
+          <a:lstStyle/>
+          <a:p>
+            <a:pPr algn="ctr" indent="0" marL="0">
+              <a:buNone/>
+            </a:pPr>
+            <a:r>
+              <a:rPr lang="en-US" sz="1300" b="1" dirty="0">
+                <a:solidFill>
+                  <a:srgbClr val="9D174D"/>
+                </a:solidFill>
+                <a:latin typeface="Trebuchet MS" pitchFamily="34" charset="0"/>
+                <a:ea typeface="Trebuchet MS" pitchFamily="34" charset="-122"/>
+                <a:cs typeface="Trebuchet MS" pitchFamily="34" charset="-120"/>
+              </a:rPr>
+              <a:t>ing</a:t>
+            </a:r>
+            <a:endParaRPr lang="en-US" sz="1300" dirty="0"/>
+          </a:p>
+        </p:txBody>
+      </p:sp>
+      <p:sp>
+        <p:nvSpPr>
+          <p:cNvPr id="24" name="Text 22"/>
+          <p:cNvSpPr/>
+          <p:nvPr/>
+        </p:nvSpPr>
+        <p:spPr>
+          <a:xfrm>
+            <a:off x="6519672" y="2569464"/>
+            <a:ext cx="1828800" cy="201168"/>
+          </a:xfrm>
+          <a:prstGeom prst="rect">
+            <a:avLst/>
+          </a:prstGeom>
+          <a:noFill/>
+          <a:ln/>
+        </p:spPr>
+        <p:txBody>
+          <a:bodyPr wrap="square" lIns="0" tIns="0" rIns="0" bIns="0" rtlCol="0" anchor="t"/>
+          <a:lstStyle/>
+          <a:p>
+            <a:pPr algn="ctr" indent="0" marL="0">
+              <a:buNone/>
+            </a:pPr>
+            <a:r>
+              <a:rPr lang="en-US" sz="850" dirty="0">
+                <a:solidFill>
+                  <a:srgbClr val="475569"/>
+                </a:solidFill>
+                <a:latin typeface="Calibri" pitchFamily="34" charset="0"/>
+                <a:ea typeface="Calibri" pitchFamily="34" charset="-122"/>
+                <a:cs typeface="Calibri" pitchFamily="34" charset="-120"/>
+              </a:rPr>
+              <a:t>happening now</a:t>
+            </a:r>
+            <a:endParaRPr lang="en-US" sz="850" dirty="0"/>
+          </a:p>
+        </p:txBody>
+      </p:sp>
+      <p:sp>
+        <p:nvSpPr>
+          <p:cNvPr id="25" name="Shape 23"/>
           <p:cNvSpPr/>
           <p:nvPr/>
         </p:nvSpPr>
@@ -26296,7 +27942,7 @@
       </p:sp>
       <p:sp>
         <p:nvSpPr>
-          <p:cNvPr id="23" name="Text 21"/>
+          <p:cNvPr id="26" name="Text 24"/>
           <p:cNvSpPr/>
           <p:nvPr/>
         </p:nvSpPr>
@@ -26335,7 +27981,7 @@
       </p:sp>
       <p:sp>
         <p:nvSpPr>
-          <p:cNvPr id="24" name="Shape 22"/>
+          <p:cNvPr id="27" name="Shape 25"/>
           <p:cNvSpPr/>
           <p:nvPr/>
         </p:nvSpPr>
@@ -26362,14 +28008,14 @@
       </p:sp>
       <p:sp>
         <p:nvSpPr>
-          <p:cNvPr id="25" name="Shape 23"/>
-          <p:cNvSpPr/>
-          <p:nvPr/>
-        </p:nvSpPr>
-        <p:spPr>
-          <a:xfrm>
-            <a:off x="1975104" y="3364992"/>
-            <a:ext cx="1554480" cy="475488"/>
+          <p:cNvPr id="28" name="Shape 26"/>
+          <p:cNvSpPr/>
+          <p:nvPr/>
+        </p:nvSpPr>
+        <p:spPr>
+          <a:xfrm>
+            <a:off x="1978152" y="3364992"/>
+            <a:ext cx="1225296" cy="475488"/>
           </a:xfrm>
           <a:prstGeom prst="rect">
             <a:avLst>
@@ -26389,14 +28035,14 @@
       </p:sp>
       <p:sp>
         <p:nvSpPr>
-          <p:cNvPr id="26" name="Text 24"/>
-          <p:cNvSpPr/>
-          <p:nvPr/>
-        </p:nvSpPr>
-        <p:spPr>
-          <a:xfrm>
-            <a:off x="1975104" y="3364992"/>
-            <a:ext cx="1554480" cy="475488"/>
+          <p:cNvPr id="29" name="Text 27"/>
+          <p:cNvSpPr/>
+          <p:nvPr/>
+        </p:nvSpPr>
+        <p:spPr>
+          <a:xfrm>
+            <a:off x="1978152" y="3364992"/>
+            <a:ext cx="1225296" cy="475488"/>
           </a:xfrm>
           <a:prstGeom prst="rect">
             <a:avLst/>
@@ -26420,7 +28066,7 @@
                 <a:ea typeface="Trebuchet MS" pitchFamily="34" charset="-122"/>
                 <a:cs typeface="Trebuchet MS" pitchFamily="34" charset="-120"/>
               </a:rPr>
-              <a:t>su</a:t>
+              <a:t>o</a:t>
             </a:r>
             <a:endParaRPr lang="en-US" sz="1400" dirty="0"/>
           </a:p>
@@ -26428,14 +28074,14 @@
       </p:sp>
       <p:sp>
         <p:nvSpPr>
-          <p:cNvPr id="27" name="Text 25"/>
-          <p:cNvSpPr/>
-          <p:nvPr/>
-        </p:nvSpPr>
-        <p:spPr>
-          <a:xfrm>
-            <a:off x="3529584" y="3364992"/>
-            <a:ext cx="73152" cy="475488"/>
+          <p:cNvPr id="30" name="Text 28"/>
+          <p:cNvSpPr/>
+          <p:nvPr/>
+        </p:nvSpPr>
+        <p:spPr>
+          <a:xfrm>
+            <a:off x="3203448" y="3364992"/>
+            <a:ext cx="76200" cy="475488"/>
           </a:xfrm>
           <a:prstGeom prst="rect">
             <a:avLst/>
@@ -26467,14 +28113,14 @@
       </p:sp>
       <p:sp>
         <p:nvSpPr>
-          <p:cNvPr id="28" name="Shape 26"/>
-          <p:cNvSpPr/>
-          <p:nvPr/>
-        </p:nvSpPr>
-        <p:spPr>
-          <a:xfrm>
-            <a:off x="3602736" y="3364992"/>
-            <a:ext cx="1554480" cy="475488"/>
+          <p:cNvPr id="31" name="Shape 29"/>
+          <p:cNvSpPr/>
+          <p:nvPr/>
+        </p:nvSpPr>
+        <p:spPr>
+          <a:xfrm>
+            <a:off x="3279648" y="3364992"/>
+            <a:ext cx="1225296" cy="475488"/>
           </a:xfrm>
           <a:prstGeom prst="rect">
             <a:avLst>
@@ -26494,14 +28140,14 @@
       </p:sp>
       <p:sp>
         <p:nvSpPr>
-          <p:cNvPr id="29" name="Text 27"/>
-          <p:cNvSpPr/>
-          <p:nvPr/>
-        </p:nvSpPr>
-        <p:spPr>
-          <a:xfrm>
-            <a:off x="3602736" y="3364992"/>
-            <a:ext cx="1554480" cy="475488"/>
+          <p:cNvPr id="32" name="Text 30"/>
+          <p:cNvSpPr/>
+          <p:nvPr/>
+        </p:nvSpPr>
+        <p:spPr>
+          <a:xfrm>
+            <a:off x="3279648" y="3364992"/>
+            <a:ext cx="1225296" cy="475488"/>
           </a:xfrm>
           <a:prstGeom prst="rect">
             <a:avLst/>
@@ -26525,7 +28171,7 @@
                 <a:ea typeface="Trebuchet MS" pitchFamily="34" charset="-122"/>
                 <a:cs typeface="Trebuchet MS" pitchFamily="34" charset="-120"/>
               </a:rPr>
-              <a:t>per</a:t>
+              <a:t>ver</a:t>
             </a:r>
             <a:endParaRPr lang="en-US" sz="1400" dirty="0"/>
           </a:p>
@@ -26533,14 +28179,14 @@
       </p:sp>
       <p:sp>
         <p:nvSpPr>
-          <p:cNvPr id="30" name="Text 28"/>
-          <p:cNvSpPr/>
-          <p:nvPr/>
-        </p:nvSpPr>
-        <p:spPr>
-          <a:xfrm>
-            <a:off x="5157216" y="3364992"/>
-            <a:ext cx="73152" cy="475488"/>
+          <p:cNvPr id="33" name="Text 31"/>
+          <p:cNvSpPr/>
+          <p:nvPr/>
+        </p:nvSpPr>
+        <p:spPr>
+          <a:xfrm>
+            <a:off x="4504944" y="3364992"/>
+            <a:ext cx="76200" cy="475488"/>
           </a:xfrm>
           <a:prstGeom prst="rect">
             <a:avLst/>
@@ -26572,14 +28218,14 @@
       </p:sp>
       <p:sp>
         <p:nvSpPr>
-          <p:cNvPr id="31" name="Shape 29"/>
-          <p:cNvSpPr/>
-          <p:nvPr/>
-        </p:nvSpPr>
-        <p:spPr>
-          <a:xfrm>
-            <a:off x="5230368" y="3364992"/>
-            <a:ext cx="1554480" cy="475488"/>
+          <p:cNvPr id="34" name="Shape 32"/>
+          <p:cNvSpPr/>
+          <p:nvPr/>
+        </p:nvSpPr>
+        <p:spPr>
+          <a:xfrm>
+            <a:off x="4581144" y="3364992"/>
+            <a:ext cx="1225296" cy="475488"/>
           </a:xfrm>
           <a:prstGeom prst="rect">
             <a:avLst>
@@ -26599,14 +28245,14 @@
       </p:sp>
       <p:sp>
         <p:nvSpPr>
-          <p:cNvPr id="32" name="Text 30"/>
-          <p:cNvSpPr/>
-          <p:nvPr/>
-        </p:nvSpPr>
-        <p:spPr>
-          <a:xfrm>
-            <a:off x="5230368" y="3364992"/>
-            <a:ext cx="1554480" cy="475488"/>
+          <p:cNvPr id="35" name="Text 33"/>
+          <p:cNvSpPr/>
+          <p:nvPr/>
+        </p:nvSpPr>
+        <p:spPr>
+          <a:xfrm>
+            <a:off x="4581144" y="3364992"/>
+            <a:ext cx="1225296" cy="475488"/>
           </a:xfrm>
           <a:prstGeom prst="rect">
             <a:avLst/>
@@ -26638,14 +28284,14 @@
       </p:sp>
       <p:sp>
         <p:nvSpPr>
-          <p:cNvPr id="33" name="Text 31"/>
-          <p:cNvSpPr/>
-          <p:nvPr/>
-        </p:nvSpPr>
-        <p:spPr>
-          <a:xfrm>
-            <a:off x="6784848" y="3364992"/>
-            <a:ext cx="73152" cy="475488"/>
+          <p:cNvPr id="36" name="Text 34"/>
+          <p:cNvSpPr/>
+          <p:nvPr/>
+        </p:nvSpPr>
+        <p:spPr>
+          <a:xfrm>
+            <a:off x="5806440" y="3364992"/>
+            <a:ext cx="76200" cy="475488"/>
           </a:xfrm>
           <a:prstGeom prst="rect">
             <a:avLst/>
@@ -26677,14 +28323,14 @@
       </p:sp>
       <p:sp>
         <p:nvSpPr>
-          <p:cNvPr id="34" name="Shape 32"/>
-          <p:cNvSpPr/>
-          <p:nvPr/>
-        </p:nvSpPr>
-        <p:spPr>
-          <a:xfrm>
-            <a:off x="6858000" y="3364992"/>
-            <a:ext cx="1554480" cy="475488"/>
+          <p:cNvPr id="37" name="Shape 35"/>
+          <p:cNvSpPr/>
+          <p:nvPr/>
+        </p:nvSpPr>
+        <p:spPr>
+          <a:xfrm>
+            <a:off x="5882640" y="3364992"/>
+            <a:ext cx="1225296" cy="475488"/>
           </a:xfrm>
           <a:prstGeom prst="rect">
             <a:avLst>
@@ -26704,14 +28350,14 @@
       </p:sp>
       <p:sp>
         <p:nvSpPr>
-          <p:cNvPr id="35" name="Text 33"/>
-          <p:cNvSpPr/>
-          <p:nvPr/>
-        </p:nvSpPr>
-        <p:spPr>
-          <a:xfrm>
-            <a:off x="6858000" y="3364992"/>
-            <a:ext cx="1554480" cy="475488"/>
+          <p:cNvPr id="38" name="Text 36"/>
+          <p:cNvSpPr/>
+          <p:nvPr/>
+        </p:nvSpPr>
+        <p:spPr>
+          <a:xfrm>
+            <a:off x="5882640" y="3364992"/>
+            <a:ext cx="1225296" cy="475488"/>
           </a:xfrm>
           <a:prstGeom prst="rect">
             <a:avLst/>
@@ -26743,7 +28389,112 @@
       </p:sp>
       <p:sp>
         <p:nvSpPr>
-          <p:cNvPr id="36" name="Shape 34"/>
+          <p:cNvPr id="39" name="Text 37"/>
+          <p:cNvSpPr/>
+          <p:nvPr/>
+        </p:nvSpPr>
+        <p:spPr>
+          <a:xfrm>
+            <a:off x="7107936" y="3364992"/>
+            <a:ext cx="76200" cy="475488"/>
+          </a:xfrm>
+          <a:prstGeom prst="rect">
+            <a:avLst/>
+          </a:prstGeom>
+          <a:noFill/>
+          <a:ln/>
+        </p:spPr>
+        <p:txBody>
+          <a:bodyPr wrap="square" lIns="0" tIns="0" rIns="0" bIns="0" rtlCol="0" anchor="ctr"/>
+          <a:lstStyle/>
+          <a:p>
+            <a:pPr algn="ctr" indent="0" marL="0">
+              <a:buNone/>
+            </a:pPr>
+            <a:r>
+              <a:rPr lang="en-US" sz="1600" b="1" dirty="0">
+                <a:solidFill>
+                  <a:srgbClr val="0D9488"/>
+                </a:solidFill>
+                <a:latin typeface="Trebuchet MS" pitchFamily="34" charset="0"/>
+                <a:ea typeface="Trebuchet MS" pitchFamily="34" charset="-122"/>
+                <a:cs typeface="Trebuchet MS" pitchFamily="34" charset="-120"/>
+              </a:rPr>
+              <a:t>·</a:t>
+            </a:r>
+            <a:endParaRPr lang="en-US" sz="1600" dirty="0"/>
+          </a:p>
+        </p:txBody>
+      </p:sp>
+      <p:sp>
+        <p:nvSpPr>
+          <p:cNvPr id="40" name="Shape 38"/>
+          <p:cNvSpPr/>
+          <p:nvPr/>
+        </p:nvSpPr>
+        <p:spPr>
+          <a:xfrm>
+            <a:off x="7184136" y="3364992"/>
+            <a:ext cx="1225296" cy="475488"/>
+          </a:xfrm>
+          <a:prstGeom prst="rect">
+            <a:avLst>
+              <a:gd name="adj" fmla="val 9615"/>
+            </a:avLst>
+          </a:prstGeom>
+          <a:solidFill>
+            <a:srgbClr val="FFFFFF"/>
+          </a:solidFill>
+          <a:ln w="12700">
+            <a:solidFill>
+              <a:srgbClr val="0D9488"/>
+            </a:solidFill>
+            <a:prstDash val="solid"/>
+          </a:ln>
+        </p:spPr>
+      </p:sp>
+      <p:sp>
+        <p:nvSpPr>
+          <p:cNvPr id="41" name="Text 39"/>
+          <p:cNvSpPr/>
+          <p:nvPr/>
+        </p:nvSpPr>
+        <p:spPr>
+          <a:xfrm>
+            <a:off x="7184136" y="3364992"/>
+            <a:ext cx="1225296" cy="475488"/>
+          </a:xfrm>
+          <a:prstGeom prst="rect">
+            <a:avLst/>
+          </a:prstGeom>
+          <a:noFill/>
+          <a:ln/>
+        </p:spPr>
+        <p:txBody>
+          <a:bodyPr wrap="square" lIns="0" tIns="0" rIns="0" bIns="0" rtlCol="0" anchor="ctr"/>
+          <a:lstStyle/>
+          <a:p>
+            <a:pPr algn="ctr" indent="0" marL="0">
+              <a:buNone/>
+            </a:pPr>
+            <a:r>
+              <a:rPr lang="en-US" sz="1400" b="1" dirty="0">
+                <a:solidFill>
+                  <a:srgbClr val="0D9488"/>
+                </a:solidFill>
+                <a:latin typeface="Trebuchet MS" pitchFamily="34" charset="0"/>
+                <a:ea typeface="Trebuchet MS" pitchFamily="34" charset="-122"/>
+                <a:cs typeface="Trebuchet MS" pitchFamily="34" charset="-120"/>
+              </a:rPr>
+              <a:t>ing</a:t>
+            </a:r>
+            <a:endParaRPr lang="en-US" sz="1400" dirty="0"/>
+          </a:p>
+        </p:txBody>
+      </p:sp>
+      <p:sp>
+        <p:nvSpPr>
+          <p:cNvPr id="42" name="Shape 40"/>
           <p:cNvSpPr/>
           <p:nvPr/>
         </p:nvSpPr>
@@ -26770,7 +28521,7 @@
       </p:sp>
       <p:sp>
         <p:nvSpPr>
-          <p:cNvPr id="37" name="Text 35"/>
+          <p:cNvPr id="43" name="Text 41"/>
           <p:cNvSpPr/>
           <p:nvPr/>
         </p:nvSpPr>
@@ -26809,7 +28560,7 @@
       </p:sp>
       <p:sp>
         <p:nvSpPr>
-          <p:cNvPr id="38" name="Shape 36"/>
+          <p:cNvPr id="44" name="Shape 42"/>
           <p:cNvSpPr/>
           <p:nvPr/>
         </p:nvSpPr>
@@ -26836,7 +28587,7 @@
       </p:sp>
       <p:sp>
         <p:nvSpPr>
-          <p:cNvPr id="39" name="Text 37"/>
+          <p:cNvPr id="45" name="Text 43"/>
           <p:cNvSpPr/>
           <p:nvPr/>
         </p:nvSpPr>
@@ -27159,7 +28910,7 @@
                 <a:ea typeface="Calibri" pitchFamily="34" charset="-122"/>
                 <a:cs typeface="Calibri" pitchFamily="34" charset="-120"/>
               </a:rPr>
-              <a:t>Word Labs  •  wordlabs.app  •  Root: 'power' = strength, force, ability</a:t>
+              <a:t>Word Labs  •  wordlabs.app  •  Root: 'power' = strength; control; energy</a:t>
             </a:r>
             <a:endParaRPr lang="en-US" sz="800" dirty="0"/>
           </a:p>
@@ -27298,7 +29049,7 @@
                 <a:ea typeface="Trebuchet MS" pitchFamily="34" charset="-122"/>
                 <a:cs typeface="Trebuchet MS" pitchFamily="34" charset="-120"/>
               </a:rPr>
-              <a:t>superpower</a:t>
+              <a:t>overpowering</a:t>
             </a:r>
             <a:endParaRPr lang="en-US" sz="2800" dirty="0"/>
           </a:p>
@@ -27378,7 +29129,7 @@
         </p:nvSpPr>
         <p:spPr>
           <a:xfrm>
-            <a:off x="2938272" y="2258568"/>
+            <a:off x="2221992" y="2258568"/>
             <a:ext cx="1828800" cy="292608"/>
           </a:xfrm>
           <a:prstGeom prst="rect">
@@ -27412,7 +29163,7 @@
         </p:nvSpPr>
         <p:spPr>
           <a:xfrm>
-            <a:off x="2938272" y="2258568"/>
+            <a:off x="2221992" y="2258568"/>
             <a:ext cx="1828800" cy="292608"/>
           </a:xfrm>
           <a:prstGeom prst="rect">
@@ -27437,7 +29188,7 @@
                 <a:ea typeface="Trebuchet MS" pitchFamily="34" charset="-122"/>
                 <a:cs typeface="Trebuchet MS" pitchFamily="34" charset="-120"/>
               </a:rPr>
-              <a:t>super</a:t>
+              <a:t>over</a:t>
             </a:r>
             <a:endParaRPr lang="en-US" sz="1300" dirty="0"/>
           </a:p>
@@ -27451,7 +29202,7 @@
         </p:nvSpPr>
         <p:spPr>
           <a:xfrm>
-            <a:off x="2938272" y="2569464"/>
+            <a:off x="2221992" y="2569464"/>
             <a:ext cx="1828800" cy="201168"/>
           </a:xfrm>
           <a:prstGeom prst="rect">
@@ -27476,7 +29227,7 @@
                 <a:ea typeface="Calibri" pitchFamily="34" charset="-122"/>
                 <a:cs typeface="Calibri" pitchFamily="34" charset="-120"/>
               </a:rPr>
-              <a:t>above, beyond</a:t>
+              <a:t>too much</a:t>
             </a:r>
             <a:endParaRPr lang="en-US" sz="850" dirty="0"/>
           </a:p>
@@ -27490,7 +29241,7 @@
         </p:nvSpPr>
         <p:spPr>
           <a:xfrm>
-            <a:off x="5803392" y="2258568"/>
+            <a:off x="4370832" y="2258568"/>
             <a:ext cx="1828800" cy="292608"/>
           </a:xfrm>
           <a:prstGeom prst="rect">
@@ -27524,7 +29275,7 @@
         </p:nvSpPr>
         <p:spPr>
           <a:xfrm>
-            <a:off x="5803392" y="2258568"/>
+            <a:off x="4370832" y="2258568"/>
             <a:ext cx="1828800" cy="292608"/>
           </a:xfrm>
           <a:prstGeom prst="rect">
@@ -27563,7 +29314,7 @@
         </p:nvSpPr>
         <p:spPr>
           <a:xfrm>
-            <a:off x="5803392" y="2569464"/>
+            <a:off x="4370832" y="2569464"/>
             <a:ext cx="1828800" cy="201168"/>
           </a:xfrm>
           <a:prstGeom prst="rect">
@@ -27588,7 +29339,7 @@
                 <a:ea typeface="Calibri" pitchFamily="34" charset="-122"/>
                 <a:cs typeface="Calibri" pitchFamily="34" charset="-120"/>
               </a:rPr>
-              <a:t>strength, force</a:t>
+              <a:t>strength; control; energy</a:t>
             </a:r>
             <a:endParaRPr lang="en-US" sz="850" dirty="0"/>
           </a:p>
@@ -27597,6 +29348,118 @@
       <p:sp>
         <p:nvSpPr>
           <p:cNvPr id="22" name="Shape 20"/>
+          <p:cNvSpPr/>
+          <p:nvPr/>
+        </p:nvSpPr>
+        <p:spPr>
+          <a:xfrm>
+            <a:off x="6519672" y="2258568"/>
+            <a:ext cx="1828800" cy="292608"/>
+          </a:xfrm>
+          <a:prstGeom prst="rect">
+            <a:avLst>
+              <a:gd name="adj" fmla="val 25000"/>
+            </a:avLst>
+          </a:prstGeom>
+          <a:solidFill>
+            <a:srgbClr val="FCE7F3"/>
+          </a:solidFill>
+          <a:ln w="19050">
+            <a:solidFill>
+              <a:srgbClr val="DB2777"/>
+            </a:solidFill>
+            <a:prstDash val="solid"/>
+          </a:ln>
+          <a:effectLst>
+            <a:outerShdw sx="100000" sy="100000" kx="0" ky="0" algn="bl" rotWithShape="0" blurRad="101600" dist="38100" dir="8100000">
+              <a:srgbClr val="000000">
+                <a:alpha val="12000"/>
+              </a:srgbClr>
+            </a:outerShdw>
+          </a:effectLst>
+        </p:spPr>
+      </p:sp>
+      <p:sp>
+        <p:nvSpPr>
+          <p:cNvPr id="23" name="Text 21"/>
+          <p:cNvSpPr/>
+          <p:nvPr/>
+        </p:nvSpPr>
+        <p:spPr>
+          <a:xfrm>
+            <a:off x="6519672" y="2258568"/>
+            <a:ext cx="1828800" cy="292608"/>
+          </a:xfrm>
+          <a:prstGeom prst="rect">
+            <a:avLst/>
+          </a:prstGeom>
+          <a:noFill/>
+          <a:ln/>
+        </p:spPr>
+        <p:txBody>
+          <a:bodyPr wrap="square" lIns="0" tIns="0" rIns="0" bIns="0" rtlCol="0" anchor="ctr"/>
+          <a:lstStyle/>
+          <a:p>
+            <a:pPr algn="ctr" indent="0" marL="0">
+              <a:buNone/>
+            </a:pPr>
+            <a:r>
+              <a:rPr lang="en-US" sz="1300" b="1" dirty="0">
+                <a:solidFill>
+                  <a:srgbClr val="9D174D"/>
+                </a:solidFill>
+                <a:latin typeface="Trebuchet MS" pitchFamily="34" charset="0"/>
+                <a:ea typeface="Trebuchet MS" pitchFamily="34" charset="-122"/>
+                <a:cs typeface="Trebuchet MS" pitchFamily="34" charset="-120"/>
+              </a:rPr>
+              <a:t>ing</a:t>
+            </a:r>
+            <a:endParaRPr lang="en-US" sz="1300" dirty="0"/>
+          </a:p>
+        </p:txBody>
+      </p:sp>
+      <p:sp>
+        <p:nvSpPr>
+          <p:cNvPr id="24" name="Text 22"/>
+          <p:cNvSpPr/>
+          <p:nvPr/>
+        </p:nvSpPr>
+        <p:spPr>
+          <a:xfrm>
+            <a:off x="6519672" y="2569464"/>
+            <a:ext cx="1828800" cy="201168"/>
+          </a:xfrm>
+          <a:prstGeom prst="rect">
+            <a:avLst/>
+          </a:prstGeom>
+          <a:noFill/>
+          <a:ln/>
+        </p:spPr>
+        <p:txBody>
+          <a:bodyPr wrap="square" lIns="0" tIns="0" rIns="0" bIns="0" rtlCol="0" anchor="t"/>
+          <a:lstStyle/>
+          <a:p>
+            <a:pPr algn="ctr" indent="0" marL="0">
+              <a:buNone/>
+            </a:pPr>
+            <a:r>
+              <a:rPr lang="en-US" sz="850" dirty="0">
+                <a:solidFill>
+                  <a:srgbClr val="475569"/>
+                </a:solidFill>
+                <a:latin typeface="Calibri" pitchFamily="34" charset="0"/>
+                <a:ea typeface="Calibri" pitchFamily="34" charset="-122"/>
+                <a:cs typeface="Calibri" pitchFamily="34" charset="-120"/>
+              </a:rPr>
+              <a:t>happening now</a:t>
+            </a:r>
+            <a:endParaRPr lang="en-US" sz="850" dirty="0"/>
+          </a:p>
+        </p:txBody>
+      </p:sp>
+      <p:sp>
+        <p:nvSpPr>
+          <p:cNvPr id="25" name="Shape 23"/>
           <p:cNvSpPr/>
           <p:nvPr/>
         </p:nvSpPr>
@@ -27623,7 +29486,7 @@
       </p:sp>
       <p:sp>
         <p:nvSpPr>
-          <p:cNvPr id="23" name="Text 21"/>
+          <p:cNvPr id="26" name="Text 24"/>
           <p:cNvSpPr/>
           <p:nvPr/>
         </p:nvSpPr>
@@ -27662,7 +29525,7 @@
       </p:sp>
       <p:sp>
         <p:nvSpPr>
-          <p:cNvPr id="24" name="Shape 22"/>
+          <p:cNvPr id="27" name="Shape 25"/>
           <p:cNvSpPr/>
           <p:nvPr/>
         </p:nvSpPr>
@@ -27689,14 +29552,14 @@
       </p:sp>
       <p:sp>
         <p:nvSpPr>
-          <p:cNvPr id="25" name="Shape 23"/>
-          <p:cNvSpPr/>
-          <p:nvPr/>
-        </p:nvSpPr>
-        <p:spPr>
-          <a:xfrm>
-            <a:off x="1975104" y="3364992"/>
-            <a:ext cx="1554480" cy="475488"/>
+          <p:cNvPr id="28" name="Shape 26"/>
+          <p:cNvSpPr/>
+          <p:nvPr/>
+        </p:nvSpPr>
+        <p:spPr>
+          <a:xfrm>
+            <a:off x="1978152" y="3364992"/>
+            <a:ext cx="1225296" cy="475488"/>
           </a:xfrm>
           <a:prstGeom prst="rect">
             <a:avLst>
@@ -27716,14 +29579,14 @@
       </p:sp>
       <p:sp>
         <p:nvSpPr>
-          <p:cNvPr id="26" name="Text 24"/>
-          <p:cNvSpPr/>
-          <p:nvPr/>
-        </p:nvSpPr>
-        <p:spPr>
-          <a:xfrm>
-            <a:off x="1975104" y="3364992"/>
-            <a:ext cx="1554480" cy="475488"/>
+          <p:cNvPr id="29" name="Text 27"/>
+          <p:cNvSpPr/>
+          <p:nvPr/>
+        </p:nvSpPr>
+        <p:spPr>
+          <a:xfrm>
+            <a:off x="1978152" y="3364992"/>
+            <a:ext cx="1225296" cy="475488"/>
           </a:xfrm>
           <a:prstGeom prst="rect">
             <a:avLst/>
@@ -27747,7 +29610,7 @@
                 <a:ea typeface="Trebuchet MS" pitchFamily="34" charset="-122"/>
                 <a:cs typeface="Trebuchet MS" pitchFamily="34" charset="-120"/>
               </a:rPr>
-              <a:t>su</a:t>
+              <a:t>o</a:t>
             </a:r>
             <a:endParaRPr lang="en-US" sz="1400" dirty="0"/>
           </a:p>
@@ -27755,14 +29618,14 @@
       </p:sp>
       <p:sp>
         <p:nvSpPr>
-          <p:cNvPr id="27" name="Text 25"/>
-          <p:cNvSpPr/>
-          <p:nvPr/>
-        </p:nvSpPr>
-        <p:spPr>
-          <a:xfrm>
-            <a:off x="3529584" y="3364992"/>
-            <a:ext cx="73152" cy="475488"/>
+          <p:cNvPr id="30" name="Text 28"/>
+          <p:cNvSpPr/>
+          <p:nvPr/>
+        </p:nvSpPr>
+        <p:spPr>
+          <a:xfrm>
+            <a:off x="3203448" y="3364992"/>
+            <a:ext cx="76200" cy="475488"/>
           </a:xfrm>
           <a:prstGeom prst="rect">
             <a:avLst/>
@@ -27794,14 +29657,14 @@
       </p:sp>
       <p:sp>
         <p:nvSpPr>
-          <p:cNvPr id="28" name="Shape 26"/>
-          <p:cNvSpPr/>
-          <p:nvPr/>
-        </p:nvSpPr>
-        <p:spPr>
-          <a:xfrm>
-            <a:off x="3602736" y="3364992"/>
-            <a:ext cx="1554480" cy="475488"/>
+          <p:cNvPr id="31" name="Shape 29"/>
+          <p:cNvSpPr/>
+          <p:nvPr/>
+        </p:nvSpPr>
+        <p:spPr>
+          <a:xfrm>
+            <a:off x="3279648" y="3364992"/>
+            <a:ext cx="1225296" cy="475488"/>
           </a:xfrm>
           <a:prstGeom prst="rect">
             <a:avLst>
@@ -27821,14 +29684,14 @@
       </p:sp>
       <p:sp>
         <p:nvSpPr>
-          <p:cNvPr id="29" name="Text 27"/>
-          <p:cNvSpPr/>
-          <p:nvPr/>
-        </p:nvSpPr>
-        <p:spPr>
-          <a:xfrm>
-            <a:off x="3602736" y="3364992"/>
-            <a:ext cx="1554480" cy="475488"/>
+          <p:cNvPr id="32" name="Text 30"/>
+          <p:cNvSpPr/>
+          <p:nvPr/>
+        </p:nvSpPr>
+        <p:spPr>
+          <a:xfrm>
+            <a:off x="3279648" y="3364992"/>
+            <a:ext cx="1225296" cy="475488"/>
           </a:xfrm>
           <a:prstGeom prst="rect">
             <a:avLst/>
@@ -27852,7 +29715,7 @@
                 <a:ea typeface="Trebuchet MS" pitchFamily="34" charset="-122"/>
                 <a:cs typeface="Trebuchet MS" pitchFamily="34" charset="-120"/>
               </a:rPr>
-              <a:t>per</a:t>
+              <a:t>ver</a:t>
             </a:r>
             <a:endParaRPr lang="en-US" sz="1400" dirty="0"/>
           </a:p>
@@ -27860,14 +29723,14 @@
       </p:sp>
       <p:sp>
         <p:nvSpPr>
-          <p:cNvPr id="30" name="Text 28"/>
-          <p:cNvSpPr/>
-          <p:nvPr/>
-        </p:nvSpPr>
-        <p:spPr>
-          <a:xfrm>
-            <a:off x="5157216" y="3364992"/>
-            <a:ext cx="73152" cy="475488"/>
+          <p:cNvPr id="33" name="Text 31"/>
+          <p:cNvSpPr/>
+          <p:nvPr/>
+        </p:nvSpPr>
+        <p:spPr>
+          <a:xfrm>
+            <a:off x="4504944" y="3364992"/>
+            <a:ext cx="76200" cy="475488"/>
           </a:xfrm>
           <a:prstGeom prst="rect">
             <a:avLst/>
@@ -27899,14 +29762,14 @@
       </p:sp>
       <p:sp>
         <p:nvSpPr>
-          <p:cNvPr id="31" name="Shape 29"/>
-          <p:cNvSpPr/>
-          <p:nvPr/>
-        </p:nvSpPr>
-        <p:spPr>
-          <a:xfrm>
-            <a:off x="5230368" y="3364992"/>
-            <a:ext cx="1554480" cy="475488"/>
+          <p:cNvPr id="34" name="Shape 32"/>
+          <p:cNvSpPr/>
+          <p:nvPr/>
+        </p:nvSpPr>
+        <p:spPr>
+          <a:xfrm>
+            <a:off x="4581144" y="3364992"/>
+            <a:ext cx="1225296" cy="475488"/>
           </a:xfrm>
           <a:prstGeom prst="rect">
             <a:avLst>
@@ -27926,14 +29789,14 @@
       </p:sp>
       <p:sp>
         <p:nvSpPr>
-          <p:cNvPr id="32" name="Text 30"/>
-          <p:cNvSpPr/>
-          <p:nvPr/>
-        </p:nvSpPr>
-        <p:spPr>
-          <a:xfrm>
-            <a:off x="5230368" y="3364992"/>
-            <a:ext cx="1554480" cy="475488"/>
+          <p:cNvPr id="35" name="Text 33"/>
+          <p:cNvSpPr/>
+          <p:nvPr/>
+        </p:nvSpPr>
+        <p:spPr>
+          <a:xfrm>
+            <a:off x="4581144" y="3364992"/>
+            <a:ext cx="1225296" cy="475488"/>
           </a:xfrm>
           <a:prstGeom prst="rect">
             <a:avLst/>
@@ -27965,14 +29828,14 @@
       </p:sp>
       <p:sp>
         <p:nvSpPr>
-          <p:cNvPr id="33" name="Text 31"/>
-          <p:cNvSpPr/>
-          <p:nvPr/>
-        </p:nvSpPr>
-        <p:spPr>
-          <a:xfrm>
-            <a:off x="6784848" y="3364992"/>
-            <a:ext cx="73152" cy="475488"/>
+          <p:cNvPr id="36" name="Text 34"/>
+          <p:cNvSpPr/>
+          <p:nvPr/>
+        </p:nvSpPr>
+        <p:spPr>
+          <a:xfrm>
+            <a:off x="5806440" y="3364992"/>
+            <a:ext cx="76200" cy="475488"/>
           </a:xfrm>
           <a:prstGeom prst="rect">
             <a:avLst/>
@@ -28004,14 +29867,14 @@
       </p:sp>
       <p:sp>
         <p:nvSpPr>
-          <p:cNvPr id="34" name="Shape 32"/>
-          <p:cNvSpPr/>
-          <p:nvPr/>
-        </p:nvSpPr>
-        <p:spPr>
-          <a:xfrm>
-            <a:off x="6858000" y="3364992"/>
-            <a:ext cx="1554480" cy="475488"/>
+          <p:cNvPr id="37" name="Shape 35"/>
+          <p:cNvSpPr/>
+          <p:nvPr/>
+        </p:nvSpPr>
+        <p:spPr>
+          <a:xfrm>
+            <a:off x="5882640" y="3364992"/>
+            <a:ext cx="1225296" cy="475488"/>
           </a:xfrm>
           <a:prstGeom prst="rect">
             <a:avLst>
@@ -28031,14 +29894,14 @@
       </p:sp>
       <p:sp>
         <p:nvSpPr>
-          <p:cNvPr id="35" name="Text 33"/>
-          <p:cNvSpPr/>
-          <p:nvPr/>
-        </p:nvSpPr>
-        <p:spPr>
-          <a:xfrm>
-            <a:off x="6858000" y="3364992"/>
-            <a:ext cx="1554480" cy="475488"/>
+          <p:cNvPr id="38" name="Text 36"/>
+          <p:cNvSpPr/>
+          <p:nvPr/>
+        </p:nvSpPr>
+        <p:spPr>
+          <a:xfrm>
+            <a:off x="5882640" y="3364992"/>
+            <a:ext cx="1225296" cy="475488"/>
           </a:xfrm>
           <a:prstGeom prst="rect">
             <a:avLst/>
@@ -28070,7 +29933,112 @@
       </p:sp>
       <p:sp>
         <p:nvSpPr>
-          <p:cNvPr id="36" name="Shape 34"/>
+          <p:cNvPr id="39" name="Text 37"/>
+          <p:cNvSpPr/>
+          <p:nvPr/>
+        </p:nvSpPr>
+        <p:spPr>
+          <a:xfrm>
+            <a:off x="7107936" y="3364992"/>
+            <a:ext cx="76200" cy="475488"/>
+          </a:xfrm>
+          <a:prstGeom prst="rect">
+            <a:avLst/>
+          </a:prstGeom>
+          <a:noFill/>
+          <a:ln/>
+        </p:spPr>
+        <p:txBody>
+          <a:bodyPr wrap="square" lIns="0" tIns="0" rIns="0" bIns="0" rtlCol="0" anchor="ctr"/>
+          <a:lstStyle/>
+          <a:p>
+            <a:pPr algn="ctr" indent="0" marL="0">
+              <a:buNone/>
+            </a:pPr>
+            <a:r>
+              <a:rPr lang="en-US" sz="1600" b="1" dirty="0">
+                <a:solidFill>
+                  <a:srgbClr val="0D9488"/>
+                </a:solidFill>
+                <a:latin typeface="Trebuchet MS" pitchFamily="34" charset="0"/>
+                <a:ea typeface="Trebuchet MS" pitchFamily="34" charset="-122"/>
+                <a:cs typeface="Trebuchet MS" pitchFamily="34" charset="-120"/>
+              </a:rPr>
+              <a:t>·</a:t>
+            </a:r>
+            <a:endParaRPr lang="en-US" sz="1600" dirty="0"/>
+          </a:p>
+        </p:txBody>
+      </p:sp>
+      <p:sp>
+        <p:nvSpPr>
+          <p:cNvPr id="40" name="Shape 38"/>
+          <p:cNvSpPr/>
+          <p:nvPr/>
+        </p:nvSpPr>
+        <p:spPr>
+          <a:xfrm>
+            <a:off x="7184136" y="3364992"/>
+            <a:ext cx="1225296" cy="475488"/>
+          </a:xfrm>
+          <a:prstGeom prst="rect">
+            <a:avLst>
+              <a:gd name="adj" fmla="val 9615"/>
+            </a:avLst>
+          </a:prstGeom>
+          <a:solidFill>
+            <a:srgbClr val="FFFFFF"/>
+          </a:solidFill>
+          <a:ln w="12700">
+            <a:solidFill>
+              <a:srgbClr val="0D9488"/>
+            </a:solidFill>
+            <a:prstDash val="solid"/>
+          </a:ln>
+        </p:spPr>
+      </p:sp>
+      <p:sp>
+        <p:nvSpPr>
+          <p:cNvPr id="41" name="Text 39"/>
+          <p:cNvSpPr/>
+          <p:nvPr/>
+        </p:nvSpPr>
+        <p:spPr>
+          <a:xfrm>
+            <a:off x="7184136" y="3364992"/>
+            <a:ext cx="1225296" cy="475488"/>
+          </a:xfrm>
+          <a:prstGeom prst="rect">
+            <a:avLst/>
+          </a:prstGeom>
+          <a:noFill/>
+          <a:ln/>
+        </p:spPr>
+        <p:txBody>
+          <a:bodyPr wrap="square" lIns="0" tIns="0" rIns="0" bIns="0" rtlCol="0" anchor="ctr"/>
+          <a:lstStyle/>
+          <a:p>
+            <a:pPr algn="ctr" indent="0" marL="0">
+              <a:buNone/>
+            </a:pPr>
+            <a:r>
+              <a:rPr lang="en-US" sz="1400" b="1" dirty="0">
+                <a:solidFill>
+                  <a:srgbClr val="0D9488"/>
+                </a:solidFill>
+                <a:latin typeface="Trebuchet MS" pitchFamily="34" charset="0"/>
+                <a:ea typeface="Trebuchet MS" pitchFamily="34" charset="-122"/>
+                <a:cs typeface="Trebuchet MS" pitchFamily="34" charset="-120"/>
+              </a:rPr>
+              <a:t>ing</a:t>
+            </a:r>
+            <a:endParaRPr lang="en-US" sz="1400" dirty="0"/>
+          </a:p>
+        </p:txBody>
+      </p:sp>
+      <p:sp>
+        <p:nvSpPr>
+          <p:cNvPr id="42" name="Shape 40"/>
           <p:cNvSpPr/>
           <p:nvPr/>
         </p:nvSpPr>
@@ -28097,7 +30065,7 @@
       </p:sp>
       <p:sp>
         <p:nvSpPr>
-          <p:cNvPr id="37" name="Text 35"/>
+          <p:cNvPr id="43" name="Text 41"/>
           <p:cNvSpPr/>
           <p:nvPr/>
         </p:nvSpPr>
@@ -28136,7 +30104,7 @@
       </p:sp>
       <p:sp>
         <p:nvSpPr>
-          <p:cNvPr id="38" name="Shape 36"/>
+          <p:cNvPr id="44" name="Shape 42"/>
           <p:cNvSpPr/>
           <p:nvPr/>
         </p:nvSpPr>
@@ -28163,13 +30131,13 @@
       </p:sp>
       <p:sp>
         <p:nvSpPr>
-          <p:cNvPr id="39" name="Shape 37"/>
-          <p:cNvSpPr/>
-          <p:nvPr/>
-        </p:nvSpPr>
-        <p:spPr>
-          <a:xfrm>
-            <a:off x="2124837" y="4169664"/>
+          <p:cNvPr id="45" name="Shape 43"/>
+          <p:cNvSpPr/>
+          <p:nvPr/>
+        </p:nvSpPr>
+        <p:spPr>
+          <a:xfrm>
+            <a:off x="2023872" y="4169664"/>
             <a:ext cx="685800" cy="475488"/>
           </a:xfrm>
           <a:prstGeom prst="rect">
@@ -28190,13 +30158,13 @@
       </p:sp>
       <p:sp>
         <p:nvSpPr>
-          <p:cNvPr id="40" name="Text 38"/>
-          <p:cNvSpPr/>
-          <p:nvPr/>
-        </p:nvSpPr>
-        <p:spPr>
-          <a:xfrm>
-            <a:off x="2124837" y="4169664"/>
+          <p:cNvPr id="46" name="Text 44"/>
+          <p:cNvSpPr/>
+          <p:nvPr/>
+        </p:nvSpPr>
+        <p:spPr>
+          <a:xfrm>
+            <a:off x="2023872" y="4169664"/>
             <a:ext cx="685800" cy="475488"/>
           </a:xfrm>
           <a:prstGeom prst="rect">
@@ -28221,7 +30189,7 @@
                 <a:ea typeface="Trebuchet MS" pitchFamily="34" charset="-122"/>
                 <a:cs typeface="Trebuchet MS" pitchFamily="34" charset="-120"/>
               </a:rPr>
-              <a:t>s</a:t>
+              <a:t>o</a:t>
             </a:r>
             <a:endParaRPr lang="en-US" sz="900" dirty="0"/>
           </a:p>
@@ -28229,13 +30197,13 @@
       </p:sp>
       <p:sp>
         <p:nvSpPr>
-          <p:cNvPr id="41" name="Shape 39"/>
-          <p:cNvSpPr/>
-          <p:nvPr/>
-        </p:nvSpPr>
-        <p:spPr>
-          <a:xfrm>
-            <a:off x="3033522" y="4169664"/>
+          <p:cNvPr id="47" name="Shape 45"/>
+          <p:cNvSpPr/>
+          <p:nvPr/>
+        </p:nvSpPr>
+        <p:spPr>
+          <a:xfrm>
+            <a:off x="2831592" y="4169664"/>
             <a:ext cx="685800" cy="475488"/>
           </a:xfrm>
           <a:prstGeom prst="rect">
@@ -28256,13 +30224,13 @@
       </p:sp>
       <p:sp>
         <p:nvSpPr>
-          <p:cNvPr id="42" name="Text 40"/>
-          <p:cNvSpPr/>
-          <p:nvPr/>
-        </p:nvSpPr>
-        <p:spPr>
-          <a:xfrm>
-            <a:off x="3033522" y="4169664"/>
+          <p:cNvPr id="48" name="Text 46"/>
+          <p:cNvSpPr/>
+          <p:nvPr/>
+        </p:nvSpPr>
+        <p:spPr>
+          <a:xfrm>
+            <a:off x="2831592" y="4169664"/>
             <a:ext cx="685800" cy="475488"/>
           </a:xfrm>
           <a:prstGeom prst="rect">
@@ -28287,7 +30255,7 @@
                 <a:ea typeface="Trebuchet MS" pitchFamily="34" charset="-122"/>
                 <a:cs typeface="Trebuchet MS" pitchFamily="34" charset="-120"/>
               </a:rPr>
-              <a:t>u</a:t>
+              <a:t>v</a:t>
             </a:r>
             <a:endParaRPr lang="en-US" sz="900" dirty="0"/>
           </a:p>
@@ -28295,13 +30263,13 @@
       </p:sp>
       <p:sp>
         <p:nvSpPr>
-          <p:cNvPr id="43" name="Shape 41"/>
-          <p:cNvSpPr/>
-          <p:nvPr/>
-        </p:nvSpPr>
-        <p:spPr>
-          <a:xfrm>
-            <a:off x="3942207" y="4169664"/>
+          <p:cNvPr id="49" name="Shape 47"/>
+          <p:cNvSpPr/>
+          <p:nvPr/>
+        </p:nvSpPr>
+        <p:spPr>
+          <a:xfrm>
+            <a:off x="3639312" y="4169664"/>
             <a:ext cx="685800" cy="475488"/>
           </a:xfrm>
           <a:prstGeom prst="rect">
@@ -28322,13 +30290,13 @@
       </p:sp>
       <p:sp>
         <p:nvSpPr>
-          <p:cNvPr id="44" name="Text 42"/>
-          <p:cNvSpPr/>
-          <p:nvPr/>
-        </p:nvSpPr>
-        <p:spPr>
-          <a:xfrm>
-            <a:off x="3942207" y="4169664"/>
+          <p:cNvPr id="50" name="Text 48"/>
+          <p:cNvSpPr/>
+          <p:nvPr/>
+        </p:nvSpPr>
+        <p:spPr>
+          <a:xfrm>
+            <a:off x="3639312" y="4169664"/>
             <a:ext cx="685800" cy="475488"/>
           </a:xfrm>
           <a:prstGeom prst="rect">
@@ -28353,7 +30321,7 @@
                 <a:ea typeface="Trebuchet MS" pitchFamily="34" charset="-122"/>
                 <a:cs typeface="Trebuchet MS" pitchFamily="34" charset="-120"/>
               </a:rPr>
-              <a:t>p</a:t>
+              <a:t>er</a:t>
             </a:r>
             <a:endParaRPr lang="en-US" sz="900" dirty="0"/>
           </a:p>
@@ -28361,13 +30329,13 @@
       </p:sp>
       <p:sp>
         <p:nvSpPr>
-          <p:cNvPr id="45" name="Shape 43"/>
-          <p:cNvSpPr/>
-          <p:nvPr/>
-        </p:nvSpPr>
-        <p:spPr>
-          <a:xfrm>
-            <a:off x="4850892" y="4169664"/>
+          <p:cNvPr id="51" name="Shape 49"/>
+          <p:cNvSpPr/>
+          <p:nvPr/>
+        </p:nvSpPr>
+        <p:spPr>
+          <a:xfrm>
+            <a:off x="4447032" y="4169664"/>
             <a:ext cx="685800" cy="475488"/>
           </a:xfrm>
           <a:prstGeom prst="rect">
@@ -28388,13 +30356,13 @@
       </p:sp>
       <p:sp>
         <p:nvSpPr>
-          <p:cNvPr id="46" name="Text 44"/>
-          <p:cNvSpPr/>
-          <p:nvPr/>
-        </p:nvSpPr>
-        <p:spPr>
-          <a:xfrm>
-            <a:off x="4850892" y="4169664"/>
+          <p:cNvPr id="52" name="Text 50"/>
+          <p:cNvSpPr/>
+          <p:nvPr/>
+        </p:nvSpPr>
+        <p:spPr>
+          <a:xfrm>
+            <a:off x="4447032" y="4169664"/>
             <a:ext cx="685800" cy="475488"/>
           </a:xfrm>
           <a:prstGeom prst="rect">
@@ -28419,7 +30387,7 @@
                 <a:ea typeface="Trebuchet MS" pitchFamily="34" charset="-122"/>
                 <a:cs typeface="Trebuchet MS" pitchFamily="34" charset="-120"/>
               </a:rPr>
-              <a:t>er</a:t>
+              <a:t>p</a:t>
             </a:r>
             <a:endParaRPr lang="en-US" sz="900" dirty="0"/>
           </a:p>
@@ -28427,13 +30395,13 @@
       </p:sp>
       <p:sp>
         <p:nvSpPr>
-          <p:cNvPr id="47" name="Shape 45"/>
-          <p:cNvSpPr/>
-          <p:nvPr/>
-        </p:nvSpPr>
-        <p:spPr>
-          <a:xfrm>
-            <a:off x="5759577" y="4169664"/>
+          <p:cNvPr id="53" name="Shape 51"/>
+          <p:cNvSpPr/>
+          <p:nvPr/>
+        </p:nvSpPr>
+        <p:spPr>
+          <a:xfrm>
+            <a:off x="5254752" y="4169664"/>
             <a:ext cx="685800" cy="475488"/>
           </a:xfrm>
           <a:prstGeom prst="rect">
@@ -28454,13 +30422,13 @@
       </p:sp>
       <p:sp>
         <p:nvSpPr>
-          <p:cNvPr id="48" name="Text 46"/>
-          <p:cNvSpPr/>
-          <p:nvPr/>
-        </p:nvSpPr>
-        <p:spPr>
-          <a:xfrm>
-            <a:off x="5759577" y="4169664"/>
+          <p:cNvPr id="54" name="Text 52"/>
+          <p:cNvSpPr/>
+          <p:nvPr/>
+        </p:nvSpPr>
+        <p:spPr>
+          <a:xfrm>
+            <a:off x="5254752" y="4169664"/>
             <a:ext cx="685800" cy="475488"/>
           </a:xfrm>
           <a:prstGeom prst="rect">
@@ -28485,7 +30453,7 @@
                 <a:ea typeface="Trebuchet MS" pitchFamily="34" charset="-122"/>
                 <a:cs typeface="Trebuchet MS" pitchFamily="34" charset="-120"/>
               </a:rPr>
-              <a:t>p</a:t>
+              <a:t>ow</a:t>
             </a:r>
             <a:endParaRPr lang="en-US" sz="900" dirty="0"/>
           </a:p>
@@ -28493,13 +30461,13 @@
       </p:sp>
       <p:sp>
         <p:nvSpPr>
-          <p:cNvPr id="49" name="Shape 47"/>
-          <p:cNvSpPr/>
-          <p:nvPr/>
-        </p:nvSpPr>
-        <p:spPr>
-          <a:xfrm>
-            <a:off x="6668262" y="4169664"/>
+          <p:cNvPr id="55" name="Shape 53"/>
+          <p:cNvSpPr/>
+          <p:nvPr/>
+        </p:nvSpPr>
+        <p:spPr>
+          <a:xfrm>
+            <a:off x="6062472" y="4169664"/>
             <a:ext cx="685800" cy="475488"/>
           </a:xfrm>
           <a:prstGeom prst="rect">
@@ -28520,13 +30488,13 @@
       </p:sp>
       <p:sp>
         <p:nvSpPr>
-          <p:cNvPr id="50" name="Text 48"/>
-          <p:cNvSpPr/>
-          <p:nvPr/>
-        </p:nvSpPr>
-        <p:spPr>
-          <a:xfrm>
-            <a:off x="6668262" y="4169664"/>
+          <p:cNvPr id="56" name="Text 54"/>
+          <p:cNvSpPr/>
+          <p:nvPr/>
+        </p:nvSpPr>
+        <p:spPr>
+          <a:xfrm>
+            <a:off x="6062472" y="4169664"/>
             <a:ext cx="685800" cy="475488"/>
           </a:xfrm>
           <a:prstGeom prst="rect">
@@ -28551,7 +30519,7 @@
                 <a:ea typeface="Trebuchet MS" pitchFamily="34" charset="-122"/>
                 <a:cs typeface="Trebuchet MS" pitchFamily="34" charset="-120"/>
               </a:rPr>
-              <a:t>ow</a:t>
+              <a:t>er</a:t>
             </a:r>
             <a:endParaRPr lang="en-US" sz="900" dirty="0"/>
           </a:p>
@@ -28559,13 +30527,13 @@
       </p:sp>
       <p:sp>
         <p:nvSpPr>
-          <p:cNvPr id="51" name="Shape 49"/>
-          <p:cNvSpPr/>
-          <p:nvPr/>
-        </p:nvSpPr>
-        <p:spPr>
-          <a:xfrm>
-            <a:off x="7576947" y="4169664"/>
+          <p:cNvPr id="57" name="Shape 55"/>
+          <p:cNvSpPr/>
+          <p:nvPr/>
+        </p:nvSpPr>
+        <p:spPr>
+          <a:xfrm>
+            <a:off x="6870192" y="4169664"/>
             <a:ext cx="685800" cy="475488"/>
           </a:xfrm>
           <a:prstGeom prst="rect">
@@ -28586,13 +30554,13 @@
       </p:sp>
       <p:sp>
         <p:nvSpPr>
-          <p:cNvPr id="52" name="Text 50"/>
-          <p:cNvSpPr/>
-          <p:nvPr/>
-        </p:nvSpPr>
-        <p:spPr>
-          <a:xfrm>
-            <a:off x="7576947" y="4169664"/>
+          <p:cNvPr id="58" name="Text 56"/>
+          <p:cNvSpPr/>
+          <p:nvPr/>
+        </p:nvSpPr>
+        <p:spPr>
+          <a:xfrm>
+            <a:off x="6870192" y="4169664"/>
             <a:ext cx="685800" cy="475488"/>
           </a:xfrm>
           <a:prstGeom prst="rect">
@@ -28617,7 +30585,73 @@
                 <a:ea typeface="Trebuchet MS" pitchFamily="34" charset="-122"/>
                 <a:cs typeface="Trebuchet MS" pitchFamily="34" charset="-120"/>
               </a:rPr>
-              <a:t>er</a:t>
+              <a:t>i</a:t>
+            </a:r>
+            <a:endParaRPr lang="en-US" sz="900" dirty="0"/>
+          </a:p>
+        </p:txBody>
+      </p:sp>
+      <p:sp>
+        <p:nvSpPr>
+          <p:cNvPr id="59" name="Shape 57"/>
+          <p:cNvSpPr/>
+          <p:nvPr/>
+        </p:nvSpPr>
+        <p:spPr>
+          <a:xfrm>
+            <a:off x="7677912" y="4169664"/>
+            <a:ext cx="685800" cy="475488"/>
+          </a:xfrm>
+          <a:prstGeom prst="rect">
+            <a:avLst>
+              <a:gd name="adj" fmla="val 7692"/>
+            </a:avLst>
+          </a:prstGeom>
+          <a:solidFill>
+            <a:srgbClr val="FFFFFF"/>
+          </a:solidFill>
+          <a:ln w="12700">
+            <a:solidFill>
+              <a:srgbClr val="DB2777"/>
+            </a:solidFill>
+            <a:prstDash val="solid"/>
+          </a:ln>
+        </p:spPr>
+      </p:sp>
+      <p:sp>
+        <p:nvSpPr>
+          <p:cNvPr id="60" name="Text 58"/>
+          <p:cNvSpPr/>
+          <p:nvPr/>
+        </p:nvSpPr>
+        <p:spPr>
+          <a:xfrm>
+            <a:off x="7677912" y="4169664"/>
+            <a:ext cx="685800" cy="475488"/>
+          </a:xfrm>
+          <a:prstGeom prst="rect">
+            <a:avLst/>
+          </a:prstGeom>
+          <a:noFill/>
+          <a:ln/>
+        </p:spPr>
+        <p:txBody>
+          <a:bodyPr wrap="square" lIns="0" tIns="0" rIns="0" bIns="0" rtlCol="0" anchor="ctr"/>
+          <a:lstStyle/>
+          <a:p>
+            <a:pPr algn="ctr" indent="0" marL="0">
+              <a:buNone/>
+            </a:pPr>
+            <a:r>
+              <a:rPr lang="en-US" sz="900" b="1" dirty="0">
+                <a:solidFill>
+                  <a:srgbClr val="9D174D"/>
+                </a:solidFill>
+                <a:latin typeface="Trebuchet MS" pitchFamily="34" charset="0"/>
+                <a:ea typeface="Trebuchet MS" pitchFamily="34" charset="-122"/>
+                <a:cs typeface="Trebuchet MS" pitchFamily="34" charset="-120"/>
+              </a:rPr>
+              <a:t>ng</a:t>
             </a:r>
             <a:endParaRPr lang="en-US" sz="900" dirty="0"/>
           </a:p>
@@ -28909,7 +30943,7 @@
                 <a:ea typeface="Calibri" pitchFamily="34" charset="-122"/>
                 <a:cs typeface="Calibri" pitchFamily="34" charset="-120"/>
               </a:rPr>
-              <a:t>Word Labs  •  wordlabs.app  •  Root: 'power' = strength, force, ability</a:t>
+              <a:t>Word Labs  •  wordlabs.app  •  Root: 'power' = strength; control; energy</a:t>
             </a:r>
             <a:endParaRPr lang="en-US" sz="800" dirty="0"/>
           </a:p>
@@ -29048,7 +31082,7 @@
                 <a:ea typeface="Trebuchet MS" pitchFamily="34" charset="-122"/>
                 <a:cs typeface="Trebuchet MS" pitchFamily="34" charset="-120"/>
               </a:rPr>
-              <a:t>overpowered</a:t>
+              <a:t>underpowered</a:t>
             </a:r>
             <a:endParaRPr lang="en-US" sz="2800" dirty="0"/>
           </a:p>
@@ -29736,7 +31770,7 @@
                 <a:ea typeface="Calibri" pitchFamily="34" charset="-122"/>
                 <a:cs typeface="Calibri" pitchFamily="34" charset="-120"/>
               </a:rPr>
-              <a:t>Word Labs  •  wordlabs.app  •  Root: 'power' = strength, force, ability</a:t>
+              <a:t>Word Labs  •  wordlabs.app  •  Root: 'power' = strength; control; energy</a:t>
             </a:r>
             <a:endParaRPr lang="en-US" sz="800" dirty="0"/>
           </a:p>
@@ -29875,7 +31909,7 @@
                 <a:ea typeface="Trebuchet MS" pitchFamily="34" charset="-122"/>
                 <a:cs typeface="Trebuchet MS" pitchFamily="34" charset="-120"/>
               </a:rPr>
-              <a:t>overpowered</a:t>
+              <a:t>underpowered</a:t>
             </a:r>
             <a:endParaRPr lang="en-US" sz="2800" dirty="0"/>
           </a:p>
@@ -30014,7 +32048,7 @@
                 <a:ea typeface="Trebuchet MS" pitchFamily="34" charset="-122"/>
                 <a:cs typeface="Trebuchet MS" pitchFamily="34" charset="-120"/>
               </a:rPr>
-              <a:t>over</a:t>
+              <a:t>under</a:t>
             </a:r>
             <a:endParaRPr lang="en-US" sz="1300" dirty="0"/>
           </a:p>
@@ -30053,7 +32087,7 @@
                 <a:ea typeface="Calibri" pitchFamily="34" charset="-122"/>
                 <a:cs typeface="Calibri" pitchFamily="34" charset="-120"/>
               </a:rPr>
-              <a:t>too much, above</a:t>
+              <a:t>below</a:t>
             </a:r>
             <a:endParaRPr lang="en-US" sz="850" dirty="0"/>
           </a:p>
@@ -30165,7 +32199,7 @@
                 <a:ea typeface="Calibri" pitchFamily="34" charset="-122"/>
                 <a:cs typeface="Calibri" pitchFamily="34" charset="-120"/>
               </a:rPr>
-              <a:t>strength, force</a:t>
+              <a:t>strength; control; energy</a:t>
             </a:r>
             <a:endParaRPr lang="en-US" sz="850" dirty="0"/>
           </a:p>
@@ -30277,7 +32311,7 @@
                 <a:ea typeface="Calibri" pitchFamily="34" charset="-122"/>
                 <a:cs typeface="Calibri" pitchFamily="34" charset="-120"/>
               </a:rPr>
-              <a:t>already happened, past tense</a:t>
+              <a:t>past tense</a:t>
             </a:r>
             <a:endParaRPr lang="en-US" sz="850" dirty="0"/>
           </a:p>
@@ -30833,7 +32867,7 @@
                 <a:ea typeface="Calibri" pitchFamily="34" charset="-122"/>
                 <a:cs typeface="Calibri" pitchFamily="34" charset="-120"/>
               </a:rPr>
-              <a:t>Word Labs  •  wordlabs.app  •  Root: 'power' = strength, force, ability</a:t>
+              <a:t>Word Labs  •  wordlabs.app  •  Root: 'power' = strength; control; energy</a:t>
             </a:r>
             <a:endParaRPr lang="en-US" sz="800" dirty="0"/>
           </a:p>
@@ -30972,7 +33006,7 @@
                 <a:ea typeface="Trebuchet MS" pitchFamily="34" charset="-122"/>
                 <a:cs typeface="Trebuchet MS" pitchFamily="34" charset="-120"/>
               </a:rPr>
-              <a:t>overpowered</a:t>
+              <a:t>underpowered</a:t>
             </a:r>
             <a:endParaRPr lang="en-US" sz="2800" dirty="0"/>
           </a:p>
@@ -31111,7 +33145,7 @@
                 <a:ea typeface="Trebuchet MS" pitchFamily="34" charset="-122"/>
                 <a:cs typeface="Trebuchet MS" pitchFamily="34" charset="-120"/>
               </a:rPr>
-              <a:t>over</a:t>
+              <a:t>under</a:t>
             </a:r>
             <a:endParaRPr lang="en-US" sz="1300" dirty="0"/>
           </a:p>
@@ -31150,7 +33184,7 @@
                 <a:ea typeface="Calibri" pitchFamily="34" charset="-122"/>
                 <a:cs typeface="Calibri" pitchFamily="34" charset="-120"/>
               </a:rPr>
-              <a:t>too much, above</a:t>
+              <a:t>below</a:t>
             </a:r>
             <a:endParaRPr lang="en-US" sz="850" dirty="0"/>
           </a:p>
@@ -31262,7 +33296,7 @@
                 <a:ea typeface="Calibri" pitchFamily="34" charset="-122"/>
                 <a:cs typeface="Calibri" pitchFamily="34" charset="-120"/>
               </a:rPr>
-              <a:t>strength, force</a:t>
+              <a:t>strength; control; energy</a:t>
             </a:r>
             <a:endParaRPr lang="en-US" sz="850" dirty="0"/>
           </a:p>
@@ -31374,7 +33408,7 @@
                 <a:ea typeface="Calibri" pitchFamily="34" charset="-122"/>
                 <a:cs typeface="Calibri" pitchFamily="34" charset="-120"/>
               </a:rPr>
-              <a:t>already happened, past tense</a:t>
+              <a:t>past tense</a:t>
             </a:r>
             <a:endParaRPr lang="en-US" sz="850" dirty="0"/>
           </a:p>
@@ -31533,7 +33567,7 @@
                 <a:ea typeface="Trebuchet MS" pitchFamily="34" charset="-122"/>
                 <a:cs typeface="Trebuchet MS" pitchFamily="34" charset="-120"/>
               </a:rPr>
-              <a:t>o</a:t>
+              <a:t>un</a:t>
             </a:r>
             <a:endParaRPr lang="en-US" sz="1400" dirty="0"/>
           </a:p>
@@ -31638,7 +33672,7 @@
                 <a:ea typeface="Trebuchet MS" pitchFamily="34" charset="-122"/>
                 <a:cs typeface="Trebuchet MS" pitchFamily="34" charset="-120"/>
               </a:rPr>
-              <a:t>ver</a:t>
+              <a:t>der</a:t>
             </a:r>
             <a:endParaRPr lang="en-US" sz="1400" dirty="0"/>
           </a:p>
@@ -32272,7 +34306,7 @@
                 <a:ea typeface="Calibri" pitchFamily="34" charset="-122"/>
                 <a:cs typeface="Calibri" pitchFamily="34" charset="-120"/>
               </a:rPr>
-              <a:t>Word Labs  •  wordlabs.app  •  Root: 'power' = strength, force, ability</a:t>
+              <a:t>Word Labs  •  wordlabs.app  •  Root: 'power' = strength; control; energy</a:t>
             </a:r>
             <a:endParaRPr lang="en-US" sz="800" dirty="0"/>
           </a:p>
@@ -32411,7 +34445,7 @@
                 <a:ea typeface="Trebuchet MS" pitchFamily="34" charset="-122"/>
                 <a:cs typeface="Trebuchet MS" pitchFamily="34" charset="-120"/>
               </a:rPr>
-              <a:t>overpowered</a:t>
+              <a:t>underpowered</a:t>
             </a:r>
             <a:endParaRPr lang="en-US" sz="2800" dirty="0"/>
           </a:p>
@@ -32550,7 +34584,7 @@
                 <a:ea typeface="Trebuchet MS" pitchFamily="34" charset="-122"/>
                 <a:cs typeface="Trebuchet MS" pitchFamily="34" charset="-120"/>
               </a:rPr>
-              <a:t>over</a:t>
+              <a:t>under</a:t>
             </a:r>
             <a:endParaRPr lang="en-US" sz="1300" dirty="0"/>
           </a:p>
@@ -32589,7 +34623,7 @@
                 <a:ea typeface="Calibri" pitchFamily="34" charset="-122"/>
                 <a:cs typeface="Calibri" pitchFamily="34" charset="-120"/>
               </a:rPr>
-              <a:t>too much, above</a:t>
+              <a:t>below</a:t>
             </a:r>
             <a:endParaRPr lang="en-US" sz="850" dirty="0"/>
           </a:p>
@@ -32701,7 +34735,7 @@
                 <a:ea typeface="Calibri" pitchFamily="34" charset="-122"/>
                 <a:cs typeface="Calibri" pitchFamily="34" charset="-120"/>
               </a:rPr>
-              <a:t>strength, force</a:t>
+              <a:t>strength; control; energy</a:t>
             </a:r>
             <a:endParaRPr lang="en-US" sz="850" dirty="0"/>
           </a:p>
@@ -32813,7 +34847,7 @@
                 <a:ea typeface="Calibri" pitchFamily="34" charset="-122"/>
                 <a:cs typeface="Calibri" pitchFamily="34" charset="-120"/>
               </a:rPr>
-              <a:t>already happened, past tense</a:t>
+              <a:t>past tense</a:t>
             </a:r>
             <a:endParaRPr lang="en-US" sz="850" dirty="0"/>
           </a:p>
@@ -32972,7 +35006,7 @@
                 <a:ea typeface="Trebuchet MS" pitchFamily="34" charset="-122"/>
                 <a:cs typeface="Trebuchet MS" pitchFamily="34" charset="-120"/>
               </a:rPr>
-              <a:t>o</a:t>
+              <a:t>un</a:t>
             </a:r>
             <a:endParaRPr lang="en-US" sz="1400" dirty="0"/>
           </a:p>
@@ -33077,7 +35111,7 @@
                 <a:ea typeface="Trebuchet MS" pitchFamily="34" charset="-122"/>
                 <a:cs typeface="Trebuchet MS" pitchFamily="34" charset="-120"/>
               </a:rPr>
-              <a:t>ver</a:t>
+              <a:t>der</a:t>
             </a:r>
             <a:endParaRPr lang="en-US" sz="1400" dirty="0"/>
           </a:p>
@@ -33446,7 +35480,7 @@
                 <a:ea typeface="Trebuchet MS" pitchFamily="34" charset="-122"/>
                 <a:cs typeface="Trebuchet MS" pitchFamily="34" charset="-120"/>
               </a:rPr>
-              <a:t>o</a:t>
+              <a:t>u</a:t>
             </a:r>
             <a:endParaRPr lang="en-US" sz="900" dirty="0"/>
           </a:p>
@@ -33512,7 +35546,7 @@
                 <a:ea typeface="Trebuchet MS" pitchFamily="34" charset="-122"/>
                 <a:cs typeface="Trebuchet MS" pitchFamily="34" charset="-120"/>
               </a:rPr>
-              <a:t>v</a:t>
+              <a:t>n</a:t>
             </a:r>
             <a:endParaRPr lang="en-US" sz="900" dirty="0"/>
           </a:p>
@@ -33578,7 +35612,7 @@
                 <a:ea typeface="Trebuchet MS" pitchFamily="34" charset="-122"/>
                 <a:cs typeface="Trebuchet MS" pitchFamily="34" charset="-120"/>
               </a:rPr>
-              <a:t>er</a:t>
+              <a:t>d</a:t>
             </a:r>
             <a:endParaRPr lang="en-US" sz="900" dirty="0"/>
           </a:p>
@@ -33644,7 +35678,7 @@
                 <a:ea typeface="Trebuchet MS" pitchFamily="34" charset="-122"/>
                 <a:cs typeface="Trebuchet MS" pitchFamily="34" charset="-120"/>
               </a:rPr>
-              <a:t>p</a:t>
+              <a:t>er</a:t>
             </a:r>
             <a:endParaRPr lang="en-US" sz="900" dirty="0"/>
           </a:p>
@@ -33710,7 +35744,7 @@
                 <a:ea typeface="Trebuchet MS" pitchFamily="34" charset="-122"/>
                 <a:cs typeface="Trebuchet MS" pitchFamily="34" charset="-120"/>
               </a:rPr>
-              <a:t>ow</a:t>
+              <a:t>p</a:t>
             </a:r>
             <a:endParaRPr lang="en-US" sz="900" dirty="0"/>
           </a:p>
@@ -33776,7 +35810,7 @@
                 <a:ea typeface="Trebuchet MS" pitchFamily="34" charset="-122"/>
                 <a:cs typeface="Trebuchet MS" pitchFamily="34" charset="-120"/>
               </a:rPr>
-              <a:t>er</a:t>
+              <a:t>ow</a:t>
             </a:r>
             <a:endParaRPr lang="en-US" sz="900" dirty="0"/>
           </a:p>
@@ -33842,7 +35876,7 @@
                 <a:ea typeface="Trebuchet MS" pitchFamily="34" charset="-122"/>
                 <a:cs typeface="Trebuchet MS" pitchFamily="34" charset="-120"/>
               </a:rPr>
-              <a:t>e</a:t>
+              <a:t>er</a:t>
             </a:r>
             <a:endParaRPr lang="en-US" sz="900" dirty="0"/>
           </a:p>
@@ -33908,7 +35942,7 @@
                 <a:ea typeface="Trebuchet MS" pitchFamily="34" charset="-122"/>
                 <a:cs typeface="Trebuchet MS" pitchFamily="34" charset="-120"/>
               </a:rPr>
-              <a:t>d</a:t>
+              <a:t>ed</a:t>
             </a:r>
             <a:endParaRPr lang="en-US" sz="900" dirty="0"/>
           </a:p>
@@ -34200,7 +36234,7 @@
                 <a:ea typeface="Calibri" pitchFamily="34" charset="-122"/>
                 <a:cs typeface="Calibri" pitchFamily="34" charset="-120"/>
               </a:rPr>
-              <a:t>Word Labs  •  wordlabs.app  •  Root: 'power' = strength, force, ability</a:t>
+              <a:t>Word Labs  •  wordlabs.app  •  Root: 'power' = strength; control; energy</a:t>
             </a:r>
             <a:endParaRPr lang="en-US" sz="800" dirty="0"/>
           </a:p>
@@ -35369,7 +37403,7 @@
                 <a:ea typeface="Calibri" pitchFamily="34" charset="-122"/>
                 <a:cs typeface="Calibri" pitchFamily="34" charset="-120"/>
               </a:rPr>
-              <a:t>Word Labs  •  wordlabs.app  •  Root: 'power' = strength, force, ability</a:t>
+              <a:t>Word Labs  •  wordlabs.app  •  Root: 'power' = strength; control; energy</a:t>
             </a:r>
             <a:endParaRPr lang="en-US" sz="800" dirty="0"/>
           </a:p>
@@ -35670,7 +37704,7 @@
                 <a:ea typeface="Trebuchet MS" pitchFamily="34" charset="-122"/>
                 <a:cs typeface="Trebuchet MS" pitchFamily="34" charset="-120"/>
               </a:rPr>
-              <a:t>em-</a:t>
+              <a:t>en-</a:t>
             </a:r>
             <a:endParaRPr lang="en-US" sz="1300" dirty="0"/>
           </a:p>
@@ -35951,7 +37985,7 @@
                 <a:ea typeface="Trebuchet MS" pitchFamily="34" charset="-122"/>
                 <a:cs typeface="Trebuchet MS" pitchFamily="34" charset="-120"/>
               </a:rPr>
-              <a:t>-ful</a:t>
+              <a:t>-ing</a:t>
             </a:r>
             <a:endParaRPr lang="en-US" sz="1300" dirty="0"/>
           </a:p>
@@ -36015,7 +38049,7 @@
                 <a:ea typeface="Trebuchet MS" pitchFamily="34" charset="-122"/>
                 <a:cs typeface="Trebuchet MS" pitchFamily="34" charset="-120"/>
               </a:rPr>
-              <a:t>super-</a:t>
+              <a:t>under-</a:t>
             </a:r>
             <a:endParaRPr lang="en-US" sz="1300" dirty="0"/>
           </a:p>
@@ -36104,7 +38138,7 @@
                 <a:ea typeface="Trebuchet MS" pitchFamily="34" charset="-122"/>
                 <a:cs typeface="Trebuchet MS" pitchFamily="34" charset="-120"/>
               </a:rPr>
-              <a:t>-house</a:t>
+              <a:t>-ment</a:t>
             </a:r>
             <a:endParaRPr lang="en-US" sz="1300" dirty="0"/>
           </a:p>
@@ -36125,7 +38159,7 @@
             <a:avLst/>
           </a:prstGeom>
           <a:solidFill>
-            <a:srgbClr val="DDD6FE"/>
+            <a:srgbClr val="F1F5F9"/>
           </a:solidFill>
           <a:ln w="12700">
             <a:solidFill>
@@ -36137,14 +38171,64 @@
       </p:sp>
       <p:sp>
         <p:nvSpPr>
-          <p:cNvPr id="34" name="Text 32"/>
-          <p:cNvSpPr/>
-          <p:nvPr/>
-        </p:nvSpPr>
-        <p:spPr>
-          <a:xfrm>
-            <a:off x="365760" y="2825496"/>
-            <a:ext cx="2468880" cy="402336"/>
+          <p:cNvPr id="34" name="Shape 32"/>
+          <p:cNvSpPr/>
+          <p:nvPr/>
+        </p:nvSpPr>
+        <p:spPr>
+          <a:xfrm>
+            <a:off x="2971800" y="2825496"/>
+            <a:ext cx="2834640" cy="402336"/>
+          </a:xfrm>
+          <a:prstGeom prst="rect">
+            <a:avLst/>
+          </a:prstGeom>
+          <a:solidFill>
+            <a:srgbClr val="F1F5F9"/>
+          </a:solidFill>
+          <a:ln w="12700">
+            <a:solidFill>
+              <a:srgbClr val="E2E8F0"/>
+            </a:solidFill>
+            <a:prstDash val="solid"/>
+          </a:ln>
+        </p:spPr>
+      </p:sp>
+      <p:sp>
+        <p:nvSpPr>
+          <p:cNvPr id="35" name="Shape 33"/>
+          <p:cNvSpPr/>
+          <p:nvPr/>
+        </p:nvSpPr>
+        <p:spPr>
+          <a:xfrm>
+            <a:off x="5943600" y="2825496"/>
+            <a:ext cx="2834640" cy="402336"/>
+          </a:xfrm>
+          <a:prstGeom prst="rect">
+            <a:avLst/>
+          </a:prstGeom>
+          <a:solidFill>
+            <a:srgbClr val="FCE7F3"/>
+          </a:solidFill>
+          <a:ln w="12700">
+            <a:solidFill>
+              <a:srgbClr val="E2E8F0"/>
+            </a:solidFill>
+            <a:prstDash val="solid"/>
+          </a:ln>
+        </p:spPr>
+      </p:sp>
+      <p:sp>
+        <p:nvSpPr>
+          <p:cNvPr id="36" name="Text 34"/>
+          <p:cNvSpPr/>
+          <p:nvPr/>
+        </p:nvSpPr>
+        <p:spPr>
+          <a:xfrm>
+            <a:off x="5943600" y="2825496"/>
+            <a:ext cx="2834640" cy="402336"/>
           </a:xfrm>
           <a:prstGeom prst="rect">
             <a:avLst/>
@@ -36162,13 +38246,13 @@
             <a:r>
               <a:rPr lang="en-US" sz="1300" b="1" dirty="0">
                 <a:solidFill>
-                  <a:srgbClr val="4C1D95"/>
+                  <a:srgbClr val="9D174D"/>
                 </a:solidFill>
                 <a:latin typeface="Trebuchet MS" pitchFamily="34" charset="0"/>
                 <a:ea typeface="Trebuchet MS" pitchFamily="34" charset="-122"/>
                 <a:cs typeface="Trebuchet MS" pitchFamily="34" charset="-120"/>
               </a:rPr>
-              <a:t>un-</a:t>
+              <a:t>-ful</a:t>
             </a:r>
             <a:endParaRPr lang="en-US" sz="1300" dirty="0"/>
           </a:p>
@@ -36176,20 +38260,45 @@
       </p:sp>
       <p:sp>
         <p:nvSpPr>
-          <p:cNvPr id="35" name="Shape 33"/>
-          <p:cNvSpPr/>
-          <p:nvPr/>
-        </p:nvSpPr>
-        <p:spPr>
-          <a:xfrm>
-            <a:off x="2971800" y="2825496"/>
+          <p:cNvPr id="37" name="Shape 35"/>
+          <p:cNvSpPr/>
+          <p:nvPr/>
+        </p:nvSpPr>
+        <p:spPr>
+          <a:xfrm>
+            <a:off x="365760" y="3246120"/>
+            <a:ext cx="2468880" cy="402336"/>
+          </a:xfrm>
+          <a:prstGeom prst="rect">
+            <a:avLst/>
+          </a:prstGeom>
+          <a:solidFill>
+            <a:srgbClr val="F8FAFC"/>
+          </a:solidFill>
+          <a:ln w="12700">
+            <a:solidFill>
+              <a:srgbClr val="E2E8F0"/>
+            </a:solidFill>
+            <a:prstDash val="solid"/>
+          </a:ln>
+        </p:spPr>
+      </p:sp>
+      <p:sp>
+        <p:nvSpPr>
+          <p:cNvPr id="38" name="Shape 36"/>
+          <p:cNvSpPr/>
+          <p:nvPr/>
+        </p:nvSpPr>
+        <p:spPr>
+          <a:xfrm>
+            <a:off x="2971800" y="3246120"/>
             <a:ext cx="2834640" cy="402336"/>
           </a:xfrm>
           <a:prstGeom prst="rect">
             <a:avLst/>
           </a:prstGeom>
           <a:solidFill>
-            <a:srgbClr val="F1F5F9"/>
+            <a:srgbClr val="F8FAFC"/>
           </a:solidFill>
           <a:ln w="12700">
             <a:solidFill>
@@ -36201,13 +38310,13 @@
       </p:sp>
       <p:sp>
         <p:nvSpPr>
-          <p:cNvPr id="36" name="Shape 34"/>
-          <p:cNvSpPr/>
-          <p:nvPr/>
-        </p:nvSpPr>
-        <p:spPr>
-          <a:xfrm>
-            <a:off x="5943600" y="2825496"/>
+          <p:cNvPr id="39" name="Shape 37"/>
+          <p:cNvSpPr/>
+          <p:nvPr/>
+        </p:nvSpPr>
+        <p:spPr>
+          <a:xfrm>
+            <a:off x="5943600" y="3246120"/>
             <a:ext cx="2834640" cy="402336"/>
           </a:xfrm>
           <a:prstGeom prst="rect">
@@ -36226,13 +38335,13 @@
       </p:sp>
       <p:sp>
         <p:nvSpPr>
-          <p:cNvPr id="37" name="Text 35"/>
-          <p:cNvSpPr/>
-          <p:nvPr/>
-        </p:nvSpPr>
-        <p:spPr>
-          <a:xfrm>
-            <a:off x="5943600" y="2825496"/>
+          <p:cNvPr id="40" name="Text 38"/>
+          <p:cNvSpPr/>
+          <p:nvPr/>
+        </p:nvSpPr>
+        <p:spPr>
+          <a:xfrm>
+            <a:off x="5943600" y="3246120"/>
             <a:ext cx="2834640" cy="402336"/>
           </a:xfrm>
           <a:prstGeom prst="rect">
@@ -36257,7 +38366,7 @@
                 <a:ea typeface="Trebuchet MS" pitchFamily="34" charset="-122"/>
                 <a:cs typeface="Trebuchet MS" pitchFamily="34" charset="-120"/>
               </a:rPr>
-              <a:t>-ing</a:t>
+              <a:t>-less</a:t>
             </a:r>
             <a:endParaRPr lang="en-US" sz="1300" dirty="0"/>
           </a:p>
@@ -36265,20 +38374,20 @@
       </p:sp>
       <p:sp>
         <p:nvSpPr>
-          <p:cNvPr id="38" name="Shape 36"/>
-          <p:cNvSpPr/>
-          <p:nvPr/>
-        </p:nvSpPr>
-        <p:spPr>
-          <a:xfrm>
-            <a:off x="365760" y="3246120"/>
+          <p:cNvPr id="41" name="Shape 39"/>
+          <p:cNvSpPr/>
+          <p:nvPr/>
+        </p:nvSpPr>
+        <p:spPr>
+          <a:xfrm>
+            <a:off x="365760" y="3666744"/>
             <a:ext cx="2468880" cy="402336"/>
           </a:xfrm>
           <a:prstGeom prst="rect">
             <a:avLst/>
           </a:prstGeom>
           <a:solidFill>
-            <a:srgbClr val="DDD6FE"/>
+            <a:srgbClr val="F1F5F9"/>
           </a:solidFill>
           <a:ln w="12700">
             <a:solidFill>
@@ -36290,14 +38399,64 @@
       </p:sp>
       <p:sp>
         <p:nvSpPr>
-          <p:cNvPr id="39" name="Text 37"/>
-          <p:cNvSpPr/>
-          <p:nvPr/>
-        </p:nvSpPr>
-        <p:spPr>
-          <a:xfrm>
-            <a:off x="365760" y="3246120"/>
-            <a:ext cx="2468880" cy="402336"/>
+          <p:cNvPr id="42" name="Shape 40"/>
+          <p:cNvSpPr/>
+          <p:nvPr/>
+        </p:nvSpPr>
+        <p:spPr>
+          <a:xfrm>
+            <a:off x="2971800" y="3666744"/>
+            <a:ext cx="2834640" cy="402336"/>
+          </a:xfrm>
+          <a:prstGeom prst="rect">
+            <a:avLst/>
+          </a:prstGeom>
+          <a:solidFill>
+            <a:srgbClr val="F1F5F9"/>
+          </a:solidFill>
+          <a:ln w="12700">
+            <a:solidFill>
+              <a:srgbClr val="E2E8F0"/>
+            </a:solidFill>
+            <a:prstDash val="solid"/>
+          </a:ln>
+        </p:spPr>
+      </p:sp>
+      <p:sp>
+        <p:nvSpPr>
+          <p:cNvPr id="43" name="Shape 41"/>
+          <p:cNvSpPr/>
+          <p:nvPr/>
+        </p:nvSpPr>
+        <p:spPr>
+          <a:xfrm>
+            <a:off x="5943600" y="3666744"/>
+            <a:ext cx="2834640" cy="402336"/>
+          </a:xfrm>
+          <a:prstGeom prst="rect">
+            <a:avLst/>
+          </a:prstGeom>
+          <a:solidFill>
+            <a:srgbClr val="FCE7F3"/>
+          </a:solidFill>
+          <a:ln w="12700">
+            <a:solidFill>
+              <a:srgbClr val="E2E8F0"/>
+            </a:solidFill>
+            <a:prstDash val="solid"/>
+          </a:ln>
+        </p:spPr>
+      </p:sp>
+      <p:sp>
+        <p:nvSpPr>
+          <p:cNvPr id="44" name="Text 42"/>
+          <p:cNvSpPr/>
+          <p:nvPr/>
+        </p:nvSpPr>
+        <p:spPr>
+          <a:xfrm>
+            <a:off x="5943600" y="3666744"/>
+            <a:ext cx="2834640" cy="402336"/>
           </a:xfrm>
           <a:prstGeom prst="rect">
             <a:avLst/>
@@ -36315,13 +38474,13 @@
             <a:r>
               <a:rPr lang="en-US" sz="1300" b="1" dirty="0">
                 <a:solidFill>
-                  <a:srgbClr val="4C1D95"/>
+                  <a:srgbClr val="9D174D"/>
                 </a:solidFill>
                 <a:latin typeface="Trebuchet MS" pitchFamily="34" charset="0"/>
                 <a:ea typeface="Trebuchet MS" pitchFamily="34" charset="-122"/>
                 <a:cs typeface="Trebuchet MS" pitchFamily="34" charset="-120"/>
               </a:rPr>
-              <a:t>water-</a:t>
+              <a:t>-s</a:t>
             </a:r>
             <a:endParaRPr lang="en-US" sz="1300" dirty="0"/>
           </a:p>
@@ -36329,127 +38488,104 @@
       </p:sp>
       <p:sp>
         <p:nvSpPr>
-          <p:cNvPr id="40" name="Shape 38"/>
-          <p:cNvSpPr/>
-          <p:nvPr/>
-        </p:nvSpPr>
-        <p:spPr>
-          <a:xfrm>
-            <a:off x="2971800" y="3246120"/>
-            <a:ext cx="2834640" cy="402336"/>
-          </a:xfrm>
-          <a:prstGeom prst="rect">
-            <a:avLst/>
-          </a:prstGeom>
-          <a:solidFill>
-            <a:srgbClr val="F8FAFC"/>
-          </a:solidFill>
-          <a:ln w="12700">
-            <a:solidFill>
-              <a:srgbClr val="E2E8F0"/>
-            </a:solidFill>
-            <a:prstDash val="solid"/>
-          </a:ln>
-        </p:spPr>
-      </p:sp>
-      <p:sp>
-        <p:nvSpPr>
-          <p:cNvPr id="41" name="Shape 39"/>
-          <p:cNvSpPr/>
-          <p:nvPr/>
-        </p:nvSpPr>
-        <p:spPr>
-          <a:xfrm>
-            <a:off x="5943600" y="3246120"/>
-            <a:ext cx="2834640" cy="402336"/>
-          </a:xfrm>
-          <a:prstGeom prst="rect">
-            <a:avLst/>
-          </a:prstGeom>
-          <a:solidFill>
-            <a:srgbClr val="FCE7F3"/>
-          </a:solidFill>
-          <a:ln w="12700">
-            <a:solidFill>
-              <a:srgbClr val="E2E8F0"/>
-            </a:solidFill>
-            <a:prstDash val="solid"/>
-          </a:ln>
-        </p:spPr>
-      </p:sp>
-      <p:sp>
-        <p:nvSpPr>
-          <p:cNvPr id="42" name="Text 40"/>
-          <p:cNvSpPr/>
-          <p:nvPr/>
-        </p:nvSpPr>
-        <p:spPr>
-          <a:xfrm>
-            <a:off x="5943600" y="3246120"/>
-            <a:ext cx="2834640" cy="402336"/>
-          </a:xfrm>
-          <a:prstGeom prst="rect">
-            <a:avLst/>
-          </a:prstGeom>
-          <a:noFill/>
-          <a:ln/>
-        </p:spPr>
-        <p:txBody>
-          <a:bodyPr wrap="square" lIns="0" tIns="0" rIns="0" bIns="0" rtlCol="0" anchor="ctr"/>
-          <a:lstStyle/>
-          <a:p>
-            <a:pPr algn="ctr" indent="0" marL="0">
-              <a:buNone/>
-            </a:pPr>
-            <a:r>
-              <a:rPr lang="en-US" sz="1300" b="1" dirty="0">
-                <a:solidFill>
-                  <a:srgbClr val="9D174D"/>
+          <p:cNvPr id="45" name="Text 43"/>
+          <p:cNvSpPr/>
+          <p:nvPr/>
+        </p:nvSpPr>
+        <p:spPr>
+          <a:xfrm>
+            <a:off x="365760" y="3611880"/>
+            <a:ext cx="1828800" cy="347472"/>
+          </a:xfrm>
+          <a:prstGeom prst="rect">
+            <a:avLst/>
+          </a:prstGeom>
+          <a:noFill/>
+          <a:ln/>
+        </p:spPr>
+        <p:txBody>
+          <a:bodyPr wrap="square" lIns="0" tIns="0" rIns="0" bIns="0" rtlCol="0" anchor="ctr"/>
+          <a:lstStyle/>
+          <a:p>
+            <a:pPr algn="l" indent="0" marL="0">
+              <a:buNone/>
+            </a:pPr>
+            <a:r>
+              <a:rPr lang="en-US" sz="1200" b="1" dirty="0">
+                <a:solidFill>
+                  <a:srgbClr val="0F172A"/>
                 </a:solidFill>
                 <a:latin typeface="Trebuchet MS" pitchFamily="34" charset="0"/>
                 <a:ea typeface="Trebuchet MS" pitchFamily="34" charset="-122"/>
                 <a:cs typeface="Trebuchet MS" pitchFamily="34" charset="-120"/>
               </a:rPr>
-              <a:t>-less</a:t>
-            </a:r>
-            <a:endParaRPr lang="en-US" sz="1300" dirty="0"/>
-          </a:p>
-        </p:txBody>
-      </p:sp>
-      <p:sp>
-        <p:nvSpPr>
-          <p:cNvPr id="43" name="Text 41"/>
-          <p:cNvSpPr/>
-          <p:nvPr/>
-        </p:nvSpPr>
-        <p:spPr>
-          <a:xfrm>
-            <a:off x="365760" y="3611880"/>
-            <a:ext cx="1828800" cy="347472"/>
-          </a:xfrm>
-          <a:prstGeom prst="rect">
-            <a:avLst/>
-          </a:prstGeom>
-          <a:noFill/>
-          <a:ln/>
-        </p:spPr>
-        <p:txBody>
-          <a:bodyPr wrap="square" lIns="0" tIns="0" rIns="0" bIns="0" rtlCol="0" anchor="ctr"/>
-          <a:lstStyle/>
-          <a:p>
-            <a:pPr algn="l" indent="0" marL="0">
+              <a:t>Sample words:</a:t>
+            </a:r>
+            <a:endParaRPr lang="en-US" sz="1200" dirty="0"/>
+          </a:p>
+        </p:txBody>
+      </p:sp>
+      <p:sp>
+        <p:nvSpPr>
+          <p:cNvPr id="46" name="Shape 44"/>
+          <p:cNvSpPr/>
+          <p:nvPr/>
+        </p:nvSpPr>
+        <p:spPr>
+          <a:xfrm>
+            <a:off x="365760" y="4023360"/>
+            <a:ext cx="2011680" cy="402336"/>
+          </a:xfrm>
+          <a:prstGeom prst="rect">
+            <a:avLst>
+              <a:gd name="adj" fmla="val 13636"/>
+            </a:avLst>
+          </a:prstGeom>
+          <a:solidFill>
+            <a:srgbClr val="EEF2FF"/>
+          </a:solidFill>
+          <a:ln w="12700">
+            <a:solidFill>
+              <a:srgbClr val="6366F1"/>
+            </a:solidFill>
+            <a:prstDash val="solid"/>
+          </a:ln>
+        </p:spPr>
+      </p:sp>
+      <p:sp>
+        <p:nvSpPr>
+          <p:cNvPr id="47" name="Text 45"/>
+          <p:cNvSpPr/>
+          <p:nvPr/>
+        </p:nvSpPr>
+        <p:spPr>
+          <a:xfrm>
+            <a:off x="365760" y="4023360"/>
+            <a:ext cx="2011680" cy="402336"/>
+          </a:xfrm>
+          <a:prstGeom prst="rect">
+            <a:avLst/>
+          </a:prstGeom>
+          <a:noFill/>
+          <a:ln/>
+        </p:spPr>
+        <p:txBody>
+          <a:bodyPr wrap="square" lIns="0" tIns="0" rIns="0" bIns="0" rtlCol="0" anchor="ctr"/>
+          <a:lstStyle/>
+          <a:p>
+            <a:pPr algn="ctr" indent="0" marL="0">
               <a:buNone/>
             </a:pPr>
             <a:r>
               <a:rPr lang="en-US" sz="1200" b="1" dirty="0">
                 <a:solidFill>
-                  <a:srgbClr val="0F172A"/>
+                  <a:srgbClr val="4338CA"/>
                 </a:solidFill>
                 <a:latin typeface="Trebuchet MS" pitchFamily="34" charset="0"/>
                 <a:ea typeface="Trebuchet MS" pitchFamily="34" charset="-122"/>
                 <a:cs typeface="Trebuchet MS" pitchFamily="34" charset="-120"/>
               </a:rPr>
-              <a:t>Sample words:</a:t>
+              <a:t>power</a:t>
             </a:r>
             <a:endParaRPr lang="en-US" sz="1200" dirty="0"/>
           </a:p>
@@ -36457,13 +38593,13 @@
       </p:sp>
       <p:sp>
         <p:nvSpPr>
-          <p:cNvPr id="44" name="Shape 42"/>
-          <p:cNvSpPr/>
-          <p:nvPr/>
-        </p:nvSpPr>
-        <p:spPr>
-          <a:xfrm>
-            <a:off x="365760" y="4023360"/>
+          <p:cNvPr id="48" name="Shape 46"/>
+          <p:cNvSpPr/>
+          <p:nvPr/>
+        </p:nvSpPr>
+        <p:spPr>
+          <a:xfrm>
+            <a:off x="2542032" y="4023360"/>
             <a:ext cx="2011680" cy="402336"/>
           </a:xfrm>
           <a:prstGeom prst="rect">
@@ -36484,13 +38620,13 @@
       </p:sp>
       <p:sp>
         <p:nvSpPr>
-          <p:cNvPr id="45" name="Text 43"/>
-          <p:cNvSpPr/>
-          <p:nvPr/>
-        </p:nvSpPr>
-        <p:spPr>
-          <a:xfrm>
-            <a:off x="365760" y="4023360"/>
+          <p:cNvPr id="49" name="Text 47"/>
+          <p:cNvSpPr/>
+          <p:nvPr/>
+        </p:nvSpPr>
+        <p:spPr>
+          <a:xfrm>
+            <a:off x="2542032" y="4023360"/>
             <a:ext cx="2011680" cy="402336"/>
           </a:xfrm>
           <a:prstGeom prst="rect">
@@ -36515,7 +38651,7 @@
                 <a:ea typeface="Trebuchet MS" pitchFamily="34" charset="-122"/>
                 <a:cs typeface="Trebuchet MS" pitchFamily="34" charset="-120"/>
               </a:rPr>
-              <a:t>powerful</a:t>
+              <a:t>powers</a:t>
             </a:r>
             <a:endParaRPr lang="en-US" sz="1200" dirty="0"/>
           </a:p>
@@ -36523,13 +38659,13 @@
       </p:sp>
       <p:sp>
         <p:nvSpPr>
-          <p:cNvPr id="46" name="Shape 44"/>
-          <p:cNvSpPr/>
-          <p:nvPr/>
-        </p:nvSpPr>
-        <p:spPr>
-          <a:xfrm>
-            <a:off x="2542032" y="4023360"/>
+          <p:cNvPr id="50" name="Shape 48"/>
+          <p:cNvSpPr/>
+          <p:nvPr/>
+        </p:nvSpPr>
+        <p:spPr>
+          <a:xfrm>
+            <a:off x="4718304" y="4023360"/>
             <a:ext cx="2011680" cy="402336"/>
           </a:xfrm>
           <a:prstGeom prst="rect">
@@ -36550,13 +38686,13 @@
       </p:sp>
       <p:sp>
         <p:nvSpPr>
-          <p:cNvPr id="47" name="Text 45"/>
-          <p:cNvSpPr/>
-          <p:nvPr/>
-        </p:nvSpPr>
-        <p:spPr>
-          <a:xfrm>
-            <a:off x="2542032" y="4023360"/>
+          <p:cNvPr id="51" name="Text 49"/>
+          <p:cNvSpPr/>
+          <p:nvPr/>
+        </p:nvSpPr>
+        <p:spPr>
+          <a:xfrm>
+            <a:off x="4718304" y="4023360"/>
             <a:ext cx="2011680" cy="402336"/>
           </a:xfrm>
           <a:prstGeom prst="rect">
@@ -36581,7 +38717,7 @@
                 <a:ea typeface="Trebuchet MS" pitchFamily="34" charset="-122"/>
                 <a:cs typeface="Trebuchet MS" pitchFamily="34" charset="-120"/>
               </a:rPr>
-              <a:t>powerless</a:t>
+              <a:t>empower</a:t>
             </a:r>
             <a:endParaRPr lang="en-US" sz="1200" dirty="0"/>
           </a:p>
@@ -36589,13 +38725,13 @@
       </p:sp>
       <p:sp>
         <p:nvSpPr>
-          <p:cNvPr id="48" name="Shape 46"/>
-          <p:cNvSpPr/>
-          <p:nvPr/>
-        </p:nvSpPr>
-        <p:spPr>
-          <a:xfrm>
-            <a:off x="4718304" y="4023360"/>
+          <p:cNvPr id="52" name="Shape 50"/>
+          <p:cNvSpPr/>
+          <p:nvPr/>
+        </p:nvSpPr>
+        <p:spPr>
+          <a:xfrm>
+            <a:off x="6894576" y="4023360"/>
             <a:ext cx="2011680" cy="402336"/>
           </a:xfrm>
           <a:prstGeom prst="rect">
@@ -36616,13 +38752,13 @@
       </p:sp>
       <p:sp>
         <p:nvSpPr>
-          <p:cNvPr id="49" name="Text 47"/>
-          <p:cNvSpPr/>
-          <p:nvPr/>
-        </p:nvSpPr>
-        <p:spPr>
-          <a:xfrm>
-            <a:off x="4718304" y="4023360"/>
+          <p:cNvPr id="53" name="Text 51"/>
+          <p:cNvSpPr/>
+          <p:nvPr/>
+        </p:nvSpPr>
+        <p:spPr>
+          <a:xfrm>
+            <a:off x="6894576" y="4023360"/>
             <a:ext cx="2011680" cy="402336"/>
           </a:xfrm>
           <a:prstGeom prst="rect">
@@ -36647,7 +38783,7 @@
                 <a:ea typeface="Trebuchet MS" pitchFamily="34" charset="-122"/>
                 <a:cs typeface="Trebuchet MS" pitchFamily="34" charset="-120"/>
               </a:rPr>
-              <a:t>empowered</a:t>
+              <a:t>powered</a:t>
             </a:r>
             <a:endParaRPr lang="en-US" sz="1200" dirty="0"/>
           </a:p>
@@ -36655,13 +38791,13 @@
       </p:sp>
       <p:sp>
         <p:nvSpPr>
-          <p:cNvPr id="50" name="Shape 48"/>
-          <p:cNvSpPr/>
-          <p:nvPr/>
-        </p:nvSpPr>
-        <p:spPr>
-          <a:xfrm>
-            <a:off x="6894576" y="4023360"/>
+          <p:cNvPr id="54" name="Shape 52"/>
+          <p:cNvSpPr/>
+          <p:nvPr/>
+        </p:nvSpPr>
+        <p:spPr>
+          <a:xfrm>
+            <a:off x="365760" y="4498848"/>
             <a:ext cx="2011680" cy="402336"/>
           </a:xfrm>
           <a:prstGeom prst="rect">
@@ -36682,13 +38818,13 @@
       </p:sp>
       <p:sp>
         <p:nvSpPr>
-          <p:cNvPr id="51" name="Text 49"/>
-          <p:cNvSpPr/>
-          <p:nvPr/>
-        </p:nvSpPr>
-        <p:spPr>
-          <a:xfrm>
-            <a:off x="6894576" y="4023360"/>
+          <p:cNvPr id="55" name="Text 53"/>
+          <p:cNvSpPr/>
+          <p:nvPr/>
+        </p:nvSpPr>
+        <p:spPr>
+          <a:xfrm>
+            <a:off x="365760" y="4498848"/>
             <a:ext cx="2011680" cy="402336"/>
           </a:xfrm>
           <a:prstGeom prst="rect">
@@ -36713,7 +38849,7 @@
                 <a:ea typeface="Trebuchet MS" pitchFamily="34" charset="-122"/>
                 <a:cs typeface="Trebuchet MS" pitchFamily="34" charset="-120"/>
               </a:rPr>
-              <a:t>overpowered</a:t>
+              <a:t>powerful</a:t>
             </a:r>
             <a:endParaRPr lang="en-US" sz="1200" dirty="0"/>
           </a:p>
@@ -36721,13 +38857,13 @@
       </p:sp>
       <p:sp>
         <p:nvSpPr>
-          <p:cNvPr id="52" name="Shape 50"/>
-          <p:cNvSpPr/>
-          <p:nvPr/>
-        </p:nvSpPr>
-        <p:spPr>
-          <a:xfrm>
-            <a:off x="365760" y="4498848"/>
+          <p:cNvPr id="56" name="Shape 54"/>
+          <p:cNvSpPr/>
+          <p:nvPr/>
+        </p:nvSpPr>
+        <p:spPr>
+          <a:xfrm>
+            <a:off x="2542032" y="4498848"/>
             <a:ext cx="2011680" cy="402336"/>
           </a:xfrm>
           <a:prstGeom prst="rect">
@@ -36748,13 +38884,13 @@
       </p:sp>
       <p:sp>
         <p:nvSpPr>
-          <p:cNvPr id="53" name="Text 51"/>
-          <p:cNvSpPr/>
-          <p:nvPr/>
-        </p:nvSpPr>
-        <p:spPr>
-          <a:xfrm>
-            <a:off x="365760" y="4498848"/>
+          <p:cNvPr id="57" name="Text 55"/>
+          <p:cNvSpPr/>
+          <p:nvPr/>
+        </p:nvSpPr>
+        <p:spPr>
+          <a:xfrm>
+            <a:off x="2542032" y="4498848"/>
             <a:ext cx="2011680" cy="402336"/>
           </a:xfrm>
           <a:prstGeom prst="rect">
@@ -36779,7 +38915,7 @@
                 <a:ea typeface="Trebuchet MS" pitchFamily="34" charset="-122"/>
                 <a:cs typeface="Trebuchet MS" pitchFamily="34" charset="-120"/>
               </a:rPr>
-              <a:t>superpower</a:t>
+              <a:t>powering</a:t>
             </a:r>
             <a:endParaRPr lang="en-US" sz="1200" dirty="0"/>
           </a:p>
@@ -36787,13 +38923,13 @@
       </p:sp>
       <p:sp>
         <p:nvSpPr>
-          <p:cNvPr id="54" name="Shape 52"/>
-          <p:cNvSpPr/>
-          <p:nvPr/>
-        </p:nvSpPr>
-        <p:spPr>
-          <a:xfrm>
-            <a:off x="2542032" y="4498848"/>
+          <p:cNvPr id="58" name="Shape 56"/>
+          <p:cNvSpPr/>
+          <p:nvPr/>
+        </p:nvSpPr>
+        <p:spPr>
+          <a:xfrm>
+            <a:off x="4718304" y="4498848"/>
             <a:ext cx="2011680" cy="402336"/>
           </a:xfrm>
           <a:prstGeom prst="rect">
@@ -36814,13 +38950,13 @@
       </p:sp>
       <p:sp>
         <p:nvSpPr>
-          <p:cNvPr id="55" name="Text 53"/>
-          <p:cNvSpPr/>
-          <p:nvPr/>
-        </p:nvSpPr>
-        <p:spPr>
-          <a:xfrm>
-            <a:off x="2542032" y="4498848"/>
+          <p:cNvPr id="59" name="Text 57"/>
+          <p:cNvSpPr/>
+          <p:nvPr/>
+        </p:nvSpPr>
+        <p:spPr>
+          <a:xfrm>
+            <a:off x="4718304" y="4498848"/>
             <a:ext cx="2011680" cy="402336"/>
           </a:xfrm>
           <a:prstGeom prst="rect">
@@ -36845,139 +38981,7 @@
                 <a:ea typeface="Trebuchet MS" pitchFamily="34" charset="-122"/>
                 <a:cs typeface="Trebuchet MS" pitchFamily="34" charset="-120"/>
               </a:rPr>
-              <a:t>powerhouse</a:t>
-            </a:r>
-            <a:endParaRPr lang="en-US" sz="1200" dirty="0"/>
-          </a:p>
-        </p:txBody>
-      </p:sp>
-      <p:sp>
-        <p:nvSpPr>
-          <p:cNvPr id="56" name="Shape 54"/>
-          <p:cNvSpPr/>
-          <p:nvPr/>
-        </p:nvSpPr>
-        <p:spPr>
-          <a:xfrm>
-            <a:off x="4718304" y="4498848"/>
-            <a:ext cx="2011680" cy="402336"/>
-          </a:xfrm>
-          <a:prstGeom prst="rect">
-            <a:avLst>
-              <a:gd name="adj" fmla="val 13636"/>
-            </a:avLst>
-          </a:prstGeom>
-          <a:solidFill>
-            <a:srgbClr val="EEF2FF"/>
-          </a:solidFill>
-          <a:ln w="12700">
-            <a:solidFill>
-              <a:srgbClr val="6366F1"/>
-            </a:solidFill>
-            <a:prstDash val="solid"/>
-          </a:ln>
-        </p:spPr>
-      </p:sp>
-      <p:sp>
-        <p:nvSpPr>
-          <p:cNvPr id="57" name="Text 55"/>
-          <p:cNvSpPr/>
-          <p:nvPr/>
-        </p:nvSpPr>
-        <p:spPr>
-          <a:xfrm>
-            <a:off x="4718304" y="4498848"/>
-            <a:ext cx="2011680" cy="402336"/>
-          </a:xfrm>
-          <a:prstGeom prst="rect">
-            <a:avLst/>
-          </a:prstGeom>
-          <a:noFill/>
-          <a:ln/>
-        </p:spPr>
-        <p:txBody>
-          <a:bodyPr wrap="square" lIns="0" tIns="0" rIns="0" bIns="0" rtlCol="0" anchor="ctr"/>
-          <a:lstStyle/>
-          <a:p>
-            <a:pPr algn="ctr" indent="0" marL="0">
-              <a:buNone/>
-            </a:pPr>
-            <a:r>
-              <a:rPr lang="en-US" sz="1200" b="1" dirty="0">
-                <a:solidFill>
-                  <a:srgbClr val="4338CA"/>
-                </a:solidFill>
-                <a:latin typeface="Trebuchet MS" pitchFamily="34" charset="0"/>
-                <a:ea typeface="Trebuchet MS" pitchFamily="34" charset="-122"/>
-                <a:cs typeface="Trebuchet MS" pitchFamily="34" charset="-120"/>
-              </a:rPr>
-              <a:t>unpowered</a:t>
-            </a:r>
-            <a:endParaRPr lang="en-US" sz="1200" dirty="0"/>
-          </a:p>
-        </p:txBody>
-      </p:sp>
-      <p:sp>
-        <p:nvSpPr>
-          <p:cNvPr id="58" name="Shape 56"/>
-          <p:cNvSpPr/>
-          <p:nvPr/>
-        </p:nvSpPr>
-        <p:spPr>
-          <a:xfrm>
-            <a:off x="6894576" y="4498848"/>
-            <a:ext cx="2011680" cy="402336"/>
-          </a:xfrm>
-          <a:prstGeom prst="rect">
-            <a:avLst>
-              <a:gd name="adj" fmla="val 13636"/>
-            </a:avLst>
-          </a:prstGeom>
-          <a:solidFill>
-            <a:srgbClr val="EEF2FF"/>
-          </a:solidFill>
-          <a:ln w="12700">
-            <a:solidFill>
-              <a:srgbClr val="6366F1"/>
-            </a:solidFill>
-            <a:prstDash val="solid"/>
-          </a:ln>
-        </p:spPr>
-      </p:sp>
-      <p:sp>
-        <p:nvSpPr>
-          <p:cNvPr id="59" name="Text 57"/>
-          <p:cNvSpPr/>
-          <p:nvPr/>
-        </p:nvSpPr>
-        <p:spPr>
-          <a:xfrm>
-            <a:off x="6894576" y="4498848"/>
-            <a:ext cx="2011680" cy="402336"/>
-          </a:xfrm>
-          <a:prstGeom prst="rect">
-            <a:avLst/>
-          </a:prstGeom>
-          <a:noFill/>
-          <a:ln/>
-        </p:spPr>
-        <p:txBody>
-          <a:bodyPr wrap="square" lIns="0" tIns="0" rIns="0" bIns="0" rtlCol="0" anchor="ctr"/>
-          <a:lstStyle/>
-          <a:p>
-            <a:pPr algn="ctr" indent="0" marL="0">
-              <a:buNone/>
-            </a:pPr>
-            <a:r>
-              <a:rPr lang="en-US" sz="1200" b="1" dirty="0">
-                <a:solidFill>
-                  <a:srgbClr val="4338CA"/>
-                </a:solidFill>
-                <a:latin typeface="Trebuchet MS" pitchFamily="34" charset="0"/>
-                <a:ea typeface="Trebuchet MS" pitchFamily="34" charset="-122"/>
-                <a:cs typeface="Trebuchet MS" pitchFamily="34" charset="-120"/>
-              </a:rPr>
-              <a:t>empowering</a:t>
+              <a:t>empowered</a:t>
             </a:r>
             <a:endParaRPr lang="en-US" sz="1200" dirty="0"/>
           </a:p>
@@ -37269,7 +39273,7 @@
                 <a:ea typeface="Calibri" pitchFamily="34" charset="-122"/>
                 <a:cs typeface="Calibri" pitchFamily="34" charset="-120"/>
               </a:rPr>
-              <a:t>Word Labs  •  wordlabs.app  •  Root: 'power' = strength, force, ability</a:t>
+              <a:t>Word Labs  •  wordlabs.app  •  Root: 'power' = strength; control; energy</a:t>
             </a:r>
             <a:endParaRPr lang="en-US" sz="800" dirty="0"/>
           </a:p>
@@ -37433,7 +39437,7 @@
                 <a:ea typeface="Calibri" pitchFamily="34" charset="-122"/>
                 <a:cs typeface="Calibri" pitchFamily="34" charset="-120"/>
               </a:rPr>
-              <a:t>The core part of a word carrying its basic meaning. For example, 'power' means 'strength, force, ability'.</a:t>
+              <a:t>The core part of a word carrying its basic meaning. For example, 'power' means 'strength; control; energy'.</a:t>
             </a:r>
             <a:endParaRPr lang="en-US" sz="1350" dirty="0"/>
           </a:p>
@@ -38053,7 +40057,7 @@
                 <a:ea typeface="Calibri" pitchFamily="34" charset="-122"/>
                 <a:cs typeface="Calibri" pitchFamily="34" charset="-120"/>
               </a:rPr>
-              <a:t>Word Labs  •  wordlabs.app  •  Root: 'power' = strength, force, ability</a:t>
+              <a:t>Word Labs  •  wordlabs.app  •  Root: 'power' = strength; control; energy</a:t>
             </a:r>
             <a:endParaRPr lang="en-US" sz="800" dirty="0"/>
           </a:p>
@@ -38165,7 +40169,7 @@
                 <a:ea typeface="Calibri" pitchFamily="34" charset="-122"/>
                 <a:cs typeface="Calibri" pitchFamily="34" charset="-120"/>
               </a:rPr>
-              <a:t>1.  The word 'powerless' contains the root 'power' and means having no strength or force.</a:t>
+              <a:t>1.  'power' means 'strength; control; energy'.</a:t>
             </a:r>
             <a:endParaRPr lang="en-US" sz="1300" dirty="0"/>
           </a:p>
@@ -38304,7 +40308,7 @@
                 <a:ea typeface="Calibri" pitchFamily="34" charset="-122"/>
                 <a:cs typeface="Calibri" pitchFamily="34" charset="-120"/>
               </a:rPr>
-              <a:t>2.  A 'powerhouse' is always a building that stores electricity and nothing else.</a:t>
+              <a:t>2.  'powers' means 'small sweet treats given as rewards'.</a:t>
             </a:r>
             <a:endParaRPr lang="en-US" sz="1300" dirty="0"/>
           </a:p>
@@ -38443,7 +40447,7 @@
                 <a:ea typeface="Calibri" pitchFamily="34" charset="-122"/>
                 <a:cs typeface="Calibri" pitchFamily="34" charset="-120"/>
               </a:rPr>
-              <a:t>3.  The root 'power' comes from the Greek word for light.</a:t>
+              <a:t>3.  'powers' means 'special abilities, or the act of supplying something with energy'.</a:t>
             </a:r>
             <a:endParaRPr lang="en-US" sz="1300" dirty="0"/>
           </a:p>
@@ -38466,11 +40470,11 @@
             </a:avLst>
           </a:prstGeom>
           <a:solidFill>
-            <a:srgbClr val="FEE2E2"/>
-          </a:solidFill>
-          <a:ln w="12700">
-            <a:solidFill>
-              <a:srgbClr val="DC2626"/>
+            <a:srgbClr val="DCFCE7"/>
+          </a:solidFill>
+          <a:ln w="12700">
+            <a:solidFill>
+              <a:srgbClr val="16A34A"/>
             </a:solidFill>
             <a:prstDash val="solid"/>
           </a:ln>
@@ -38503,13 +40507,13 @@
             <a:r>
               <a:rPr lang="en-US" sz="1100" b="1" dirty="0">
                 <a:solidFill>
-                  <a:srgbClr val="DC2626"/>
+                  <a:srgbClr val="16A34A"/>
                 </a:solidFill>
                 <a:latin typeface="Trebuchet MS" pitchFamily="34" charset="0"/>
                 <a:ea typeface="Trebuchet MS" pitchFamily="34" charset="-122"/>
                 <a:cs typeface="Trebuchet MS" pitchFamily="34" charset="-120"/>
               </a:rPr>
-              <a:t>FALSE</a:t>
+              <a:t>TRUE</a:t>
             </a:r>
             <a:endParaRPr lang="en-US" sz="1100" dirty="0"/>
           </a:p>
@@ -38582,7 +40586,7 @@
                 <a:ea typeface="Calibri" pitchFamily="34" charset="-122"/>
                 <a:cs typeface="Calibri" pitchFamily="34" charset="-120"/>
               </a:rPr>
-              <a:t>4.  Adding the suffix '-ful' to 'power' makes the word 'powerful', which means full of strength.</a:t>
+              <a:t>4.  'power' means 'a soft, sweet-smelling flower'.</a:t>
             </a:r>
             <a:endParaRPr lang="en-US" sz="1300" dirty="0"/>
           </a:p>
@@ -38605,11 +40609,11 @@
             </a:avLst>
           </a:prstGeom>
           <a:solidFill>
-            <a:srgbClr val="DCFCE7"/>
-          </a:solidFill>
-          <a:ln w="12700">
-            <a:solidFill>
-              <a:srgbClr val="16A34A"/>
+            <a:srgbClr val="FEE2E2"/>
+          </a:solidFill>
+          <a:ln w="12700">
+            <a:solidFill>
+              <a:srgbClr val="DC2626"/>
             </a:solidFill>
             <a:prstDash val="solid"/>
           </a:ln>
@@ -38642,13 +40646,13 @@
             <a:r>
               <a:rPr lang="en-US" sz="1100" b="1" dirty="0">
                 <a:solidFill>
-                  <a:srgbClr val="16A34A"/>
+                  <a:srgbClr val="DC2626"/>
                 </a:solidFill>
                 <a:latin typeface="Trebuchet MS" pitchFamily="34" charset="0"/>
                 <a:ea typeface="Trebuchet MS" pitchFamily="34" charset="-122"/>
                 <a:cs typeface="Trebuchet MS" pitchFamily="34" charset="-120"/>
               </a:rPr>
-              <a:t>TRUE</a:t>
+              <a:t>FALSE</a:t>
             </a:r>
             <a:endParaRPr lang="en-US" sz="1100" dirty="0"/>
           </a:p>
@@ -38721,7 +40725,7 @@
                 <a:ea typeface="Calibri" pitchFamily="34" charset="-122"/>
                 <a:cs typeface="Calibri" pitchFamily="34" charset="-120"/>
               </a:rPr>
-              <a:t>5.  The prefix 'em-' in 'empower' means to give someone power or make them feel capable.</a:t>
+              <a:t>5.  'power' means 'the ability to control people or things, or a source of energy'.</a:t>
             </a:r>
             <a:endParaRPr lang="en-US" sz="1300" dirty="0"/>
           </a:p>
@@ -39079,7 +41083,7 @@
                 <a:ea typeface="Calibri" pitchFamily="34" charset="-122"/>
                 <a:cs typeface="Calibri" pitchFamily="34" charset="-120"/>
               </a:rPr>
-              <a:t>Word Labs  •  wordlabs.app  •  Root: 'power' = strength, force, ability</a:t>
+              <a:t>Word Labs  •  wordlabs.app  •  Root: 'power' = strength; control; energy</a:t>
             </a:r>
             <a:endParaRPr lang="en-US" sz="800" dirty="0"/>
           </a:p>
@@ -39216,7 +41220,7 @@
                 <a:ea typeface="Trebuchet MS" pitchFamily="34" charset="-122"/>
                 <a:cs typeface="Trebuchet MS" pitchFamily="34" charset="-120"/>
               </a:rPr>
-              <a:t>strength, force, ability</a:t>
+              <a:t>strength; control; energy</a:t>
             </a:r>
             <a:endParaRPr lang="en-US" sz="2000" dirty="0"/>
           </a:p>
@@ -39255,7 +41259,7 @@
                 <a:ea typeface="Calibri" pitchFamily="34" charset="-122"/>
                 <a:cs typeface="Calibri" pitchFamily="34" charset="-120"/>
               </a:rPr>
-              <a:t>Origin: Latin: potere</a:t>
+              <a:t>Origin: Core English root</a:t>
             </a:r>
             <a:endParaRPr lang="en-US" sz="1100" dirty="0"/>
           </a:p>
@@ -39360,7 +41364,7 @@
                 <a:ea typeface="Trebuchet MS" pitchFamily="34" charset="-122"/>
                 <a:cs typeface="Trebuchet MS" pitchFamily="34" charset="-120"/>
               </a:rPr>
-              <a:t>powerful</a:t>
+              <a:t>power</a:t>
             </a:r>
             <a:endParaRPr lang="en-US" sz="1300" dirty="0"/>
           </a:p>
@@ -39426,7 +41430,7 @@
                 <a:ea typeface="Trebuchet MS" pitchFamily="34" charset="-122"/>
                 <a:cs typeface="Trebuchet MS" pitchFamily="34" charset="-120"/>
               </a:rPr>
-              <a:t>powerless</a:t>
+              <a:t>powers</a:t>
             </a:r>
             <a:endParaRPr lang="en-US" sz="1300" dirty="0"/>
           </a:p>
@@ -39492,7 +41496,7 @@
                 <a:ea typeface="Trebuchet MS" pitchFamily="34" charset="-122"/>
                 <a:cs typeface="Trebuchet MS" pitchFamily="34" charset="-120"/>
               </a:rPr>
-              <a:t>empowered</a:t>
+              <a:t>empower</a:t>
             </a:r>
             <a:endParaRPr lang="en-US" sz="1300" dirty="0"/>
           </a:p>
@@ -39558,7 +41562,7 @@
                 <a:ea typeface="Trebuchet MS" pitchFamily="34" charset="-122"/>
                 <a:cs typeface="Trebuchet MS" pitchFamily="34" charset="-120"/>
               </a:rPr>
-              <a:t>overpowered</a:t>
+              <a:t>powered</a:t>
             </a:r>
             <a:endParaRPr lang="en-US" sz="1300" dirty="0"/>
           </a:p>
@@ -39624,7 +41628,7 @@
                 <a:ea typeface="Trebuchet MS" pitchFamily="34" charset="-122"/>
                 <a:cs typeface="Trebuchet MS" pitchFamily="34" charset="-120"/>
               </a:rPr>
-              <a:t>superpower</a:t>
+              <a:t>powerful</a:t>
             </a:r>
             <a:endParaRPr lang="en-US" sz="1300" dirty="0"/>
           </a:p>
@@ -39690,7 +41694,7 @@
                 <a:ea typeface="Trebuchet MS" pitchFamily="34" charset="-122"/>
                 <a:cs typeface="Trebuchet MS" pitchFamily="34" charset="-120"/>
               </a:rPr>
-              <a:t>powerhouse</a:t>
+              <a:t>powering</a:t>
             </a:r>
             <a:endParaRPr lang="en-US" sz="1300" dirty="0"/>
           </a:p>
@@ -39756,7 +41760,7 @@
                 <a:ea typeface="Trebuchet MS" pitchFamily="34" charset="-122"/>
                 <a:cs typeface="Trebuchet MS" pitchFamily="34" charset="-120"/>
               </a:rPr>
-              <a:t>unpowered</a:t>
+              <a:t>empowered</a:t>
             </a:r>
             <a:endParaRPr lang="en-US" sz="1300" dirty="0"/>
           </a:p>
@@ -40048,7 +42052,7 @@
                 <a:ea typeface="Calibri" pitchFamily="34" charset="-122"/>
                 <a:cs typeface="Calibri" pitchFamily="34" charset="-120"/>
               </a:rPr>
-              <a:t>Word Labs  •  wordlabs.app  •  Root: 'power' = strength, force, ability</a:t>
+              <a:t>Word Labs  •  wordlabs.app  •  Root: 'power' = strength; control; energy</a:t>
             </a:r>
             <a:endParaRPr lang="en-US" sz="800" dirty="0"/>
           </a:p>
@@ -40349,7 +42353,7 @@
                 <a:ea typeface="Trebuchet MS" pitchFamily="34" charset="-122"/>
                 <a:cs typeface="Trebuchet MS" pitchFamily="34" charset="-120"/>
               </a:rPr>
-              <a:t>em-</a:t>
+              <a:t>en-</a:t>
             </a:r>
             <a:endParaRPr lang="en-US" sz="1300" dirty="0"/>
           </a:p>
@@ -40630,7 +42634,7 @@
                 <a:ea typeface="Trebuchet MS" pitchFamily="34" charset="-122"/>
                 <a:cs typeface="Trebuchet MS" pitchFamily="34" charset="-120"/>
               </a:rPr>
-              <a:t>-ful</a:t>
+              <a:t>-ing</a:t>
             </a:r>
             <a:endParaRPr lang="en-US" sz="1300" dirty="0"/>
           </a:p>
@@ -40694,7 +42698,7 @@
                 <a:ea typeface="Trebuchet MS" pitchFamily="34" charset="-122"/>
                 <a:cs typeface="Trebuchet MS" pitchFamily="34" charset="-120"/>
               </a:rPr>
-              <a:t>super-</a:t>
+              <a:t>under-</a:t>
             </a:r>
             <a:endParaRPr lang="en-US" sz="1300" dirty="0"/>
           </a:p>
@@ -40783,7 +42787,7 @@
                 <a:ea typeface="Trebuchet MS" pitchFamily="34" charset="-122"/>
                 <a:cs typeface="Trebuchet MS" pitchFamily="34" charset="-120"/>
               </a:rPr>
-              <a:t>-house</a:t>
+              <a:t>-ment</a:t>
             </a:r>
             <a:endParaRPr lang="en-US" sz="1300" dirty="0"/>
           </a:p>
@@ -40804,7 +42808,7 @@
             <a:avLst/>
           </a:prstGeom>
           <a:solidFill>
-            <a:srgbClr val="DDD6FE"/>
+            <a:srgbClr val="F1F5F9"/>
           </a:solidFill>
           <a:ln w="12700">
             <a:solidFill>
@@ -40816,18 +42820,68 @@
       </p:sp>
       <p:sp>
         <p:nvSpPr>
-          <p:cNvPr id="34" name="Text 32"/>
-          <p:cNvSpPr/>
-          <p:nvPr/>
-        </p:nvSpPr>
-        <p:spPr>
-          <a:xfrm>
-            <a:off x="640080" y="3127248"/>
+          <p:cNvPr id="34" name="Shape 32"/>
+          <p:cNvSpPr/>
+          <p:nvPr/>
+        </p:nvSpPr>
+        <p:spPr>
+          <a:xfrm>
+            <a:off x="3291840" y="3127248"/>
+            <a:ext cx="1645920" cy="420624"/>
+          </a:xfrm>
+          <a:prstGeom prst="rect">
+            <a:avLst/>
+          </a:prstGeom>
+          <a:solidFill>
+            <a:srgbClr val="F1F5F9"/>
+          </a:solidFill>
+          <a:ln w="12700">
+            <a:solidFill>
+              <a:srgbClr val="E5E7EB"/>
+            </a:solidFill>
+            <a:prstDash val="solid"/>
+          </a:ln>
+        </p:spPr>
+      </p:sp>
+      <p:sp>
+        <p:nvSpPr>
+          <p:cNvPr id="35" name="Shape 33"/>
+          <p:cNvSpPr/>
+          <p:nvPr/>
+        </p:nvSpPr>
+        <p:spPr>
+          <a:xfrm>
+            <a:off x="5943600" y="3127248"/>
             <a:ext cx="1463040" cy="420624"/>
           </a:xfrm>
           <a:prstGeom prst="rect">
             <a:avLst/>
           </a:prstGeom>
+          <a:solidFill>
+            <a:srgbClr val="FCE7F3"/>
+          </a:solidFill>
+          <a:ln w="12700">
+            <a:solidFill>
+              <a:srgbClr val="E5E7EB"/>
+            </a:solidFill>
+            <a:prstDash val="solid"/>
+          </a:ln>
+        </p:spPr>
+      </p:sp>
+      <p:sp>
+        <p:nvSpPr>
+          <p:cNvPr id="36" name="Text 34"/>
+          <p:cNvSpPr/>
+          <p:nvPr/>
+        </p:nvSpPr>
+        <p:spPr>
+          <a:xfrm>
+            <a:off x="5943600" y="3127248"/>
+            <a:ext cx="1463040" cy="420624"/>
+          </a:xfrm>
+          <a:prstGeom prst="rect">
+            <a:avLst/>
+          </a:prstGeom>
           <a:noFill/>
           <a:ln/>
         </p:spPr>
@@ -40841,13 +42895,13 @@
             <a:r>
               <a:rPr lang="en-US" sz="1300" b="1" dirty="0">
                 <a:solidFill>
-                  <a:srgbClr val="4C1D95"/>
+                  <a:srgbClr val="9D174D"/>
                 </a:solidFill>
                 <a:latin typeface="Trebuchet MS" pitchFamily="34" charset="0"/>
                 <a:ea typeface="Trebuchet MS" pitchFamily="34" charset="-122"/>
                 <a:cs typeface="Trebuchet MS" pitchFamily="34" charset="-120"/>
               </a:rPr>
-              <a:t>un-</a:t>
+              <a:t>-ful</a:t>
             </a:r>
             <a:endParaRPr lang="en-US" sz="1300" dirty="0"/>
           </a:p>
@@ -40855,20 +42909,45 @@
       </p:sp>
       <p:sp>
         <p:nvSpPr>
-          <p:cNvPr id="35" name="Shape 33"/>
-          <p:cNvSpPr/>
-          <p:nvPr/>
-        </p:nvSpPr>
-        <p:spPr>
-          <a:xfrm>
-            <a:off x="3291840" y="3127248"/>
+          <p:cNvPr id="37" name="Shape 35"/>
+          <p:cNvSpPr/>
+          <p:nvPr/>
+        </p:nvSpPr>
+        <p:spPr>
+          <a:xfrm>
+            <a:off x="640080" y="3584448"/>
+            <a:ext cx="1463040" cy="420624"/>
+          </a:xfrm>
+          <a:prstGeom prst="rect">
+            <a:avLst/>
+          </a:prstGeom>
+          <a:solidFill>
+            <a:srgbClr val="F8FAFC"/>
+          </a:solidFill>
+          <a:ln w="12700">
+            <a:solidFill>
+              <a:srgbClr val="E5E7EB"/>
+            </a:solidFill>
+            <a:prstDash val="solid"/>
+          </a:ln>
+        </p:spPr>
+      </p:sp>
+      <p:sp>
+        <p:nvSpPr>
+          <p:cNvPr id="38" name="Shape 36"/>
+          <p:cNvSpPr/>
+          <p:nvPr/>
+        </p:nvSpPr>
+        <p:spPr>
+          <a:xfrm>
+            <a:off x="3291840" y="3584448"/>
             <a:ext cx="1645920" cy="420624"/>
           </a:xfrm>
           <a:prstGeom prst="rect">
             <a:avLst/>
           </a:prstGeom>
           <a:solidFill>
-            <a:srgbClr val="F1F5F9"/>
+            <a:srgbClr val="F8FAFC"/>
           </a:solidFill>
           <a:ln w="12700">
             <a:solidFill>
@@ -40880,13 +42959,13 @@
       </p:sp>
       <p:sp>
         <p:nvSpPr>
-          <p:cNvPr id="36" name="Shape 34"/>
-          <p:cNvSpPr/>
-          <p:nvPr/>
-        </p:nvSpPr>
-        <p:spPr>
-          <a:xfrm>
-            <a:off x="5943600" y="3127248"/>
+          <p:cNvPr id="39" name="Shape 37"/>
+          <p:cNvSpPr/>
+          <p:nvPr/>
+        </p:nvSpPr>
+        <p:spPr>
+          <a:xfrm>
+            <a:off x="5943600" y="3584448"/>
             <a:ext cx="1463040" cy="420624"/>
           </a:xfrm>
           <a:prstGeom prst="rect">
@@ -40905,13 +42984,13 @@
       </p:sp>
       <p:sp>
         <p:nvSpPr>
-          <p:cNvPr id="37" name="Text 35"/>
-          <p:cNvSpPr/>
-          <p:nvPr/>
-        </p:nvSpPr>
-        <p:spPr>
-          <a:xfrm>
-            <a:off x="5943600" y="3127248"/>
+          <p:cNvPr id="40" name="Text 38"/>
+          <p:cNvSpPr/>
+          <p:nvPr/>
+        </p:nvSpPr>
+        <p:spPr>
+          <a:xfrm>
+            <a:off x="5943600" y="3584448"/>
             <a:ext cx="1463040" cy="420624"/>
           </a:xfrm>
           <a:prstGeom prst="rect">
@@ -40936,7 +43015,7 @@
                 <a:ea typeface="Trebuchet MS" pitchFamily="34" charset="-122"/>
                 <a:cs typeface="Trebuchet MS" pitchFamily="34" charset="-120"/>
               </a:rPr>
-              <a:t>-ing</a:t>
+              <a:t>-less</a:t>
             </a:r>
             <a:endParaRPr lang="en-US" sz="1300" dirty="0"/>
           </a:p>
@@ -40944,20 +43023,20 @@
       </p:sp>
       <p:sp>
         <p:nvSpPr>
-          <p:cNvPr id="38" name="Shape 36"/>
-          <p:cNvSpPr/>
-          <p:nvPr/>
-        </p:nvSpPr>
-        <p:spPr>
-          <a:xfrm>
-            <a:off x="640080" y="3584448"/>
+          <p:cNvPr id="41" name="Shape 39"/>
+          <p:cNvSpPr/>
+          <p:nvPr/>
+        </p:nvSpPr>
+        <p:spPr>
+          <a:xfrm>
+            <a:off x="640080" y="4041648"/>
             <a:ext cx="1463040" cy="420624"/>
           </a:xfrm>
           <a:prstGeom prst="rect">
             <a:avLst/>
           </a:prstGeom>
           <a:solidFill>
-            <a:srgbClr val="DDD6FE"/>
+            <a:srgbClr val="F1F5F9"/>
           </a:solidFill>
           <a:ln w="12700">
             <a:solidFill>
@@ -40969,18 +43048,68 @@
       </p:sp>
       <p:sp>
         <p:nvSpPr>
-          <p:cNvPr id="39" name="Text 37"/>
-          <p:cNvSpPr/>
-          <p:nvPr/>
-        </p:nvSpPr>
-        <p:spPr>
-          <a:xfrm>
-            <a:off x="640080" y="3584448"/>
+          <p:cNvPr id="42" name="Shape 40"/>
+          <p:cNvSpPr/>
+          <p:nvPr/>
+        </p:nvSpPr>
+        <p:spPr>
+          <a:xfrm>
+            <a:off x="3291840" y="4041648"/>
+            <a:ext cx="1645920" cy="420624"/>
+          </a:xfrm>
+          <a:prstGeom prst="rect">
+            <a:avLst/>
+          </a:prstGeom>
+          <a:solidFill>
+            <a:srgbClr val="F1F5F9"/>
+          </a:solidFill>
+          <a:ln w="12700">
+            <a:solidFill>
+              <a:srgbClr val="E5E7EB"/>
+            </a:solidFill>
+            <a:prstDash val="solid"/>
+          </a:ln>
+        </p:spPr>
+      </p:sp>
+      <p:sp>
+        <p:nvSpPr>
+          <p:cNvPr id="43" name="Shape 41"/>
+          <p:cNvSpPr/>
+          <p:nvPr/>
+        </p:nvSpPr>
+        <p:spPr>
+          <a:xfrm>
+            <a:off x="5943600" y="4041648"/>
             <a:ext cx="1463040" cy="420624"/>
           </a:xfrm>
           <a:prstGeom prst="rect">
             <a:avLst/>
           </a:prstGeom>
+          <a:solidFill>
+            <a:srgbClr val="FCE7F3"/>
+          </a:solidFill>
+          <a:ln w="12700">
+            <a:solidFill>
+              <a:srgbClr val="E5E7EB"/>
+            </a:solidFill>
+            <a:prstDash val="solid"/>
+          </a:ln>
+        </p:spPr>
+      </p:sp>
+      <p:sp>
+        <p:nvSpPr>
+          <p:cNvPr id="44" name="Text 42"/>
+          <p:cNvSpPr/>
+          <p:nvPr/>
+        </p:nvSpPr>
+        <p:spPr>
+          <a:xfrm>
+            <a:off x="5943600" y="4041648"/>
+            <a:ext cx="1463040" cy="420624"/>
+          </a:xfrm>
+          <a:prstGeom prst="rect">
+            <a:avLst/>
+          </a:prstGeom>
           <a:noFill/>
           <a:ln/>
         </p:spPr>
@@ -40994,13 +43123,13 @@
             <a:r>
               <a:rPr lang="en-US" sz="1300" b="1" dirty="0">
                 <a:solidFill>
-                  <a:srgbClr val="4C1D95"/>
+                  <a:srgbClr val="9D174D"/>
                 </a:solidFill>
                 <a:latin typeface="Trebuchet MS" pitchFamily="34" charset="0"/>
                 <a:ea typeface="Trebuchet MS" pitchFamily="34" charset="-122"/>
                 <a:cs typeface="Trebuchet MS" pitchFamily="34" charset="-120"/>
               </a:rPr>
-              <a:t>water-</a:t>
+              <a:t>-s</a:t>
             </a:r>
             <a:endParaRPr lang="en-US" sz="1300" dirty="0"/>
           </a:p>
@@ -41008,102 +43137,13 @@
       </p:sp>
       <p:sp>
         <p:nvSpPr>
-          <p:cNvPr id="40" name="Shape 38"/>
-          <p:cNvSpPr/>
-          <p:nvPr/>
-        </p:nvSpPr>
-        <p:spPr>
-          <a:xfrm>
-            <a:off x="3291840" y="3584448"/>
-            <a:ext cx="1645920" cy="420624"/>
-          </a:xfrm>
-          <a:prstGeom prst="rect">
-            <a:avLst/>
-          </a:prstGeom>
-          <a:solidFill>
-            <a:srgbClr val="F8FAFC"/>
-          </a:solidFill>
-          <a:ln w="12700">
-            <a:solidFill>
-              <a:srgbClr val="E5E7EB"/>
-            </a:solidFill>
-            <a:prstDash val="solid"/>
-          </a:ln>
-        </p:spPr>
-      </p:sp>
-      <p:sp>
-        <p:nvSpPr>
-          <p:cNvPr id="41" name="Shape 39"/>
-          <p:cNvSpPr/>
-          <p:nvPr/>
-        </p:nvSpPr>
-        <p:spPr>
-          <a:xfrm>
-            <a:off x="5943600" y="3584448"/>
-            <a:ext cx="1463040" cy="420624"/>
-          </a:xfrm>
-          <a:prstGeom prst="rect">
-            <a:avLst/>
-          </a:prstGeom>
-          <a:solidFill>
-            <a:srgbClr val="FCE7F3"/>
-          </a:solidFill>
-          <a:ln w="12700">
-            <a:solidFill>
-              <a:srgbClr val="E5E7EB"/>
-            </a:solidFill>
-            <a:prstDash val="solid"/>
-          </a:ln>
-        </p:spPr>
-      </p:sp>
-      <p:sp>
-        <p:nvSpPr>
-          <p:cNvPr id="42" name="Text 40"/>
-          <p:cNvSpPr/>
-          <p:nvPr/>
-        </p:nvSpPr>
-        <p:spPr>
-          <a:xfrm>
-            <a:off x="5943600" y="3584448"/>
-            <a:ext cx="1463040" cy="420624"/>
-          </a:xfrm>
-          <a:prstGeom prst="rect">
-            <a:avLst/>
-          </a:prstGeom>
-          <a:noFill/>
-          <a:ln/>
-        </p:spPr>
-        <p:txBody>
-          <a:bodyPr wrap="square" lIns="0" tIns="0" rIns="0" bIns="0" rtlCol="0" anchor="ctr"/>
-          <a:lstStyle/>
-          <a:p>
-            <a:pPr algn="ctr" indent="0" marL="0">
-              <a:buNone/>
-            </a:pPr>
-            <a:r>
-              <a:rPr lang="en-US" sz="1300" b="1" dirty="0">
-                <a:solidFill>
-                  <a:srgbClr val="9D174D"/>
-                </a:solidFill>
-                <a:latin typeface="Trebuchet MS" pitchFamily="34" charset="0"/>
-                <a:ea typeface="Trebuchet MS" pitchFamily="34" charset="-122"/>
-                <a:cs typeface="Trebuchet MS" pitchFamily="34" charset="-120"/>
-              </a:rPr>
-              <a:t>-less</a:t>
-            </a:r>
-            <a:endParaRPr lang="en-US" sz="1300" dirty="0"/>
-          </a:p>
-        </p:txBody>
-      </p:sp>
-      <p:sp>
-        <p:nvSpPr>
-          <p:cNvPr id="43" name="Text 41"/>
-          <p:cNvSpPr/>
-          <p:nvPr/>
-        </p:nvSpPr>
-        <p:spPr>
-          <a:xfrm>
-            <a:off x="365760" y="4178808"/>
+          <p:cNvPr id="45" name="Text 43"/>
+          <p:cNvSpPr/>
+          <p:nvPr/>
+        </p:nvSpPr>
+        <p:spPr>
+          <a:xfrm>
+            <a:off x="365760" y="4636008"/>
             <a:ext cx="1097280" cy="420624"/>
           </a:xfrm>
           <a:prstGeom prst="rect">
@@ -41136,13 +43176,13 @@
       </p:sp>
       <p:sp>
         <p:nvSpPr>
-          <p:cNvPr id="44" name="Shape 42"/>
-          <p:cNvSpPr/>
-          <p:nvPr/>
-        </p:nvSpPr>
-        <p:spPr>
-          <a:xfrm>
-            <a:off x="1508760" y="4178808"/>
+          <p:cNvPr id="46" name="Shape 44"/>
+          <p:cNvSpPr/>
+          <p:nvPr/>
+        </p:nvSpPr>
+        <p:spPr>
+          <a:xfrm>
+            <a:off x="1508760" y="4636008"/>
             <a:ext cx="822960" cy="420624"/>
           </a:xfrm>
           <a:prstGeom prst="rect">
@@ -41170,13 +43210,13 @@
       </p:sp>
       <p:sp>
         <p:nvSpPr>
-          <p:cNvPr id="45" name="Text 43"/>
-          <p:cNvSpPr/>
-          <p:nvPr/>
-        </p:nvSpPr>
-        <p:spPr>
-          <a:xfrm>
-            <a:off x="1508760" y="4178808"/>
+          <p:cNvPr id="47" name="Text 45"/>
+          <p:cNvSpPr/>
+          <p:nvPr/>
+        </p:nvSpPr>
+        <p:spPr>
+          <a:xfrm>
+            <a:off x="1508760" y="4636008"/>
             <a:ext cx="822960" cy="420624"/>
           </a:xfrm>
           <a:prstGeom prst="rect">
@@ -41201,7 +43241,7 @@
                 <a:ea typeface="Trebuchet MS" pitchFamily="34" charset="-122"/>
                 <a:cs typeface="Trebuchet MS" pitchFamily="34" charset="-120"/>
               </a:rPr>
-              <a:t>em-</a:t>
+              <a:t>en-</a:t>
             </a:r>
             <a:endParaRPr lang="en-US" sz="1300" dirty="0"/>
           </a:p>
@@ -41209,13 +43249,13 @@
       </p:sp>
       <p:sp>
         <p:nvSpPr>
-          <p:cNvPr id="46" name="Text 44"/>
-          <p:cNvSpPr/>
-          <p:nvPr/>
-        </p:nvSpPr>
-        <p:spPr>
-          <a:xfrm>
-            <a:off x="2359152" y="4178808"/>
+          <p:cNvPr id="48" name="Text 46"/>
+          <p:cNvSpPr/>
+          <p:nvPr/>
+        </p:nvSpPr>
+        <p:spPr>
+          <a:xfrm>
+            <a:off x="2359152" y="4636008"/>
             <a:ext cx="320040" cy="420624"/>
           </a:xfrm>
           <a:prstGeom prst="rect">
@@ -41248,13 +43288,13 @@
       </p:sp>
       <p:sp>
         <p:nvSpPr>
-          <p:cNvPr id="47" name="Shape 45"/>
-          <p:cNvSpPr/>
-          <p:nvPr/>
-        </p:nvSpPr>
-        <p:spPr>
-          <a:xfrm>
-            <a:off x="2706624" y="4178808"/>
+          <p:cNvPr id="49" name="Shape 47"/>
+          <p:cNvSpPr/>
+          <p:nvPr/>
+        </p:nvSpPr>
+        <p:spPr>
+          <a:xfrm>
+            <a:off x="2706624" y="4636008"/>
             <a:ext cx="1389888" cy="420624"/>
           </a:xfrm>
           <a:prstGeom prst="rect">
@@ -41282,13 +43322,13 @@
       </p:sp>
       <p:sp>
         <p:nvSpPr>
-          <p:cNvPr id="48" name="Text 46"/>
-          <p:cNvSpPr/>
-          <p:nvPr/>
-        </p:nvSpPr>
-        <p:spPr>
-          <a:xfrm>
-            <a:off x="2706624" y="4178808"/>
+          <p:cNvPr id="50" name="Text 48"/>
+          <p:cNvSpPr/>
+          <p:nvPr/>
+        </p:nvSpPr>
+        <p:spPr>
+          <a:xfrm>
+            <a:off x="2706624" y="4636008"/>
             <a:ext cx="1389888" cy="420624"/>
           </a:xfrm>
           <a:prstGeom prst="rect">
@@ -41321,13 +43361,13 @@
       </p:sp>
       <p:sp>
         <p:nvSpPr>
-          <p:cNvPr id="49" name="Text 47"/>
-          <p:cNvSpPr/>
-          <p:nvPr/>
-        </p:nvSpPr>
-        <p:spPr>
-          <a:xfrm>
-            <a:off x="4123944" y="4178808"/>
+          <p:cNvPr id="51" name="Text 49"/>
+          <p:cNvSpPr/>
+          <p:nvPr/>
+        </p:nvSpPr>
+        <p:spPr>
+          <a:xfrm>
+            <a:off x="4123944" y="4636008"/>
             <a:ext cx="320040" cy="420624"/>
           </a:xfrm>
           <a:prstGeom prst="rect">
@@ -41360,13 +43400,13 @@
       </p:sp>
       <p:sp>
         <p:nvSpPr>
-          <p:cNvPr id="50" name="Shape 48"/>
-          <p:cNvSpPr/>
-          <p:nvPr/>
-        </p:nvSpPr>
-        <p:spPr>
-          <a:xfrm>
-            <a:off x="4471416" y="4178808"/>
+          <p:cNvPr id="52" name="Shape 50"/>
+          <p:cNvSpPr/>
+          <p:nvPr/>
+        </p:nvSpPr>
+        <p:spPr>
+          <a:xfrm>
+            <a:off x="4471416" y="4636008"/>
             <a:ext cx="822960" cy="420624"/>
           </a:xfrm>
           <a:prstGeom prst="rect">
@@ -41394,13 +43434,13 @@
       </p:sp>
       <p:sp>
         <p:nvSpPr>
-          <p:cNvPr id="51" name="Text 49"/>
-          <p:cNvSpPr/>
-          <p:nvPr/>
-        </p:nvSpPr>
-        <p:spPr>
-          <a:xfrm>
-            <a:off x="4471416" y="4178808"/>
+          <p:cNvPr id="53" name="Text 51"/>
+          <p:cNvSpPr/>
+          <p:nvPr/>
+        </p:nvSpPr>
+        <p:spPr>
+          <a:xfrm>
+            <a:off x="4471416" y="4636008"/>
             <a:ext cx="822960" cy="420624"/>
           </a:xfrm>
           <a:prstGeom prst="rect">
@@ -41433,13 +43473,13 @@
       </p:sp>
       <p:sp>
         <p:nvSpPr>
-          <p:cNvPr id="52" name="Text 50"/>
-          <p:cNvSpPr/>
-          <p:nvPr/>
-        </p:nvSpPr>
-        <p:spPr>
-          <a:xfrm>
-            <a:off x="5367528" y="4178808"/>
+          <p:cNvPr id="54" name="Text 52"/>
+          <p:cNvSpPr/>
+          <p:nvPr/>
+        </p:nvSpPr>
+        <p:spPr>
+          <a:xfrm>
+            <a:off x="5367528" y="4636008"/>
             <a:ext cx="365760" cy="420624"/>
           </a:xfrm>
           <a:prstGeom prst="rect">
@@ -41472,13 +43512,13 @@
       </p:sp>
       <p:sp>
         <p:nvSpPr>
-          <p:cNvPr id="53" name="Shape 51"/>
-          <p:cNvSpPr/>
-          <p:nvPr/>
-        </p:nvSpPr>
-        <p:spPr>
-          <a:xfrm>
-            <a:off x="5779008" y="4178808"/>
+          <p:cNvPr id="55" name="Shape 53"/>
+          <p:cNvSpPr/>
+          <p:nvPr/>
+        </p:nvSpPr>
+        <p:spPr>
+          <a:xfrm>
+            <a:off x="5779008" y="4636008"/>
             <a:ext cx="2194560" cy="420624"/>
           </a:xfrm>
           <a:prstGeom prst="rect">
@@ -41499,13 +43539,13 @@
       </p:sp>
       <p:sp>
         <p:nvSpPr>
-          <p:cNvPr id="54" name="Text 52"/>
-          <p:cNvSpPr/>
-          <p:nvPr/>
-        </p:nvSpPr>
-        <p:spPr>
-          <a:xfrm>
-            <a:off x="5779008" y="4178808"/>
+          <p:cNvPr id="56" name="Text 54"/>
+          <p:cNvSpPr/>
+          <p:nvPr/>
+        </p:nvSpPr>
+        <p:spPr>
+          <a:xfrm>
+            <a:off x="5779008" y="4636008"/>
             <a:ext cx="2194560" cy="420624"/>
           </a:xfrm>
           <a:prstGeom prst="rect">
@@ -41530,7 +43570,7 @@
                 <a:ea typeface="Trebuchet MS" pitchFamily="34" charset="-122"/>
                 <a:cs typeface="Trebuchet MS" pitchFamily="34" charset="-120"/>
               </a:rPr>
-              <a:t>powerful</a:t>
+              <a:t>power</a:t>
             </a:r>
             <a:endParaRPr lang="en-US" sz="1400" dirty="0"/>
           </a:p>
@@ -41822,7 +43862,7 @@
                 <a:ea typeface="Calibri" pitchFamily="34" charset="-122"/>
                 <a:cs typeface="Calibri" pitchFamily="34" charset="-120"/>
               </a:rPr>
-              <a:t>Word Labs  •  wordlabs.app  •  Root: 'power' = strength, force, ability</a:t>
+              <a:t>Word Labs  •  wordlabs.app  •  Root: 'power' = strength; control; energy</a:t>
             </a:r>
             <a:endParaRPr lang="en-US" sz="800" dirty="0"/>
           </a:p>
@@ -41934,7 +43974,7 @@
                 <a:ea typeface="Trebuchet MS" pitchFamily="34" charset="-122"/>
                 <a:cs typeface="Trebuchet MS" pitchFamily="34" charset="-120"/>
               </a:rPr>
-              <a:t>powerful</a:t>
+              <a:t>power</a:t>
             </a:r>
             <a:endParaRPr lang="en-US" sz="1200" dirty="0"/>
           </a:p>
@@ -42000,7 +44040,7 @@
                 <a:ea typeface="Calibri" pitchFamily="34" charset="-122"/>
                 <a:cs typeface="Calibri" pitchFamily="34" charset="-120"/>
               </a:rPr>
-              <a:t>Feeling confident and strong enough to do something yourself.</a:t>
+              <a:t>to give someone the confidence or power to do something</a:t>
             </a:r>
             <a:endParaRPr lang="en-US" sz="1200" dirty="0"/>
           </a:p>
@@ -42073,7 +44113,7 @@
                 <a:ea typeface="Trebuchet MS" pitchFamily="34" charset="-122"/>
                 <a:cs typeface="Trebuchet MS" pitchFamily="34" charset="-120"/>
               </a:rPr>
-              <a:t>powerless</a:t>
+              <a:t>powers</a:t>
             </a:r>
             <a:endParaRPr lang="en-US" sz="1200" dirty="0"/>
           </a:p>
@@ -42139,7 +44179,7 @@
                 <a:ea typeface="Calibri" pitchFamily="34" charset="-122"/>
                 <a:cs typeface="Calibri" pitchFamily="34" charset="-120"/>
               </a:rPr>
-              <a:t>An amazing ability, like flying or invisibility, that a superhero might have.</a:t>
+              <a:t>having great strength, force, or influence</a:t>
             </a:r>
             <a:endParaRPr lang="en-US" sz="1200" dirty="0"/>
           </a:p>
@@ -42212,7 +44252,7 @@
                 <a:ea typeface="Trebuchet MS" pitchFamily="34" charset="-122"/>
                 <a:cs typeface="Trebuchet MS" pitchFamily="34" charset="-120"/>
               </a:rPr>
-              <a:t>empowered</a:t>
+              <a:t>empower</a:t>
             </a:r>
             <a:endParaRPr lang="en-US" sz="1200" dirty="0"/>
           </a:p>
@@ -42278,7 +44318,7 @@
                 <a:ea typeface="Calibri" pitchFamily="34" charset="-122"/>
                 <a:cs typeface="Calibri" pitchFamily="34" charset="-120"/>
               </a:rPr>
-              <a:t>Having a lot of strength or force, like a powerful storm.</a:t>
+              <a:t>the ability to control people or things, or a source of energy</a:t>
             </a:r>
             <a:endParaRPr lang="en-US" sz="1200" dirty="0"/>
           </a:p>
@@ -42351,7 +44391,7 @@
                 <a:ea typeface="Trebuchet MS" pitchFamily="34" charset="-122"/>
                 <a:cs typeface="Trebuchet MS" pitchFamily="34" charset="-120"/>
               </a:rPr>
-              <a:t>overpowered</a:t>
+              <a:t>powered</a:t>
             </a:r>
             <a:endParaRPr lang="en-US" sz="1200" dirty="0"/>
           </a:p>
@@ -42417,7 +44457,7 @@
                 <a:ea typeface="Calibri" pitchFamily="34" charset="-122"/>
                 <a:cs typeface="Calibri" pitchFamily="34" charset="-120"/>
               </a:rPr>
-              <a:t>A person, team, or place that produces a lot of energy or achieves a great deal.</a:t>
+              <a:t>giving energy to something so it can run</a:t>
             </a:r>
             <a:endParaRPr lang="en-US" sz="1200" dirty="0"/>
           </a:p>
@@ -42490,7 +44530,7 @@
                 <a:ea typeface="Trebuchet MS" pitchFamily="34" charset="-122"/>
                 <a:cs typeface="Trebuchet MS" pitchFamily="34" charset="-120"/>
               </a:rPr>
-              <a:t>superpower</a:t>
+              <a:t>powerful</a:t>
             </a:r>
             <a:endParaRPr lang="en-US" sz="1200" dirty="0"/>
           </a:p>
@@ -42556,7 +44596,7 @@
                 <a:ea typeface="Calibri" pitchFamily="34" charset="-122"/>
                 <a:cs typeface="Calibri" pitchFamily="34" charset="-120"/>
               </a:rPr>
-              <a:t>Something that has no engine or power source to make it move.</a:t>
+              <a:t>given the confidence or power to do something</a:t>
             </a:r>
             <a:endParaRPr lang="en-US" sz="1200" dirty="0"/>
           </a:p>
@@ -42629,7 +44669,7 @@
                 <a:ea typeface="Trebuchet MS" pitchFamily="34" charset="-122"/>
                 <a:cs typeface="Trebuchet MS" pitchFamily="34" charset="-120"/>
               </a:rPr>
-              <a:t>powerhouse</a:t>
+              <a:t>powering</a:t>
             </a:r>
             <a:endParaRPr lang="en-US" sz="1200" dirty="0"/>
           </a:p>
@@ -42695,7 +44735,7 @@
                 <a:ea typeface="Calibri" pitchFamily="34" charset="-122"/>
                 <a:cs typeface="Calibri" pitchFamily="34" charset="-120"/>
               </a:rPr>
-              <a:t>When someone or something is too strong to be beaten or controlled.</a:t>
+              <a:t>supplied with energy to make something work</a:t>
             </a:r>
             <a:endParaRPr lang="en-US" sz="1200" dirty="0"/>
           </a:p>
@@ -42768,7 +44808,7 @@
                 <a:ea typeface="Trebuchet MS" pitchFamily="34" charset="-122"/>
                 <a:cs typeface="Trebuchet MS" pitchFamily="34" charset="-120"/>
               </a:rPr>
-              <a:t>unpowered</a:t>
+              <a:t>empowered</a:t>
             </a:r>
             <a:endParaRPr lang="en-US" sz="1200" dirty="0"/>
           </a:p>
@@ -42834,7 +44874,7 @@
                 <a:ea typeface="Calibri" pitchFamily="34" charset="-122"/>
                 <a:cs typeface="Calibri" pitchFamily="34" charset="-120"/>
               </a:rPr>
-              <a:t>Not able to do anything to change a situation; having no power.</a:t>
+              <a:t>special abilities, or the act of supplying something with energy</a:t>
             </a:r>
             <a:endParaRPr lang="en-US" sz="1200" dirty="0"/>
           </a:p>
@@ -43126,7 +45166,7 @@
                 <a:ea typeface="Calibri" pitchFamily="34" charset="-122"/>
                 <a:cs typeface="Calibri" pitchFamily="34" charset="-120"/>
               </a:rPr>
-              <a:t>Word Labs  •  wordlabs.app  •  Root: 'power' = strength, force, ability</a:t>
+              <a:t>Word Labs  •  wordlabs.app  •  Root: 'power' = strength; control; energy</a:t>
             </a:r>
             <a:endParaRPr lang="en-US" sz="800" dirty="0"/>
           </a:p>
@@ -43329,7 +45369,7 @@
                 <a:ea typeface="Calibri" pitchFamily="34" charset="-122"/>
                 <a:cs typeface="Calibri" pitchFamily="34" charset="-120"/>
               </a:rPr>
-              <a:t>The superhero felt truly empowered after she discovered her incredible superpower.</a:t>
+              <a:t>The wind turbine generates enough power for two hundred homes.</a:t>
             </a:r>
             <a:endParaRPr lang="en-US" sz="1500" dirty="0"/>
           </a:p>
@@ -43493,7 +45533,7 @@
                 <a:ea typeface="Calibri" pitchFamily="34" charset="-122"/>
                 <a:cs typeface="Calibri" pitchFamily="34" charset="-120"/>
               </a:rPr>
-              <a:t>The powerful waterfall crashed down the rocks, spraying mist everywhere.</a:t>
+              <a:t>The superhero's powers let her fly faster than a jet.</a:t>
             </a:r>
             <a:endParaRPr lang="en-US" sz="1500" dirty="0"/>
           </a:p>
@@ -43657,7 +45697,7 @@
                 <a:ea typeface="Calibri" pitchFamily="34" charset="-122"/>
                 <a:cs typeface="Calibri" pitchFamily="34" charset="-120"/>
               </a:rPr>
-              <a:t>Without batteries, the toy was completely powerless and wouldn't move at all.</a:t>
+              <a:t>The programme aims to empower young people to speak up.</a:t>
             </a:r>
             <a:endParaRPr lang="en-US" sz="1500" dirty="0"/>
           </a:p>
